--- a/docs/public/course-assets/course-pptx/in-004.pptx
+++ b/docs/public/course-assets/course-pptx/in-004.pptx
@@ -2,25 +2,25 @@
 <file path=ppt/presentation.xml><?xml version="1.0" encoding="utf-8"?>
 <p:presentation xmlns:p="http://schemas.openxmlformats.org/presentationml/2006/main">
   <p:sldMasterIdLst>
-    <p:sldMasterId xmlns:r="http://schemas.openxmlformats.org/officeDocument/2006/relationships" id="2147483648" r:id="R23071c0860e6482f"/>
+    <p:sldMasterId xmlns:r="http://schemas.openxmlformats.org/officeDocument/2006/relationships" id="2147483648" r:id="R146f7099ab4a4f08"/>
   </p:sldMasterIdLst>
   <p:notesMasterIdLst>
-    <p:notesMasterId xmlns:r="http://schemas.openxmlformats.org/officeDocument/2006/relationships" r:id="Rd78ccf05a39d41ed"/>
+    <p:notesMasterId xmlns:r="http://schemas.openxmlformats.org/officeDocument/2006/relationships" r:id="Ra6b569d1dfc843e5"/>
   </p:notesMasterIdLst>
   <p:sldIdLst>
-    <p:sldId xmlns:r="http://schemas.openxmlformats.org/officeDocument/2006/relationships" id="256" r:id="R8de7aad82fae4828"/>
-    <p:sldId xmlns:r="http://schemas.openxmlformats.org/officeDocument/2006/relationships" id="257" r:id="R3aff5b3ffbfb42eb"/>
-    <p:sldId xmlns:r="http://schemas.openxmlformats.org/officeDocument/2006/relationships" id="258" r:id="R1893a500f2234c04"/>
-    <p:sldId xmlns:r="http://schemas.openxmlformats.org/officeDocument/2006/relationships" id="259" r:id="Rb8a6cb22e99749a9"/>
-    <p:sldId xmlns:r="http://schemas.openxmlformats.org/officeDocument/2006/relationships" id="260" r:id="Re75cc4fd04be475f"/>
-    <p:sldId xmlns:r="http://schemas.openxmlformats.org/officeDocument/2006/relationships" id="261" r:id="Rf53951a6cbaf4c00"/>
-    <p:sldId xmlns:r="http://schemas.openxmlformats.org/officeDocument/2006/relationships" id="262" r:id="R2820f86d1fde42ee"/>
-    <p:sldId xmlns:r="http://schemas.openxmlformats.org/officeDocument/2006/relationships" id="263" r:id="R091f372f287f4886"/>
-    <p:sldId xmlns:r="http://schemas.openxmlformats.org/officeDocument/2006/relationships" id="264" r:id="R15ea65b74ecf4f96"/>
-    <p:sldId xmlns:r="http://schemas.openxmlformats.org/officeDocument/2006/relationships" id="265" r:id="R0d67422d7a724373"/>
-    <p:sldId xmlns:r="http://schemas.openxmlformats.org/officeDocument/2006/relationships" id="266" r:id="Ra8a9e2328053408a"/>
-    <p:sldId xmlns:r="http://schemas.openxmlformats.org/officeDocument/2006/relationships" id="267" r:id="R533265d578fd4331"/>
-    <p:sldId xmlns:r="http://schemas.openxmlformats.org/officeDocument/2006/relationships" id="268" r:id="R79452f7e05e24773"/>
+    <p:sldId xmlns:r="http://schemas.openxmlformats.org/officeDocument/2006/relationships" id="256" r:id="R33b777ee8e8f424a"/>
+    <p:sldId xmlns:r="http://schemas.openxmlformats.org/officeDocument/2006/relationships" id="257" r:id="R55960e817c434dc2"/>
+    <p:sldId xmlns:r="http://schemas.openxmlformats.org/officeDocument/2006/relationships" id="258" r:id="R6d301e9b4bb8453b"/>
+    <p:sldId xmlns:r="http://schemas.openxmlformats.org/officeDocument/2006/relationships" id="259" r:id="R881747e2a67e438f"/>
+    <p:sldId xmlns:r="http://schemas.openxmlformats.org/officeDocument/2006/relationships" id="260" r:id="R0633aca881ec4403"/>
+    <p:sldId xmlns:r="http://schemas.openxmlformats.org/officeDocument/2006/relationships" id="261" r:id="R7ac871a0e2e24bd4"/>
+    <p:sldId xmlns:r="http://schemas.openxmlformats.org/officeDocument/2006/relationships" id="262" r:id="R5568bc54984043e9"/>
+    <p:sldId xmlns:r="http://schemas.openxmlformats.org/officeDocument/2006/relationships" id="263" r:id="R11872e4bcd1346d0"/>
+    <p:sldId xmlns:r="http://schemas.openxmlformats.org/officeDocument/2006/relationships" id="264" r:id="R6ddfcba2a6d4416a"/>
+    <p:sldId xmlns:r="http://schemas.openxmlformats.org/officeDocument/2006/relationships" id="265" r:id="Rc7528dc438784767"/>
+    <p:sldId xmlns:r="http://schemas.openxmlformats.org/officeDocument/2006/relationships" id="266" r:id="R13d1ab25e55a4562"/>
+    <p:sldId xmlns:r="http://schemas.openxmlformats.org/officeDocument/2006/relationships" id="267" r:id="Ra06c051603a741fa"/>
+    <p:sldId xmlns:r="http://schemas.openxmlformats.org/officeDocument/2006/relationships" id="268" r:id="R1c49d56f403245ef"/>
   </p:sldIdLst>
   <p:sldSz cx="12192000" cy="6858000"/>
   <p:notesSz cx="6858000" cy="9144000"/>
@@ -1405,7 +1405,7 @@
   </p:cSld>
   <p:clrMap bg1="lt1" tx1="dk1" bg2="lt2" tx2="dk2" accent1="accent1" accent2="accent2" accent3="accent3" accent4="accent4" accent5="accent5" accent6="accent6" hlink="hlink" folHlink="folHlink"/>
   <p:sldLayoutIdLst>
-    <p:sldLayoutId xmlns:r="http://schemas.openxmlformats.org/officeDocument/2006/relationships" id="2147483649" r:id="R67bd763ef41c47f4"/>
+    <p:sldLayoutId xmlns:r="http://schemas.openxmlformats.org/officeDocument/2006/relationships" id="2147483649" r:id="R656fb13b8aec4391"/>
   </p:sldLayoutIdLst>
   <p:txStyles>
     <p:titleStyle>
@@ -1956,7 +1956,7 @@
           <p:cNvPr id="1" name="cover-rule">
             <a:extLst xmlns:a="http://schemas.openxmlformats.org/drawingml/2006/main">
               <a:ext uri="{FF2B5EF4-FFF2-40B4-BE49-F238E27FC236}">
-                <a16:creationId xmlns:a16="http://schemas.microsoft.com/office/drawing/2014/main" id="{3D74189A-95BC-4F0B-A93B-5E40EE665780}"/>
+                <a16:creationId xmlns:a16="http://schemas.microsoft.com/office/drawing/2014/main" id="{26AF89E8-8675-4F8C-AAF7-EC89C07F8A66}"/>
               </a:ext>
             </a:extLst>
           </p:cNvPr>
@@ -1989,7 +1989,7 @@
           <p:cNvPr id="2" name="cover-ring-1">
             <a:extLst xmlns:a="http://schemas.openxmlformats.org/drawingml/2006/main">
               <a:ext uri="{FF2B5EF4-FFF2-40B4-BE49-F238E27FC236}">
-                <a16:creationId xmlns:a16="http://schemas.microsoft.com/office/drawing/2014/main" id="{D3E86A2C-615C-496D-A846-0FC675BEB716}"/>
+                <a16:creationId xmlns:a16="http://schemas.microsoft.com/office/drawing/2014/main" id="{FE2B7D40-A27A-462D-85B6-C2B892B01980}"/>
               </a:ext>
             </a:extLst>
           </p:cNvPr>
@@ -2020,7 +2020,7 @@
           <p:cNvPr id="3" name="cover-ring-2">
             <a:extLst xmlns:a="http://schemas.openxmlformats.org/drawingml/2006/main">
               <a:ext uri="{FF2B5EF4-FFF2-40B4-BE49-F238E27FC236}">
-                <a16:creationId xmlns:a16="http://schemas.microsoft.com/office/drawing/2014/main" id="{9C0023DD-1F35-42DF-A2BD-BDB2660C2705}"/>
+                <a16:creationId xmlns:a16="http://schemas.microsoft.com/office/drawing/2014/main" id="{4A61A1C1-97C1-4F4A-A8E3-D7E70F2CF120}"/>
               </a:ext>
             </a:extLst>
           </p:cNvPr>
@@ -2051,7 +2051,7 @@
           <p:cNvPr id="4" name="cover-core">
             <a:extLst xmlns:a="http://schemas.openxmlformats.org/drawingml/2006/main">
               <a:ext uri="{FF2B5EF4-FFF2-40B4-BE49-F238E27FC236}">
-                <a16:creationId xmlns:a16="http://schemas.microsoft.com/office/drawing/2014/main" id="{C28E8661-E71A-483D-942F-6A2E8F6872AA}"/>
+                <a16:creationId xmlns:a16="http://schemas.microsoft.com/office/drawing/2014/main" id="{5D74164C-7283-4E82-85B0-C0D229FAEFC7}"/>
               </a:ext>
             </a:extLst>
           </p:cNvPr>
@@ -2084,7 +2084,7 @@
           <p:cNvPr id="5" name="cover-line-1">
             <a:extLst xmlns:a="http://schemas.openxmlformats.org/drawingml/2006/main">
               <a:ext uri="{FF2B5EF4-FFF2-40B4-BE49-F238E27FC236}">
-                <a16:creationId xmlns:a16="http://schemas.microsoft.com/office/drawing/2014/main" id="{71E2327D-5324-4A3A-88C6-F691A4DE828E}"/>
+                <a16:creationId xmlns:a16="http://schemas.microsoft.com/office/drawing/2014/main" id="{B2AF0C39-1CB7-47B2-A7BE-1590A7776518}"/>
               </a:ext>
             </a:extLst>
           </p:cNvPr>
@@ -2115,7 +2115,7 @@
           <p:cNvPr id="6" name="cover-line-2">
             <a:extLst xmlns:a="http://schemas.openxmlformats.org/drawingml/2006/main">
               <a:ext uri="{FF2B5EF4-FFF2-40B4-BE49-F238E27FC236}">
-                <a16:creationId xmlns:a16="http://schemas.microsoft.com/office/drawing/2014/main" id="{91E3350B-0BF4-4C7A-8B87-116BB89E60B5}"/>
+                <a16:creationId xmlns:a16="http://schemas.microsoft.com/office/drawing/2014/main" id="{85669D1F-F5FD-4E54-A13C-7F30AE558E6B}"/>
               </a:ext>
             </a:extLst>
           </p:cNvPr>
@@ -2146,7 +2146,7 @@
           <p:cNvPr id="7" name="cover-eyebrow">
             <a:extLst xmlns:a="http://schemas.openxmlformats.org/drawingml/2006/main">
               <a:ext uri="{FF2B5EF4-FFF2-40B4-BE49-F238E27FC236}">
-                <a16:creationId xmlns:a16="http://schemas.microsoft.com/office/drawing/2014/main" id="{80BB4188-CBC4-4448-9435-6944CE1C258A}"/>
+                <a16:creationId xmlns:a16="http://schemas.microsoft.com/office/drawing/2014/main" id="{FF744179-F27D-47BC-8D81-F6DBB977E7BF}"/>
               </a:ext>
             </a:extLst>
           </p:cNvPr>
@@ -2204,7 +2204,7 @@
           <p:cNvPr id="8" name="cover-title">
             <a:extLst xmlns:a="http://schemas.openxmlformats.org/drawingml/2006/main">
               <a:ext uri="{FF2B5EF4-FFF2-40B4-BE49-F238E27FC236}">
-                <a16:creationId xmlns:a16="http://schemas.microsoft.com/office/drawing/2014/main" id="{D36B8ACB-5A9D-4DD6-938B-AC2192CF9BB8}"/>
+                <a16:creationId xmlns:a16="http://schemas.microsoft.com/office/drawing/2014/main" id="{B56B7198-7473-4C96-9B96-E38CDDA78A56}"/>
               </a:ext>
             </a:extLst>
           </p:cNvPr>
@@ -2262,7 +2262,7 @@
           <p:cNvPr id="9" name="cover-subtitle">
             <a:extLst xmlns:a="http://schemas.openxmlformats.org/drawingml/2006/main">
               <a:ext uri="{FF2B5EF4-FFF2-40B4-BE49-F238E27FC236}">
-                <a16:creationId xmlns:a16="http://schemas.microsoft.com/office/drawing/2014/main" id="{91F214CC-F79D-4F26-9377-899F39045716}"/>
+                <a16:creationId xmlns:a16="http://schemas.microsoft.com/office/drawing/2014/main" id="{83BED553-CF31-4709-A35A-B9A296D9923B}"/>
               </a:ext>
             </a:extLst>
           </p:cNvPr>
@@ -2324,7 +2324,7 @@
           <p:cNvPr id="10" name="cover-lead">
             <a:extLst xmlns:a="http://schemas.openxmlformats.org/drawingml/2006/main">
               <a:ext uri="{FF2B5EF4-FFF2-40B4-BE49-F238E27FC236}">
-                <a16:creationId xmlns:a16="http://schemas.microsoft.com/office/drawing/2014/main" id="{AB4F6455-9DDD-465E-B308-FB9099220D5E}"/>
+                <a16:creationId xmlns:a16="http://schemas.microsoft.com/office/drawing/2014/main" id="{86FADFEE-FB38-4AEE-904B-EFFF676B4151}"/>
               </a:ext>
             </a:extLst>
           </p:cNvPr>
@@ -2372,7 +2372,7 @@
                 <a:ea typeface="PingFang SC"/>
                 <a:cs typeface="PingFang SC"/>
               </a:rPr>
-              <a:t>企业里并不缺文档，缺的是在正确时间把正确版本交给有权限的人。会议录音、聊天、制度、合同、产品说明和销售材料不断产生；若没有来源与责任管理，AI 只会加速复制旧信息和错误信息…</a:t>
+              <a:t>企业里并不缺文档，缺的是在正确时间把正确版本交给有权限的人；会议录音、聊天、制度、合同、产品说明和销售材料不断产生；若没有来源与责任管理；AI 只会加速复制旧信息和错误信息</a:t>
             </a:r>
           </a:p>
         </p:txBody>
@@ -2382,7 +2382,7 @@
           <p:cNvPr id="11" name="cover-course">
             <a:extLst xmlns:a="http://schemas.openxmlformats.org/drawingml/2006/main">
               <a:ext uri="{FF2B5EF4-FFF2-40B4-BE49-F238E27FC236}">
-                <a16:creationId xmlns:a16="http://schemas.microsoft.com/office/drawing/2014/main" id="{C59CC88A-2F89-4EC4-A17C-1141316884CE}"/>
+                <a16:creationId xmlns:a16="http://schemas.microsoft.com/office/drawing/2014/main" id="{43BE0092-79E4-4ED4-9F2E-F0D94FFC1319}"/>
               </a:ext>
             </a:extLst>
           </p:cNvPr>
@@ -2440,7 +2440,7 @@
           <p:cNvPr id="12" name="cover-id">
             <a:extLst xmlns:a="http://schemas.openxmlformats.org/drawingml/2006/main">
               <a:ext uri="{FF2B5EF4-FFF2-40B4-BE49-F238E27FC236}">
-                <a16:creationId xmlns:a16="http://schemas.microsoft.com/office/drawing/2014/main" id="{D13C278E-B363-4F65-8E8F-964AD4726877}"/>
+                <a16:creationId xmlns:a16="http://schemas.microsoft.com/office/drawing/2014/main" id="{FB0458EE-B9A1-4072-9306-467CFA351EB3}"/>
               </a:ext>
             </a:extLst>
           </p:cNvPr>
@@ -2496,7 +2496,7 @@
     </p:spTree>
     <p:extLst>
       <p:ext uri="{BB962C8B-B14F-4D97-AF65-F5344CB8AC3E}">
-        <p14:creationId xmlns:p14="http://schemas.microsoft.com/office/powerpoint/2010/main" val="946959786"/>
+        <p14:creationId xmlns:p14="http://schemas.microsoft.com/office/powerpoint/2010/main" val="2042954268"/>
       </p:ext>
     </p:extLst>
   </p:cSld>
@@ -2527,7 +2527,7 @@
           <p:cNvPr id="1" name="s10-rule">
             <a:extLst xmlns:a="http://schemas.openxmlformats.org/drawingml/2006/main">
               <a:ext uri="{FF2B5EF4-FFF2-40B4-BE49-F238E27FC236}">
-                <a16:creationId xmlns:a16="http://schemas.microsoft.com/office/drawing/2014/main" id="{09FD6F38-E43D-4170-9600-3D84F41775BC}"/>
+                <a16:creationId xmlns:a16="http://schemas.microsoft.com/office/drawing/2014/main" id="{D6230D22-F6FD-4323-98FC-DB5783411579}"/>
               </a:ext>
             </a:extLst>
           </p:cNvPr>
@@ -2560,7 +2560,7 @@
           <p:cNvPr id="2" name="s10-eyebrow">
             <a:extLst xmlns:a="http://schemas.openxmlformats.org/drawingml/2006/main">
               <a:ext uri="{FF2B5EF4-FFF2-40B4-BE49-F238E27FC236}">
-                <a16:creationId xmlns:a16="http://schemas.microsoft.com/office/drawing/2014/main" id="{044C6590-BC24-46B4-B02B-CF205972B42B}"/>
+                <a16:creationId xmlns:a16="http://schemas.microsoft.com/office/drawing/2014/main" id="{9BB575D3-6819-49AE-B4E0-E3B43D8ABA3F}"/>
               </a:ext>
             </a:extLst>
           </p:cNvPr>
@@ -2618,7 +2618,7 @@
           <p:cNvPr id="3" name="s10-title">
             <a:extLst xmlns:a="http://schemas.openxmlformats.org/drawingml/2006/main">
               <a:ext uri="{FF2B5EF4-FFF2-40B4-BE49-F238E27FC236}">
-                <a16:creationId xmlns:a16="http://schemas.microsoft.com/office/drawing/2014/main" id="{67A99B83-5A31-4E4D-9EBB-68EAFE337708}"/>
+                <a16:creationId xmlns:a16="http://schemas.microsoft.com/office/drawing/2014/main" id="{3271793C-E1E6-4080-B3EC-5702410C87C8}"/>
               </a:ext>
             </a:extLst>
           </p:cNvPr>
@@ -2666,7 +2666,7 @@
                 <a:ea typeface="PingFang SC"/>
                 <a:cs typeface="PingFang SC"/>
               </a:rPr>
-              <a:t>带版本的制度问答必须经过边界验证</a:t>
+              <a:t>制度问答必须绑定版本、生效日期与权限</a:t>
             </a:r>
           </a:p>
         </p:txBody>
@@ -2676,7 +2676,7 @@
           <p:cNvPr id="4" name="s10-footer">
             <a:extLst xmlns:a="http://schemas.openxmlformats.org/drawingml/2006/main">
               <a:ext uri="{FF2B5EF4-FFF2-40B4-BE49-F238E27FC236}">
-                <a16:creationId xmlns:a16="http://schemas.microsoft.com/office/drawing/2014/main" id="{830F047C-228B-488A-B9CB-8AAC6CEE5A76}"/>
+                <a16:creationId xmlns:a16="http://schemas.microsoft.com/office/drawing/2014/main" id="{59C3FF27-222B-4562-9332-BC81D6589C91}"/>
               </a:ext>
             </a:extLst>
           </p:cNvPr>
@@ -2707,7 +2707,7 @@
           <p:cNvPr id="5" name="s10-identity">
             <a:extLst xmlns:a="http://schemas.openxmlformats.org/drawingml/2006/main">
               <a:ext uri="{FF2B5EF4-FFF2-40B4-BE49-F238E27FC236}">
-                <a16:creationId xmlns:a16="http://schemas.microsoft.com/office/drawing/2014/main" id="{14EDBEF5-A996-4BDA-9F1A-8A030A0DFE81}"/>
+                <a16:creationId xmlns:a16="http://schemas.microsoft.com/office/drawing/2014/main" id="{B765C0CB-BA8C-4857-96BA-A1A212A67758}"/>
               </a:ext>
             </a:extLst>
           </p:cNvPr>
@@ -2765,7 +2765,7 @@
           <p:cNvPr id="6" name="case-title">
             <a:extLst xmlns:a="http://schemas.openxmlformats.org/drawingml/2006/main">
               <a:ext uri="{FF2B5EF4-FFF2-40B4-BE49-F238E27FC236}">
-                <a16:creationId xmlns:a16="http://schemas.microsoft.com/office/drawing/2014/main" id="{07B7633B-7188-406B-BD2F-0583330C0DD5}"/>
+                <a16:creationId xmlns:a16="http://schemas.microsoft.com/office/drawing/2014/main" id="{7959DCDA-25E0-402C-8804-FAD8DDEBCCC0}"/>
               </a:ext>
             </a:extLst>
           </p:cNvPr>
@@ -2829,23 +2829,23 @@
           <p:cNvPr id="7" name="case-row-0">
             <a:extLst xmlns:a="http://schemas.openxmlformats.org/drawingml/2006/main">
               <a:ext uri="{FF2B5EF4-FFF2-40B4-BE49-F238E27FC236}">
-                <a16:creationId xmlns:a16="http://schemas.microsoft.com/office/drawing/2014/main" id="{28FCA58F-078F-47AA-A4C7-4BBBC473334F}"/>
-              </a:ext>
-            </a:extLst>
-          </p:cNvPr>
-          <p:cNvSpPr>
-            <a:spLocks xmlns:a="http://schemas.openxmlformats.org/drawingml/2006/main" noGrp="1"/>
-          </p:cNvSpPr>
-          <p:nvPr/>
-        </p:nvSpPr>
-        <p:spPr>
-          <a:xfrm xmlns:a="http://schemas.openxmlformats.org/drawingml/2006/main">
-            <a:off x="4286250" y="2228850"/>
-            <a:ext cx="6534150" cy="1238250"/>
+                <a16:creationId xmlns:a16="http://schemas.microsoft.com/office/drawing/2014/main" id="{F2C29F6F-5914-44CE-B381-5C725ED4FB30}"/>
+              </a:ext>
+            </a:extLst>
+          </p:cNvPr>
+          <p:cNvSpPr>
+            <a:spLocks xmlns:a="http://schemas.openxmlformats.org/drawingml/2006/main" noGrp="1"/>
+          </p:cNvSpPr>
+          <p:nvPr/>
+        </p:nvSpPr>
+        <p:spPr>
+          <a:xfrm xmlns:a="http://schemas.openxmlformats.org/drawingml/2006/main">
+            <a:off x="4286250" y="2057400"/>
+            <a:ext cx="6534150" cy="838200"/>
           </a:xfrm>
           <a:prstGeom xmlns:a="http://schemas.openxmlformats.org/drawingml/2006/main" prst="roundRect">
             <a:avLst>
-              <a:gd name="adj" fmla="val 10000"/>
+              <a:gd name="adj" fmla="val 14773"/>
             </a:avLst>
           </a:prstGeom>
           <a:solidFill xmlns:a="http://schemas.openxmlformats.org/drawingml/2006/main">
@@ -2893,23 +2893,87 @@
           <p:cNvPr id="8" name="case-row-1">
             <a:extLst xmlns:a="http://schemas.openxmlformats.org/drawingml/2006/main">
               <a:ext uri="{FF2B5EF4-FFF2-40B4-BE49-F238E27FC236}">
-                <a16:creationId xmlns:a16="http://schemas.microsoft.com/office/drawing/2014/main" id="{9BCCBBF4-AEB0-4063-B614-A9E2ECBA73B9}"/>
-              </a:ext>
-            </a:extLst>
-          </p:cNvPr>
-          <p:cNvSpPr>
-            <a:spLocks xmlns:a="http://schemas.openxmlformats.org/drawingml/2006/main" noGrp="1"/>
-          </p:cNvSpPr>
-          <p:nvPr/>
-        </p:nvSpPr>
-        <p:spPr>
-          <a:xfrm xmlns:a="http://schemas.openxmlformats.org/drawingml/2006/main">
-            <a:off x="4286250" y="3714750"/>
-            <a:ext cx="6534150" cy="1238250"/>
+                <a16:creationId xmlns:a16="http://schemas.microsoft.com/office/drawing/2014/main" id="{03BA37D0-C26F-49EB-B934-2982B70060EA}"/>
+              </a:ext>
+            </a:extLst>
+          </p:cNvPr>
+          <p:cNvSpPr>
+            <a:spLocks xmlns:a="http://schemas.openxmlformats.org/drawingml/2006/main" noGrp="1"/>
+          </p:cNvSpPr>
+          <p:nvPr/>
+        </p:nvSpPr>
+        <p:spPr>
+          <a:xfrm xmlns:a="http://schemas.openxmlformats.org/drawingml/2006/main">
+            <a:off x="4286250" y="3086100"/>
+            <a:ext cx="6534150" cy="838200"/>
           </a:xfrm>
           <a:prstGeom xmlns:a="http://schemas.openxmlformats.org/drawingml/2006/main" prst="roundRect">
             <a:avLst>
-              <a:gd name="adj" fmla="val 10000"/>
+              <a:gd name="adj" fmla="val 14773"/>
+            </a:avLst>
+          </a:prstGeom>
+          <a:solidFill xmlns:a="http://schemas.openxmlformats.org/drawingml/2006/main">
+            <a:srgbClr val="FFFFFF"/>
+          </a:solidFill>
+          <a:ln xmlns:a="http://schemas.openxmlformats.org/drawingml/2006/main" w="9525">
+            <a:solidFill>
+              <a:srgbClr val="D8E0E8"/>
+            </a:solidFill>
+            <a:prstDash val="solid"/>
+          </a:ln>
+        </p:spPr>
+        <p:txBody>
+          <a:bodyPr xmlns:a="http://schemas.openxmlformats.org/drawingml/2006/main" lIns="152400" tIns="133350" rIns="152400" bIns="133350" anchor="ctr">
+            <a:normAutofit fontScale="100000"/>
+          </a:bodyPr>
+          <a:lstStyle xmlns:a="http://schemas.openxmlformats.org/drawingml/2006/main"/>
+          <a:p xmlns:a="http://schemas.openxmlformats.org/drawingml/2006/main">
+            <a:pPr algn="l">
+              <a:defRPr sz="1575" b="0">
+                <a:solidFill>
+                  <a:srgbClr val="10233F"/>
+                </a:solidFill>
+                <a:latin typeface="PingFang SC"/>
+                <a:ea typeface="PingFang SC"/>
+                <a:cs typeface="PingFang SC"/>
+              </a:defRPr>
+            </a:pPr>
+            <a:r>
+              <a:rPr sz="1575" b="0">
+                <a:solidFill>
+                  <a:srgbClr val="10233F"/>
+                </a:solidFill>
+                <a:latin typeface="PingFang SC"/>
+                <a:ea typeface="PingFang SC"/>
+                <a:cs typeface="PingFang SC"/>
+              </a:rPr>
+              <a:t>提问｜员工询问某类费用能否报销</a:t>
+            </a:r>
+          </a:p>
+        </p:txBody>
+      </p:sp>
+      <p:sp>
+        <p:nvSpPr>
+          <p:cNvPr id="9" name="case-row-2">
+            <a:extLst xmlns:a="http://schemas.openxmlformats.org/drawingml/2006/main">
+              <a:ext uri="{FF2B5EF4-FFF2-40B4-BE49-F238E27FC236}">
+                <a16:creationId xmlns:a16="http://schemas.microsoft.com/office/drawing/2014/main" id="{FF0D33B2-9D04-41D6-8B37-993995A739D6}"/>
+              </a:ext>
+            </a:extLst>
+          </p:cNvPr>
+          <p:cNvSpPr>
+            <a:spLocks xmlns:a="http://schemas.openxmlformats.org/drawingml/2006/main" noGrp="1"/>
+          </p:cNvSpPr>
+          <p:nvPr/>
+        </p:nvSpPr>
+        <p:spPr>
+          <a:xfrm xmlns:a="http://schemas.openxmlformats.org/drawingml/2006/main">
+            <a:off x="4286250" y="4114800"/>
+            <a:ext cx="6534150" cy="838200"/>
+          </a:xfrm>
+          <a:prstGeom xmlns:a="http://schemas.openxmlformats.org/drawingml/2006/main" prst="roundRect">
+            <a:avLst>
+              <a:gd name="adj" fmla="val 14773"/>
             </a:avLst>
           </a:prstGeom>
           <a:solidFill xmlns:a="http://schemas.openxmlformats.org/drawingml/2006/main">
@@ -2917,7 +2981,7 @@
           </a:solidFill>
           <a:ln xmlns:a="http://schemas.openxmlformats.org/drawingml/2006/main" w="9525">
             <a:solidFill>
-              <a:srgbClr val="E5783F"/>
+              <a:srgbClr val="9A3F16"/>
             </a:solidFill>
             <a:prstDash val="solid"/>
           </a:ln>
@@ -2947,17 +3011,17 @@
                 <a:ea typeface="PingFang SC"/>
                 <a:cs typeface="PingFang SC"/>
               </a:rPr>
-              <a:t>验证｜验收“带版本的制度问答”时，要同时记录适用场景、证据来源、失败条件与人工责任</a:t>
-            </a:r>
-          </a:p>
-        </p:txBody>
-      </p:sp>
-      <p:sp>
-        <p:nvSpPr>
-          <p:cNvPr id="9" name="s10-takeaway-rule">
-            <a:extLst xmlns:a="http://schemas.openxmlformats.org/drawingml/2006/main">
-              <a:ext uri="{FF2B5EF4-FFF2-40B4-BE49-F238E27FC236}">
-                <a16:creationId xmlns:a16="http://schemas.microsoft.com/office/drawing/2014/main" id="{00C5C7C6-F978-4C07-8F18-3D1C9031830B}"/>
+              <a:t>回答｜系统返回适用范围、条件、例外和原文位置，同时显示制度版本与生效时间</a:t>
+            </a:r>
+          </a:p>
+        </p:txBody>
+      </p:sp>
+      <p:sp>
+        <p:nvSpPr>
+          <p:cNvPr id="10" name="s10-takeaway-rule">
+            <a:extLst xmlns:a="http://schemas.openxmlformats.org/drawingml/2006/main">
+              <a:ext uri="{FF2B5EF4-FFF2-40B4-BE49-F238E27FC236}">
+                <a16:creationId xmlns:a16="http://schemas.microsoft.com/office/drawing/2014/main" id="{0AF213C0-B048-454A-9030-54248F6B80A6}"/>
               </a:ext>
             </a:extLst>
           </p:cNvPr>
@@ -2987,10 +3051,10 @@
       </p:sp>
       <p:sp>
         <p:nvSpPr>
-          <p:cNvPr id="10" name="s10-takeaway">
-            <a:extLst xmlns:a="http://schemas.openxmlformats.org/drawingml/2006/main">
-              <a:ext uri="{FF2B5EF4-FFF2-40B4-BE49-F238E27FC236}">
-                <a16:creationId xmlns:a16="http://schemas.microsoft.com/office/drawing/2014/main" id="{C3278FCB-AC63-43FE-B078-261A8A2C0478}"/>
+          <p:cNvPr id="11" name="s10-takeaway">
+            <a:extLst xmlns:a="http://schemas.openxmlformats.org/drawingml/2006/main">
+              <a:ext uri="{FF2B5EF4-FFF2-40B4-BE49-F238E27FC236}">
+                <a16:creationId xmlns:a16="http://schemas.microsoft.com/office/drawing/2014/main" id="{81A4F5C6-C365-46F1-8BA6-20F02EDF507F}"/>
               </a:ext>
             </a:extLst>
           </p:cNvPr>
@@ -3038,7 +3102,7 @@
                 <a:ea typeface="PingFang SC"/>
                 <a:cs typeface="PingFang SC"/>
               </a:rPr>
-              <a:t>带版本的制度问答必须经过边界验证</a:t>
+              <a:t>制度问答必须绑定版本、生效日期与权限</a:t>
             </a:r>
           </a:p>
         </p:txBody>
@@ -3046,7 +3110,7 @@
     </p:spTree>
     <p:extLst>
       <p:ext uri="{BB962C8B-B14F-4D97-AF65-F5344CB8AC3E}">
-        <p14:creationId xmlns:p14="http://schemas.microsoft.com/office/powerpoint/2010/main" val="2016032723"/>
+        <p14:creationId xmlns:p14="http://schemas.microsoft.com/office/powerpoint/2010/main" val="1252928902"/>
       </p:ext>
     </p:extLst>
   </p:cSld>
@@ -3077,7 +3141,7 @@
           <p:cNvPr id="1" name="s11-rule">
             <a:extLst xmlns:a="http://schemas.openxmlformats.org/drawingml/2006/main">
               <a:ext uri="{FF2B5EF4-FFF2-40B4-BE49-F238E27FC236}">
-                <a16:creationId xmlns:a16="http://schemas.microsoft.com/office/drawing/2014/main" id="{FF49590A-FB9C-4D75-8BAF-DAC688A36DD4}"/>
+                <a16:creationId xmlns:a16="http://schemas.microsoft.com/office/drawing/2014/main" id="{45B2ABDE-0C2B-48B5-A430-683E9CDE1D63}"/>
               </a:ext>
             </a:extLst>
           </p:cNvPr>
@@ -3110,7 +3174,7 @@
           <p:cNvPr id="2" name="s11-eyebrow">
             <a:extLst xmlns:a="http://schemas.openxmlformats.org/drawingml/2006/main">
               <a:ext uri="{FF2B5EF4-FFF2-40B4-BE49-F238E27FC236}">
-                <a16:creationId xmlns:a16="http://schemas.microsoft.com/office/drawing/2014/main" id="{15291E10-586D-4AC4-8B1F-2BEB7318A1BA}"/>
+                <a16:creationId xmlns:a16="http://schemas.microsoft.com/office/drawing/2014/main" id="{0FB25FBA-950E-459C-B7B7-A2DDDFEDD164}"/>
               </a:ext>
             </a:extLst>
           </p:cNvPr>
@@ -3168,7 +3232,7 @@
           <p:cNvPr id="3" name="s11-title">
             <a:extLst xmlns:a="http://schemas.openxmlformats.org/drawingml/2006/main">
               <a:ext uri="{FF2B5EF4-FFF2-40B4-BE49-F238E27FC236}">
-                <a16:creationId xmlns:a16="http://schemas.microsoft.com/office/drawing/2014/main" id="{F33EC584-C3C4-4E5F-8FD2-7600ADEE3F42}"/>
+                <a16:creationId xmlns:a16="http://schemas.microsoft.com/office/drawing/2014/main" id="{BDC56283-C51E-40EA-9549-84BDEF5037E9}"/>
               </a:ext>
             </a:extLst>
           </p:cNvPr>
@@ -3216,7 +3280,7 @@
                 <a:ea typeface="PingFang SC"/>
                 <a:cs typeface="PingFang SC"/>
               </a:rPr>
-              <a:t>把方法落实为可验证的行动</a:t>
+              <a:t>企业知识与 AIGC：一次可验收练习</a:t>
             </a:r>
           </a:p>
         </p:txBody>
@@ -3226,7 +3290,7 @@
           <p:cNvPr id="4" name="s11-footer">
             <a:extLst xmlns:a="http://schemas.openxmlformats.org/drawingml/2006/main">
               <a:ext uri="{FF2B5EF4-FFF2-40B4-BE49-F238E27FC236}">
-                <a16:creationId xmlns:a16="http://schemas.microsoft.com/office/drawing/2014/main" id="{046B92AB-5B53-4962-956B-8E085C3A3721}"/>
+                <a16:creationId xmlns:a16="http://schemas.microsoft.com/office/drawing/2014/main" id="{B571AA19-0C15-424E-B910-20EB93E51683}"/>
               </a:ext>
             </a:extLst>
           </p:cNvPr>
@@ -3257,7 +3321,7 @@
           <p:cNvPr id="5" name="s11-identity">
             <a:extLst xmlns:a="http://schemas.openxmlformats.org/drawingml/2006/main">
               <a:ext uri="{FF2B5EF4-FFF2-40B4-BE49-F238E27FC236}">
-                <a16:creationId xmlns:a16="http://schemas.microsoft.com/office/drawing/2014/main" id="{48047E6C-7730-40B0-BECD-CBD962E3098F}"/>
+                <a16:creationId xmlns:a16="http://schemas.microsoft.com/office/drawing/2014/main" id="{3C4706D5-29EF-48AB-9950-5B3EDD4A6D18}"/>
               </a:ext>
             </a:extLst>
           </p:cNvPr>
@@ -3315,7 +3379,7 @@
           <p:cNvPr id="6" name="practice-circle-0">
             <a:extLst xmlns:a="http://schemas.openxmlformats.org/drawingml/2006/main">
               <a:ext uri="{FF2B5EF4-FFF2-40B4-BE49-F238E27FC236}">
-                <a16:creationId xmlns:a16="http://schemas.microsoft.com/office/drawing/2014/main" id="{E17C5520-02B1-455A-AB51-8B0DCE5E5094}"/>
+                <a16:creationId xmlns:a16="http://schemas.microsoft.com/office/drawing/2014/main" id="{764FA457-5A7D-466A-9FDD-60E0A98679DB}"/>
               </a:ext>
             </a:extLst>
           </p:cNvPr>
@@ -3348,7 +3412,7 @@
           <p:cNvPr id="7" name="practice-number-0">
             <a:extLst xmlns:a="http://schemas.openxmlformats.org/drawingml/2006/main">
               <a:ext uri="{FF2B5EF4-FFF2-40B4-BE49-F238E27FC236}">
-                <a16:creationId xmlns:a16="http://schemas.microsoft.com/office/drawing/2014/main" id="{A8C569D6-3CA6-466D-B4A5-310380317C0E}"/>
+                <a16:creationId xmlns:a16="http://schemas.microsoft.com/office/drawing/2014/main" id="{E03A1E11-DF8B-4805-8E3E-E65D56D8EBED}"/>
               </a:ext>
             </a:extLst>
           </p:cNvPr>
@@ -3406,7 +3470,7 @@
           <p:cNvPr id="8" name="practice-item-0">
             <a:extLst xmlns:a="http://schemas.openxmlformats.org/drawingml/2006/main">
               <a:ext uri="{FF2B5EF4-FFF2-40B4-BE49-F238E27FC236}">
-                <a16:creationId xmlns:a16="http://schemas.microsoft.com/office/drawing/2014/main" id="{71B4D976-0C0B-4804-89A8-D21F3C2AB60B}"/>
+                <a16:creationId xmlns:a16="http://schemas.microsoft.com/office/drawing/2014/main" id="{5C59441D-FE6F-4285-9EA3-9012EA81CF7A}"/>
               </a:ext>
             </a:extLst>
           </p:cNvPr>
@@ -3470,7 +3534,7 @@
           <p:cNvPr id="9" name="practice-connector-0">
             <a:extLst xmlns:a="http://schemas.openxmlformats.org/drawingml/2006/main">
               <a:ext uri="{FF2B5EF4-FFF2-40B4-BE49-F238E27FC236}">
-                <a16:creationId xmlns:a16="http://schemas.microsoft.com/office/drawing/2014/main" id="{CDEDEC06-1613-43A7-AA24-240A6A95BFC1}"/>
+                <a16:creationId xmlns:a16="http://schemas.microsoft.com/office/drawing/2014/main" id="{0DE7D96C-A5FC-4840-AF2C-945AB6F41548}"/>
               </a:ext>
             </a:extLst>
           </p:cNvPr>
@@ -3490,7 +3554,7 @@
           <a:noFill xmlns:a="http://schemas.openxmlformats.org/drawingml/2006/main"/>
           <a:ln xmlns:a="http://schemas.openxmlformats.org/drawingml/2006/main" w="28575">
             <a:solidFill>
-              <a:srgbClr val="E5783F"/>
+              <a:srgbClr val="9A3F16"/>
             </a:solidFill>
             <a:prstDash val="solid"/>
           </a:ln>
@@ -3501,7 +3565,7 @@
           <p:cNvPr id="10" name="practice-circle-1">
             <a:extLst xmlns:a="http://schemas.openxmlformats.org/drawingml/2006/main">
               <a:ext uri="{FF2B5EF4-FFF2-40B4-BE49-F238E27FC236}">
-                <a16:creationId xmlns:a16="http://schemas.microsoft.com/office/drawing/2014/main" id="{59E57A37-F338-4922-BD89-2F5662B3656A}"/>
+                <a16:creationId xmlns:a16="http://schemas.microsoft.com/office/drawing/2014/main" id="{712BF712-8518-4BBF-8FA5-AEF6DEB0910C}"/>
               </a:ext>
             </a:extLst>
           </p:cNvPr>
@@ -3534,7 +3598,7 @@
           <p:cNvPr id="11" name="practice-number-1">
             <a:extLst xmlns:a="http://schemas.openxmlformats.org/drawingml/2006/main">
               <a:ext uri="{FF2B5EF4-FFF2-40B4-BE49-F238E27FC236}">
-                <a16:creationId xmlns:a16="http://schemas.microsoft.com/office/drawing/2014/main" id="{C91BC5DD-3D0A-452A-B992-9409953C1676}"/>
+                <a16:creationId xmlns:a16="http://schemas.microsoft.com/office/drawing/2014/main" id="{716E3AEF-1552-469D-9ACD-6D99917B710C}"/>
               </a:ext>
             </a:extLst>
           </p:cNvPr>
@@ -3592,7 +3656,7 @@
           <p:cNvPr id="12" name="practice-item-1">
             <a:extLst xmlns:a="http://schemas.openxmlformats.org/drawingml/2006/main">
               <a:ext uri="{FF2B5EF4-FFF2-40B4-BE49-F238E27FC236}">
-                <a16:creationId xmlns:a16="http://schemas.microsoft.com/office/drawing/2014/main" id="{EEC6D67E-E41F-405F-B98E-4D397FDBEAB5}"/>
+                <a16:creationId xmlns:a16="http://schemas.microsoft.com/office/drawing/2014/main" id="{4CB1A673-23D4-4CD5-8F1E-69A62188A7FD}"/>
               </a:ext>
             </a:extLst>
           </p:cNvPr>
@@ -3656,7 +3720,7 @@
           <p:cNvPr id="13" name="practice-connector-1">
             <a:extLst xmlns:a="http://schemas.openxmlformats.org/drawingml/2006/main">
               <a:ext uri="{FF2B5EF4-FFF2-40B4-BE49-F238E27FC236}">
-                <a16:creationId xmlns:a16="http://schemas.microsoft.com/office/drawing/2014/main" id="{5FE4764F-5279-46E2-A236-2AB45E7C4F1B}"/>
+                <a16:creationId xmlns:a16="http://schemas.microsoft.com/office/drawing/2014/main" id="{993D88B9-AAD5-4471-9304-56F192264B94}"/>
               </a:ext>
             </a:extLst>
           </p:cNvPr>
@@ -3676,7 +3740,7 @@
           <a:noFill xmlns:a="http://schemas.openxmlformats.org/drawingml/2006/main"/>
           <a:ln xmlns:a="http://schemas.openxmlformats.org/drawingml/2006/main" w="28575">
             <a:solidFill>
-              <a:srgbClr val="E5783F"/>
+              <a:srgbClr val="9A3F16"/>
             </a:solidFill>
             <a:prstDash val="solid"/>
           </a:ln>
@@ -3687,7 +3751,7 @@
           <p:cNvPr id="14" name="practice-circle-2">
             <a:extLst xmlns:a="http://schemas.openxmlformats.org/drawingml/2006/main">
               <a:ext uri="{FF2B5EF4-FFF2-40B4-BE49-F238E27FC236}">
-                <a16:creationId xmlns:a16="http://schemas.microsoft.com/office/drawing/2014/main" id="{DBBD6343-B885-45C7-B19E-538CE8DAE7BF}"/>
+                <a16:creationId xmlns:a16="http://schemas.microsoft.com/office/drawing/2014/main" id="{D9F1329A-95A1-4984-8E62-D0899AC6678B}"/>
               </a:ext>
             </a:extLst>
           </p:cNvPr>
@@ -3705,7 +3769,7 @@
             <a:avLst/>
           </a:prstGeom>
           <a:solidFill xmlns:a="http://schemas.openxmlformats.org/drawingml/2006/main">
-            <a:srgbClr val="E5783F"/>
+            <a:srgbClr val="9A3F16"/>
           </a:solidFill>
           <a:ln xmlns:a="http://schemas.openxmlformats.org/drawingml/2006/main" w="28575">
             <a:solidFill>
@@ -3720,7 +3784,7 @@
           <p:cNvPr id="15" name="practice-number-2">
             <a:extLst xmlns:a="http://schemas.openxmlformats.org/drawingml/2006/main">
               <a:ext uri="{FF2B5EF4-FFF2-40B4-BE49-F238E27FC236}">
-                <a16:creationId xmlns:a16="http://schemas.microsoft.com/office/drawing/2014/main" id="{DD96D1B7-FE2D-4F4E-B5FB-E69428422CFB}"/>
+                <a16:creationId xmlns:a16="http://schemas.microsoft.com/office/drawing/2014/main" id="{A8A07064-31D5-45BB-AE46-431EF350AF01}"/>
               </a:ext>
             </a:extLst>
           </p:cNvPr>
@@ -3778,7 +3842,7 @@
           <p:cNvPr id="16" name="practice-item-2">
             <a:extLst xmlns:a="http://schemas.openxmlformats.org/drawingml/2006/main">
               <a:ext uri="{FF2B5EF4-FFF2-40B4-BE49-F238E27FC236}">
-                <a16:creationId xmlns:a16="http://schemas.microsoft.com/office/drawing/2014/main" id="{C28B8748-82AD-47BE-9F78-BFDD23808F4C}"/>
+                <a16:creationId xmlns:a16="http://schemas.microsoft.com/office/drawing/2014/main" id="{A421594B-5917-45C4-B879-F4325AA73427}"/>
               </a:ext>
             </a:extLst>
           </p:cNvPr>
@@ -3802,7 +3866,7 @@
           </a:solidFill>
           <a:ln xmlns:a="http://schemas.openxmlformats.org/drawingml/2006/main" w="19050">
             <a:solidFill>
-              <a:srgbClr val="E5783F"/>
+              <a:srgbClr val="9A3F16"/>
             </a:solidFill>
             <a:prstDash val="solid"/>
           </a:ln>
@@ -3840,7 +3904,7 @@
     </p:spTree>
     <p:extLst>
       <p:ext uri="{BB962C8B-B14F-4D97-AF65-F5344CB8AC3E}">
-        <p14:creationId xmlns:p14="http://schemas.microsoft.com/office/powerpoint/2010/main" val="2080142740"/>
+        <p14:creationId xmlns:p14="http://schemas.microsoft.com/office/powerpoint/2010/main" val="768399367"/>
       </p:ext>
     </p:extLst>
   </p:cSld>
@@ -3871,7 +3935,7 @@
           <p:cNvPr id="1" name="s12-rule">
             <a:extLst xmlns:a="http://schemas.openxmlformats.org/drawingml/2006/main">
               <a:ext uri="{FF2B5EF4-FFF2-40B4-BE49-F238E27FC236}">
-                <a16:creationId xmlns:a16="http://schemas.microsoft.com/office/drawing/2014/main" id="{0C2DB499-FD8E-40BD-8B03-AE72B0F58D26}"/>
+                <a16:creationId xmlns:a16="http://schemas.microsoft.com/office/drawing/2014/main" id="{4D12090B-EA7E-4A52-A78C-5A212C121FEA}"/>
               </a:ext>
             </a:extLst>
           </p:cNvPr>
@@ -3904,7 +3968,7 @@
           <p:cNvPr id="2" name="s12-eyebrow">
             <a:extLst xmlns:a="http://schemas.openxmlformats.org/drawingml/2006/main">
               <a:ext uri="{FF2B5EF4-FFF2-40B4-BE49-F238E27FC236}">
-                <a16:creationId xmlns:a16="http://schemas.microsoft.com/office/drawing/2014/main" id="{B85F37F5-8458-41DC-8DCC-CCDF62469157}"/>
+                <a16:creationId xmlns:a16="http://schemas.microsoft.com/office/drawing/2014/main" id="{72908597-7DDC-455C-BA9B-76C620ECF825}"/>
               </a:ext>
             </a:extLst>
           </p:cNvPr>
@@ -3962,7 +4026,7 @@
           <p:cNvPr id="3" name="s12-title">
             <a:extLst xmlns:a="http://schemas.openxmlformats.org/drawingml/2006/main">
               <a:ext uri="{FF2B5EF4-FFF2-40B4-BE49-F238E27FC236}">
-                <a16:creationId xmlns:a16="http://schemas.microsoft.com/office/drawing/2014/main" id="{12FA743F-C9C5-4655-BB3E-7A5DD0F1B8C1}"/>
+                <a16:creationId xmlns:a16="http://schemas.microsoft.com/office/drawing/2014/main" id="{90B1062A-C2C3-4181-B354-3A3730E6F57F}"/>
               </a:ext>
             </a:extLst>
           </p:cNvPr>
@@ -4010,7 +4074,7 @@
                 <a:ea typeface="PingFang SC"/>
                 <a:cs typeface="PingFang SC"/>
               </a:rPr>
-              <a:t>带走三条可复用的判断原则</a:t>
+              <a:t>企业知识与 AIGC：判断时先抓住三点</a:t>
             </a:r>
           </a:p>
         </p:txBody>
@@ -4020,7 +4084,7 @@
           <p:cNvPr id="4" name="s12-footer">
             <a:extLst xmlns:a="http://schemas.openxmlformats.org/drawingml/2006/main">
               <a:ext uri="{FF2B5EF4-FFF2-40B4-BE49-F238E27FC236}">
-                <a16:creationId xmlns:a16="http://schemas.microsoft.com/office/drawing/2014/main" id="{5D9258BF-76CD-4357-AAA2-E95EC204110D}"/>
+                <a16:creationId xmlns:a16="http://schemas.microsoft.com/office/drawing/2014/main" id="{434B7B83-2374-4B09-88DB-81FACA2DF1AD}"/>
               </a:ext>
             </a:extLst>
           </p:cNvPr>
@@ -4051,7 +4115,7 @@
           <p:cNvPr id="5" name="s12-identity">
             <a:extLst xmlns:a="http://schemas.openxmlformats.org/drawingml/2006/main">
               <a:ext uri="{FF2B5EF4-FFF2-40B4-BE49-F238E27FC236}">
-                <a16:creationId xmlns:a16="http://schemas.microsoft.com/office/drawing/2014/main" id="{0F055189-18E0-48FD-86AF-50B91DC2F1FB}"/>
+                <a16:creationId xmlns:a16="http://schemas.microsoft.com/office/drawing/2014/main" id="{585392E5-296D-440E-AFD8-541DA9AB56AD}"/>
               </a:ext>
             </a:extLst>
           </p:cNvPr>
@@ -4109,7 +4173,7 @@
           <p:cNvPr id="6" name="recap-circle-0">
             <a:extLst xmlns:a="http://schemas.openxmlformats.org/drawingml/2006/main">
               <a:ext uri="{FF2B5EF4-FFF2-40B4-BE49-F238E27FC236}">
-                <a16:creationId xmlns:a16="http://schemas.microsoft.com/office/drawing/2014/main" id="{59A3D86B-DF42-4B8E-8BDD-8D8EE428EA30}"/>
+                <a16:creationId xmlns:a16="http://schemas.microsoft.com/office/drawing/2014/main" id="{F2138556-7326-454E-B44F-939ADF8BA838}"/>
               </a:ext>
             </a:extLst>
           </p:cNvPr>
@@ -4142,7 +4206,7 @@
           <p:cNvPr id="7" name="recap-number-0">
             <a:extLst xmlns:a="http://schemas.openxmlformats.org/drawingml/2006/main">
               <a:ext uri="{FF2B5EF4-FFF2-40B4-BE49-F238E27FC236}">
-                <a16:creationId xmlns:a16="http://schemas.microsoft.com/office/drawing/2014/main" id="{7B3E5EAB-6B91-46B9-B2AC-29B98D867DC6}"/>
+                <a16:creationId xmlns:a16="http://schemas.microsoft.com/office/drawing/2014/main" id="{59E00802-B2F5-4FB1-A66A-B8604E75C042}"/>
               </a:ext>
             </a:extLst>
           </p:cNvPr>
@@ -4200,7 +4264,7 @@
           <p:cNvPr id="8" name="recap-item-0">
             <a:extLst xmlns:a="http://schemas.openxmlformats.org/drawingml/2006/main">
               <a:ext uri="{FF2B5EF4-FFF2-40B4-BE49-F238E27FC236}">
-                <a16:creationId xmlns:a16="http://schemas.microsoft.com/office/drawing/2014/main" id="{0B00B31A-7F09-4E4A-9372-83F1466DAA69}"/>
+                <a16:creationId xmlns:a16="http://schemas.microsoft.com/office/drawing/2014/main" id="{C8E6379E-1F24-46CC-8BDB-51CE6B15171C}"/>
               </a:ext>
             </a:extLst>
           </p:cNvPr>
@@ -4264,7 +4328,7 @@
           <p:cNvPr id="9" name="recap-connector-0">
             <a:extLst xmlns:a="http://schemas.openxmlformats.org/drawingml/2006/main">
               <a:ext uri="{FF2B5EF4-FFF2-40B4-BE49-F238E27FC236}">
-                <a16:creationId xmlns:a16="http://schemas.microsoft.com/office/drawing/2014/main" id="{18556D6E-DB22-48AB-894E-F3340B484C24}"/>
+                <a16:creationId xmlns:a16="http://schemas.microsoft.com/office/drawing/2014/main" id="{47C568E2-7914-45F2-BB66-DC7EB7C1B92D}"/>
               </a:ext>
             </a:extLst>
           </p:cNvPr>
@@ -4284,7 +4348,7 @@
           <a:noFill xmlns:a="http://schemas.openxmlformats.org/drawingml/2006/main"/>
           <a:ln xmlns:a="http://schemas.openxmlformats.org/drawingml/2006/main" w="28575">
             <a:solidFill>
-              <a:srgbClr val="E5783F"/>
+              <a:srgbClr val="9A3F16"/>
             </a:solidFill>
             <a:prstDash val="solid"/>
           </a:ln>
@@ -4295,7 +4359,7 @@
           <p:cNvPr id="10" name="recap-circle-1">
             <a:extLst xmlns:a="http://schemas.openxmlformats.org/drawingml/2006/main">
               <a:ext uri="{FF2B5EF4-FFF2-40B4-BE49-F238E27FC236}">
-                <a16:creationId xmlns:a16="http://schemas.microsoft.com/office/drawing/2014/main" id="{3D40010B-8F23-4156-A65A-11094F54446F}"/>
+                <a16:creationId xmlns:a16="http://schemas.microsoft.com/office/drawing/2014/main" id="{2733458E-13AC-4004-A58B-237321120B5B}"/>
               </a:ext>
             </a:extLst>
           </p:cNvPr>
@@ -4328,7 +4392,7 @@
           <p:cNvPr id="11" name="recap-number-1">
             <a:extLst xmlns:a="http://schemas.openxmlformats.org/drawingml/2006/main">
               <a:ext uri="{FF2B5EF4-FFF2-40B4-BE49-F238E27FC236}">
-                <a16:creationId xmlns:a16="http://schemas.microsoft.com/office/drawing/2014/main" id="{24A2AA25-8E0E-4AC0-81CF-F2D1BCDB334F}"/>
+                <a16:creationId xmlns:a16="http://schemas.microsoft.com/office/drawing/2014/main" id="{37C9325C-9EAF-4E4C-B345-8741821D7164}"/>
               </a:ext>
             </a:extLst>
           </p:cNvPr>
@@ -4386,7 +4450,7 @@
           <p:cNvPr id="12" name="recap-item-1">
             <a:extLst xmlns:a="http://schemas.openxmlformats.org/drawingml/2006/main">
               <a:ext uri="{FF2B5EF4-FFF2-40B4-BE49-F238E27FC236}">
-                <a16:creationId xmlns:a16="http://schemas.microsoft.com/office/drawing/2014/main" id="{A333F12E-D3B2-4D09-B3F0-02885C1589BE}"/>
+                <a16:creationId xmlns:a16="http://schemas.microsoft.com/office/drawing/2014/main" id="{E744CBDD-3503-4EE8-B513-05D53E28AE93}"/>
               </a:ext>
             </a:extLst>
           </p:cNvPr>
@@ -4440,7 +4504,7 @@
                 <a:ea typeface="PingFang SC"/>
                 <a:cs typeface="PingFang SC"/>
               </a:rPr>
-              <a:t>知识条目应继承源文件权限，而不是进入知识库后自动对全员开放</a:t>
+              <a:t>知识条目必须继承源文件权限与有效期</a:t>
             </a:r>
           </a:p>
         </p:txBody>
@@ -4450,7 +4514,7 @@
           <p:cNvPr id="13" name="recap-connector-1">
             <a:extLst xmlns:a="http://schemas.openxmlformats.org/drawingml/2006/main">
               <a:ext uri="{FF2B5EF4-FFF2-40B4-BE49-F238E27FC236}">
-                <a16:creationId xmlns:a16="http://schemas.microsoft.com/office/drawing/2014/main" id="{A51098C8-E242-4CB4-9326-C529F1DC2E9A}"/>
+                <a16:creationId xmlns:a16="http://schemas.microsoft.com/office/drawing/2014/main" id="{579CFC9D-86C3-4AFA-9A70-CB0DEDD38C99}"/>
               </a:ext>
             </a:extLst>
           </p:cNvPr>
@@ -4470,7 +4534,7 @@
           <a:noFill xmlns:a="http://schemas.openxmlformats.org/drawingml/2006/main"/>
           <a:ln xmlns:a="http://schemas.openxmlformats.org/drawingml/2006/main" w="28575">
             <a:solidFill>
-              <a:srgbClr val="E5783F"/>
+              <a:srgbClr val="9A3F16"/>
             </a:solidFill>
             <a:prstDash val="solid"/>
           </a:ln>
@@ -4481,7 +4545,7 @@
           <p:cNvPr id="14" name="recap-circle-2">
             <a:extLst xmlns:a="http://schemas.openxmlformats.org/drawingml/2006/main">
               <a:ext uri="{FF2B5EF4-FFF2-40B4-BE49-F238E27FC236}">
-                <a16:creationId xmlns:a16="http://schemas.microsoft.com/office/drawing/2014/main" id="{5CD2C3F4-EF1F-4D35-BEFD-765170C86B55}"/>
+                <a16:creationId xmlns:a16="http://schemas.microsoft.com/office/drawing/2014/main" id="{149879D2-5F64-4687-8879-50C4BC1AD2DB}"/>
               </a:ext>
             </a:extLst>
           </p:cNvPr>
@@ -4499,7 +4563,7 @@
             <a:avLst/>
           </a:prstGeom>
           <a:solidFill xmlns:a="http://schemas.openxmlformats.org/drawingml/2006/main">
-            <a:srgbClr val="E5783F"/>
+            <a:srgbClr val="9A3F16"/>
           </a:solidFill>
           <a:ln xmlns:a="http://schemas.openxmlformats.org/drawingml/2006/main" w="28575">
             <a:solidFill>
@@ -4514,7 +4578,7 @@
           <p:cNvPr id="15" name="recap-number-2">
             <a:extLst xmlns:a="http://schemas.openxmlformats.org/drawingml/2006/main">
               <a:ext uri="{FF2B5EF4-FFF2-40B4-BE49-F238E27FC236}">
-                <a16:creationId xmlns:a16="http://schemas.microsoft.com/office/drawing/2014/main" id="{8D3EB1F3-C448-47E6-9219-0A386C5AF362}"/>
+                <a16:creationId xmlns:a16="http://schemas.microsoft.com/office/drawing/2014/main" id="{69CBD424-34F1-49AA-9568-ADA128D5E93E}"/>
               </a:ext>
             </a:extLst>
           </p:cNvPr>
@@ -4572,7 +4636,7 @@
           <p:cNvPr id="16" name="recap-item-2">
             <a:extLst xmlns:a="http://schemas.openxmlformats.org/drawingml/2006/main">
               <a:ext uri="{FF2B5EF4-FFF2-40B4-BE49-F238E27FC236}">
-                <a16:creationId xmlns:a16="http://schemas.microsoft.com/office/drawing/2014/main" id="{17B8C2AC-2DE8-4BAA-B7E1-1E4707503C71}"/>
+                <a16:creationId xmlns:a16="http://schemas.microsoft.com/office/drawing/2014/main" id="{47A455F2-30CA-485A-877D-329ABBFDA133}"/>
               </a:ext>
             </a:extLst>
           </p:cNvPr>
@@ -4596,7 +4660,7 @@
           </a:solidFill>
           <a:ln xmlns:a="http://schemas.openxmlformats.org/drawingml/2006/main" w="19050">
             <a:solidFill>
-              <a:srgbClr val="E5783F"/>
+              <a:srgbClr val="9A3F16"/>
             </a:solidFill>
             <a:prstDash val="solid"/>
           </a:ln>
@@ -4634,7 +4698,7 @@
     </p:spTree>
     <p:extLst>
       <p:ext uri="{BB962C8B-B14F-4D97-AF65-F5344CB8AC3E}">
-        <p14:creationId xmlns:p14="http://schemas.microsoft.com/office/powerpoint/2010/main" val="129528840"/>
+        <p14:creationId xmlns:p14="http://schemas.microsoft.com/office/powerpoint/2010/main" val="1021809459"/>
       </p:ext>
     </p:extLst>
   </p:cSld>
@@ -4665,7 +4729,7 @@
           <p:cNvPr id="1" name="s13-rule">
             <a:extLst xmlns:a="http://schemas.openxmlformats.org/drawingml/2006/main">
               <a:ext uri="{FF2B5EF4-FFF2-40B4-BE49-F238E27FC236}">
-                <a16:creationId xmlns:a16="http://schemas.microsoft.com/office/drawing/2014/main" id="{FB20AFCD-B103-4F9C-8E82-201035AF2804}"/>
+                <a16:creationId xmlns:a16="http://schemas.microsoft.com/office/drawing/2014/main" id="{440CDDB0-74BA-42F0-A58D-59B9BBA2B2EE}"/>
               </a:ext>
             </a:extLst>
           </p:cNvPr>
@@ -4698,7 +4762,7 @@
           <p:cNvPr id="2" name="s13-eyebrow">
             <a:extLst xmlns:a="http://schemas.openxmlformats.org/drawingml/2006/main">
               <a:ext uri="{FF2B5EF4-FFF2-40B4-BE49-F238E27FC236}">
-                <a16:creationId xmlns:a16="http://schemas.microsoft.com/office/drawing/2014/main" id="{0A25F556-100D-4B19-ACFD-ADF466F9F99C}"/>
+                <a16:creationId xmlns:a16="http://schemas.microsoft.com/office/drawing/2014/main" id="{B948C5BD-0587-4188-9087-5FAA250B123B}"/>
               </a:ext>
             </a:extLst>
           </p:cNvPr>
@@ -4756,7 +4820,7 @@
           <p:cNvPr id="3" name="s13-title">
             <a:extLst xmlns:a="http://schemas.openxmlformats.org/drawingml/2006/main">
               <a:ext uri="{FF2B5EF4-FFF2-40B4-BE49-F238E27FC236}">
-                <a16:creationId xmlns:a16="http://schemas.microsoft.com/office/drawing/2014/main" id="{C274F7AA-35FB-4FE4-9A05-55724FC21E9D}"/>
+                <a16:creationId xmlns:a16="http://schemas.microsoft.com/office/drawing/2014/main" id="{7558817C-956E-4374-B411-625223D961F5}"/>
               </a:ext>
             </a:extLst>
           </p:cNvPr>
@@ -4804,7 +4868,7 @@
                 <a:ea typeface="PingFang SC"/>
                 <a:cs typeface="PingFang SC"/>
               </a:rPr>
-              <a:t>从公开重制课件回到可核对的学习资料</a:t>
+              <a:t>企业知识与 AIGC：依据、边界与延伸</a:t>
             </a:r>
           </a:p>
         </p:txBody>
@@ -4814,7 +4878,7 @@
           <p:cNvPr id="4" name="s13-footer">
             <a:extLst xmlns:a="http://schemas.openxmlformats.org/drawingml/2006/main">
               <a:ext uri="{FF2B5EF4-FFF2-40B4-BE49-F238E27FC236}">
-                <a16:creationId xmlns:a16="http://schemas.microsoft.com/office/drawing/2014/main" id="{5C0EC2A7-8998-4E52-B928-F709C56E1D4B}"/>
+                <a16:creationId xmlns:a16="http://schemas.microsoft.com/office/drawing/2014/main" id="{438654FD-057D-4DC1-A348-27F6C9C13DE1}"/>
               </a:ext>
             </a:extLst>
           </p:cNvPr>
@@ -4845,7 +4909,7 @@
           <p:cNvPr id="5" name="s13-identity">
             <a:extLst xmlns:a="http://schemas.openxmlformats.org/drawingml/2006/main">
               <a:ext uri="{FF2B5EF4-FFF2-40B4-BE49-F238E27FC236}">
-                <a16:creationId xmlns:a16="http://schemas.microsoft.com/office/drawing/2014/main" id="{5627FAE7-6CDD-446B-AB04-A3821212F628}"/>
+                <a16:creationId xmlns:a16="http://schemas.microsoft.com/office/drawing/2014/main" id="{D1517495-3D85-4FBA-B3FB-B8BE34082A56}"/>
               </a:ext>
             </a:extLst>
           </p:cNvPr>
@@ -4903,7 +4967,7 @@
           <p:cNvPr id="6" name="source-0">
             <a:extLst xmlns:a="http://schemas.openxmlformats.org/drawingml/2006/main">
               <a:ext uri="{FF2B5EF4-FFF2-40B4-BE49-F238E27FC236}">
-                <a16:creationId xmlns:a16="http://schemas.microsoft.com/office/drawing/2014/main" id="{A3031DDF-E3FF-4FBF-AC75-FB72CA5551AB}"/>
+                <a16:creationId xmlns:a16="http://schemas.microsoft.com/office/drawing/2014/main" id="{B0A3812D-0BA0-4EAE-839D-F965EDA5DEE8}"/>
               </a:ext>
             </a:extLst>
           </p:cNvPr>
@@ -4927,7 +4991,7 @@
           </a:solidFill>
           <a:ln xmlns:a="http://schemas.openxmlformats.org/drawingml/2006/main" w="9525">
             <a:solidFill>
-              <a:srgbClr val="E5783F"/>
+              <a:srgbClr val="9A3F16"/>
             </a:solidFill>
             <a:prstDash val="solid"/>
           </a:ln>
@@ -4967,7 +5031,7 @@
           <p:cNvPr id="7" name="source-1">
             <a:extLst xmlns:a="http://schemas.openxmlformats.org/drawingml/2006/main">
               <a:ext uri="{FF2B5EF4-FFF2-40B4-BE49-F238E27FC236}">
-                <a16:creationId xmlns:a16="http://schemas.microsoft.com/office/drawing/2014/main" id="{4F5CF868-FBFC-4173-B3A2-EBB1CE087326}"/>
+                <a16:creationId xmlns:a16="http://schemas.microsoft.com/office/drawing/2014/main" id="{F82EF25F-5126-41F6-86FA-8CCFECD65DD2}"/>
               </a:ext>
             </a:extLst>
           </p:cNvPr>
@@ -5031,7 +5095,7 @@
           <p:cNvPr id="8" name="source-2">
             <a:extLst xmlns:a="http://schemas.openxmlformats.org/drawingml/2006/main">
               <a:ext uri="{FF2B5EF4-FFF2-40B4-BE49-F238E27FC236}">
-                <a16:creationId xmlns:a16="http://schemas.microsoft.com/office/drawing/2014/main" id="{DB807CF1-EB11-4BD1-A476-7EFD452168F7}"/>
+                <a16:creationId xmlns:a16="http://schemas.microsoft.com/office/drawing/2014/main" id="{34C6B974-7937-48E2-A3B6-ACD9F3382730}"/>
               </a:ext>
             </a:extLst>
           </p:cNvPr>
@@ -5095,7 +5159,7 @@
           <p:cNvPr id="9" name="source-3">
             <a:extLst xmlns:a="http://schemas.openxmlformats.org/drawingml/2006/main">
               <a:ext uri="{FF2B5EF4-FFF2-40B4-BE49-F238E27FC236}">
-                <a16:creationId xmlns:a16="http://schemas.microsoft.com/office/drawing/2014/main" id="{C28F20CE-505F-46DF-8DAE-6BEE5428E33B}"/>
+                <a16:creationId xmlns:a16="http://schemas.microsoft.com/office/drawing/2014/main" id="{7C2CB4E9-B00A-4EAD-994B-27FFB10FC81F}"/>
               </a:ext>
             </a:extLst>
           </p:cNvPr>
@@ -5159,7 +5223,7 @@
           <p:cNvPr id="10" name="s13-takeaway-rule">
             <a:extLst xmlns:a="http://schemas.openxmlformats.org/drawingml/2006/main">
               <a:ext uri="{FF2B5EF4-FFF2-40B4-BE49-F238E27FC236}">
-                <a16:creationId xmlns:a16="http://schemas.microsoft.com/office/drawing/2014/main" id="{9F006DF5-BB45-4354-9CB4-B7817DAEA26F}"/>
+                <a16:creationId xmlns:a16="http://schemas.microsoft.com/office/drawing/2014/main" id="{1A538DE7-2E25-4C09-B8B3-180B120B0E1D}"/>
               </a:ext>
             </a:extLst>
           </p:cNvPr>
@@ -5192,7 +5256,7 @@
           <p:cNvPr id="11" name="s13-takeaway">
             <a:extLst xmlns:a="http://schemas.openxmlformats.org/drawingml/2006/main">
               <a:ext uri="{FF2B5EF4-FFF2-40B4-BE49-F238E27FC236}">
-                <a16:creationId xmlns:a16="http://schemas.microsoft.com/office/drawing/2014/main" id="{535B23E8-E919-43EC-821E-DCA6409D6A43}"/>
+                <a16:creationId xmlns:a16="http://schemas.microsoft.com/office/drawing/2014/main" id="{23E2FDCD-2990-40C3-A272-F3D70D8BE650}"/>
               </a:ext>
             </a:extLst>
           </p:cNvPr>
@@ -5248,7 +5312,7 @@
     </p:spTree>
     <p:extLst>
       <p:ext uri="{BB962C8B-B14F-4D97-AF65-F5344CB8AC3E}">
-        <p14:creationId xmlns:p14="http://schemas.microsoft.com/office/powerpoint/2010/main" val="170556421"/>
+        <p14:creationId xmlns:p14="http://schemas.microsoft.com/office/powerpoint/2010/main" val="1105296292"/>
       </p:ext>
     </p:extLst>
   </p:cSld>
@@ -5279,7 +5343,7 @@
           <p:cNvPr id="1" name="s2-rule">
             <a:extLst xmlns:a="http://schemas.openxmlformats.org/drawingml/2006/main">
               <a:ext uri="{FF2B5EF4-FFF2-40B4-BE49-F238E27FC236}">
-                <a16:creationId xmlns:a16="http://schemas.microsoft.com/office/drawing/2014/main" id="{E77094EF-BDD2-44BF-AE8E-014700740A84}"/>
+                <a16:creationId xmlns:a16="http://schemas.microsoft.com/office/drawing/2014/main" id="{5BF69123-8DF5-4585-80B5-4130A5CB2B13}"/>
               </a:ext>
             </a:extLst>
           </p:cNvPr>
@@ -5312,7 +5376,7 @@
           <p:cNvPr id="2" name="s2-eyebrow">
             <a:extLst xmlns:a="http://schemas.openxmlformats.org/drawingml/2006/main">
               <a:ext uri="{FF2B5EF4-FFF2-40B4-BE49-F238E27FC236}">
-                <a16:creationId xmlns:a16="http://schemas.microsoft.com/office/drawing/2014/main" id="{55B8A323-5A15-41C5-B84B-BCAD2B588214}"/>
+                <a16:creationId xmlns:a16="http://schemas.microsoft.com/office/drawing/2014/main" id="{5AA45E16-51AE-4062-AD8C-33D18967C2B1}"/>
               </a:ext>
             </a:extLst>
           </p:cNvPr>
@@ -5370,7 +5434,7 @@
           <p:cNvPr id="3" name="s2-title">
             <a:extLst xmlns:a="http://schemas.openxmlformats.org/drawingml/2006/main">
               <a:ext uri="{FF2B5EF4-FFF2-40B4-BE49-F238E27FC236}">
-                <a16:creationId xmlns:a16="http://schemas.microsoft.com/office/drawing/2014/main" id="{01210B77-ABC8-4BD8-BD81-9FB4E4377F3B}"/>
+                <a16:creationId xmlns:a16="http://schemas.microsoft.com/office/drawing/2014/main" id="{356981C5-3D54-41E1-8CB2-EA37C47BD3DC}"/>
               </a:ext>
             </a:extLst>
           </p:cNvPr>
@@ -5418,7 +5482,7 @@
                 <a:ea typeface="PingFang SC"/>
                 <a:cs typeface="PingFang SC"/>
               </a:rPr>
-              <a:t>学完这一节，你能完成这些判断与行动</a:t>
+              <a:t>企业知识与 AIGC：4项学习结果</a:t>
             </a:r>
           </a:p>
         </p:txBody>
@@ -5428,7 +5492,7 @@
           <p:cNvPr id="4" name="s2-footer">
             <a:extLst xmlns:a="http://schemas.openxmlformats.org/drawingml/2006/main">
               <a:ext uri="{FF2B5EF4-FFF2-40B4-BE49-F238E27FC236}">
-                <a16:creationId xmlns:a16="http://schemas.microsoft.com/office/drawing/2014/main" id="{B540B5CB-3336-4BC3-8388-BE2FBD8BD15E}"/>
+                <a16:creationId xmlns:a16="http://schemas.microsoft.com/office/drawing/2014/main" id="{775EB4BD-0342-4E4C-9881-9A874BA11F3C}"/>
               </a:ext>
             </a:extLst>
           </p:cNvPr>
@@ -5459,7 +5523,7 @@
           <p:cNvPr id="5" name="s2-identity">
             <a:extLst xmlns:a="http://schemas.openxmlformats.org/drawingml/2006/main">
               <a:ext uri="{FF2B5EF4-FFF2-40B4-BE49-F238E27FC236}">
-                <a16:creationId xmlns:a16="http://schemas.microsoft.com/office/drawing/2014/main" id="{78F6A3DA-700F-4D24-BF97-770F334C2BE0}"/>
+                <a16:creationId xmlns:a16="http://schemas.microsoft.com/office/drawing/2014/main" id="{DC413BC0-E03D-49AC-BF31-9170861B4BA2}"/>
               </a:ext>
             </a:extLst>
           </p:cNvPr>
@@ -5517,7 +5581,7 @@
           <p:cNvPr id="6" name="objective-1">
             <a:extLst xmlns:a="http://schemas.openxmlformats.org/drawingml/2006/main">
               <a:ext uri="{FF2B5EF4-FFF2-40B4-BE49-F238E27FC236}">
-                <a16:creationId xmlns:a16="http://schemas.microsoft.com/office/drawing/2014/main" id="{E3D55220-5318-4DBC-8513-E0C54A494848}"/>
+                <a16:creationId xmlns:a16="http://schemas.microsoft.com/office/drawing/2014/main" id="{FB5AE14D-03D0-4644-8528-D3E44E284C97}"/>
               </a:ext>
             </a:extLst>
           </p:cNvPr>
@@ -5604,7 +5668,7 @@
           <p:cNvPr id="7" name="objective-2">
             <a:extLst xmlns:a="http://schemas.openxmlformats.org/drawingml/2006/main">
               <a:ext uri="{FF2B5EF4-FFF2-40B4-BE49-F238E27FC236}">
-                <a16:creationId xmlns:a16="http://schemas.microsoft.com/office/drawing/2014/main" id="{61182188-C56F-46C7-94C6-39303F970C5C}"/>
+                <a16:creationId xmlns:a16="http://schemas.microsoft.com/office/drawing/2014/main" id="{EEDBDCDB-C6C5-4A5E-965F-B6985F3E589A}"/>
               </a:ext>
             </a:extLst>
           </p:cNvPr>
@@ -5691,7 +5755,7 @@
           <p:cNvPr id="8" name="objective-3">
             <a:extLst xmlns:a="http://schemas.openxmlformats.org/drawingml/2006/main">
               <a:ext uri="{FF2B5EF4-FFF2-40B4-BE49-F238E27FC236}">
-                <a16:creationId xmlns:a16="http://schemas.microsoft.com/office/drawing/2014/main" id="{DBD1B50C-74A0-4785-A0F8-B68FC4807D99}"/>
+                <a16:creationId xmlns:a16="http://schemas.microsoft.com/office/drawing/2014/main" id="{E3942D06-ECC4-417E-8E86-6146E4651025}"/>
               </a:ext>
             </a:extLst>
           </p:cNvPr>
@@ -5778,7 +5842,7 @@
           <p:cNvPr id="9" name="objective-4">
             <a:extLst xmlns:a="http://schemas.openxmlformats.org/drawingml/2006/main">
               <a:ext uri="{FF2B5EF4-FFF2-40B4-BE49-F238E27FC236}">
-                <a16:creationId xmlns:a16="http://schemas.microsoft.com/office/drawing/2014/main" id="{1F5D98D5-A29F-409D-AAEA-A9189DAB5065}"/>
+                <a16:creationId xmlns:a16="http://schemas.microsoft.com/office/drawing/2014/main" id="{DA5B358B-4129-4FBB-8D8F-11C07818734A}"/>
               </a:ext>
             </a:extLst>
           </p:cNvPr>
@@ -5802,7 +5866,7 @@
           </a:solidFill>
           <a:ln xmlns:a="http://schemas.openxmlformats.org/drawingml/2006/main" w="19050">
             <a:solidFill>
-              <a:srgbClr val="E5783F"/>
+              <a:srgbClr val="9A3F16"/>
             </a:solidFill>
             <a:prstDash val="solid"/>
           </a:ln>
@@ -5863,7 +5927,7 @@
     </p:spTree>
     <p:extLst>
       <p:ext uri="{BB962C8B-B14F-4D97-AF65-F5344CB8AC3E}">
-        <p14:creationId xmlns:p14="http://schemas.microsoft.com/office/powerpoint/2010/main" val="1160543837"/>
+        <p14:creationId xmlns:p14="http://schemas.microsoft.com/office/powerpoint/2010/main" val="1759306439"/>
       </p:ext>
     </p:extLst>
   </p:cSld>
@@ -5894,7 +5958,7 @@
           <p:cNvPr id="1" name="s3-rule">
             <a:extLst xmlns:a="http://schemas.openxmlformats.org/drawingml/2006/main">
               <a:ext uri="{FF2B5EF4-FFF2-40B4-BE49-F238E27FC236}">
-                <a16:creationId xmlns:a16="http://schemas.microsoft.com/office/drawing/2014/main" id="{EB34C7E0-5443-4079-B7A2-2D85A65C424A}"/>
+                <a16:creationId xmlns:a16="http://schemas.microsoft.com/office/drawing/2014/main" id="{507C7F90-F170-4CE7-85F8-A6DF31FC15AC}"/>
               </a:ext>
             </a:extLst>
           </p:cNvPr>
@@ -5927,7 +5991,7 @@
           <p:cNvPr id="2" name="s3-eyebrow">
             <a:extLst xmlns:a="http://schemas.openxmlformats.org/drawingml/2006/main">
               <a:ext uri="{FF2B5EF4-FFF2-40B4-BE49-F238E27FC236}">
-                <a16:creationId xmlns:a16="http://schemas.microsoft.com/office/drawing/2014/main" id="{D3ECD674-B0B9-49FD-85E2-9968D9067A4B}"/>
+                <a16:creationId xmlns:a16="http://schemas.microsoft.com/office/drawing/2014/main" id="{F33E6140-A9D2-475C-92DE-319DD513CA99}"/>
               </a:ext>
             </a:extLst>
           </p:cNvPr>
@@ -5985,7 +6049,7 @@
           <p:cNvPr id="3" name="s3-title">
             <a:extLst xmlns:a="http://schemas.openxmlformats.org/drawingml/2006/main">
               <a:ext uri="{FF2B5EF4-FFF2-40B4-BE49-F238E27FC236}">
-                <a16:creationId xmlns:a16="http://schemas.microsoft.com/office/drawing/2014/main" id="{57680DB7-0275-48BE-8A93-857E029A1DF1}"/>
+                <a16:creationId xmlns:a16="http://schemas.microsoft.com/office/drawing/2014/main" id="{FFF090C8-ED3E-4A05-BE1C-E7E5D6BDAF70}"/>
               </a:ext>
             </a:extLst>
           </p:cNvPr>
@@ -6043,7 +6107,7 @@
           <p:cNvPr id="4" name="s3-footer">
             <a:extLst xmlns:a="http://schemas.openxmlformats.org/drawingml/2006/main">
               <a:ext uri="{FF2B5EF4-FFF2-40B4-BE49-F238E27FC236}">
-                <a16:creationId xmlns:a16="http://schemas.microsoft.com/office/drawing/2014/main" id="{E5BAE6D9-9979-478C-85F9-F2159A135097}"/>
+                <a16:creationId xmlns:a16="http://schemas.microsoft.com/office/drawing/2014/main" id="{46ED85A1-8E0F-4C30-A930-8F6C2C8AD0ED}"/>
               </a:ext>
             </a:extLst>
           </p:cNvPr>
@@ -6074,7 +6138,7 @@
           <p:cNvPr id="5" name="s3-identity">
             <a:extLst xmlns:a="http://schemas.openxmlformats.org/drawingml/2006/main">
               <a:ext uri="{FF2B5EF4-FFF2-40B4-BE49-F238E27FC236}">
-                <a16:creationId xmlns:a16="http://schemas.microsoft.com/office/drawing/2014/main" id="{CBFBC44B-0FDA-4F8C-9E6D-02A541B834B8}"/>
+                <a16:creationId xmlns:a16="http://schemas.microsoft.com/office/drawing/2014/main" id="{E66CDADC-B69D-49EF-8BDA-715A43777153}"/>
               </a:ext>
             </a:extLst>
           </p:cNvPr>
@@ -6132,7 +6196,7 @@
           <p:cNvPr id="6" name="core-no-0">
             <a:extLst xmlns:a="http://schemas.openxmlformats.org/drawingml/2006/main">
               <a:ext uri="{FF2B5EF4-FFF2-40B4-BE49-F238E27FC236}">
-                <a16:creationId xmlns:a16="http://schemas.microsoft.com/office/drawing/2014/main" id="{FC300DA4-1A4F-4963-9727-C15977C2B735}"/>
+                <a16:creationId xmlns:a16="http://schemas.microsoft.com/office/drawing/2014/main" id="{B21AAA52-1D12-481F-9A8F-77754BB38684}"/>
               </a:ext>
             </a:extLst>
           </p:cNvPr>
@@ -6164,7 +6228,7 @@
             <a:pPr algn="l">
               <a:defRPr sz="2250" b="1">
                 <a:solidFill>
-                  <a:srgbClr val="E5783F"/>
+                  <a:srgbClr val="9A3F16"/>
                 </a:solidFill>
                 <a:latin typeface="PingFang SC"/>
                 <a:ea typeface="PingFang SC"/>
@@ -6174,7 +6238,7 @@
             <a:r>
               <a:rPr sz="2250" b="1">
                 <a:solidFill>
-                  <a:srgbClr val="E5783F"/>
+                  <a:srgbClr val="9A3F16"/>
                 </a:solidFill>
                 <a:latin typeface="PingFang SC"/>
                 <a:ea typeface="PingFang SC"/>
@@ -6190,7 +6254,7 @@
           <p:cNvPr id="7" name="core-label-0">
             <a:extLst xmlns:a="http://schemas.openxmlformats.org/drawingml/2006/main">
               <a:ext uri="{FF2B5EF4-FFF2-40B4-BE49-F238E27FC236}">
-                <a16:creationId xmlns:a16="http://schemas.microsoft.com/office/drawing/2014/main" id="{0FD446FB-F999-4F8A-9A18-24519FF38050}"/>
+                <a16:creationId xmlns:a16="http://schemas.microsoft.com/office/drawing/2014/main" id="{E2997136-E5E9-4E6E-8530-BF3B1144A800}"/>
               </a:ext>
             </a:extLst>
           </p:cNvPr>
@@ -6248,7 +6312,7 @@
           <p:cNvPr id="8" name="core-body-0">
             <a:extLst xmlns:a="http://schemas.openxmlformats.org/drawingml/2006/main">
               <a:ext uri="{FF2B5EF4-FFF2-40B4-BE49-F238E27FC236}">
-                <a16:creationId xmlns:a16="http://schemas.microsoft.com/office/drawing/2014/main" id="{4D9A3954-E3C7-43E9-89DF-F5E9AEB9F0D5}"/>
+                <a16:creationId xmlns:a16="http://schemas.microsoft.com/office/drawing/2014/main" id="{21F3071A-2EBC-4958-81C3-DFA5BC986DA8}"/>
               </a:ext>
             </a:extLst>
           </p:cNvPr>
@@ -6272,7 +6336,7 @@
           </a:solidFill>
           <a:ln xmlns:a="http://schemas.openxmlformats.org/drawingml/2006/main" w="19050">
             <a:solidFill>
-              <a:srgbClr val="E5783F"/>
+              <a:srgbClr val="9A3F16"/>
             </a:solidFill>
             <a:prstDash val="solid"/>
           </a:ln>
@@ -6302,7 +6366,7 @@
                 <a:ea typeface="PingFang SC"/>
                 <a:cs typeface="PingFang SC"/>
               </a:rPr>
-              <a:t>第一步是接收和规范化资料。文字文档保留原文件和页码，扫描件经过识别后要与图像对照，会议录音转写后保留时间戳与说话人待确认标记。系统应记录资料所有者、密级、创建时间和接入方式…</a:t>
+              <a:t>第一步是接收和规范化资料；文字文档保留原文件和页码；扫描件经过识别后要与图像对照；会议录音转写后保留时间戳与说话人待确认标记；系统应记录资料所有者、密级、创建时间和接入方式</a:t>
             </a:r>
           </a:p>
         </p:txBody>
@@ -6312,7 +6376,7 @@
           <p:cNvPr id="9" name="core-no-1">
             <a:extLst xmlns:a="http://schemas.openxmlformats.org/drawingml/2006/main">
               <a:ext uri="{FF2B5EF4-FFF2-40B4-BE49-F238E27FC236}">
-                <a16:creationId xmlns:a16="http://schemas.microsoft.com/office/drawing/2014/main" id="{B0783174-2488-446E-B294-0B58D204A52F}"/>
+                <a16:creationId xmlns:a16="http://schemas.microsoft.com/office/drawing/2014/main" id="{7CA37709-719A-43EA-BD17-28A06C396F74}"/>
               </a:ext>
             </a:extLst>
           </p:cNvPr>
@@ -6344,7 +6408,7 @@
             <a:pPr algn="l">
               <a:defRPr sz="2250" b="1">
                 <a:solidFill>
-                  <a:srgbClr val="E5783F"/>
+                  <a:srgbClr val="9A3F16"/>
                 </a:solidFill>
                 <a:latin typeface="PingFang SC"/>
                 <a:ea typeface="PingFang SC"/>
@@ -6354,7 +6418,7 @@
             <a:r>
               <a:rPr sz="2250" b="1">
                 <a:solidFill>
-                  <a:srgbClr val="E5783F"/>
+                  <a:srgbClr val="9A3F16"/>
                 </a:solidFill>
                 <a:latin typeface="PingFang SC"/>
                 <a:ea typeface="PingFang SC"/>
@@ -6370,7 +6434,7 @@
           <p:cNvPr id="10" name="core-body-1">
             <a:extLst xmlns:a="http://schemas.openxmlformats.org/drawingml/2006/main">
               <a:ext uri="{FF2B5EF4-FFF2-40B4-BE49-F238E27FC236}">
-                <a16:creationId xmlns:a16="http://schemas.microsoft.com/office/drawing/2014/main" id="{4BF1FCC2-2D82-4718-930C-DC47E0542792}"/>
+                <a16:creationId xmlns:a16="http://schemas.microsoft.com/office/drawing/2014/main" id="{D3346AEE-1BE3-4504-9CA8-BAE464D59BD4}"/>
               </a:ext>
             </a:extLst>
           </p:cNvPr>
@@ -6424,7 +6488,7 @@
                 <a:ea typeface="PingFang SC"/>
                 <a:cs typeface="PingFang SC"/>
               </a:rPr>
-              <a:t>第二步是提取结构。会议材料可抽取议题、已确认决策、未决问题、行动项、负责人和截止日期；制度文件可拆成适用对象、条件、规则、例外和办理步骤；销售资料可拆成产品事实、可公开卖点、限制条件和批准用语…</a:t>
+              <a:t>第二步是提取结构，会议材料可抽取议题、已确认决策、未决问题、行动项、负责人和截止日期；制度文件可拆成适用对象、条件、规则、例外和办理步骤；销售资料可拆成产品事实、可公开卖点、限制条件和批准用语</a:t>
             </a:r>
           </a:p>
         </p:txBody>
@@ -6434,7 +6498,7 @@
           <p:cNvPr id="11" name="core-no-2">
             <a:extLst xmlns:a="http://schemas.openxmlformats.org/drawingml/2006/main">
               <a:ext uri="{FF2B5EF4-FFF2-40B4-BE49-F238E27FC236}">
-                <a16:creationId xmlns:a16="http://schemas.microsoft.com/office/drawing/2014/main" id="{23180992-C884-4475-9D37-3BD6AA0C26DB}"/>
+                <a16:creationId xmlns:a16="http://schemas.microsoft.com/office/drawing/2014/main" id="{4C536350-F831-4D73-B898-F165286C5109}"/>
               </a:ext>
             </a:extLst>
           </p:cNvPr>
@@ -6466,7 +6530,7 @@
             <a:pPr algn="l">
               <a:defRPr sz="2250" b="1">
                 <a:solidFill>
-                  <a:srgbClr val="E5783F"/>
+                  <a:srgbClr val="9A3F16"/>
                 </a:solidFill>
                 <a:latin typeface="PingFang SC"/>
                 <a:ea typeface="PingFang SC"/>
@@ -6476,7 +6540,7 @@
             <a:r>
               <a:rPr sz="2250" b="1">
                 <a:solidFill>
-                  <a:srgbClr val="E5783F"/>
+                  <a:srgbClr val="9A3F16"/>
                 </a:solidFill>
                 <a:latin typeface="PingFang SC"/>
                 <a:ea typeface="PingFang SC"/>
@@ -6492,7 +6556,7 @@
           <p:cNvPr id="12" name="core-body-2">
             <a:extLst xmlns:a="http://schemas.openxmlformats.org/drawingml/2006/main">
               <a:ext uri="{FF2B5EF4-FFF2-40B4-BE49-F238E27FC236}">
-                <a16:creationId xmlns:a16="http://schemas.microsoft.com/office/drawing/2014/main" id="{F40F4ECD-3150-4E54-B21B-3C20258F6E46}"/>
+                <a16:creationId xmlns:a16="http://schemas.microsoft.com/office/drawing/2014/main" id="{39952B31-FF34-4D2C-99CD-00444F43C97F}"/>
               </a:ext>
             </a:extLst>
           </p:cNvPr>
@@ -6546,7 +6610,7 @@
                 <a:ea typeface="PingFang SC"/>
                 <a:cs typeface="PingFang SC"/>
               </a:rPr>
-              <a:t>第三步是核验。模型可能把讨论中的建议写成正式决定，也可能把多个版本拼接。资料责任人应检查事实、引用和状态，确认后才进入可检索知识库。未确认的会议转写、草稿和外部网页应明确标为候选信息…</a:t>
+              <a:t>第三步是核验，模型可能把讨论中的建议写成正式决定；也可能把多个版本拼接；资料责任人应检查事实、引用和状态；确认后才进入可检索知识库；未确认的会议转写、草稿和外部网页应明确标为候选信息</a:t>
             </a:r>
           </a:p>
         </p:txBody>
@@ -6556,7 +6620,7 @@
           <p:cNvPr id="13" name="s3-takeaway-rule">
             <a:extLst xmlns:a="http://schemas.openxmlformats.org/drawingml/2006/main">
               <a:ext uri="{FF2B5EF4-FFF2-40B4-BE49-F238E27FC236}">
-                <a16:creationId xmlns:a16="http://schemas.microsoft.com/office/drawing/2014/main" id="{10B4C12E-8026-4572-A4FD-186F1289EC51}"/>
+                <a16:creationId xmlns:a16="http://schemas.microsoft.com/office/drawing/2014/main" id="{3EE1380B-7A9A-4E16-ABCC-0FD0435CDF6D}"/>
               </a:ext>
             </a:extLst>
           </p:cNvPr>
@@ -6589,7 +6653,7 @@
           <p:cNvPr id="14" name="s3-takeaway">
             <a:extLst xmlns:a="http://schemas.openxmlformats.org/drawingml/2006/main">
               <a:ext uri="{FF2B5EF4-FFF2-40B4-BE49-F238E27FC236}">
-                <a16:creationId xmlns:a16="http://schemas.microsoft.com/office/drawing/2014/main" id="{547E7B0D-017D-4D69-BF12-69D97F83AA26}"/>
+                <a16:creationId xmlns:a16="http://schemas.microsoft.com/office/drawing/2014/main" id="{A7BCD38E-76EB-4361-ADF1-ED27A95A4FEF}"/>
               </a:ext>
             </a:extLst>
           </p:cNvPr>
@@ -6645,7 +6709,7 @@
     </p:spTree>
     <p:extLst>
       <p:ext uri="{BB962C8B-B14F-4D97-AF65-F5344CB8AC3E}">
-        <p14:creationId xmlns:p14="http://schemas.microsoft.com/office/powerpoint/2010/main" val="1933091386"/>
+        <p14:creationId xmlns:p14="http://schemas.microsoft.com/office/powerpoint/2010/main" val="846843238"/>
       </p:ext>
     </p:extLst>
   </p:cSld>
@@ -6676,7 +6740,7 @@
           <p:cNvPr id="1" name="s4-rule">
             <a:extLst xmlns:a="http://schemas.openxmlformats.org/drawingml/2006/main">
               <a:ext uri="{FF2B5EF4-FFF2-40B4-BE49-F238E27FC236}">
-                <a16:creationId xmlns:a16="http://schemas.microsoft.com/office/drawing/2014/main" id="{6B0D62EE-FEFB-453E-8993-99498282A433}"/>
+                <a16:creationId xmlns:a16="http://schemas.microsoft.com/office/drawing/2014/main" id="{1967646A-BA02-41DE-9023-0CBAA0071E72}"/>
               </a:ext>
             </a:extLst>
           </p:cNvPr>
@@ -6709,7 +6773,7 @@
           <p:cNvPr id="2" name="s4-eyebrow">
             <a:extLst xmlns:a="http://schemas.openxmlformats.org/drawingml/2006/main">
               <a:ext uri="{FF2B5EF4-FFF2-40B4-BE49-F238E27FC236}">
-                <a16:creationId xmlns:a16="http://schemas.microsoft.com/office/drawing/2014/main" id="{EE1415B4-6B0D-4C6C-AA50-364CB183EDD0}"/>
+                <a16:creationId xmlns:a16="http://schemas.microsoft.com/office/drawing/2014/main" id="{1DB66397-8756-4DDD-AC2D-CBCB94D8ABAB}"/>
               </a:ext>
             </a:extLst>
           </p:cNvPr>
@@ -6767,7 +6831,7 @@
           <p:cNvPr id="3" name="s4-title">
             <a:extLst xmlns:a="http://schemas.openxmlformats.org/drawingml/2006/main">
               <a:ext uri="{FF2B5EF4-FFF2-40B4-BE49-F238E27FC236}">
-                <a16:creationId xmlns:a16="http://schemas.microsoft.com/office/drawing/2014/main" id="{3EBC388E-EDF4-43C5-A3FE-7B4B5FBA9EB2}"/>
+                <a16:creationId xmlns:a16="http://schemas.microsoft.com/office/drawing/2014/main" id="{6EB9835B-A620-4475-8DE3-64A3E9E6AF49}"/>
               </a:ext>
             </a:extLst>
           </p:cNvPr>
@@ -6792,7 +6856,7 @@
         </p:spPr>
         <p:txBody>
           <a:bodyPr xmlns:a="http://schemas.openxmlformats.org/drawingml/2006/main" lIns="0" tIns="0" rIns="0" bIns="0" anchor="ctr">
-            <a:normAutofit fontScale="74187"/>
+            <a:normAutofit fontScale="100000"/>
           </a:bodyPr>
           <a:lstStyle xmlns:a="http://schemas.openxmlformats.org/drawingml/2006/main"/>
           <a:p xmlns:a="http://schemas.openxmlformats.org/drawingml/2006/main">
@@ -6815,7 +6879,7 @@
                 <a:ea typeface="PingFang SC"/>
                 <a:cs typeface="PingFang SC"/>
               </a:rPr>
-              <a:t>用户提问时，系统先识别身份与用途，再从其有权访问且仍有效的资料中检索</a:t>
+              <a:t>问答必须先校验身份，再检索有效资料</a:t>
             </a:r>
           </a:p>
         </p:txBody>
@@ -6825,7 +6889,7 @@
           <p:cNvPr id="4" name="s4-footer">
             <a:extLst xmlns:a="http://schemas.openxmlformats.org/drawingml/2006/main">
               <a:ext uri="{FF2B5EF4-FFF2-40B4-BE49-F238E27FC236}">
-                <a16:creationId xmlns:a16="http://schemas.microsoft.com/office/drawing/2014/main" id="{DF73B81A-2CB2-4C16-A18C-1575B5B2CD0A}"/>
+                <a16:creationId xmlns:a16="http://schemas.microsoft.com/office/drawing/2014/main" id="{F0A05FFC-B5C4-4435-8133-51A5FAB8157B}"/>
               </a:ext>
             </a:extLst>
           </p:cNvPr>
@@ -6856,7 +6920,7 @@
           <p:cNvPr id="5" name="s4-identity">
             <a:extLst xmlns:a="http://schemas.openxmlformats.org/drawingml/2006/main">
               <a:ext uri="{FF2B5EF4-FFF2-40B4-BE49-F238E27FC236}">
-                <a16:creationId xmlns:a16="http://schemas.microsoft.com/office/drawing/2014/main" id="{B5043715-8371-4E1E-A51A-60FDA1502CE8}"/>
+                <a16:creationId xmlns:a16="http://schemas.microsoft.com/office/drawing/2014/main" id="{84F2DB9A-A4E9-40E6-8626-ECB8677DFD90}"/>
               </a:ext>
             </a:extLst>
           </p:cNvPr>
@@ -6914,7 +6978,7 @@
           <p:cNvPr id="6" name="core-no-0">
             <a:extLst xmlns:a="http://schemas.openxmlformats.org/drawingml/2006/main">
               <a:ext uri="{FF2B5EF4-FFF2-40B4-BE49-F238E27FC236}">
-                <a16:creationId xmlns:a16="http://schemas.microsoft.com/office/drawing/2014/main" id="{E1D9BCC5-7317-4B32-835C-A4DD10209820}"/>
+                <a16:creationId xmlns:a16="http://schemas.microsoft.com/office/drawing/2014/main" id="{F13F6118-A563-403A-80EB-2798B3D218A5}"/>
               </a:ext>
             </a:extLst>
           </p:cNvPr>
@@ -6946,7 +7010,7 @@
             <a:pPr algn="l">
               <a:defRPr sz="2250" b="1">
                 <a:solidFill>
-                  <a:srgbClr val="E5783F"/>
+                  <a:srgbClr val="9A3F16"/>
                 </a:solidFill>
                 <a:latin typeface="PingFang SC"/>
                 <a:ea typeface="PingFang SC"/>
@@ -6956,7 +7020,7 @@
             <a:r>
               <a:rPr sz="2250" b="1">
                 <a:solidFill>
-                  <a:srgbClr val="E5783F"/>
+                  <a:srgbClr val="9A3F16"/>
                 </a:solidFill>
                 <a:latin typeface="PingFang SC"/>
                 <a:ea typeface="PingFang SC"/>
@@ -6972,7 +7036,7 @@
           <p:cNvPr id="7" name="core-label-0">
             <a:extLst xmlns:a="http://schemas.openxmlformats.org/drawingml/2006/main">
               <a:ext uri="{FF2B5EF4-FFF2-40B4-BE49-F238E27FC236}">
-                <a16:creationId xmlns:a16="http://schemas.microsoft.com/office/drawing/2014/main" id="{2D0CD6C5-C242-46F6-97C7-E983D3122103}"/>
+                <a16:creationId xmlns:a16="http://schemas.microsoft.com/office/drawing/2014/main" id="{C09CDF56-659F-4475-B5D4-0AE468E1A9AB}"/>
               </a:ext>
             </a:extLst>
           </p:cNvPr>
@@ -7030,7 +7094,7 @@
           <p:cNvPr id="8" name="core-body-0">
             <a:extLst xmlns:a="http://schemas.openxmlformats.org/drawingml/2006/main">
               <a:ext uri="{FF2B5EF4-FFF2-40B4-BE49-F238E27FC236}">
-                <a16:creationId xmlns:a16="http://schemas.microsoft.com/office/drawing/2014/main" id="{A993D17F-F17F-4385-885D-FCB8D616B725}"/>
+                <a16:creationId xmlns:a16="http://schemas.microsoft.com/office/drawing/2014/main" id="{1C129434-902E-47B4-A969-3989F56B6B53}"/>
               </a:ext>
             </a:extLst>
           </p:cNvPr>
@@ -7054,7 +7118,7 @@
           </a:solidFill>
           <a:ln xmlns:a="http://schemas.openxmlformats.org/drawingml/2006/main" w="19050">
             <a:solidFill>
-              <a:srgbClr val="E5783F"/>
+              <a:srgbClr val="9A3F16"/>
             </a:solidFill>
             <a:prstDash val="solid"/>
           </a:ln>
@@ -7084,7 +7148,7 @@
                 <a:ea typeface="PingFang SC"/>
                 <a:cs typeface="PingFang SC"/>
               </a:rPr>
-              <a:t>用户提问时，系统先识别身份与用途，再从其有权访问且仍有效的资料中检索。生成回答应附文档名称、版本或日期以及具体位置，必要时直接展示支持结论的短句。若检索结果互相冲突、证据不足或问题超出资料范围…</a:t>
+              <a:t>用户提问时，系统先识别身份与用途；再从其有权访问且仍有效的资料中检索；生成回答应附文档名称、版本或日期以及具体位置；必要时直接展示支持结论的短句；若检索结果互相冲突、证据不足或问题超出资料范围</a:t>
             </a:r>
           </a:p>
         </p:txBody>
@@ -7094,7 +7158,7 @@
           <p:cNvPr id="9" name="core-no-1">
             <a:extLst xmlns:a="http://schemas.openxmlformats.org/drawingml/2006/main">
               <a:ext uri="{FF2B5EF4-FFF2-40B4-BE49-F238E27FC236}">
-                <a16:creationId xmlns:a16="http://schemas.microsoft.com/office/drawing/2014/main" id="{B6ED313D-B311-4348-8274-8BBB69A7682B}"/>
+                <a16:creationId xmlns:a16="http://schemas.microsoft.com/office/drawing/2014/main" id="{83170D6F-6946-480F-9822-3BD55AAC4ADC}"/>
               </a:ext>
             </a:extLst>
           </p:cNvPr>
@@ -7126,7 +7190,7 @@
             <a:pPr algn="l">
               <a:defRPr sz="2250" b="1">
                 <a:solidFill>
-                  <a:srgbClr val="E5783F"/>
+                  <a:srgbClr val="9A3F16"/>
                 </a:solidFill>
                 <a:latin typeface="PingFang SC"/>
                 <a:ea typeface="PingFang SC"/>
@@ -7136,7 +7200,7 @@
             <a:r>
               <a:rPr sz="2250" b="1">
                 <a:solidFill>
-                  <a:srgbClr val="E5783F"/>
+                  <a:srgbClr val="9A3F16"/>
                 </a:solidFill>
                 <a:latin typeface="PingFang SC"/>
                 <a:ea typeface="PingFang SC"/>
@@ -7152,7 +7216,7 @@
           <p:cNvPr id="10" name="core-body-1">
             <a:extLst xmlns:a="http://schemas.openxmlformats.org/drawingml/2006/main">
               <a:ext uri="{FF2B5EF4-FFF2-40B4-BE49-F238E27FC236}">
-                <a16:creationId xmlns:a16="http://schemas.microsoft.com/office/drawing/2014/main" id="{99F4ACC7-6D35-47B7-8EBD-8EA2C8D785D3}"/>
+                <a16:creationId xmlns:a16="http://schemas.microsoft.com/office/drawing/2014/main" id="{A3A03615-6176-42C8-8BEF-65D841D3F49F}"/>
               </a:ext>
             </a:extLst>
           </p:cNvPr>
@@ -7206,7 +7270,7 @@
                 <a:ea typeface="PingFang SC"/>
                 <a:cs typeface="PingFang SC"/>
               </a:rPr>
-              <a:t>引用质量至少包含三层检查：引用文件真实存在；引用位置确实包含相关内容；内容能够支持回答中的结论。只有第一层通过，仍可能出现“有引用的错误答案”。对于数字、价格、承诺、政策与合同条款…</a:t>
+              <a:t>引用质量至少包含三层检查；引用文件真实存在，引用位置确实包含相关内容；内容能够支持回答中的结论；只有第一层通过，仍可能出现“有引用的错误答案”；对于数字、价格、承诺、政策与合同条款</a:t>
             </a:r>
           </a:p>
         </p:txBody>
@@ -7216,7 +7280,7 @@
           <p:cNvPr id="11" name="s4-takeaway-rule">
             <a:extLst xmlns:a="http://schemas.openxmlformats.org/drawingml/2006/main">
               <a:ext uri="{FF2B5EF4-FFF2-40B4-BE49-F238E27FC236}">
-                <a16:creationId xmlns:a16="http://schemas.microsoft.com/office/drawing/2014/main" id="{D16383C8-1383-4CBA-8998-3A6F038B4BFE}"/>
+                <a16:creationId xmlns:a16="http://schemas.microsoft.com/office/drawing/2014/main" id="{2691497D-2B23-43C3-82FC-EE48B27BFD8E}"/>
               </a:ext>
             </a:extLst>
           </p:cNvPr>
@@ -7249,7 +7313,7 @@
           <p:cNvPr id="12" name="s4-takeaway">
             <a:extLst xmlns:a="http://schemas.openxmlformats.org/drawingml/2006/main">
               <a:ext uri="{FF2B5EF4-FFF2-40B4-BE49-F238E27FC236}">
-                <a16:creationId xmlns:a16="http://schemas.microsoft.com/office/drawing/2014/main" id="{64F30904-B962-454F-83F5-549D2ED7BAF6}"/>
+                <a16:creationId xmlns:a16="http://schemas.microsoft.com/office/drawing/2014/main" id="{5B7FC470-A39D-44FD-AB06-C2967B67DF9A}"/>
               </a:ext>
             </a:extLst>
           </p:cNvPr>
@@ -7297,7 +7361,7 @@
                 <a:ea typeface="PingFang SC"/>
                 <a:cs typeface="PingFang SC"/>
               </a:rPr>
-              <a:t>用户提问时，系统先识别身份与用途，再从其有权访问且仍有效的资料中检索</a:t>
+              <a:t>问答必须先校验身份，再检索有效资料</a:t>
             </a:r>
           </a:p>
         </p:txBody>
@@ -7305,7 +7369,7 @@
     </p:spTree>
     <p:extLst>
       <p:ext uri="{BB962C8B-B14F-4D97-AF65-F5344CB8AC3E}">
-        <p14:creationId xmlns:p14="http://schemas.microsoft.com/office/powerpoint/2010/main" val="2003028119"/>
+        <p14:creationId xmlns:p14="http://schemas.microsoft.com/office/powerpoint/2010/main" val="472581412"/>
       </p:ext>
     </p:extLst>
   </p:cSld>
@@ -7336,7 +7400,7 @@
           <p:cNvPr id="1" name="s5-rule">
             <a:extLst xmlns:a="http://schemas.openxmlformats.org/drawingml/2006/main">
               <a:ext uri="{FF2B5EF4-FFF2-40B4-BE49-F238E27FC236}">
-                <a16:creationId xmlns:a16="http://schemas.microsoft.com/office/drawing/2014/main" id="{4DA461ED-DC34-4A4E-9E17-359FD8C1F09B}"/>
+                <a16:creationId xmlns:a16="http://schemas.microsoft.com/office/drawing/2014/main" id="{FAF39A1C-7F62-4536-863D-A4874C78D92E}"/>
               </a:ext>
             </a:extLst>
           </p:cNvPr>
@@ -7369,7 +7433,7 @@
           <p:cNvPr id="2" name="s5-eyebrow">
             <a:extLst xmlns:a="http://schemas.openxmlformats.org/drawingml/2006/main">
               <a:ext uri="{FF2B5EF4-FFF2-40B4-BE49-F238E27FC236}">
-                <a16:creationId xmlns:a16="http://schemas.microsoft.com/office/drawing/2014/main" id="{813F49C9-78E0-4E46-9B40-8677EDD7C35C}"/>
+                <a16:creationId xmlns:a16="http://schemas.microsoft.com/office/drawing/2014/main" id="{AF778D96-FAD7-4D22-804F-E6F4C77A98E0}"/>
               </a:ext>
             </a:extLst>
           </p:cNvPr>
@@ -7427,7 +7491,7 @@
           <p:cNvPr id="3" name="s5-title">
             <a:extLst xmlns:a="http://schemas.openxmlformats.org/drawingml/2006/main">
               <a:ext uri="{FF2B5EF4-FFF2-40B4-BE49-F238E27FC236}">
-                <a16:creationId xmlns:a16="http://schemas.microsoft.com/office/drawing/2014/main" id="{912CDE17-E00F-4D06-98ED-905F36295FC3}"/>
+                <a16:creationId xmlns:a16="http://schemas.microsoft.com/office/drawing/2014/main" id="{5F0A6416-EE02-4317-8D3F-5342417EBD07}"/>
               </a:ext>
             </a:extLst>
           </p:cNvPr>
@@ -7452,7 +7516,7 @@
         </p:spPr>
         <p:txBody>
           <a:bodyPr xmlns:a="http://schemas.openxmlformats.org/drawingml/2006/main" lIns="0" tIns="0" rIns="0" bIns="0" anchor="ctr">
-            <a:normAutofit fontScale="86983"/>
+            <a:normAutofit fontScale="100000"/>
           </a:bodyPr>
           <a:lstStyle xmlns:a="http://schemas.openxmlformats.org/drawingml/2006/main"/>
           <a:p xmlns:a="http://schemas.openxmlformats.org/drawingml/2006/main">
@@ -7475,7 +7539,7 @@
                 <a:ea typeface="PingFang SC"/>
                 <a:cs typeface="PingFang SC"/>
               </a:rPr>
-              <a:t>知识条目应继承源文件权限，而不是进入知识库后自动对全员开放</a:t>
+              <a:t>知识条目必须继承源文件权限与有效期</a:t>
             </a:r>
           </a:p>
         </p:txBody>
@@ -7485,7 +7549,7 @@
           <p:cNvPr id="4" name="s5-footer">
             <a:extLst xmlns:a="http://schemas.openxmlformats.org/drawingml/2006/main">
               <a:ext uri="{FF2B5EF4-FFF2-40B4-BE49-F238E27FC236}">
-                <a16:creationId xmlns:a16="http://schemas.microsoft.com/office/drawing/2014/main" id="{BAD3F33D-8DEC-4307-A996-2A50D2CBB80E}"/>
+                <a16:creationId xmlns:a16="http://schemas.microsoft.com/office/drawing/2014/main" id="{820F5EAC-B362-4AA4-AE1F-9B7553993AF1}"/>
               </a:ext>
             </a:extLst>
           </p:cNvPr>
@@ -7516,7 +7580,7 @@
           <p:cNvPr id="5" name="s5-identity">
             <a:extLst xmlns:a="http://schemas.openxmlformats.org/drawingml/2006/main">
               <a:ext uri="{FF2B5EF4-FFF2-40B4-BE49-F238E27FC236}">
-                <a16:creationId xmlns:a16="http://schemas.microsoft.com/office/drawing/2014/main" id="{4EC9381F-CE34-4939-A31A-4A987F6D6FF1}"/>
+                <a16:creationId xmlns:a16="http://schemas.microsoft.com/office/drawing/2014/main" id="{E19FC407-4F2D-4186-992A-90F515AA4405}"/>
               </a:ext>
             </a:extLst>
           </p:cNvPr>
@@ -7574,7 +7638,7 @@
           <p:cNvPr id="6" name="core-no-0">
             <a:extLst xmlns:a="http://schemas.openxmlformats.org/drawingml/2006/main">
               <a:ext uri="{FF2B5EF4-FFF2-40B4-BE49-F238E27FC236}">
-                <a16:creationId xmlns:a16="http://schemas.microsoft.com/office/drawing/2014/main" id="{7B256EF4-0A16-4244-863C-A4C80808AA6D}"/>
+                <a16:creationId xmlns:a16="http://schemas.microsoft.com/office/drawing/2014/main" id="{85018D7F-9015-45B1-B658-81E00521CEF5}"/>
               </a:ext>
             </a:extLst>
           </p:cNvPr>
@@ -7606,7 +7670,7 @@
             <a:pPr algn="l">
               <a:defRPr sz="2250" b="1">
                 <a:solidFill>
-                  <a:srgbClr val="E5783F"/>
+                  <a:srgbClr val="9A3F16"/>
                 </a:solidFill>
                 <a:latin typeface="PingFang SC"/>
                 <a:ea typeface="PingFang SC"/>
@@ -7616,7 +7680,7 @@
             <a:r>
               <a:rPr sz="2250" b="1">
                 <a:solidFill>
-                  <a:srgbClr val="E5783F"/>
+                  <a:srgbClr val="9A3F16"/>
                 </a:solidFill>
                 <a:latin typeface="PingFang SC"/>
                 <a:ea typeface="PingFang SC"/>
@@ -7632,7 +7696,7 @@
           <p:cNvPr id="7" name="core-label-0">
             <a:extLst xmlns:a="http://schemas.openxmlformats.org/drawingml/2006/main">
               <a:ext uri="{FF2B5EF4-FFF2-40B4-BE49-F238E27FC236}">
-                <a16:creationId xmlns:a16="http://schemas.microsoft.com/office/drawing/2014/main" id="{1D142255-7A9F-47AF-B8C9-4C485E0D2278}"/>
+                <a16:creationId xmlns:a16="http://schemas.microsoft.com/office/drawing/2014/main" id="{A17BFF07-47E6-4B63-9A7F-5129DD12C4B3}"/>
               </a:ext>
             </a:extLst>
           </p:cNvPr>
@@ -7690,7 +7754,7 @@
           <p:cNvPr id="8" name="core-body-0">
             <a:extLst xmlns:a="http://schemas.openxmlformats.org/drawingml/2006/main">
               <a:ext uri="{FF2B5EF4-FFF2-40B4-BE49-F238E27FC236}">
-                <a16:creationId xmlns:a16="http://schemas.microsoft.com/office/drawing/2014/main" id="{C960A842-F476-4B8E-ACB3-71EB8E8C7870}"/>
+                <a16:creationId xmlns:a16="http://schemas.microsoft.com/office/drawing/2014/main" id="{300EF38A-1226-41F8-A747-1A2E3DD1D909}"/>
               </a:ext>
             </a:extLst>
           </p:cNvPr>
@@ -7714,7 +7778,7 @@
           </a:solidFill>
           <a:ln xmlns:a="http://schemas.openxmlformats.org/drawingml/2006/main" w="19050">
             <a:solidFill>
-              <a:srgbClr val="E5783F"/>
+              <a:srgbClr val="9A3F16"/>
             </a:solidFill>
             <a:prstDash val="solid"/>
           </a:ln>
@@ -7744,7 +7808,7 @@
                 <a:ea typeface="PingFang SC"/>
                 <a:cs typeface="PingFang SC"/>
               </a:rPr>
-              <a:t>知识条目应继承源文件权限，而不是进入知识库后自动对全员开放。角色权限还应结合部门、项目、地域、客户和保密义务；检索结果、摘要、导出和日志都应遵循同一规则。管理员需要定期检查权限漂移…</a:t>
+              <a:t>知识条目应继承源文件权限；而不是进入知识库后自动对全员开放；角色权限还应结合部门、项目、地域、客户和保密义务；检索结果、摘要、导出和日志都应遵循同一规则；管理员需要定期检查权限漂移</a:t>
             </a:r>
           </a:p>
         </p:txBody>
@@ -7754,7 +7818,7 @@
           <p:cNvPr id="9" name="core-no-1">
             <a:extLst xmlns:a="http://schemas.openxmlformats.org/drawingml/2006/main">
               <a:ext uri="{FF2B5EF4-FFF2-40B4-BE49-F238E27FC236}">
-                <a16:creationId xmlns:a16="http://schemas.microsoft.com/office/drawing/2014/main" id="{B4B00EBE-46FC-40AA-B084-0CBDEA324342}"/>
+                <a16:creationId xmlns:a16="http://schemas.microsoft.com/office/drawing/2014/main" id="{8316F19A-AEEC-464A-9A58-2FD33B300C49}"/>
               </a:ext>
             </a:extLst>
           </p:cNvPr>
@@ -7786,7 +7850,7 @@
             <a:pPr algn="l">
               <a:defRPr sz="2250" b="1">
                 <a:solidFill>
-                  <a:srgbClr val="E5783F"/>
+                  <a:srgbClr val="9A3F16"/>
                 </a:solidFill>
                 <a:latin typeface="PingFang SC"/>
                 <a:ea typeface="PingFang SC"/>
@@ -7796,7 +7860,7 @@
             <a:r>
               <a:rPr sz="2250" b="1">
                 <a:solidFill>
-                  <a:srgbClr val="E5783F"/>
+                  <a:srgbClr val="9A3F16"/>
                 </a:solidFill>
                 <a:latin typeface="PingFang SC"/>
                 <a:ea typeface="PingFang SC"/>
@@ -7812,7 +7876,7 @@
           <p:cNvPr id="10" name="core-body-1">
             <a:extLst xmlns:a="http://schemas.openxmlformats.org/drawingml/2006/main">
               <a:ext uri="{FF2B5EF4-FFF2-40B4-BE49-F238E27FC236}">
-                <a16:creationId xmlns:a16="http://schemas.microsoft.com/office/drawing/2014/main" id="{01A4FFE9-CD43-4FDB-BCC2-13436EDD4E61}"/>
+                <a16:creationId xmlns:a16="http://schemas.microsoft.com/office/drawing/2014/main" id="{A42B2B1E-E068-4743-9245-9CC10D2DF0C6}"/>
               </a:ext>
             </a:extLst>
           </p:cNvPr>
@@ -7866,7 +7930,7 @@
                 <a:ea typeface="PingFang SC"/>
                 <a:cs typeface="PingFang SC"/>
               </a:rPr>
-              <a:t>同一制度可能有草案、现行版和历史版。同一产品也可能因地区、客户或发布时间不同而有多个口径。系统要标出版本关系、生效时间、失效时间和替代文件。接近复审日期时通知责任人…</a:t>
+              <a:t>同一制度可能有草案、现行版和历史版；同一产品也可能因地区、客户或发布时间不同而有多个口径；系统要标出版本关系、生效时间、失效时间和替代文件；接近复审日期时通知责任人</a:t>
             </a:r>
           </a:p>
         </p:txBody>
@@ -7876,7 +7940,7 @@
           <p:cNvPr id="11" name="s5-takeaway-rule">
             <a:extLst xmlns:a="http://schemas.openxmlformats.org/drawingml/2006/main">
               <a:ext uri="{FF2B5EF4-FFF2-40B4-BE49-F238E27FC236}">
-                <a16:creationId xmlns:a16="http://schemas.microsoft.com/office/drawing/2014/main" id="{7DD0A9C6-040D-4DA3-A2ED-2F488B1D4575}"/>
+                <a16:creationId xmlns:a16="http://schemas.microsoft.com/office/drawing/2014/main" id="{847E2164-20ED-491A-AEB6-38DE0B68DF74}"/>
               </a:ext>
             </a:extLst>
           </p:cNvPr>
@@ -7909,7 +7973,7 @@
           <p:cNvPr id="12" name="s5-takeaway">
             <a:extLst xmlns:a="http://schemas.openxmlformats.org/drawingml/2006/main">
               <a:ext uri="{FF2B5EF4-FFF2-40B4-BE49-F238E27FC236}">
-                <a16:creationId xmlns:a16="http://schemas.microsoft.com/office/drawing/2014/main" id="{F348F1D1-5981-4EE7-B598-90881550128F}"/>
+                <a16:creationId xmlns:a16="http://schemas.microsoft.com/office/drawing/2014/main" id="{EA33306C-0114-4FF8-9E55-398865F9BF30}"/>
               </a:ext>
             </a:extLst>
           </p:cNvPr>
@@ -7957,7 +8021,7 @@
                 <a:ea typeface="PingFang SC"/>
                 <a:cs typeface="PingFang SC"/>
               </a:rPr>
-              <a:t>知识条目应继承源文件权限，而不是进入知识库后自动对全员开放</a:t>
+              <a:t>知识条目必须继承源文件权限与有效期</a:t>
             </a:r>
           </a:p>
         </p:txBody>
@@ -7965,7 +8029,7 @@
     </p:spTree>
     <p:extLst>
       <p:ext uri="{BB962C8B-B14F-4D97-AF65-F5344CB8AC3E}">
-        <p14:creationId xmlns:p14="http://schemas.microsoft.com/office/powerpoint/2010/main" val="325866461"/>
+        <p14:creationId xmlns:p14="http://schemas.microsoft.com/office/powerpoint/2010/main" val="952726493"/>
       </p:ext>
     </p:extLst>
   </p:cSld>
@@ -7996,7 +8060,7 @@
           <p:cNvPr id="1" name="s6-rule">
             <a:extLst xmlns:a="http://schemas.openxmlformats.org/drawingml/2006/main">
               <a:ext uri="{FF2B5EF4-FFF2-40B4-BE49-F238E27FC236}">
-                <a16:creationId xmlns:a16="http://schemas.microsoft.com/office/drawing/2014/main" id="{74F42D55-B830-485B-82BE-98DA93814EAF}"/>
+                <a16:creationId xmlns:a16="http://schemas.microsoft.com/office/drawing/2014/main" id="{8B645155-387B-4006-8B33-EDA6E114E2AA}"/>
               </a:ext>
             </a:extLst>
           </p:cNvPr>
@@ -8029,7 +8093,7 @@
           <p:cNvPr id="2" name="s6-eyebrow">
             <a:extLst xmlns:a="http://schemas.openxmlformats.org/drawingml/2006/main">
               <a:ext uri="{FF2B5EF4-FFF2-40B4-BE49-F238E27FC236}">
-                <a16:creationId xmlns:a16="http://schemas.microsoft.com/office/drawing/2014/main" id="{84AB5DCA-63DC-4112-A661-C1C83A3DA6B1}"/>
+                <a16:creationId xmlns:a16="http://schemas.microsoft.com/office/drawing/2014/main" id="{957B601B-6241-4238-87C3-5B37A2774BB4}"/>
               </a:ext>
             </a:extLst>
           </p:cNvPr>
@@ -8087,7 +8151,7 @@
           <p:cNvPr id="3" name="s6-title">
             <a:extLst xmlns:a="http://schemas.openxmlformats.org/drawingml/2006/main">
               <a:ext uri="{FF2B5EF4-FFF2-40B4-BE49-F238E27FC236}">
-                <a16:creationId xmlns:a16="http://schemas.microsoft.com/office/drawing/2014/main" id="{38BD7853-9983-4618-A546-991F2A28EC63}"/>
+                <a16:creationId xmlns:a16="http://schemas.microsoft.com/office/drawing/2014/main" id="{3F6CF653-DFA5-4465-978B-D5E2FBF5789A}"/>
               </a:ext>
             </a:extLst>
           </p:cNvPr>
@@ -8135,7 +8199,7 @@
                 <a:ea typeface="PingFang SC"/>
                 <a:cs typeface="PingFang SC"/>
               </a:rPr>
-              <a:t>但不同输出需要不同审批</a:t>
+              <a:t>不同输出应匹配不同审批与发布责任</a:t>
             </a:r>
           </a:p>
         </p:txBody>
@@ -8145,7 +8209,7 @@
           <p:cNvPr id="4" name="s6-footer">
             <a:extLst xmlns:a="http://schemas.openxmlformats.org/drawingml/2006/main">
               <a:ext uri="{FF2B5EF4-FFF2-40B4-BE49-F238E27FC236}">
-                <a16:creationId xmlns:a16="http://schemas.microsoft.com/office/drawing/2014/main" id="{3A3EC93E-3BC1-461E-8988-0B7FBBC97170}"/>
+                <a16:creationId xmlns:a16="http://schemas.microsoft.com/office/drawing/2014/main" id="{83A8E800-3DBB-4FA0-A479-0F422D5F4D58}"/>
               </a:ext>
             </a:extLst>
           </p:cNvPr>
@@ -8176,7 +8240,7 @@
           <p:cNvPr id="5" name="s6-identity">
             <a:extLst xmlns:a="http://schemas.openxmlformats.org/drawingml/2006/main">
               <a:ext uri="{FF2B5EF4-FFF2-40B4-BE49-F238E27FC236}">
-                <a16:creationId xmlns:a16="http://schemas.microsoft.com/office/drawing/2014/main" id="{178E4792-C791-429E-97DD-B9BA55C799C4}"/>
+                <a16:creationId xmlns:a16="http://schemas.microsoft.com/office/drawing/2014/main" id="{B7504A49-68DB-4371-80FA-9E54B466229F}"/>
               </a:ext>
             </a:extLst>
           </p:cNvPr>
@@ -8234,7 +8298,7 @@
           <p:cNvPr id="6" name="core-no-0">
             <a:extLst xmlns:a="http://schemas.openxmlformats.org/drawingml/2006/main">
               <a:ext uri="{FF2B5EF4-FFF2-40B4-BE49-F238E27FC236}">
-                <a16:creationId xmlns:a16="http://schemas.microsoft.com/office/drawing/2014/main" id="{3777F632-59C0-43A4-B39F-FD9CB854D22A}"/>
+                <a16:creationId xmlns:a16="http://schemas.microsoft.com/office/drawing/2014/main" id="{E885540C-217D-4DFF-B830-5409E6B5F9EC}"/>
               </a:ext>
             </a:extLst>
           </p:cNvPr>
@@ -8266,7 +8330,7 @@
             <a:pPr algn="l">
               <a:defRPr sz="2250" b="1">
                 <a:solidFill>
-                  <a:srgbClr val="E5783F"/>
+                  <a:srgbClr val="9A3F16"/>
                 </a:solidFill>
                 <a:latin typeface="PingFang SC"/>
                 <a:ea typeface="PingFang SC"/>
@@ -8276,7 +8340,7 @@
             <a:r>
               <a:rPr sz="2250" b="1">
                 <a:solidFill>
-                  <a:srgbClr val="E5783F"/>
+                  <a:srgbClr val="9A3F16"/>
                 </a:solidFill>
                 <a:latin typeface="PingFang SC"/>
                 <a:ea typeface="PingFang SC"/>
@@ -8292,7 +8356,7 @@
           <p:cNvPr id="7" name="core-label-0">
             <a:extLst xmlns:a="http://schemas.openxmlformats.org/drawingml/2006/main">
               <a:ext uri="{FF2B5EF4-FFF2-40B4-BE49-F238E27FC236}">
-                <a16:creationId xmlns:a16="http://schemas.microsoft.com/office/drawing/2014/main" id="{E4F1D122-FCA1-4A3F-A91A-64E63604568F}"/>
+                <a16:creationId xmlns:a16="http://schemas.microsoft.com/office/drawing/2014/main" id="{C8312295-8EAA-4AD0-8B78-99018DD8C5FD}"/>
               </a:ext>
             </a:extLst>
           </p:cNvPr>
@@ -8350,7 +8414,7 @@
           <p:cNvPr id="8" name="core-body-0">
             <a:extLst xmlns:a="http://schemas.openxmlformats.org/drawingml/2006/main">
               <a:ext uri="{FF2B5EF4-FFF2-40B4-BE49-F238E27FC236}">
-                <a16:creationId xmlns:a16="http://schemas.microsoft.com/office/drawing/2014/main" id="{D81B4144-0F9D-4E88-A8B3-D61B933BEE30}"/>
+                <a16:creationId xmlns:a16="http://schemas.microsoft.com/office/drawing/2014/main" id="{1D0D2F2D-2DA8-4E64-BD40-BB62697C7969}"/>
               </a:ext>
             </a:extLst>
           </p:cNvPr>
@@ -8374,14 +8438,14 @@
           </a:solidFill>
           <a:ln xmlns:a="http://schemas.openxmlformats.org/drawingml/2006/main" w="19050">
             <a:solidFill>
-              <a:srgbClr val="E5783F"/>
+              <a:srgbClr val="9A3F16"/>
             </a:solidFill>
             <a:prstDash val="solid"/>
           </a:ln>
         </p:spPr>
         <p:txBody>
           <a:bodyPr xmlns:a="http://schemas.openxmlformats.org/drawingml/2006/main" lIns="152400" tIns="133350" rIns="152400" bIns="133350" anchor="ctr">
-            <a:normAutofit fontScale="92156"/>
+            <a:normAutofit fontScale="98233"/>
           </a:bodyPr>
           <a:lstStyle xmlns:a="http://schemas.openxmlformats.org/drawingml/2006/main"/>
           <a:p xmlns:a="http://schemas.openxmlformats.org/drawingml/2006/main">
@@ -8404,7 +8468,7 @@
                 <a:ea typeface="PingFang SC"/>
                 <a:cs typeface="PingFang SC"/>
               </a:rPr>
-              <a:t>AIGC 适合生成会议纪要草稿、制度问答、邮件、简报、销售材料和多渠道内容，但不同输出需要不同审批。内部个人草稿可由使用者自审；跨部门通知需要业务负责人确认；对客户的价格、功能、合同…</a:t>
+              <a:t>AIGC 适合生成会议纪要草稿、制度问答、邮件、简报、销售材料和多渠道内容；但不同输出需要不同审批；内部个人草稿可由使用者自审；跨部门通知需要业务负责人确认</a:t>
             </a:r>
           </a:p>
         </p:txBody>
@@ -8414,7 +8478,7 @@
           <p:cNvPr id="9" name="core-no-1">
             <a:extLst xmlns:a="http://schemas.openxmlformats.org/drawingml/2006/main">
               <a:ext uri="{FF2B5EF4-FFF2-40B4-BE49-F238E27FC236}">
-                <a16:creationId xmlns:a16="http://schemas.microsoft.com/office/drawing/2014/main" id="{42146FC3-E0AE-4505-8E1A-8B37595375C6}"/>
+                <a16:creationId xmlns:a16="http://schemas.microsoft.com/office/drawing/2014/main" id="{0603814B-E677-4EE0-95C6-CEE9216E4484}"/>
               </a:ext>
             </a:extLst>
           </p:cNvPr>
@@ -8446,7 +8510,7 @@
             <a:pPr algn="l">
               <a:defRPr sz="2250" b="1">
                 <a:solidFill>
-                  <a:srgbClr val="E5783F"/>
+                  <a:srgbClr val="9A3F16"/>
                 </a:solidFill>
                 <a:latin typeface="PingFang SC"/>
                 <a:ea typeface="PingFang SC"/>
@@ -8456,7 +8520,7 @@
             <a:r>
               <a:rPr sz="2250" b="1">
                 <a:solidFill>
-                  <a:srgbClr val="E5783F"/>
+                  <a:srgbClr val="9A3F16"/>
                 </a:solidFill>
                 <a:latin typeface="PingFang SC"/>
                 <a:ea typeface="PingFang SC"/>
@@ -8472,7 +8536,7 @@
           <p:cNvPr id="10" name="core-body-1">
             <a:extLst xmlns:a="http://schemas.openxmlformats.org/drawingml/2006/main">
               <a:ext uri="{FF2B5EF4-FFF2-40B4-BE49-F238E27FC236}">
-                <a16:creationId xmlns:a16="http://schemas.microsoft.com/office/drawing/2014/main" id="{0EDF6CD0-18BE-4FE8-BF86-36828514D925}"/>
+                <a16:creationId xmlns:a16="http://schemas.microsoft.com/office/drawing/2014/main" id="{62ACFFAF-36C2-4CCA-B26E-5D8B47C2BBCE}"/>
               </a:ext>
             </a:extLst>
           </p:cNvPr>
@@ -8536,7 +8600,7 @@
           <p:cNvPr id="11" name="s6-takeaway-rule">
             <a:extLst xmlns:a="http://schemas.openxmlformats.org/drawingml/2006/main">
               <a:ext uri="{FF2B5EF4-FFF2-40B4-BE49-F238E27FC236}">
-                <a16:creationId xmlns:a16="http://schemas.microsoft.com/office/drawing/2014/main" id="{ABBA3B1C-1E39-485C-93A3-17EE7E5A9462}"/>
+                <a16:creationId xmlns:a16="http://schemas.microsoft.com/office/drawing/2014/main" id="{8B903844-609A-46A5-B713-9519A0C1B3D2}"/>
               </a:ext>
             </a:extLst>
           </p:cNvPr>
@@ -8569,7 +8633,7 @@
           <p:cNvPr id="12" name="s6-takeaway">
             <a:extLst xmlns:a="http://schemas.openxmlformats.org/drawingml/2006/main">
               <a:ext uri="{FF2B5EF4-FFF2-40B4-BE49-F238E27FC236}">
-                <a16:creationId xmlns:a16="http://schemas.microsoft.com/office/drawing/2014/main" id="{3B2EF493-8238-44D1-B91D-4616DF360FB7}"/>
+                <a16:creationId xmlns:a16="http://schemas.microsoft.com/office/drawing/2014/main" id="{C180713B-6EC3-4624-982C-3F95BA2E26B6}"/>
               </a:ext>
             </a:extLst>
           </p:cNvPr>
@@ -8617,7 +8681,7 @@
                 <a:ea typeface="PingFang SC"/>
                 <a:cs typeface="PingFang SC"/>
               </a:rPr>
-              <a:t>但不同输出需要不同审批</a:t>
+              <a:t>不同输出应匹配不同审批与发布责任</a:t>
             </a:r>
           </a:p>
         </p:txBody>
@@ -8625,7 +8689,7 @@
     </p:spTree>
     <p:extLst>
       <p:ext uri="{BB962C8B-B14F-4D97-AF65-F5344CB8AC3E}">
-        <p14:creationId xmlns:p14="http://schemas.microsoft.com/office/powerpoint/2010/main" val="856355885"/>
+        <p14:creationId xmlns:p14="http://schemas.microsoft.com/office/powerpoint/2010/main" val="272361783"/>
       </p:ext>
     </p:extLst>
   </p:cSld>
@@ -8656,7 +8720,7 @@
           <p:cNvPr id="1" name="s7-rule">
             <a:extLst xmlns:a="http://schemas.openxmlformats.org/drawingml/2006/main">
               <a:ext uri="{FF2B5EF4-FFF2-40B4-BE49-F238E27FC236}">
-                <a16:creationId xmlns:a16="http://schemas.microsoft.com/office/drawing/2014/main" id="{EB01A174-D935-4E9B-A2EC-D9478497E3E1}"/>
+                <a16:creationId xmlns:a16="http://schemas.microsoft.com/office/drawing/2014/main" id="{629A7B65-7F5C-41AA-8897-2061E35BE429}"/>
               </a:ext>
             </a:extLst>
           </p:cNvPr>
@@ -8689,7 +8753,7 @@
           <p:cNvPr id="2" name="s7-eyebrow">
             <a:extLst xmlns:a="http://schemas.openxmlformats.org/drawingml/2006/main">
               <a:ext uri="{FF2B5EF4-FFF2-40B4-BE49-F238E27FC236}">
-                <a16:creationId xmlns:a16="http://schemas.microsoft.com/office/drawing/2014/main" id="{EBBC3E06-6D9A-489F-AA18-703B1F3FF64A}"/>
+                <a16:creationId xmlns:a16="http://schemas.microsoft.com/office/drawing/2014/main" id="{159D2359-D9CD-4A00-A5E9-F0BBC8E06AE9}"/>
               </a:ext>
             </a:extLst>
           </p:cNvPr>
@@ -8747,7 +8811,7 @@
           <p:cNvPr id="3" name="s7-title">
             <a:extLst xmlns:a="http://schemas.openxmlformats.org/drawingml/2006/main">
               <a:ext uri="{FF2B5EF4-FFF2-40B4-BE49-F238E27FC236}">
-                <a16:creationId xmlns:a16="http://schemas.microsoft.com/office/drawing/2014/main" id="{ACB32340-39A0-4782-B072-A85551D34249}"/>
+                <a16:creationId xmlns:a16="http://schemas.microsoft.com/office/drawing/2014/main" id="{E8F6C5AA-D511-4E99-9381-83957A11F70D}"/>
               </a:ext>
             </a:extLst>
           </p:cNvPr>
@@ -8805,7 +8869,7 @@
           <p:cNvPr id="4" name="s7-footer">
             <a:extLst xmlns:a="http://schemas.openxmlformats.org/drawingml/2006/main">
               <a:ext uri="{FF2B5EF4-FFF2-40B4-BE49-F238E27FC236}">
-                <a16:creationId xmlns:a16="http://schemas.microsoft.com/office/drawing/2014/main" id="{3D1DC7FE-B73E-4A0D-8685-D70158634DF9}"/>
+                <a16:creationId xmlns:a16="http://schemas.microsoft.com/office/drawing/2014/main" id="{D4A34C38-8DC7-421A-BA5A-F7802A91CB9E}"/>
               </a:ext>
             </a:extLst>
           </p:cNvPr>
@@ -8836,7 +8900,7 @@
           <p:cNvPr id="5" name="s7-identity">
             <a:extLst xmlns:a="http://schemas.openxmlformats.org/drawingml/2006/main">
               <a:ext uri="{FF2B5EF4-FFF2-40B4-BE49-F238E27FC236}">
-                <a16:creationId xmlns:a16="http://schemas.microsoft.com/office/drawing/2014/main" id="{A997B887-D38B-4114-8507-5E09903EDAF6}"/>
+                <a16:creationId xmlns:a16="http://schemas.microsoft.com/office/drawing/2014/main" id="{6AD532B4-87C8-4521-A3FF-F2E66393347B}"/>
               </a:ext>
             </a:extLst>
           </p:cNvPr>
@@ -8894,7 +8958,7 @@
           <p:cNvPr id="6" name="core-no-0">
             <a:extLst xmlns:a="http://schemas.openxmlformats.org/drawingml/2006/main">
               <a:ext uri="{FF2B5EF4-FFF2-40B4-BE49-F238E27FC236}">
-                <a16:creationId xmlns:a16="http://schemas.microsoft.com/office/drawing/2014/main" id="{53CC4EA0-5368-415E-BC37-D0C43F4D025C}"/>
+                <a16:creationId xmlns:a16="http://schemas.microsoft.com/office/drawing/2014/main" id="{FE2D849A-EE60-4854-B5C6-1620438CDE06}"/>
               </a:ext>
             </a:extLst>
           </p:cNvPr>
@@ -8926,7 +8990,7 @@
             <a:pPr algn="l">
               <a:defRPr sz="2250" b="1">
                 <a:solidFill>
-                  <a:srgbClr val="E5783F"/>
+                  <a:srgbClr val="9A3F16"/>
                 </a:solidFill>
                 <a:latin typeface="PingFang SC"/>
                 <a:ea typeface="PingFang SC"/>
@@ -8936,7 +9000,7 @@
             <a:r>
               <a:rPr sz="2250" b="1">
                 <a:solidFill>
-                  <a:srgbClr val="E5783F"/>
+                  <a:srgbClr val="9A3F16"/>
                 </a:solidFill>
                 <a:latin typeface="PingFang SC"/>
                 <a:ea typeface="PingFang SC"/>
@@ -8952,7 +9016,7 @@
           <p:cNvPr id="7" name="core-label-0">
             <a:extLst xmlns:a="http://schemas.openxmlformats.org/drawingml/2006/main">
               <a:ext uri="{FF2B5EF4-FFF2-40B4-BE49-F238E27FC236}">
-                <a16:creationId xmlns:a16="http://schemas.microsoft.com/office/drawing/2014/main" id="{26833030-04B7-40C6-8D63-588D361585F9}"/>
+                <a16:creationId xmlns:a16="http://schemas.microsoft.com/office/drawing/2014/main" id="{EFF6D937-9A31-49C4-B3D6-E85128548B5B}"/>
               </a:ext>
             </a:extLst>
           </p:cNvPr>
@@ -9010,7 +9074,7 @@
           <p:cNvPr id="8" name="core-body-0">
             <a:extLst xmlns:a="http://schemas.openxmlformats.org/drawingml/2006/main">
               <a:ext uri="{FF2B5EF4-FFF2-40B4-BE49-F238E27FC236}">
-                <a16:creationId xmlns:a16="http://schemas.microsoft.com/office/drawing/2014/main" id="{39FA0483-95F1-47A8-90D0-3D0409B5976D}"/>
+                <a16:creationId xmlns:a16="http://schemas.microsoft.com/office/drawing/2014/main" id="{94590F2B-8671-4AC8-9966-09F9169BCC07}"/>
               </a:ext>
             </a:extLst>
           </p:cNvPr>
@@ -9034,7 +9098,7 @@
           </a:solidFill>
           <a:ln xmlns:a="http://schemas.openxmlformats.org/drawingml/2006/main" w="19050">
             <a:solidFill>
-              <a:srgbClr val="E5783F"/>
+              <a:srgbClr val="9A3F16"/>
             </a:solidFill>
             <a:prstDash val="solid"/>
           </a:ln>
@@ -9074,7 +9138,7 @@
           <p:cNvPr id="9" name="core-no-1">
             <a:extLst xmlns:a="http://schemas.openxmlformats.org/drawingml/2006/main">
               <a:ext uri="{FF2B5EF4-FFF2-40B4-BE49-F238E27FC236}">
-                <a16:creationId xmlns:a16="http://schemas.microsoft.com/office/drawing/2014/main" id="{97BD3FE4-3FE7-41D4-99FA-FD655AB233B0}"/>
+                <a16:creationId xmlns:a16="http://schemas.microsoft.com/office/drawing/2014/main" id="{7E8B4B33-3A13-4AB5-8A53-474E32217FD8}"/>
               </a:ext>
             </a:extLst>
           </p:cNvPr>
@@ -9106,7 +9170,7 @@
             <a:pPr algn="l">
               <a:defRPr sz="2250" b="1">
                 <a:solidFill>
-                  <a:srgbClr val="E5783F"/>
+                  <a:srgbClr val="9A3F16"/>
                 </a:solidFill>
                 <a:latin typeface="PingFang SC"/>
                 <a:ea typeface="PingFang SC"/>
@@ -9116,7 +9180,7 @@
             <a:r>
               <a:rPr sz="2250" b="1">
                 <a:solidFill>
-                  <a:srgbClr val="E5783F"/>
+                  <a:srgbClr val="9A3F16"/>
                 </a:solidFill>
                 <a:latin typeface="PingFang SC"/>
                 <a:ea typeface="PingFang SC"/>
@@ -9132,7 +9196,7 @@
           <p:cNvPr id="10" name="core-body-1">
             <a:extLst xmlns:a="http://schemas.openxmlformats.org/drawingml/2006/main">
               <a:ext uri="{FF2B5EF4-FFF2-40B4-BE49-F238E27FC236}">
-                <a16:creationId xmlns:a16="http://schemas.microsoft.com/office/drawing/2014/main" id="{B177FA9B-0278-4602-884B-A0A4385B1239}"/>
+                <a16:creationId xmlns:a16="http://schemas.microsoft.com/office/drawing/2014/main" id="{86BA427A-4B69-4C69-8E6B-E11618BAB563}"/>
               </a:ext>
             </a:extLst>
           </p:cNvPr>
@@ -9196,7 +9260,7 @@
           <p:cNvPr id="11" name="core-no-2">
             <a:extLst xmlns:a="http://schemas.openxmlformats.org/drawingml/2006/main">
               <a:ext uri="{FF2B5EF4-FFF2-40B4-BE49-F238E27FC236}">
-                <a16:creationId xmlns:a16="http://schemas.microsoft.com/office/drawing/2014/main" id="{204ACEBE-1EA8-4789-AB11-0FA37FD500F3}"/>
+                <a16:creationId xmlns:a16="http://schemas.microsoft.com/office/drawing/2014/main" id="{416F6B39-BA31-4D90-8E74-E2DE140D84E0}"/>
               </a:ext>
             </a:extLst>
           </p:cNvPr>
@@ -9228,7 +9292,7 @@
             <a:pPr algn="l">
               <a:defRPr sz="2250" b="1">
                 <a:solidFill>
-                  <a:srgbClr val="E5783F"/>
+                  <a:srgbClr val="9A3F16"/>
                 </a:solidFill>
                 <a:latin typeface="PingFang SC"/>
                 <a:ea typeface="PingFang SC"/>
@@ -9238,7 +9302,7 @@
             <a:r>
               <a:rPr sz="2250" b="1">
                 <a:solidFill>
-                  <a:srgbClr val="E5783F"/>
+                  <a:srgbClr val="9A3F16"/>
                 </a:solidFill>
                 <a:latin typeface="PingFang SC"/>
                 <a:ea typeface="PingFang SC"/>
@@ -9254,7 +9318,7 @@
           <p:cNvPr id="12" name="core-body-2">
             <a:extLst xmlns:a="http://schemas.openxmlformats.org/drawingml/2006/main">
               <a:ext uri="{FF2B5EF4-FFF2-40B4-BE49-F238E27FC236}">
-                <a16:creationId xmlns:a16="http://schemas.microsoft.com/office/drawing/2014/main" id="{500132F6-A029-42C3-A324-90681577FFBA}"/>
+                <a16:creationId xmlns:a16="http://schemas.microsoft.com/office/drawing/2014/main" id="{7455AD6B-8069-4A24-AAD0-4E428FF269CB}"/>
               </a:ext>
             </a:extLst>
           </p:cNvPr>
@@ -9318,7 +9382,7 @@
           <p:cNvPr id="13" name="s7-takeaway-rule">
             <a:extLst xmlns:a="http://schemas.openxmlformats.org/drawingml/2006/main">
               <a:ext uri="{FF2B5EF4-FFF2-40B4-BE49-F238E27FC236}">
-                <a16:creationId xmlns:a16="http://schemas.microsoft.com/office/drawing/2014/main" id="{3DDE025E-8B18-43AF-A057-1B706B6CEF7A}"/>
+                <a16:creationId xmlns:a16="http://schemas.microsoft.com/office/drawing/2014/main" id="{BF77EE44-9E20-468D-8653-CFA8B55B56C0}"/>
               </a:ext>
             </a:extLst>
           </p:cNvPr>
@@ -9351,7 +9415,7 @@
           <p:cNvPr id="14" name="s7-takeaway">
             <a:extLst xmlns:a="http://schemas.openxmlformats.org/drawingml/2006/main">
               <a:ext uri="{FF2B5EF4-FFF2-40B4-BE49-F238E27FC236}">
-                <a16:creationId xmlns:a16="http://schemas.microsoft.com/office/drawing/2014/main" id="{892790F6-2F66-446F-9306-2909B9FBFBB4}"/>
+                <a16:creationId xmlns:a16="http://schemas.microsoft.com/office/drawing/2014/main" id="{1E1AA9BA-453C-43A3-9EB6-8B52F4D839E6}"/>
               </a:ext>
             </a:extLst>
           </p:cNvPr>
@@ -9407,7 +9471,7 @@
     </p:spTree>
     <p:extLst>
       <p:ext uri="{BB962C8B-B14F-4D97-AF65-F5344CB8AC3E}">
-        <p14:creationId xmlns:p14="http://schemas.microsoft.com/office/powerpoint/2010/main" val="2068604215"/>
+        <p14:creationId xmlns:p14="http://schemas.microsoft.com/office/powerpoint/2010/main" val="649003934"/>
       </p:ext>
     </p:extLst>
   </p:cSld>
@@ -9438,7 +9502,7 @@
           <p:cNvPr id="1" name="s8-rule">
             <a:extLst xmlns:a="http://schemas.openxmlformats.org/drawingml/2006/main">
               <a:ext uri="{FF2B5EF4-FFF2-40B4-BE49-F238E27FC236}">
-                <a16:creationId xmlns:a16="http://schemas.microsoft.com/office/drawing/2014/main" id="{83040531-85C3-49A8-B4B2-6C15B474EB79}"/>
+                <a16:creationId xmlns:a16="http://schemas.microsoft.com/office/drawing/2014/main" id="{A358320D-BEE9-4EB2-BD70-91C49EBD0489}"/>
               </a:ext>
             </a:extLst>
           </p:cNvPr>
@@ -9471,7 +9535,7 @@
           <p:cNvPr id="2" name="s8-eyebrow">
             <a:extLst xmlns:a="http://schemas.openxmlformats.org/drawingml/2006/main">
               <a:ext uri="{FF2B5EF4-FFF2-40B4-BE49-F238E27FC236}">
-                <a16:creationId xmlns:a16="http://schemas.microsoft.com/office/drawing/2014/main" id="{00E13D4D-0C98-4E47-AC3E-D555F8AEFEA6}"/>
+                <a16:creationId xmlns:a16="http://schemas.microsoft.com/office/drawing/2014/main" id="{C66AF315-420D-4FAD-9AC8-EA361786FB8C}"/>
               </a:ext>
             </a:extLst>
           </p:cNvPr>
@@ -9529,7 +9593,7 @@
           <p:cNvPr id="3" name="s8-title">
             <a:extLst xmlns:a="http://schemas.openxmlformats.org/drawingml/2006/main">
               <a:ext uri="{FF2B5EF4-FFF2-40B4-BE49-F238E27FC236}">
-                <a16:creationId xmlns:a16="http://schemas.microsoft.com/office/drawing/2014/main" id="{03EFED31-AA7A-422C-ABCE-73C4D337CDA2}"/>
+                <a16:creationId xmlns:a16="http://schemas.microsoft.com/office/drawing/2014/main" id="{CABDFAA9-A68C-47F5-949C-D2A02C0D2C58}"/>
               </a:ext>
             </a:extLst>
           </p:cNvPr>
@@ -9587,7 +9651,7 @@
           <p:cNvPr id="4" name="s8-footer">
             <a:extLst xmlns:a="http://schemas.openxmlformats.org/drawingml/2006/main">
               <a:ext uri="{FF2B5EF4-FFF2-40B4-BE49-F238E27FC236}">
-                <a16:creationId xmlns:a16="http://schemas.microsoft.com/office/drawing/2014/main" id="{348C7235-4D13-4AA7-A72B-7D247079A12E}"/>
+                <a16:creationId xmlns:a16="http://schemas.microsoft.com/office/drawing/2014/main" id="{11D636CF-DECF-4B70-BF39-DA2810AEF4B7}"/>
               </a:ext>
             </a:extLst>
           </p:cNvPr>
@@ -9618,7 +9682,7 @@
           <p:cNvPr id="5" name="s8-identity">
             <a:extLst xmlns:a="http://schemas.openxmlformats.org/drawingml/2006/main">
               <a:ext uri="{FF2B5EF4-FFF2-40B4-BE49-F238E27FC236}">
-                <a16:creationId xmlns:a16="http://schemas.microsoft.com/office/drawing/2014/main" id="{D46E98B0-78EF-40C7-84EC-F39AD256AE83}"/>
+                <a16:creationId xmlns:a16="http://schemas.microsoft.com/office/drawing/2014/main" id="{4F9D7BB7-7624-43F6-A037-C7F5DC6CA0E7}"/>
               </a:ext>
             </a:extLst>
           </p:cNvPr>
@@ -9676,7 +9740,7 @@
           <p:cNvPr id="6" name="core-no-0">
             <a:extLst xmlns:a="http://schemas.openxmlformats.org/drawingml/2006/main">
               <a:ext uri="{FF2B5EF4-FFF2-40B4-BE49-F238E27FC236}">
-                <a16:creationId xmlns:a16="http://schemas.microsoft.com/office/drawing/2014/main" id="{3DC7941A-865C-4364-9273-020D552608FE}"/>
+                <a16:creationId xmlns:a16="http://schemas.microsoft.com/office/drawing/2014/main" id="{4F140DD5-3233-4A1D-AAE1-74285F57CA90}"/>
               </a:ext>
             </a:extLst>
           </p:cNvPr>
@@ -9708,7 +9772,7 @@
             <a:pPr algn="l">
               <a:defRPr sz="2250" b="1">
                 <a:solidFill>
-                  <a:srgbClr val="E5783F"/>
+                  <a:srgbClr val="9A3F16"/>
                 </a:solidFill>
                 <a:latin typeface="PingFang SC"/>
                 <a:ea typeface="PingFang SC"/>
@@ -9718,7 +9782,7 @@
             <a:r>
               <a:rPr sz="2250" b="1">
                 <a:solidFill>
-                  <a:srgbClr val="E5783F"/>
+                  <a:srgbClr val="9A3F16"/>
                 </a:solidFill>
                 <a:latin typeface="PingFang SC"/>
                 <a:ea typeface="PingFang SC"/>
@@ -9734,7 +9798,7 @@
           <p:cNvPr id="7" name="core-label-0">
             <a:extLst xmlns:a="http://schemas.openxmlformats.org/drawingml/2006/main">
               <a:ext uri="{FF2B5EF4-FFF2-40B4-BE49-F238E27FC236}">
-                <a16:creationId xmlns:a16="http://schemas.microsoft.com/office/drawing/2014/main" id="{D2452190-3C2C-42A6-B4FA-61F894B74CE6}"/>
+                <a16:creationId xmlns:a16="http://schemas.microsoft.com/office/drawing/2014/main" id="{55851C1D-C6BD-4762-987F-0E33F39B7F59}"/>
               </a:ext>
             </a:extLst>
           </p:cNvPr>
@@ -9792,7 +9856,7 @@
           <p:cNvPr id="8" name="core-body-0">
             <a:extLst xmlns:a="http://schemas.openxmlformats.org/drawingml/2006/main">
               <a:ext uri="{FF2B5EF4-FFF2-40B4-BE49-F238E27FC236}">
-                <a16:creationId xmlns:a16="http://schemas.microsoft.com/office/drawing/2014/main" id="{7B8B1308-3F5C-462B-9F74-75FEC9A2F061}"/>
+                <a16:creationId xmlns:a16="http://schemas.microsoft.com/office/drawing/2014/main" id="{61CA6BA6-DA47-43F8-9FDC-6A29CD2F5375}"/>
               </a:ext>
             </a:extLst>
           </p:cNvPr>
@@ -9816,7 +9880,7 @@
           </a:solidFill>
           <a:ln xmlns:a="http://schemas.openxmlformats.org/drawingml/2006/main" w="19050">
             <a:solidFill>
-              <a:srgbClr val="E5783F"/>
+              <a:srgbClr val="9A3F16"/>
             </a:solidFill>
             <a:prstDash val="solid"/>
           </a:ln>
@@ -9846,7 +9910,7 @@
                 <a:ea typeface="PingFang SC"/>
                 <a:cs typeface="PingFang SC"/>
               </a:rPr>
-              <a:t>页面访问量并不能证明知识有用。更有意义的指标包括：问题是否得到有依据的解决、引用能否支持回答、用户是否反复追问、人工转交是否准确、旧版本是否被拦截、从资料产生到批准可用需要多久…</a:t>
+              <a:t>页面访问量并不能证明知识有用。更有意义的指标包括：问题是否得到有依据的解决、引用能否支持回答、用户是否反复追问、人工转交是否准确、旧版本是否被拦截、从资料产生到批准可用需要多久</a:t>
             </a:r>
           </a:p>
         </p:txBody>
@@ -9856,7 +9920,7 @@
           <p:cNvPr id="9" name="core-no-1">
             <a:extLst xmlns:a="http://schemas.openxmlformats.org/drawingml/2006/main">
               <a:ext uri="{FF2B5EF4-FFF2-40B4-BE49-F238E27FC236}">
-                <a16:creationId xmlns:a16="http://schemas.microsoft.com/office/drawing/2014/main" id="{6B9A7C61-00D9-424D-AF5F-5A81422D6EB6}"/>
+                <a16:creationId xmlns:a16="http://schemas.microsoft.com/office/drawing/2014/main" id="{66642916-919E-4EA7-80B9-2DBDC3408614}"/>
               </a:ext>
             </a:extLst>
           </p:cNvPr>
@@ -9888,7 +9952,7 @@
             <a:pPr algn="l">
               <a:defRPr sz="2250" b="1">
                 <a:solidFill>
-                  <a:srgbClr val="E5783F"/>
+                  <a:srgbClr val="9A3F16"/>
                 </a:solidFill>
                 <a:latin typeface="PingFang SC"/>
                 <a:ea typeface="PingFang SC"/>
@@ -9898,7 +9962,7 @@
             <a:r>
               <a:rPr sz="2250" b="1">
                 <a:solidFill>
-                  <a:srgbClr val="E5783F"/>
+                  <a:srgbClr val="9A3F16"/>
                 </a:solidFill>
                 <a:latin typeface="PingFang SC"/>
                 <a:ea typeface="PingFang SC"/>
@@ -9914,7 +9978,7 @@
           <p:cNvPr id="10" name="core-body-1">
             <a:extLst xmlns:a="http://schemas.openxmlformats.org/drawingml/2006/main">
               <a:ext uri="{FF2B5EF4-FFF2-40B4-BE49-F238E27FC236}">
-                <a16:creationId xmlns:a16="http://schemas.microsoft.com/office/drawing/2014/main" id="{B905A280-D9A0-4F20-90D1-2395CF70F6DF}"/>
+                <a16:creationId xmlns:a16="http://schemas.microsoft.com/office/drawing/2014/main" id="{5E0C16EE-7CCD-4FAF-BF76-BDDE9FA5E798}"/>
               </a:ext>
             </a:extLst>
           </p:cNvPr>
@@ -9968,7 +10032,7 @@
                 <a:ea typeface="PingFang SC"/>
                 <a:cs typeface="PingFang SC"/>
               </a:rPr>
-              <a:t>还应观察业务结果，例如会议行动项按时完成情况、服务台重复咨询变化、销售资料退回原因和知识责任人的维护负担。若用户很少采用系统答案，应通过访谈区分是检索质量、权限缺失…</a:t>
+              <a:t>还应观察业务结果，例如会议行动项按时完成情况、服务台重复咨询变化、销售资料退回原因和知识责任人的维护负担；若用户很少采用系统答案</a:t>
             </a:r>
           </a:p>
         </p:txBody>
@@ -9978,7 +10042,7 @@
           <p:cNvPr id="11" name="s8-takeaway-rule">
             <a:extLst xmlns:a="http://schemas.openxmlformats.org/drawingml/2006/main">
               <a:ext uri="{FF2B5EF4-FFF2-40B4-BE49-F238E27FC236}">
-                <a16:creationId xmlns:a16="http://schemas.microsoft.com/office/drawing/2014/main" id="{7EBB2430-E1E5-4CD3-A31C-9FB1E05B7D26}"/>
+                <a16:creationId xmlns:a16="http://schemas.microsoft.com/office/drawing/2014/main" id="{0322DF8A-14E3-472D-A313-4058BD156FE1}"/>
               </a:ext>
             </a:extLst>
           </p:cNvPr>
@@ -10011,7 +10075,7 @@
           <p:cNvPr id="12" name="s8-takeaway">
             <a:extLst xmlns:a="http://schemas.openxmlformats.org/drawingml/2006/main">
               <a:ext uri="{FF2B5EF4-FFF2-40B4-BE49-F238E27FC236}">
-                <a16:creationId xmlns:a16="http://schemas.microsoft.com/office/drawing/2014/main" id="{77C09316-7DB6-4321-8481-083E9AD93CB0}"/>
+                <a16:creationId xmlns:a16="http://schemas.microsoft.com/office/drawing/2014/main" id="{A85030A4-3776-4B67-B4B8-129541488064}"/>
               </a:ext>
             </a:extLst>
           </p:cNvPr>
@@ -10067,7 +10131,7 @@
     </p:spTree>
     <p:extLst>
       <p:ext uri="{BB962C8B-B14F-4D97-AF65-F5344CB8AC3E}">
-        <p14:creationId xmlns:p14="http://schemas.microsoft.com/office/powerpoint/2010/main" val="1527987401"/>
+        <p14:creationId xmlns:p14="http://schemas.microsoft.com/office/powerpoint/2010/main" val="429172470"/>
       </p:ext>
     </p:extLst>
   </p:cSld>
@@ -10098,7 +10162,7 @@
           <p:cNvPr id="1" name="s9-rule">
             <a:extLst xmlns:a="http://schemas.openxmlformats.org/drawingml/2006/main">
               <a:ext uri="{FF2B5EF4-FFF2-40B4-BE49-F238E27FC236}">
-                <a16:creationId xmlns:a16="http://schemas.microsoft.com/office/drawing/2014/main" id="{84017729-2BDB-4B09-80F1-6C1F7D8BB289}"/>
+                <a16:creationId xmlns:a16="http://schemas.microsoft.com/office/drawing/2014/main" id="{6B9DA1B6-2FDD-48E9-AB63-EF15434B80B0}"/>
               </a:ext>
             </a:extLst>
           </p:cNvPr>
@@ -10131,7 +10195,7 @@
           <p:cNvPr id="2" name="s9-eyebrow">
             <a:extLst xmlns:a="http://schemas.openxmlformats.org/drawingml/2006/main">
               <a:ext uri="{FF2B5EF4-FFF2-40B4-BE49-F238E27FC236}">
-                <a16:creationId xmlns:a16="http://schemas.microsoft.com/office/drawing/2014/main" id="{4698DAD0-8FCB-4913-B197-65E68F35AF84}"/>
+                <a16:creationId xmlns:a16="http://schemas.microsoft.com/office/drawing/2014/main" id="{354A0640-CDDB-4A7D-BDD7-1822E43D2456}"/>
               </a:ext>
             </a:extLst>
           </p:cNvPr>
@@ -10189,7 +10253,7 @@
           <p:cNvPr id="3" name="s9-title">
             <a:extLst xmlns:a="http://schemas.openxmlformats.org/drawingml/2006/main">
               <a:ext uri="{FF2B5EF4-FFF2-40B4-BE49-F238E27FC236}">
-                <a16:creationId xmlns:a16="http://schemas.microsoft.com/office/drawing/2014/main" id="{7BC98FB5-BBC2-4BB7-83D0-9053EA4AFF8C}"/>
+                <a16:creationId xmlns:a16="http://schemas.microsoft.com/office/drawing/2014/main" id="{C21ADF29-116F-42AB-BF2C-36B19FCDEAEF}"/>
               </a:ext>
             </a:extLst>
           </p:cNvPr>
@@ -10247,7 +10311,7 @@
           <p:cNvPr id="4" name="s9-footer">
             <a:extLst xmlns:a="http://schemas.openxmlformats.org/drawingml/2006/main">
               <a:ext uri="{FF2B5EF4-FFF2-40B4-BE49-F238E27FC236}">
-                <a16:creationId xmlns:a16="http://schemas.microsoft.com/office/drawing/2014/main" id="{742C0AC5-E7D7-4D00-B681-B3986AC84224}"/>
+                <a16:creationId xmlns:a16="http://schemas.microsoft.com/office/drawing/2014/main" id="{D6EDCFCD-C841-475F-B8B4-5D1C6B7E6E18}"/>
               </a:ext>
             </a:extLst>
           </p:cNvPr>
@@ -10278,7 +10342,7 @@
           <p:cNvPr id="5" name="s9-identity">
             <a:extLst xmlns:a="http://schemas.openxmlformats.org/drawingml/2006/main">
               <a:ext uri="{FF2B5EF4-FFF2-40B4-BE49-F238E27FC236}">
-                <a16:creationId xmlns:a16="http://schemas.microsoft.com/office/drawing/2014/main" id="{4DB40D86-51A5-469D-951C-2CE9C5571760}"/>
+                <a16:creationId xmlns:a16="http://schemas.microsoft.com/office/drawing/2014/main" id="{4E5D0D63-BFA4-466F-A8F5-662D6E9C3C34}"/>
               </a:ext>
             </a:extLst>
           </p:cNvPr>
@@ -10336,7 +10400,7 @@
           <p:cNvPr id="6" name="case-title">
             <a:extLst xmlns:a="http://schemas.openxmlformats.org/drawingml/2006/main">
               <a:ext uri="{FF2B5EF4-FFF2-40B4-BE49-F238E27FC236}">
-                <a16:creationId xmlns:a16="http://schemas.microsoft.com/office/drawing/2014/main" id="{3C762BFD-47FA-4C4F-AF73-804F66AD4EEB}"/>
+                <a16:creationId xmlns:a16="http://schemas.microsoft.com/office/drawing/2014/main" id="{625745A9-B7D9-4CD1-B3BC-DE6C0AF79EBA}"/>
               </a:ext>
             </a:extLst>
           </p:cNvPr>
@@ -10400,7 +10464,7 @@
           <p:cNvPr id="7" name="case-row-0">
             <a:extLst xmlns:a="http://schemas.openxmlformats.org/drawingml/2006/main">
               <a:ext uri="{FF2B5EF4-FFF2-40B4-BE49-F238E27FC236}">
-                <a16:creationId xmlns:a16="http://schemas.microsoft.com/office/drawing/2014/main" id="{19CD16D0-F09D-4682-8810-83EE6DF78582}"/>
+                <a16:creationId xmlns:a16="http://schemas.microsoft.com/office/drawing/2014/main" id="{9223DEC2-D488-4CA6-BEEE-264E9B30D7DC}"/>
               </a:ext>
             </a:extLst>
           </p:cNvPr>
@@ -10464,7 +10528,7 @@
           <p:cNvPr id="8" name="case-row-1">
             <a:extLst xmlns:a="http://schemas.openxmlformats.org/drawingml/2006/main">
               <a:ext uri="{FF2B5EF4-FFF2-40B4-BE49-F238E27FC236}">
-                <a16:creationId xmlns:a16="http://schemas.microsoft.com/office/drawing/2014/main" id="{373A711F-2DD9-4949-B72B-9880D81C2D34}"/>
+                <a16:creationId xmlns:a16="http://schemas.microsoft.com/office/drawing/2014/main" id="{DE61C98F-2724-440D-AD3F-E2AF8492DD37}"/>
               </a:ext>
             </a:extLst>
           </p:cNvPr>
@@ -10528,7 +10592,7 @@
           <p:cNvPr id="9" name="case-row-2">
             <a:extLst xmlns:a="http://schemas.openxmlformats.org/drawingml/2006/main">
               <a:ext uri="{FF2B5EF4-FFF2-40B4-BE49-F238E27FC236}">
-                <a16:creationId xmlns:a16="http://schemas.microsoft.com/office/drawing/2014/main" id="{C84A5C09-D45C-459C-BDBE-11CF878B00F9}"/>
+                <a16:creationId xmlns:a16="http://schemas.microsoft.com/office/drawing/2014/main" id="{F50921A3-A86B-4E10-877D-528A7450C993}"/>
               </a:ext>
             </a:extLst>
           </p:cNvPr>
@@ -10592,7 +10656,7 @@
           <p:cNvPr id="10" name="case-row-3">
             <a:extLst xmlns:a="http://schemas.openxmlformats.org/drawingml/2006/main">
               <a:ext uri="{FF2B5EF4-FFF2-40B4-BE49-F238E27FC236}">
-                <a16:creationId xmlns:a16="http://schemas.microsoft.com/office/drawing/2014/main" id="{9BF3B2E9-1CEE-4918-A842-C0947EE47E6A}"/>
+                <a16:creationId xmlns:a16="http://schemas.microsoft.com/office/drawing/2014/main" id="{FC82D116-716D-400A-8186-33CCF58CC58D}"/>
               </a:ext>
             </a:extLst>
           </p:cNvPr>
@@ -10616,7 +10680,7 @@
           </a:solidFill>
           <a:ln xmlns:a="http://schemas.openxmlformats.org/drawingml/2006/main" w="9525">
             <a:solidFill>
-              <a:srgbClr val="E5783F"/>
+              <a:srgbClr val="9A3F16"/>
             </a:solidFill>
             <a:prstDash val="solid"/>
           </a:ln>
@@ -10656,7 +10720,7 @@
           <p:cNvPr id="11" name="s9-takeaway-rule">
             <a:extLst xmlns:a="http://schemas.openxmlformats.org/drawingml/2006/main">
               <a:ext uri="{FF2B5EF4-FFF2-40B4-BE49-F238E27FC236}">
-                <a16:creationId xmlns:a16="http://schemas.microsoft.com/office/drawing/2014/main" id="{CA402D4B-B1FF-4992-8676-D4A7C9B18FD2}"/>
+                <a16:creationId xmlns:a16="http://schemas.microsoft.com/office/drawing/2014/main" id="{106953CE-43F1-4F3C-BA11-2C7922F7922D}"/>
               </a:ext>
             </a:extLst>
           </p:cNvPr>
@@ -10689,7 +10753,7 @@
           <p:cNvPr id="12" name="s9-takeaway">
             <a:extLst xmlns:a="http://schemas.openxmlformats.org/drawingml/2006/main">
               <a:ext uri="{FF2B5EF4-FFF2-40B4-BE49-F238E27FC236}">
-                <a16:creationId xmlns:a16="http://schemas.microsoft.com/office/drawing/2014/main" id="{79B2334A-3708-4F81-A213-089D8210B909}"/>
+                <a16:creationId xmlns:a16="http://schemas.microsoft.com/office/drawing/2014/main" id="{E5D407FE-624A-4FD7-9C3A-BAF891C69455}"/>
               </a:ext>
             </a:extLst>
           </p:cNvPr>
@@ -10745,7 +10809,7 @@
     </p:spTree>
     <p:extLst>
       <p:ext uri="{BB962C8B-B14F-4D97-AF65-F5344CB8AC3E}">
-        <p14:creationId xmlns:p14="http://schemas.microsoft.com/office/powerpoint/2010/main" val="1059093181"/>
+        <p14:creationId xmlns:p14="http://schemas.microsoft.com/office/powerpoint/2010/main" val="551000412"/>
       </p:ext>
     </p:extLst>
   </p:cSld>

--- a/docs/public/course-assets/course-pptx/in-004.pptx
+++ b/docs/public/course-assets/course-pptx/in-004.pptx
@@ -2,25 +2,25 @@
 <file path=ppt/presentation.xml><?xml version="1.0" encoding="utf-8"?>
 <p:presentation xmlns:p="http://schemas.openxmlformats.org/presentationml/2006/main">
   <p:sldMasterIdLst>
-    <p:sldMasterId xmlns:r="http://schemas.openxmlformats.org/officeDocument/2006/relationships" id="2147483648" r:id="R146f7099ab4a4f08"/>
+    <p:sldMasterId xmlns:r="http://schemas.openxmlformats.org/officeDocument/2006/relationships" id="2147483648" r:id="Rf40d8cf714ea4bd9"/>
   </p:sldMasterIdLst>
   <p:notesMasterIdLst>
-    <p:notesMasterId xmlns:r="http://schemas.openxmlformats.org/officeDocument/2006/relationships" r:id="Ra6b569d1dfc843e5"/>
+    <p:notesMasterId xmlns:r="http://schemas.openxmlformats.org/officeDocument/2006/relationships" r:id="R8737c1758a2f4198"/>
   </p:notesMasterIdLst>
   <p:sldIdLst>
-    <p:sldId xmlns:r="http://schemas.openxmlformats.org/officeDocument/2006/relationships" id="256" r:id="R33b777ee8e8f424a"/>
-    <p:sldId xmlns:r="http://schemas.openxmlformats.org/officeDocument/2006/relationships" id="257" r:id="R55960e817c434dc2"/>
-    <p:sldId xmlns:r="http://schemas.openxmlformats.org/officeDocument/2006/relationships" id="258" r:id="R6d301e9b4bb8453b"/>
-    <p:sldId xmlns:r="http://schemas.openxmlformats.org/officeDocument/2006/relationships" id="259" r:id="R881747e2a67e438f"/>
-    <p:sldId xmlns:r="http://schemas.openxmlformats.org/officeDocument/2006/relationships" id="260" r:id="R0633aca881ec4403"/>
-    <p:sldId xmlns:r="http://schemas.openxmlformats.org/officeDocument/2006/relationships" id="261" r:id="R7ac871a0e2e24bd4"/>
-    <p:sldId xmlns:r="http://schemas.openxmlformats.org/officeDocument/2006/relationships" id="262" r:id="R5568bc54984043e9"/>
-    <p:sldId xmlns:r="http://schemas.openxmlformats.org/officeDocument/2006/relationships" id="263" r:id="R11872e4bcd1346d0"/>
-    <p:sldId xmlns:r="http://schemas.openxmlformats.org/officeDocument/2006/relationships" id="264" r:id="R6ddfcba2a6d4416a"/>
-    <p:sldId xmlns:r="http://schemas.openxmlformats.org/officeDocument/2006/relationships" id="265" r:id="Rc7528dc438784767"/>
-    <p:sldId xmlns:r="http://schemas.openxmlformats.org/officeDocument/2006/relationships" id="266" r:id="R13d1ab25e55a4562"/>
-    <p:sldId xmlns:r="http://schemas.openxmlformats.org/officeDocument/2006/relationships" id="267" r:id="Ra06c051603a741fa"/>
-    <p:sldId xmlns:r="http://schemas.openxmlformats.org/officeDocument/2006/relationships" id="268" r:id="R1c49d56f403245ef"/>
+    <p:sldId xmlns:r="http://schemas.openxmlformats.org/officeDocument/2006/relationships" id="256" r:id="R9f2f0e6257cb4694"/>
+    <p:sldId xmlns:r="http://schemas.openxmlformats.org/officeDocument/2006/relationships" id="257" r:id="Rc1447b416b1d4603"/>
+    <p:sldId xmlns:r="http://schemas.openxmlformats.org/officeDocument/2006/relationships" id="258" r:id="R8b0c1d26891d4688"/>
+    <p:sldId xmlns:r="http://schemas.openxmlformats.org/officeDocument/2006/relationships" id="259" r:id="R9d9af3d027d64ccf"/>
+    <p:sldId xmlns:r="http://schemas.openxmlformats.org/officeDocument/2006/relationships" id="260" r:id="R2799288862bd44b1"/>
+    <p:sldId xmlns:r="http://schemas.openxmlformats.org/officeDocument/2006/relationships" id="261" r:id="R61a3a918a00b470e"/>
+    <p:sldId xmlns:r="http://schemas.openxmlformats.org/officeDocument/2006/relationships" id="262" r:id="R0f6b718f47634c9f"/>
+    <p:sldId xmlns:r="http://schemas.openxmlformats.org/officeDocument/2006/relationships" id="263" r:id="R5dee8a6ae87641ce"/>
+    <p:sldId xmlns:r="http://schemas.openxmlformats.org/officeDocument/2006/relationships" id="264" r:id="Racef31f6487242ca"/>
+    <p:sldId xmlns:r="http://schemas.openxmlformats.org/officeDocument/2006/relationships" id="265" r:id="R86de5a47fe8d4879"/>
+    <p:sldId xmlns:r="http://schemas.openxmlformats.org/officeDocument/2006/relationships" id="266" r:id="R426886db91464121"/>
+    <p:sldId xmlns:r="http://schemas.openxmlformats.org/officeDocument/2006/relationships" id="267" r:id="R378450942e884ede"/>
+    <p:sldId xmlns:r="http://schemas.openxmlformats.org/officeDocument/2006/relationships" id="268" r:id="R74b96f3b896945f3"/>
   </p:sldIdLst>
   <p:sldSz cx="12192000" cy="6858000"/>
   <p:notesSz cx="6858000" cy="9144000"/>
@@ -1405,7 +1405,7 @@
   </p:cSld>
   <p:clrMap bg1="lt1" tx1="dk1" bg2="lt2" tx2="dk2" accent1="accent1" accent2="accent2" accent3="accent3" accent4="accent4" accent5="accent5" accent6="accent6" hlink="hlink" folHlink="folHlink"/>
   <p:sldLayoutIdLst>
-    <p:sldLayoutId xmlns:r="http://schemas.openxmlformats.org/officeDocument/2006/relationships" id="2147483649" r:id="R656fb13b8aec4391"/>
+    <p:sldLayoutId xmlns:r="http://schemas.openxmlformats.org/officeDocument/2006/relationships" id="2147483649" r:id="R5bf3e801dd0f4ca9"/>
   </p:sldLayoutIdLst>
   <p:txStyles>
     <p:titleStyle>
@@ -1956,7 +1956,7 @@
           <p:cNvPr id="1" name="cover-rule">
             <a:extLst xmlns:a="http://schemas.openxmlformats.org/drawingml/2006/main">
               <a:ext uri="{FF2B5EF4-FFF2-40B4-BE49-F238E27FC236}">
-                <a16:creationId xmlns:a16="http://schemas.microsoft.com/office/drawing/2014/main" id="{26AF89E8-8675-4F8C-AAF7-EC89C07F8A66}"/>
+                <a16:creationId xmlns:a16="http://schemas.microsoft.com/office/drawing/2014/main" id="{4C19116C-7418-4540-AFA4-D4B45A39CC58}"/>
               </a:ext>
             </a:extLst>
           </p:cNvPr>
@@ -1989,7 +1989,7 @@
           <p:cNvPr id="2" name="cover-ring-1">
             <a:extLst xmlns:a="http://schemas.openxmlformats.org/drawingml/2006/main">
               <a:ext uri="{FF2B5EF4-FFF2-40B4-BE49-F238E27FC236}">
-                <a16:creationId xmlns:a16="http://schemas.microsoft.com/office/drawing/2014/main" id="{FE2B7D40-A27A-462D-85B6-C2B892B01980}"/>
+                <a16:creationId xmlns:a16="http://schemas.microsoft.com/office/drawing/2014/main" id="{A56572B7-7C6B-421D-9B9D-B57429D33C12}"/>
               </a:ext>
             </a:extLst>
           </p:cNvPr>
@@ -2020,7 +2020,7 @@
           <p:cNvPr id="3" name="cover-ring-2">
             <a:extLst xmlns:a="http://schemas.openxmlformats.org/drawingml/2006/main">
               <a:ext uri="{FF2B5EF4-FFF2-40B4-BE49-F238E27FC236}">
-                <a16:creationId xmlns:a16="http://schemas.microsoft.com/office/drawing/2014/main" id="{4A61A1C1-97C1-4F4A-A8E3-D7E70F2CF120}"/>
+                <a16:creationId xmlns:a16="http://schemas.microsoft.com/office/drawing/2014/main" id="{95AEF660-0856-4D8A-8505-88931DB978F6}"/>
               </a:ext>
             </a:extLst>
           </p:cNvPr>
@@ -2051,7 +2051,7 @@
           <p:cNvPr id="4" name="cover-core">
             <a:extLst xmlns:a="http://schemas.openxmlformats.org/drawingml/2006/main">
               <a:ext uri="{FF2B5EF4-FFF2-40B4-BE49-F238E27FC236}">
-                <a16:creationId xmlns:a16="http://schemas.microsoft.com/office/drawing/2014/main" id="{5D74164C-7283-4E82-85B0-C0D229FAEFC7}"/>
+                <a16:creationId xmlns:a16="http://schemas.microsoft.com/office/drawing/2014/main" id="{3C6AF810-C764-4BDA-97CA-35E209C08E31}"/>
               </a:ext>
             </a:extLst>
           </p:cNvPr>
@@ -2084,7 +2084,7 @@
           <p:cNvPr id="5" name="cover-line-1">
             <a:extLst xmlns:a="http://schemas.openxmlformats.org/drawingml/2006/main">
               <a:ext uri="{FF2B5EF4-FFF2-40B4-BE49-F238E27FC236}">
-                <a16:creationId xmlns:a16="http://schemas.microsoft.com/office/drawing/2014/main" id="{B2AF0C39-1CB7-47B2-A7BE-1590A7776518}"/>
+                <a16:creationId xmlns:a16="http://schemas.microsoft.com/office/drawing/2014/main" id="{072ED357-ABB4-4DFA-9628-E525AD94C3E7}"/>
               </a:ext>
             </a:extLst>
           </p:cNvPr>
@@ -2115,7 +2115,7 @@
           <p:cNvPr id="6" name="cover-line-2">
             <a:extLst xmlns:a="http://schemas.openxmlformats.org/drawingml/2006/main">
               <a:ext uri="{FF2B5EF4-FFF2-40B4-BE49-F238E27FC236}">
-                <a16:creationId xmlns:a16="http://schemas.microsoft.com/office/drawing/2014/main" id="{85669D1F-F5FD-4E54-A13C-7F30AE558E6B}"/>
+                <a16:creationId xmlns:a16="http://schemas.microsoft.com/office/drawing/2014/main" id="{86ABCD7B-095B-4211-BC74-89CB17B0AC25}"/>
               </a:ext>
             </a:extLst>
           </p:cNvPr>
@@ -2146,7 +2146,7 @@
           <p:cNvPr id="7" name="cover-eyebrow">
             <a:extLst xmlns:a="http://schemas.openxmlformats.org/drawingml/2006/main">
               <a:ext uri="{FF2B5EF4-FFF2-40B4-BE49-F238E27FC236}">
-                <a16:creationId xmlns:a16="http://schemas.microsoft.com/office/drawing/2014/main" id="{FF744179-F27D-47BC-8D81-F6DBB977E7BF}"/>
+                <a16:creationId xmlns:a16="http://schemas.microsoft.com/office/drawing/2014/main" id="{1CE01CE2-4681-4BB9-AB85-9992EBF14489}"/>
               </a:ext>
             </a:extLst>
           </p:cNvPr>
@@ -2204,7 +2204,7 @@
           <p:cNvPr id="8" name="cover-title">
             <a:extLst xmlns:a="http://schemas.openxmlformats.org/drawingml/2006/main">
               <a:ext uri="{FF2B5EF4-FFF2-40B4-BE49-F238E27FC236}">
-                <a16:creationId xmlns:a16="http://schemas.microsoft.com/office/drawing/2014/main" id="{B56B7198-7473-4C96-9B96-E38CDDA78A56}"/>
+                <a16:creationId xmlns:a16="http://schemas.microsoft.com/office/drawing/2014/main" id="{FEA40936-B698-4BA0-90B1-01F2C346A35C}"/>
               </a:ext>
             </a:extLst>
           </p:cNvPr>
@@ -2262,7 +2262,7 @@
           <p:cNvPr id="9" name="cover-subtitle">
             <a:extLst xmlns:a="http://schemas.openxmlformats.org/drawingml/2006/main">
               <a:ext uri="{FF2B5EF4-FFF2-40B4-BE49-F238E27FC236}">
-                <a16:creationId xmlns:a16="http://schemas.microsoft.com/office/drawing/2014/main" id="{83BED553-CF31-4709-A35A-B9A296D9923B}"/>
+                <a16:creationId xmlns:a16="http://schemas.microsoft.com/office/drawing/2014/main" id="{E9897F7D-EA02-4E6B-9D17-59A3502C0CE2}"/>
               </a:ext>
             </a:extLst>
           </p:cNvPr>
@@ -2324,7 +2324,7 @@
           <p:cNvPr id="10" name="cover-lead">
             <a:extLst xmlns:a="http://schemas.openxmlformats.org/drawingml/2006/main">
               <a:ext uri="{FF2B5EF4-FFF2-40B4-BE49-F238E27FC236}">
-                <a16:creationId xmlns:a16="http://schemas.microsoft.com/office/drawing/2014/main" id="{86FADFEE-FB38-4AEE-904B-EFFF676B4151}"/>
+                <a16:creationId xmlns:a16="http://schemas.microsoft.com/office/drawing/2014/main" id="{3A72F1C2-5AA4-4E95-8E00-78A0D40082A5}"/>
               </a:ext>
             </a:extLst>
           </p:cNvPr>
@@ -2382,7 +2382,7 @@
           <p:cNvPr id="11" name="cover-course">
             <a:extLst xmlns:a="http://schemas.openxmlformats.org/drawingml/2006/main">
               <a:ext uri="{FF2B5EF4-FFF2-40B4-BE49-F238E27FC236}">
-                <a16:creationId xmlns:a16="http://schemas.microsoft.com/office/drawing/2014/main" id="{43BE0092-79E4-4ED4-9F2E-F0D94FFC1319}"/>
+                <a16:creationId xmlns:a16="http://schemas.microsoft.com/office/drawing/2014/main" id="{CA667C6C-64F3-4E6E-A5EC-CF62507E7912}"/>
               </a:ext>
             </a:extLst>
           </p:cNvPr>
@@ -2440,7 +2440,7 @@
           <p:cNvPr id="12" name="cover-id">
             <a:extLst xmlns:a="http://schemas.openxmlformats.org/drawingml/2006/main">
               <a:ext uri="{FF2B5EF4-FFF2-40B4-BE49-F238E27FC236}">
-                <a16:creationId xmlns:a16="http://schemas.microsoft.com/office/drawing/2014/main" id="{FB0458EE-B9A1-4072-9306-467CFA351EB3}"/>
+                <a16:creationId xmlns:a16="http://schemas.microsoft.com/office/drawing/2014/main" id="{9044DD7B-66DC-4746-BE62-D0C7E7FB2B8E}"/>
               </a:ext>
             </a:extLst>
           </p:cNvPr>
@@ -2496,7 +2496,7 @@
     </p:spTree>
     <p:extLst>
       <p:ext uri="{BB962C8B-B14F-4D97-AF65-F5344CB8AC3E}">
-        <p14:creationId xmlns:p14="http://schemas.microsoft.com/office/powerpoint/2010/main" val="2042954268"/>
+        <p14:creationId xmlns:p14="http://schemas.microsoft.com/office/powerpoint/2010/main" val="1870314280"/>
       </p:ext>
     </p:extLst>
   </p:cSld>
@@ -2527,7 +2527,7 @@
           <p:cNvPr id="1" name="s10-rule">
             <a:extLst xmlns:a="http://schemas.openxmlformats.org/drawingml/2006/main">
               <a:ext uri="{FF2B5EF4-FFF2-40B4-BE49-F238E27FC236}">
-                <a16:creationId xmlns:a16="http://schemas.microsoft.com/office/drawing/2014/main" id="{D6230D22-F6FD-4323-98FC-DB5783411579}"/>
+                <a16:creationId xmlns:a16="http://schemas.microsoft.com/office/drawing/2014/main" id="{E0EB2C88-B999-4112-9318-F15C1A073A03}"/>
               </a:ext>
             </a:extLst>
           </p:cNvPr>
@@ -2560,7 +2560,7 @@
           <p:cNvPr id="2" name="s10-eyebrow">
             <a:extLst xmlns:a="http://schemas.openxmlformats.org/drawingml/2006/main">
               <a:ext uri="{FF2B5EF4-FFF2-40B4-BE49-F238E27FC236}">
-                <a16:creationId xmlns:a16="http://schemas.microsoft.com/office/drawing/2014/main" id="{9BB575D3-6819-49AE-B4E0-E3B43D8ABA3F}"/>
+                <a16:creationId xmlns:a16="http://schemas.microsoft.com/office/drawing/2014/main" id="{19087818-F0BF-4491-A4E2-C829124EB2C6}"/>
               </a:ext>
             </a:extLst>
           </p:cNvPr>
@@ -2618,7 +2618,7 @@
           <p:cNvPr id="3" name="s10-title">
             <a:extLst xmlns:a="http://schemas.openxmlformats.org/drawingml/2006/main">
               <a:ext uri="{FF2B5EF4-FFF2-40B4-BE49-F238E27FC236}">
-                <a16:creationId xmlns:a16="http://schemas.microsoft.com/office/drawing/2014/main" id="{3271793C-E1E6-4080-B3EC-5702410C87C8}"/>
+                <a16:creationId xmlns:a16="http://schemas.microsoft.com/office/drawing/2014/main" id="{A00EF41F-B855-4A2B-B0FC-F938FF846FAA}"/>
               </a:ext>
             </a:extLst>
           </p:cNvPr>
@@ -2676,7 +2676,7 @@
           <p:cNvPr id="4" name="s10-footer">
             <a:extLst xmlns:a="http://schemas.openxmlformats.org/drawingml/2006/main">
               <a:ext uri="{FF2B5EF4-FFF2-40B4-BE49-F238E27FC236}">
-                <a16:creationId xmlns:a16="http://schemas.microsoft.com/office/drawing/2014/main" id="{59C3FF27-222B-4562-9332-BC81D6589C91}"/>
+                <a16:creationId xmlns:a16="http://schemas.microsoft.com/office/drawing/2014/main" id="{D6F261D5-5275-40D8-B8EC-97F32E9FC005}"/>
               </a:ext>
             </a:extLst>
           </p:cNvPr>
@@ -2707,7 +2707,7 @@
           <p:cNvPr id="5" name="s10-identity">
             <a:extLst xmlns:a="http://schemas.openxmlformats.org/drawingml/2006/main">
               <a:ext uri="{FF2B5EF4-FFF2-40B4-BE49-F238E27FC236}">
-                <a16:creationId xmlns:a16="http://schemas.microsoft.com/office/drawing/2014/main" id="{B765C0CB-BA8C-4857-96BA-A1A212A67758}"/>
+                <a16:creationId xmlns:a16="http://schemas.microsoft.com/office/drawing/2014/main" id="{993B6C66-CA2C-4668-AA96-37FAA93077EE}"/>
               </a:ext>
             </a:extLst>
           </p:cNvPr>
@@ -2765,7 +2765,7 @@
           <p:cNvPr id="6" name="case-title">
             <a:extLst xmlns:a="http://schemas.openxmlformats.org/drawingml/2006/main">
               <a:ext uri="{FF2B5EF4-FFF2-40B4-BE49-F238E27FC236}">
-                <a16:creationId xmlns:a16="http://schemas.microsoft.com/office/drawing/2014/main" id="{7959DCDA-25E0-402C-8804-FAD8DDEBCCC0}"/>
+                <a16:creationId xmlns:a16="http://schemas.microsoft.com/office/drawing/2014/main" id="{9AD451C0-DB13-4E2D-A135-634AD0EED69C}"/>
               </a:ext>
             </a:extLst>
           </p:cNvPr>
@@ -2829,7 +2829,7 @@
           <p:cNvPr id="7" name="case-row-0">
             <a:extLst xmlns:a="http://schemas.openxmlformats.org/drawingml/2006/main">
               <a:ext uri="{FF2B5EF4-FFF2-40B4-BE49-F238E27FC236}">
-                <a16:creationId xmlns:a16="http://schemas.microsoft.com/office/drawing/2014/main" id="{F2C29F6F-5914-44CE-B381-5C725ED4FB30}"/>
+                <a16:creationId xmlns:a16="http://schemas.microsoft.com/office/drawing/2014/main" id="{255F8D78-ED11-4321-9CE2-C18DA3CE1390}"/>
               </a:ext>
             </a:extLst>
           </p:cNvPr>
@@ -2893,7 +2893,7 @@
           <p:cNvPr id="8" name="case-row-1">
             <a:extLst xmlns:a="http://schemas.openxmlformats.org/drawingml/2006/main">
               <a:ext uri="{FF2B5EF4-FFF2-40B4-BE49-F238E27FC236}">
-                <a16:creationId xmlns:a16="http://schemas.microsoft.com/office/drawing/2014/main" id="{03BA37D0-C26F-49EB-B934-2982B70060EA}"/>
+                <a16:creationId xmlns:a16="http://schemas.microsoft.com/office/drawing/2014/main" id="{952E639F-6FB2-42A1-90BC-21D912E9C65C}"/>
               </a:ext>
             </a:extLst>
           </p:cNvPr>
@@ -2957,7 +2957,7 @@
           <p:cNvPr id="9" name="case-row-2">
             <a:extLst xmlns:a="http://schemas.openxmlformats.org/drawingml/2006/main">
               <a:ext uri="{FF2B5EF4-FFF2-40B4-BE49-F238E27FC236}">
-                <a16:creationId xmlns:a16="http://schemas.microsoft.com/office/drawing/2014/main" id="{FF0D33B2-9D04-41D6-8B37-993995A739D6}"/>
+                <a16:creationId xmlns:a16="http://schemas.microsoft.com/office/drawing/2014/main" id="{196F846F-35FC-4788-9C53-760876507E59}"/>
               </a:ext>
             </a:extLst>
           </p:cNvPr>
@@ -3021,7 +3021,7 @@
           <p:cNvPr id="10" name="s10-takeaway-rule">
             <a:extLst xmlns:a="http://schemas.openxmlformats.org/drawingml/2006/main">
               <a:ext uri="{FF2B5EF4-FFF2-40B4-BE49-F238E27FC236}">
-                <a16:creationId xmlns:a16="http://schemas.microsoft.com/office/drawing/2014/main" id="{0AF213C0-B048-454A-9030-54248F6B80A6}"/>
+                <a16:creationId xmlns:a16="http://schemas.microsoft.com/office/drawing/2014/main" id="{F3BAC517-F261-4086-8F86-9166B917596B}"/>
               </a:ext>
             </a:extLst>
           </p:cNvPr>
@@ -3054,7 +3054,7 @@
           <p:cNvPr id="11" name="s10-takeaway">
             <a:extLst xmlns:a="http://schemas.openxmlformats.org/drawingml/2006/main">
               <a:ext uri="{FF2B5EF4-FFF2-40B4-BE49-F238E27FC236}">
-                <a16:creationId xmlns:a16="http://schemas.microsoft.com/office/drawing/2014/main" id="{81A4F5C6-C365-46F1-8BA6-20F02EDF507F}"/>
+                <a16:creationId xmlns:a16="http://schemas.microsoft.com/office/drawing/2014/main" id="{F0FC9629-B5D1-44E5-8C5C-494AFA42B0B9}"/>
               </a:ext>
             </a:extLst>
           </p:cNvPr>
@@ -3110,7 +3110,7 @@
     </p:spTree>
     <p:extLst>
       <p:ext uri="{BB962C8B-B14F-4D97-AF65-F5344CB8AC3E}">
-        <p14:creationId xmlns:p14="http://schemas.microsoft.com/office/powerpoint/2010/main" val="1252928902"/>
+        <p14:creationId xmlns:p14="http://schemas.microsoft.com/office/powerpoint/2010/main" val="281050355"/>
       </p:ext>
     </p:extLst>
   </p:cSld>
@@ -3141,7 +3141,7 @@
           <p:cNvPr id="1" name="s11-rule">
             <a:extLst xmlns:a="http://schemas.openxmlformats.org/drawingml/2006/main">
               <a:ext uri="{FF2B5EF4-FFF2-40B4-BE49-F238E27FC236}">
-                <a16:creationId xmlns:a16="http://schemas.microsoft.com/office/drawing/2014/main" id="{45B2ABDE-0C2B-48B5-A430-683E9CDE1D63}"/>
+                <a16:creationId xmlns:a16="http://schemas.microsoft.com/office/drawing/2014/main" id="{6D7329CF-166E-42BE-AB32-E26E91760D5D}"/>
               </a:ext>
             </a:extLst>
           </p:cNvPr>
@@ -3174,7 +3174,7 @@
           <p:cNvPr id="2" name="s11-eyebrow">
             <a:extLst xmlns:a="http://schemas.openxmlformats.org/drawingml/2006/main">
               <a:ext uri="{FF2B5EF4-FFF2-40B4-BE49-F238E27FC236}">
-                <a16:creationId xmlns:a16="http://schemas.microsoft.com/office/drawing/2014/main" id="{0FB25FBA-950E-459C-B7B7-A2DDDFEDD164}"/>
+                <a16:creationId xmlns:a16="http://schemas.microsoft.com/office/drawing/2014/main" id="{3AC96DD3-087C-499D-977A-F1B66C924457}"/>
               </a:ext>
             </a:extLst>
           </p:cNvPr>
@@ -3232,7 +3232,7 @@
           <p:cNvPr id="3" name="s11-title">
             <a:extLst xmlns:a="http://schemas.openxmlformats.org/drawingml/2006/main">
               <a:ext uri="{FF2B5EF4-FFF2-40B4-BE49-F238E27FC236}">
-                <a16:creationId xmlns:a16="http://schemas.microsoft.com/office/drawing/2014/main" id="{BDC56283-C51E-40EA-9549-84BDEF5037E9}"/>
+                <a16:creationId xmlns:a16="http://schemas.microsoft.com/office/drawing/2014/main" id="{F1A6D89E-84EF-409B-A644-0C6A9542EDEB}"/>
               </a:ext>
             </a:extLst>
           </p:cNvPr>
@@ -3290,7 +3290,7 @@
           <p:cNvPr id="4" name="s11-footer">
             <a:extLst xmlns:a="http://schemas.openxmlformats.org/drawingml/2006/main">
               <a:ext uri="{FF2B5EF4-FFF2-40B4-BE49-F238E27FC236}">
-                <a16:creationId xmlns:a16="http://schemas.microsoft.com/office/drawing/2014/main" id="{B571AA19-0C15-424E-B910-20EB93E51683}"/>
+                <a16:creationId xmlns:a16="http://schemas.microsoft.com/office/drawing/2014/main" id="{AAEE7D6E-36AE-4AB6-B756-C1245C22AEF1}"/>
               </a:ext>
             </a:extLst>
           </p:cNvPr>
@@ -3321,7 +3321,7 @@
           <p:cNvPr id="5" name="s11-identity">
             <a:extLst xmlns:a="http://schemas.openxmlformats.org/drawingml/2006/main">
               <a:ext uri="{FF2B5EF4-FFF2-40B4-BE49-F238E27FC236}">
-                <a16:creationId xmlns:a16="http://schemas.microsoft.com/office/drawing/2014/main" id="{3C4706D5-29EF-48AB-9950-5B3EDD4A6D18}"/>
+                <a16:creationId xmlns:a16="http://schemas.microsoft.com/office/drawing/2014/main" id="{A19C9AC9-1F14-42C7-B524-78D6557A58B2}"/>
               </a:ext>
             </a:extLst>
           </p:cNvPr>
@@ -3379,7 +3379,7 @@
           <p:cNvPr id="6" name="practice-circle-0">
             <a:extLst xmlns:a="http://schemas.openxmlformats.org/drawingml/2006/main">
               <a:ext uri="{FF2B5EF4-FFF2-40B4-BE49-F238E27FC236}">
-                <a16:creationId xmlns:a16="http://schemas.microsoft.com/office/drawing/2014/main" id="{764FA457-5A7D-466A-9FDD-60E0A98679DB}"/>
+                <a16:creationId xmlns:a16="http://schemas.microsoft.com/office/drawing/2014/main" id="{519FEF40-6449-4568-B827-2865C39C834C}"/>
               </a:ext>
             </a:extLst>
           </p:cNvPr>
@@ -3412,7 +3412,7 @@
           <p:cNvPr id="7" name="practice-number-0">
             <a:extLst xmlns:a="http://schemas.openxmlformats.org/drawingml/2006/main">
               <a:ext uri="{FF2B5EF4-FFF2-40B4-BE49-F238E27FC236}">
-                <a16:creationId xmlns:a16="http://schemas.microsoft.com/office/drawing/2014/main" id="{E03A1E11-DF8B-4805-8E3E-E65D56D8EBED}"/>
+                <a16:creationId xmlns:a16="http://schemas.microsoft.com/office/drawing/2014/main" id="{C9BD56DD-F34A-4FC2-B822-857303C0B687}"/>
               </a:ext>
             </a:extLst>
           </p:cNvPr>
@@ -3470,7 +3470,7 @@
           <p:cNvPr id="8" name="practice-item-0">
             <a:extLst xmlns:a="http://schemas.openxmlformats.org/drawingml/2006/main">
               <a:ext uri="{FF2B5EF4-FFF2-40B4-BE49-F238E27FC236}">
-                <a16:creationId xmlns:a16="http://schemas.microsoft.com/office/drawing/2014/main" id="{5C59441D-FE6F-4285-9EA3-9012EA81CF7A}"/>
+                <a16:creationId xmlns:a16="http://schemas.microsoft.com/office/drawing/2014/main" id="{EDA3CAA3-85FE-43E4-BDE7-FA84BC2DCC88}"/>
               </a:ext>
             </a:extLst>
           </p:cNvPr>
@@ -3534,7 +3534,7 @@
           <p:cNvPr id="9" name="practice-connector-0">
             <a:extLst xmlns:a="http://schemas.openxmlformats.org/drawingml/2006/main">
               <a:ext uri="{FF2B5EF4-FFF2-40B4-BE49-F238E27FC236}">
-                <a16:creationId xmlns:a16="http://schemas.microsoft.com/office/drawing/2014/main" id="{0DE7D96C-A5FC-4840-AF2C-945AB6F41548}"/>
+                <a16:creationId xmlns:a16="http://schemas.microsoft.com/office/drawing/2014/main" id="{AD81FB1D-9A08-40D7-839B-B331E9CE6523}"/>
               </a:ext>
             </a:extLst>
           </p:cNvPr>
@@ -3565,7 +3565,7 @@
           <p:cNvPr id="10" name="practice-circle-1">
             <a:extLst xmlns:a="http://schemas.openxmlformats.org/drawingml/2006/main">
               <a:ext uri="{FF2B5EF4-FFF2-40B4-BE49-F238E27FC236}">
-                <a16:creationId xmlns:a16="http://schemas.microsoft.com/office/drawing/2014/main" id="{712BF712-8518-4BBF-8FA5-AEF6DEB0910C}"/>
+                <a16:creationId xmlns:a16="http://schemas.microsoft.com/office/drawing/2014/main" id="{4DCD9D37-0837-4D0A-A149-AF2F04B7EA5C}"/>
               </a:ext>
             </a:extLst>
           </p:cNvPr>
@@ -3598,7 +3598,7 @@
           <p:cNvPr id="11" name="practice-number-1">
             <a:extLst xmlns:a="http://schemas.openxmlformats.org/drawingml/2006/main">
               <a:ext uri="{FF2B5EF4-FFF2-40B4-BE49-F238E27FC236}">
-                <a16:creationId xmlns:a16="http://schemas.microsoft.com/office/drawing/2014/main" id="{716E3AEF-1552-469D-9ACD-6D99917B710C}"/>
+                <a16:creationId xmlns:a16="http://schemas.microsoft.com/office/drawing/2014/main" id="{81CEBBCE-4D95-487D-A232-619160F1886B}"/>
               </a:ext>
             </a:extLst>
           </p:cNvPr>
@@ -3656,7 +3656,7 @@
           <p:cNvPr id="12" name="practice-item-1">
             <a:extLst xmlns:a="http://schemas.openxmlformats.org/drawingml/2006/main">
               <a:ext uri="{FF2B5EF4-FFF2-40B4-BE49-F238E27FC236}">
-                <a16:creationId xmlns:a16="http://schemas.microsoft.com/office/drawing/2014/main" id="{4CB1A673-23D4-4CD5-8F1E-69A62188A7FD}"/>
+                <a16:creationId xmlns:a16="http://schemas.microsoft.com/office/drawing/2014/main" id="{A817BB15-B112-4173-B9C1-6B2D38B59F7B}"/>
               </a:ext>
             </a:extLst>
           </p:cNvPr>
@@ -3720,7 +3720,7 @@
           <p:cNvPr id="13" name="practice-connector-1">
             <a:extLst xmlns:a="http://schemas.openxmlformats.org/drawingml/2006/main">
               <a:ext uri="{FF2B5EF4-FFF2-40B4-BE49-F238E27FC236}">
-                <a16:creationId xmlns:a16="http://schemas.microsoft.com/office/drawing/2014/main" id="{993D88B9-AAD5-4471-9304-56F192264B94}"/>
+                <a16:creationId xmlns:a16="http://schemas.microsoft.com/office/drawing/2014/main" id="{F8B2C55F-F0A8-475E-951C-3093595CB199}"/>
               </a:ext>
             </a:extLst>
           </p:cNvPr>
@@ -3751,7 +3751,7 @@
           <p:cNvPr id="14" name="practice-circle-2">
             <a:extLst xmlns:a="http://schemas.openxmlformats.org/drawingml/2006/main">
               <a:ext uri="{FF2B5EF4-FFF2-40B4-BE49-F238E27FC236}">
-                <a16:creationId xmlns:a16="http://schemas.microsoft.com/office/drawing/2014/main" id="{D9F1329A-95A1-4984-8E62-D0899AC6678B}"/>
+                <a16:creationId xmlns:a16="http://schemas.microsoft.com/office/drawing/2014/main" id="{10DB6194-2EC2-4D31-B7C2-5562E3EDA608}"/>
               </a:ext>
             </a:extLst>
           </p:cNvPr>
@@ -3784,7 +3784,7 @@
           <p:cNvPr id="15" name="practice-number-2">
             <a:extLst xmlns:a="http://schemas.openxmlformats.org/drawingml/2006/main">
               <a:ext uri="{FF2B5EF4-FFF2-40B4-BE49-F238E27FC236}">
-                <a16:creationId xmlns:a16="http://schemas.microsoft.com/office/drawing/2014/main" id="{A8A07064-31D5-45BB-AE46-431EF350AF01}"/>
+                <a16:creationId xmlns:a16="http://schemas.microsoft.com/office/drawing/2014/main" id="{255DC55A-CE3A-4C07-9758-BED2ED98899C}"/>
               </a:ext>
             </a:extLst>
           </p:cNvPr>
@@ -3842,7 +3842,7 @@
           <p:cNvPr id="16" name="practice-item-2">
             <a:extLst xmlns:a="http://schemas.openxmlformats.org/drawingml/2006/main">
               <a:ext uri="{FF2B5EF4-FFF2-40B4-BE49-F238E27FC236}">
-                <a16:creationId xmlns:a16="http://schemas.microsoft.com/office/drawing/2014/main" id="{A421594B-5917-45C4-B879-F4325AA73427}"/>
+                <a16:creationId xmlns:a16="http://schemas.microsoft.com/office/drawing/2014/main" id="{BA7B0B69-4A13-4E55-8B92-0439D2819FA8}"/>
               </a:ext>
             </a:extLst>
           </p:cNvPr>
@@ -3904,7 +3904,7 @@
     </p:spTree>
     <p:extLst>
       <p:ext uri="{BB962C8B-B14F-4D97-AF65-F5344CB8AC3E}">
-        <p14:creationId xmlns:p14="http://schemas.microsoft.com/office/powerpoint/2010/main" val="768399367"/>
+        <p14:creationId xmlns:p14="http://schemas.microsoft.com/office/powerpoint/2010/main" val="903487001"/>
       </p:ext>
     </p:extLst>
   </p:cSld>
@@ -3935,7 +3935,7 @@
           <p:cNvPr id="1" name="s12-rule">
             <a:extLst xmlns:a="http://schemas.openxmlformats.org/drawingml/2006/main">
               <a:ext uri="{FF2B5EF4-FFF2-40B4-BE49-F238E27FC236}">
-                <a16:creationId xmlns:a16="http://schemas.microsoft.com/office/drawing/2014/main" id="{4D12090B-EA7E-4A52-A78C-5A212C121FEA}"/>
+                <a16:creationId xmlns:a16="http://schemas.microsoft.com/office/drawing/2014/main" id="{E7B6BA9A-8D22-43AB-A74F-4243BB785EE9}"/>
               </a:ext>
             </a:extLst>
           </p:cNvPr>
@@ -3968,7 +3968,7 @@
           <p:cNvPr id="2" name="s12-eyebrow">
             <a:extLst xmlns:a="http://schemas.openxmlformats.org/drawingml/2006/main">
               <a:ext uri="{FF2B5EF4-FFF2-40B4-BE49-F238E27FC236}">
-                <a16:creationId xmlns:a16="http://schemas.microsoft.com/office/drawing/2014/main" id="{72908597-7DDC-455C-BA9B-76C620ECF825}"/>
+                <a16:creationId xmlns:a16="http://schemas.microsoft.com/office/drawing/2014/main" id="{A107D163-44AC-4AFE-BBBB-7F49998CE472}"/>
               </a:ext>
             </a:extLst>
           </p:cNvPr>
@@ -4026,7 +4026,7 @@
           <p:cNvPr id="3" name="s12-title">
             <a:extLst xmlns:a="http://schemas.openxmlformats.org/drawingml/2006/main">
               <a:ext uri="{FF2B5EF4-FFF2-40B4-BE49-F238E27FC236}">
-                <a16:creationId xmlns:a16="http://schemas.microsoft.com/office/drawing/2014/main" id="{90B1062A-C2C3-4181-B354-3A3730E6F57F}"/>
+                <a16:creationId xmlns:a16="http://schemas.microsoft.com/office/drawing/2014/main" id="{D9AFBDF5-A6CD-4B97-8D48-2485EA63CC31}"/>
               </a:ext>
             </a:extLst>
           </p:cNvPr>
@@ -4084,7 +4084,7 @@
           <p:cNvPr id="4" name="s12-footer">
             <a:extLst xmlns:a="http://schemas.openxmlformats.org/drawingml/2006/main">
               <a:ext uri="{FF2B5EF4-FFF2-40B4-BE49-F238E27FC236}">
-                <a16:creationId xmlns:a16="http://schemas.microsoft.com/office/drawing/2014/main" id="{434B7B83-2374-4B09-88DB-81FACA2DF1AD}"/>
+                <a16:creationId xmlns:a16="http://schemas.microsoft.com/office/drawing/2014/main" id="{43A30786-C90E-4E48-A6C4-5C972CE162D9}"/>
               </a:ext>
             </a:extLst>
           </p:cNvPr>
@@ -4115,7 +4115,7 @@
           <p:cNvPr id="5" name="s12-identity">
             <a:extLst xmlns:a="http://schemas.openxmlformats.org/drawingml/2006/main">
               <a:ext uri="{FF2B5EF4-FFF2-40B4-BE49-F238E27FC236}">
-                <a16:creationId xmlns:a16="http://schemas.microsoft.com/office/drawing/2014/main" id="{585392E5-296D-440E-AFD8-541DA9AB56AD}"/>
+                <a16:creationId xmlns:a16="http://schemas.microsoft.com/office/drawing/2014/main" id="{2EB2327F-CC57-4BF8-9272-409CC853C7CB}"/>
               </a:ext>
             </a:extLst>
           </p:cNvPr>
@@ -4173,7 +4173,7 @@
           <p:cNvPr id="6" name="recap-circle-0">
             <a:extLst xmlns:a="http://schemas.openxmlformats.org/drawingml/2006/main">
               <a:ext uri="{FF2B5EF4-FFF2-40B4-BE49-F238E27FC236}">
-                <a16:creationId xmlns:a16="http://schemas.microsoft.com/office/drawing/2014/main" id="{F2138556-7326-454E-B44F-939ADF8BA838}"/>
+                <a16:creationId xmlns:a16="http://schemas.microsoft.com/office/drawing/2014/main" id="{18E60093-8063-4327-8F96-E06EBDDF5A9B}"/>
               </a:ext>
             </a:extLst>
           </p:cNvPr>
@@ -4206,7 +4206,7 @@
           <p:cNvPr id="7" name="recap-number-0">
             <a:extLst xmlns:a="http://schemas.openxmlformats.org/drawingml/2006/main">
               <a:ext uri="{FF2B5EF4-FFF2-40B4-BE49-F238E27FC236}">
-                <a16:creationId xmlns:a16="http://schemas.microsoft.com/office/drawing/2014/main" id="{59E00802-B2F5-4FB1-A66A-B8604E75C042}"/>
+                <a16:creationId xmlns:a16="http://schemas.microsoft.com/office/drawing/2014/main" id="{C1653A09-F4A8-463D-8086-DBA9F522A5D5}"/>
               </a:ext>
             </a:extLst>
           </p:cNvPr>
@@ -4264,7 +4264,7 @@
           <p:cNvPr id="8" name="recap-item-0">
             <a:extLst xmlns:a="http://schemas.openxmlformats.org/drawingml/2006/main">
               <a:ext uri="{FF2B5EF4-FFF2-40B4-BE49-F238E27FC236}">
-                <a16:creationId xmlns:a16="http://schemas.microsoft.com/office/drawing/2014/main" id="{C8E6379E-1F24-46CC-8BDB-51CE6B15171C}"/>
+                <a16:creationId xmlns:a16="http://schemas.microsoft.com/office/drawing/2014/main" id="{446EA3A8-B469-42E5-B4A5-3889AC0DBBA9}"/>
               </a:ext>
             </a:extLst>
           </p:cNvPr>
@@ -4328,7 +4328,7 @@
           <p:cNvPr id="9" name="recap-connector-0">
             <a:extLst xmlns:a="http://schemas.openxmlformats.org/drawingml/2006/main">
               <a:ext uri="{FF2B5EF4-FFF2-40B4-BE49-F238E27FC236}">
-                <a16:creationId xmlns:a16="http://schemas.microsoft.com/office/drawing/2014/main" id="{47C568E2-7914-45F2-BB66-DC7EB7C1B92D}"/>
+                <a16:creationId xmlns:a16="http://schemas.microsoft.com/office/drawing/2014/main" id="{668E3245-AD08-4C96-AE35-91F43C65692F}"/>
               </a:ext>
             </a:extLst>
           </p:cNvPr>
@@ -4359,7 +4359,7 @@
           <p:cNvPr id="10" name="recap-circle-1">
             <a:extLst xmlns:a="http://schemas.openxmlformats.org/drawingml/2006/main">
               <a:ext uri="{FF2B5EF4-FFF2-40B4-BE49-F238E27FC236}">
-                <a16:creationId xmlns:a16="http://schemas.microsoft.com/office/drawing/2014/main" id="{2733458E-13AC-4004-A58B-237321120B5B}"/>
+                <a16:creationId xmlns:a16="http://schemas.microsoft.com/office/drawing/2014/main" id="{53FD12D6-103C-4092-B626-E6115A9389FC}"/>
               </a:ext>
             </a:extLst>
           </p:cNvPr>
@@ -4392,7 +4392,7 @@
           <p:cNvPr id="11" name="recap-number-1">
             <a:extLst xmlns:a="http://schemas.openxmlformats.org/drawingml/2006/main">
               <a:ext uri="{FF2B5EF4-FFF2-40B4-BE49-F238E27FC236}">
-                <a16:creationId xmlns:a16="http://schemas.microsoft.com/office/drawing/2014/main" id="{37C9325C-9EAF-4E4C-B345-8741821D7164}"/>
+                <a16:creationId xmlns:a16="http://schemas.microsoft.com/office/drawing/2014/main" id="{6C9C7B27-1C24-40A6-912D-CB2FC4179E30}"/>
               </a:ext>
             </a:extLst>
           </p:cNvPr>
@@ -4450,7 +4450,7 @@
           <p:cNvPr id="12" name="recap-item-1">
             <a:extLst xmlns:a="http://schemas.openxmlformats.org/drawingml/2006/main">
               <a:ext uri="{FF2B5EF4-FFF2-40B4-BE49-F238E27FC236}">
-                <a16:creationId xmlns:a16="http://schemas.microsoft.com/office/drawing/2014/main" id="{E744CBDD-3503-4EE8-B513-05D53E28AE93}"/>
+                <a16:creationId xmlns:a16="http://schemas.microsoft.com/office/drawing/2014/main" id="{F59AD0E5-2FF7-429C-B8FB-1EDBB08C4993}"/>
               </a:ext>
             </a:extLst>
           </p:cNvPr>
@@ -4514,7 +4514,7 @@
           <p:cNvPr id="13" name="recap-connector-1">
             <a:extLst xmlns:a="http://schemas.openxmlformats.org/drawingml/2006/main">
               <a:ext uri="{FF2B5EF4-FFF2-40B4-BE49-F238E27FC236}">
-                <a16:creationId xmlns:a16="http://schemas.microsoft.com/office/drawing/2014/main" id="{579CFC9D-86C3-4AFA-9A70-CB0DEDD38C99}"/>
+                <a16:creationId xmlns:a16="http://schemas.microsoft.com/office/drawing/2014/main" id="{628D8E5D-1018-47EC-840A-0072B5705A85}"/>
               </a:ext>
             </a:extLst>
           </p:cNvPr>
@@ -4545,7 +4545,7 @@
           <p:cNvPr id="14" name="recap-circle-2">
             <a:extLst xmlns:a="http://schemas.openxmlformats.org/drawingml/2006/main">
               <a:ext uri="{FF2B5EF4-FFF2-40B4-BE49-F238E27FC236}">
-                <a16:creationId xmlns:a16="http://schemas.microsoft.com/office/drawing/2014/main" id="{149879D2-5F64-4687-8879-50C4BC1AD2DB}"/>
+                <a16:creationId xmlns:a16="http://schemas.microsoft.com/office/drawing/2014/main" id="{2847337D-C8D2-41B2-9805-F05BB3E772CB}"/>
               </a:ext>
             </a:extLst>
           </p:cNvPr>
@@ -4578,7 +4578,7 @@
           <p:cNvPr id="15" name="recap-number-2">
             <a:extLst xmlns:a="http://schemas.openxmlformats.org/drawingml/2006/main">
               <a:ext uri="{FF2B5EF4-FFF2-40B4-BE49-F238E27FC236}">
-                <a16:creationId xmlns:a16="http://schemas.microsoft.com/office/drawing/2014/main" id="{69CBD424-34F1-49AA-9568-ADA128D5E93E}"/>
+                <a16:creationId xmlns:a16="http://schemas.microsoft.com/office/drawing/2014/main" id="{3F5305B1-1AD3-491A-8528-89C06B5F758D}"/>
               </a:ext>
             </a:extLst>
           </p:cNvPr>
@@ -4636,7 +4636,7 @@
           <p:cNvPr id="16" name="recap-item-2">
             <a:extLst xmlns:a="http://schemas.openxmlformats.org/drawingml/2006/main">
               <a:ext uri="{FF2B5EF4-FFF2-40B4-BE49-F238E27FC236}">
-                <a16:creationId xmlns:a16="http://schemas.microsoft.com/office/drawing/2014/main" id="{47A455F2-30CA-485A-877D-329ABBFDA133}"/>
+                <a16:creationId xmlns:a16="http://schemas.microsoft.com/office/drawing/2014/main" id="{EC37883B-EE0F-419F-9351-C078B89994E5}"/>
               </a:ext>
             </a:extLst>
           </p:cNvPr>
@@ -4698,7 +4698,7 @@
     </p:spTree>
     <p:extLst>
       <p:ext uri="{BB962C8B-B14F-4D97-AF65-F5344CB8AC3E}">
-        <p14:creationId xmlns:p14="http://schemas.microsoft.com/office/powerpoint/2010/main" val="1021809459"/>
+        <p14:creationId xmlns:p14="http://schemas.microsoft.com/office/powerpoint/2010/main" val="417536550"/>
       </p:ext>
     </p:extLst>
   </p:cSld>
@@ -4729,7 +4729,7 @@
           <p:cNvPr id="1" name="s13-rule">
             <a:extLst xmlns:a="http://schemas.openxmlformats.org/drawingml/2006/main">
               <a:ext uri="{FF2B5EF4-FFF2-40B4-BE49-F238E27FC236}">
-                <a16:creationId xmlns:a16="http://schemas.microsoft.com/office/drawing/2014/main" id="{440CDDB0-74BA-42F0-A58D-59B9BBA2B2EE}"/>
+                <a16:creationId xmlns:a16="http://schemas.microsoft.com/office/drawing/2014/main" id="{5CF0E079-C9BD-40D8-A431-78373D11F76B}"/>
               </a:ext>
             </a:extLst>
           </p:cNvPr>
@@ -4762,7 +4762,7 @@
           <p:cNvPr id="2" name="s13-eyebrow">
             <a:extLst xmlns:a="http://schemas.openxmlformats.org/drawingml/2006/main">
               <a:ext uri="{FF2B5EF4-FFF2-40B4-BE49-F238E27FC236}">
-                <a16:creationId xmlns:a16="http://schemas.microsoft.com/office/drawing/2014/main" id="{B948C5BD-0587-4188-9087-5FAA250B123B}"/>
+                <a16:creationId xmlns:a16="http://schemas.microsoft.com/office/drawing/2014/main" id="{354AED70-D038-4787-974B-4C1EFE2B9B20}"/>
               </a:ext>
             </a:extLst>
           </p:cNvPr>
@@ -4820,7 +4820,7 @@
           <p:cNvPr id="3" name="s13-title">
             <a:extLst xmlns:a="http://schemas.openxmlformats.org/drawingml/2006/main">
               <a:ext uri="{FF2B5EF4-FFF2-40B4-BE49-F238E27FC236}">
-                <a16:creationId xmlns:a16="http://schemas.microsoft.com/office/drawing/2014/main" id="{7558817C-956E-4374-B411-625223D961F5}"/>
+                <a16:creationId xmlns:a16="http://schemas.microsoft.com/office/drawing/2014/main" id="{DE983B82-964E-4D91-AE2B-9744DEFF7A19}"/>
               </a:ext>
             </a:extLst>
           </p:cNvPr>
@@ -4878,7 +4878,7 @@
           <p:cNvPr id="4" name="s13-footer">
             <a:extLst xmlns:a="http://schemas.openxmlformats.org/drawingml/2006/main">
               <a:ext uri="{FF2B5EF4-FFF2-40B4-BE49-F238E27FC236}">
-                <a16:creationId xmlns:a16="http://schemas.microsoft.com/office/drawing/2014/main" id="{438654FD-057D-4DC1-A348-27F6C9C13DE1}"/>
+                <a16:creationId xmlns:a16="http://schemas.microsoft.com/office/drawing/2014/main" id="{8E30179C-D897-4BA4-B73C-E4CC38C5B40B}"/>
               </a:ext>
             </a:extLst>
           </p:cNvPr>
@@ -4909,7 +4909,7 @@
           <p:cNvPr id="5" name="s13-identity">
             <a:extLst xmlns:a="http://schemas.openxmlformats.org/drawingml/2006/main">
               <a:ext uri="{FF2B5EF4-FFF2-40B4-BE49-F238E27FC236}">
-                <a16:creationId xmlns:a16="http://schemas.microsoft.com/office/drawing/2014/main" id="{D1517495-3D85-4FBA-B3FB-B8BE34082A56}"/>
+                <a16:creationId xmlns:a16="http://schemas.microsoft.com/office/drawing/2014/main" id="{B1E14DEB-DCD0-48CD-8BD4-5B6B2ABD5FC8}"/>
               </a:ext>
             </a:extLst>
           </p:cNvPr>
@@ -4967,7 +4967,7 @@
           <p:cNvPr id="6" name="source-0">
             <a:extLst xmlns:a="http://schemas.openxmlformats.org/drawingml/2006/main">
               <a:ext uri="{FF2B5EF4-FFF2-40B4-BE49-F238E27FC236}">
-                <a16:creationId xmlns:a16="http://schemas.microsoft.com/office/drawing/2014/main" id="{B0A3812D-0BA0-4EAE-839D-F965EDA5DEE8}"/>
+                <a16:creationId xmlns:a16="http://schemas.microsoft.com/office/drawing/2014/main" id="{A72A1C64-95D9-40CD-B199-9934D3DBB556}"/>
               </a:ext>
             </a:extLst>
           </p:cNvPr>
@@ -5031,7 +5031,7 @@
           <p:cNvPr id="7" name="source-1">
             <a:extLst xmlns:a="http://schemas.openxmlformats.org/drawingml/2006/main">
               <a:ext uri="{FF2B5EF4-FFF2-40B4-BE49-F238E27FC236}">
-                <a16:creationId xmlns:a16="http://schemas.microsoft.com/office/drawing/2014/main" id="{F82EF25F-5126-41F6-86FA-8CCFECD65DD2}"/>
+                <a16:creationId xmlns:a16="http://schemas.microsoft.com/office/drawing/2014/main" id="{390F74B0-9D45-47AB-A914-9712B1CE98B3}"/>
               </a:ext>
             </a:extLst>
           </p:cNvPr>
@@ -5095,7 +5095,7 @@
           <p:cNvPr id="8" name="source-2">
             <a:extLst xmlns:a="http://schemas.openxmlformats.org/drawingml/2006/main">
               <a:ext uri="{FF2B5EF4-FFF2-40B4-BE49-F238E27FC236}">
-                <a16:creationId xmlns:a16="http://schemas.microsoft.com/office/drawing/2014/main" id="{34C6B974-7937-48E2-A3B6-ACD9F3382730}"/>
+                <a16:creationId xmlns:a16="http://schemas.microsoft.com/office/drawing/2014/main" id="{FEC23B2B-224C-4C63-B86C-1E6BE0BD57A1}"/>
               </a:ext>
             </a:extLst>
           </p:cNvPr>
@@ -5159,7 +5159,7 @@
           <p:cNvPr id="9" name="source-3">
             <a:extLst xmlns:a="http://schemas.openxmlformats.org/drawingml/2006/main">
               <a:ext uri="{FF2B5EF4-FFF2-40B4-BE49-F238E27FC236}">
-                <a16:creationId xmlns:a16="http://schemas.microsoft.com/office/drawing/2014/main" id="{7C2CB4E9-B00A-4EAD-994B-27FFB10FC81F}"/>
+                <a16:creationId xmlns:a16="http://schemas.microsoft.com/office/drawing/2014/main" id="{C148FF7A-1E6D-4A04-A097-FB5CF25541ED}"/>
               </a:ext>
             </a:extLst>
           </p:cNvPr>
@@ -5223,7 +5223,7 @@
           <p:cNvPr id="10" name="s13-takeaway-rule">
             <a:extLst xmlns:a="http://schemas.openxmlformats.org/drawingml/2006/main">
               <a:ext uri="{FF2B5EF4-FFF2-40B4-BE49-F238E27FC236}">
-                <a16:creationId xmlns:a16="http://schemas.microsoft.com/office/drawing/2014/main" id="{1A538DE7-2E25-4C09-B8B3-180B120B0E1D}"/>
+                <a16:creationId xmlns:a16="http://schemas.microsoft.com/office/drawing/2014/main" id="{DCF681C6-8E0E-4EC6-B423-8718A71115AE}"/>
               </a:ext>
             </a:extLst>
           </p:cNvPr>
@@ -5256,7 +5256,7 @@
           <p:cNvPr id="11" name="s13-takeaway">
             <a:extLst xmlns:a="http://schemas.openxmlformats.org/drawingml/2006/main">
               <a:ext uri="{FF2B5EF4-FFF2-40B4-BE49-F238E27FC236}">
-                <a16:creationId xmlns:a16="http://schemas.microsoft.com/office/drawing/2014/main" id="{23E2FDCD-2990-40C3-A272-F3D70D8BE650}"/>
+                <a16:creationId xmlns:a16="http://schemas.microsoft.com/office/drawing/2014/main" id="{11921051-41E5-468C-826D-75D92E68DE93}"/>
               </a:ext>
             </a:extLst>
           </p:cNvPr>
@@ -5281,7 +5281,7 @@
         </p:spPr>
         <p:txBody>
           <a:bodyPr xmlns:a="http://schemas.openxmlformats.org/drawingml/2006/main" lIns="0" tIns="0" rIns="0" bIns="0" anchor="ctr">
-            <a:normAutofit fontScale="100000"/>
+            <a:normAutofit fontScale="95911"/>
           </a:bodyPr>
           <a:lstStyle xmlns:a="http://schemas.openxmlformats.org/drawingml/2006/main"/>
           <a:p xmlns:a="http://schemas.openxmlformats.org/drawingml/2006/main">
@@ -5304,7 +5304,7 @@
                 <a:ea typeface="PingFang SC"/>
                 <a:cs typeface="PingFang SC"/>
               </a:rPr>
-              <a:t>公开幻灯片只使用课程原创文字与原生图形；完整论证、链接和事实边界请见本节讲义。</a:t>
+              <a:t>课程精编页用于讲授主线；播放器中的“原课件”模式保留团队 PowerPoint 精选页、真实图片和可播放视频。</a:t>
             </a:r>
           </a:p>
         </p:txBody>
@@ -5312,7 +5312,7 @@
     </p:spTree>
     <p:extLst>
       <p:ext uri="{BB962C8B-B14F-4D97-AF65-F5344CB8AC3E}">
-        <p14:creationId xmlns:p14="http://schemas.microsoft.com/office/powerpoint/2010/main" val="1105296292"/>
+        <p14:creationId xmlns:p14="http://schemas.microsoft.com/office/powerpoint/2010/main" val="589757056"/>
       </p:ext>
     </p:extLst>
   </p:cSld>
@@ -5343,7 +5343,7 @@
           <p:cNvPr id="1" name="s2-rule">
             <a:extLst xmlns:a="http://schemas.openxmlformats.org/drawingml/2006/main">
               <a:ext uri="{FF2B5EF4-FFF2-40B4-BE49-F238E27FC236}">
-                <a16:creationId xmlns:a16="http://schemas.microsoft.com/office/drawing/2014/main" id="{5BF69123-8DF5-4585-80B5-4130A5CB2B13}"/>
+                <a16:creationId xmlns:a16="http://schemas.microsoft.com/office/drawing/2014/main" id="{751A0D1D-197E-43F0-8D09-02A121BE46AC}"/>
               </a:ext>
             </a:extLst>
           </p:cNvPr>
@@ -5376,7 +5376,7 @@
           <p:cNvPr id="2" name="s2-eyebrow">
             <a:extLst xmlns:a="http://schemas.openxmlformats.org/drawingml/2006/main">
               <a:ext uri="{FF2B5EF4-FFF2-40B4-BE49-F238E27FC236}">
-                <a16:creationId xmlns:a16="http://schemas.microsoft.com/office/drawing/2014/main" id="{5AA45E16-51AE-4062-AD8C-33D18967C2B1}"/>
+                <a16:creationId xmlns:a16="http://schemas.microsoft.com/office/drawing/2014/main" id="{5D758BC3-88D2-48F9-BF33-370B0D875249}"/>
               </a:ext>
             </a:extLst>
           </p:cNvPr>
@@ -5434,7 +5434,7 @@
           <p:cNvPr id="3" name="s2-title">
             <a:extLst xmlns:a="http://schemas.openxmlformats.org/drawingml/2006/main">
               <a:ext uri="{FF2B5EF4-FFF2-40B4-BE49-F238E27FC236}">
-                <a16:creationId xmlns:a16="http://schemas.microsoft.com/office/drawing/2014/main" id="{356981C5-3D54-41E1-8CB2-EA37C47BD3DC}"/>
+                <a16:creationId xmlns:a16="http://schemas.microsoft.com/office/drawing/2014/main" id="{8EED3711-8938-4755-BD6D-E334682688D1}"/>
               </a:ext>
             </a:extLst>
           </p:cNvPr>
@@ -5492,7 +5492,7 @@
           <p:cNvPr id="4" name="s2-footer">
             <a:extLst xmlns:a="http://schemas.openxmlformats.org/drawingml/2006/main">
               <a:ext uri="{FF2B5EF4-FFF2-40B4-BE49-F238E27FC236}">
-                <a16:creationId xmlns:a16="http://schemas.microsoft.com/office/drawing/2014/main" id="{775EB4BD-0342-4E4C-9881-9A874BA11F3C}"/>
+                <a16:creationId xmlns:a16="http://schemas.microsoft.com/office/drawing/2014/main" id="{9D5B8F30-3D58-442C-AA2A-8FAEF6EC19D0}"/>
               </a:ext>
             </a:extLst>
           </p:cNvPr>
@@ -5523,7 +5523,7 @@
           <p:cNvPr id="5" name="s2-identity">
             <a:extLst xmlns:a="http://schemas.openxmlformats.org/drawingml/2006/main">
               <a:ext uri="{FF2B5EF4-FFF2-40B4-BE49-F238E27FC236}">
-                <a16:creationId xmlns:a16="http://schemas.microsoft.com/office/drawing/2014/main" id="{DC413BC0-E03D-49AC-BF31-9170861B4BA2}"/>
+                <a16:creationId xmlns:a16="http://schemas.microsoft.com/office/drawing/2014/main" id="{0488A2B3-1AC4-45DF-863C-101AE740CEEA}"/>
               </a:ext>
             </a:extLst>
           </p:cNvPr>
@@ -5581,7 +5581,7 @@
           <p:cNvPr id="6" name="objective-1">
             <a:extLst xmlns:a="http://schemas.openxmlformats.org/drawingml/2006/main">
               <a:ext uri="{FF2B5EF4-FFF2-40B4-BE49-F238E27FC236}">
-                <a16:creationId xmlns:a16="http://schemas.microsoft.com/office/drawing/2014/main" id="{FB5AE14D-03D0-4644-8528-D3E44E284C97}"/>
+                <a16:creationId xmlns:a16="http://schemas.microsoft.com/office/drawing/2014/main" id="{1040D770-B33B-4F7C-871B-B3291A6F6B67}"/>
               </a:ext>
             </a:extLst>
           </p:cNvPr>
@@ -5668,7 +5668,7 @@
           <p:cNvPr id="7" name="objective-2">
             <a:extLst xmlns:a="http://schemas.openxmlformats.org/drawingml/2006/main">
               <a:ext uri="{FF2B5EF4-FFF2-40B4-BE49-F238E27FC236}">
-                <a16:creationId xmlns:a16="http://schemas.microsoft.com/office/drawing/2014/main" id="{EEDBDCDB-C6C5-4A5E-965F-B6985F3E589A}"/>
+                <a16:creationId xmlns:a16="http://schemas.microsoft.com/office/drawing/2014/main" id="{4D5C4DA7-F61F-4712-8587-36DBD083D8E7}"/>
               </a:ext>
             </a:extLst>
           </p:cNvPr>
@@ -5755,7 +5755,7 @@
           <p:cNvPr id="8" name="objective-3">
             <a:extLst xmlns:a="http://schemas.openxmlformats.org/drawingml/2006/main">
               <a:ext uri="{FF2B5EF4-FFF2-40B4-BE49-F238E27FC236}">
-                <a16:creationId xmlns:a16="http://schemas.microsoft.com/office/drawing/2014/main" id="{E3942D06-ECC4-417E-8E86-6146E4651025}"/>
+                <a16:creationId xmlns:a16="http://schemas.microsoft.com/office/drawing/2014/main" id="{2796C43A-E851-4506-AF4B-0136FB2C160A}"/>
               </a:ext>
             </a:extLst>
           </p:cNvPr>
@@ -5842,7 +5842,7 @@
           <p:cNvPr id="9" name="objective-4">
             <a:extLst xmlns:a="http://schemas.openxmlformats.org/drawingml/2006/main">
               <a:ext uri="{FF2B5EF4-FFF2-40B4-BE49-F238E27FC236}">
-                <a16:creationId xmlns:a16="http://schemas.microsoft.com/office/drawing/2014/main" id="{DA5B358B-4129-4FBB-8D8F-11C07818734A}"/>
+                <a16:creationId xmlns:a16="http://schemas.microsoft.com/office/drawing/2014/main" id="{F707E197-7B04-4D7A-AD40-C30352C3D1A8}"/>
               </a:ext>
             </a:extLst>
           </p:cNvPr>
@@ -5927,7 +5927,7 @@
     </p:spTree>
     <p:extLst>
       <p:ext uri="{BB962C8B-B14F-4D97-AF65-F5344CB8AC3E}">
-        <p14:creationId xmlns:p14="http://schemas.microsoft.com/office/powerpoint/2010/main" val="1759306439"/>
+        <p14:creationId xmlns:p14="http://schemas.microsoft.com/office/powerpoint/2010/main" val="1433710493"/>
       </p:ext>
     </p:extLst>
   </p:cSld>
@@ -5958,7 +5958,7 @@
           <p:cNvPr id="1" name="s3-rule">
             <a:extLst xmlns:a="http://schemas.openxmlformats.org/drawingml/2006/main">
               <a:ext uri="{FF2B5EF4-FFF2-40B4-BE49-F238E27FC236}">
-                <a16:creationId xmlns:a16="http://schemas.microsoft.com/office/drawing/2014/main" id="{507C7F90-F170-4CE7-85F8-A6DF31FC15AC}"/>
+                <a16:creationId xmlns:a16="http://schemas.microsoft.com/office/drawing/2014/main" id="{647D5167-6A5B-4CB5-9586-BAF367BE1500}"/>
               </a:ext>
             </a:extLst>
           </p:cNvPr>
@@ -5991,7 +5991,7 @@
           <p:cNvPr id="2" name="s3-eyebrow">
             <a:extLst xmlns:a="http://schemas.openxmlformats.org/drawingml/2006/main">
               <a:ext uri="{FF2B5EF4-FFF2-40B4-BE49-F238E27FC236}">
-                <a16:creationId xmlns:a16="http://schemas.microsoft.com/office/drawing/2014/main" id="{F33E6140-A9D2-475C-92DE-319DD513CA99}"/>
+                <a16:creationId xmlns:a16="http://schemas.microsoft.com/office/drawing/2014/main" id="{4F52BCD1-93AE-4F51-A5E7-E1851801F300}"/>
               </a:ext>
             </a:extLst>
           </p:cNvPr>
@@ -6049,7 +6049,7 @@
           <p:cNvPr id="3" name="s3-title">
             <a:extLst xmlns:a="http://schemas.openxmlformats.org/drawingml/2006/main">
               <a:ext uri="{FF2B5EF4-FFF2-40B4-BE49-F238E27FC236}">
-                <a16:creationId xmlns:a16="http://schemas.microsoft.com/office/drawing/2014/main" id="{FFF090C8-ED3E-4A05-BE1C-E7E5D6BDAF70}"/>
+                <a16:creationId xmlns:a16="http://schemas.microsoft.com/office/drawing/2014/main" id="{B405EC40-7EDF-46C8-A9DC-1A2690CE0F8F}"/>
               </a:ext>
             </a:extLst>
           </p:cNvPr>
@@ -6107,7 +6107,7 @@
           <p:cNvPr id="4" name="s3-footer">
             <a:extLst xmlns:a="http://schemas.openxmlformats.org/drawingml/2006/main">
               <a:ext uri="{FF2B5EF4-FFF2-40B4-BE49-F238E27FC236}">
-                <a16:creationId xmlns:a16="http://schemas.microsoft.com/office/drawing/2014/main" id="{46ED85A1-8E0F-4C30-A930-8F6C2C8AD0ED}"/>
+                <a16:creationId xmlns:a16="http://schemas.microsoft.com/office/drawing/2014/main" id="{BA308673-5856-4668-856C-FCE2401B2B00}"/>
               </a:ext>
             </a:extLst>
           </p:cNvPr>
@@ -6138,7 +6138,7 @@
           <p:cNvPr id="5" name="s3-identity">
             <a:extLst xmlns:a="http://schemas.openxmlformats.org/drawingml/2006/main">
               <a:ext uri="{FF2B5EF4-FFF2-40B4-BE49-F238E27FC236}">
-                <a16:creationId xmlns:a16="http://schemas.microsoft.com/office/drawing/2014/main" id="{E66CDADC-B69D-49EF-8BDA-715A43777153}"/>
+                <a16:creationId xmlns:a16="http://schemas.microsoft.com/office/drawing/2014/main" id="{A3EF167C-E860-482F-B29E-B3500CCEF4C5}"/>
               </a:ext>
             </a:extLst>
           </p:cNvPr>
@@ -6196,7 +6196,7 @@
           <p:cNvPr id="6" name="core-no-0">
             <a:extLst xmlns:a="http://schemas.openxmlformats.org/drawingml/2006/main">
               <a:ext uri="{FF2B5EF4-FFF2-40B4-BE49-F238E27FC236}">
-                <a16:creationId xmlns:a16="http://schemas.microsoft.com/office/drawing/2014/main" id="{B21AAA52-1D12-481F-9A8F-77754BB38684}"/>
+                <a16:creationId xmlns:a16="http://schemas.microsoft.com/office/drawing/2014/main" id="{7B4667A6-CF09-45C8-B08D-79D5A6565AD4}"/>
               </a:ext>
             </a:extLst>
           </p:cNvPr>
@@ -6254,7 +6254,7 @@
           <p:cNvPr id="7" name="core-label-0">
             <a:extLst xmlns:a="http://schemas.openxmlformats.org/drawingml/2006/main">
               <a:ext uri="{FF2B5EF4-FFF2-40B4-BE49-F238E27FC236}">
-                <a16:creationId xmlns:a16="http://schemas.microsoft.com/office/drawing/2014/main" id="{E2997136-E5E9-4E6E-8530-BF3B1144A800}"/>
+                <a16:creationId xmlns:a16="http://schemas.microsoft.com/office/drawing/2014/main" id="{96C06C5C-5048-4DA4-A550-5D3A03AA6B0F}"/>
               </a:ext>
             </a:extLst>
           </p:cNvPr>
@@ -6312,7 +6312,7 @@
           <p:cNvPr id="8" name="core-body-0">
             <a:extLst xmlns:a="http://schemas.openxmlformats.org/drawingml/2006/main">
               <a:ext uri="{FF2B5EF4-FFF2-40B4-BE49-F238E27FC236}">
-                <a16:creationId xmlns:a16="http://schemas.microsoft.com/office/drawing/2014/main" id="{21F3071A-2EBC-4958-81C3-DFA5BC986DA8}"/>
+                <a16:creationId xmlns:a16="http://schemas.microsoft.com/office/drawing/2014/main" id="{F17040E9-0AE1-4D51-8F5A-1780AF8728EC}"/>
               </a:ext>
             </a:extLst>
           </p:cNvPr>
@@ -6376,7 +6376,7 @@
           <p:cNvPr id="9" name="core-no-1">
             <a:extLst xmlns:a="http://schemas.openxmlformats.org/drawingml/2006/main">
               <a:ext uri="{FF2B5EF4-FFF2-40B4-BE49-F238E27FC236}">
-                <a16:creationId xmlns:a16="http://schemas.microsoft.com/office/drawing/2014/main" id="{7CA37709-719A-43EA-BD17-28A06C396F74}"/>
+                <a16:creationId xmlns:a16="http://schemas.microsoft.com/office/drawing/2014/main" id="{F69734B9-6F8B-4A32-A1EE-D2C70953CA32}"/>
               </a:ext>
             </a:extLst>
           </p:cNvPr>
@@ -6434,7 +6434,7 @@
           <p:cNvPr id="10" name="core-body-1">
             <a:extLst xmlns:a="http://schemas.openxmlformats.org/drawingml/2006/main">
               <a:ext uri="{FF2B5EF4-FFF2-40B4-BE49-F238E27FC236}">
-                <a16:creationId xmlns:a16="http://schemas.microsoft.com/office/drawing/2014/main" id="{D3346AEE-1BE3-4504-9CA8-BAE464D59BD4}"/>
+                <a16:creationId xmlns:a16="http://schemas.microsoft.com/office/drawing/2014/main" id="{2EC961F6-7CBA-4B6C-A9C5-4B70CCDE502A}"/>
               </a:ext>
             </a:extLst>
           </p:cNvPr>
@@ -6498,7 +6498,7 @@
           <p:cNvPr id="11" name="core-no-2">
             <a:extLst xmlns:a="http://schemas.openxmlformats.org/drawingml/2006/main">
               <a:ext uri="{FF2B5EF4-FFF2-40B4-BE49-F238E27FC236}">
-                <a16:creationId xmlns:a16="http://schemas.microsoft.com/office/drawing/2014/main" id="{4C536350-F831-4D73-B898-F165286C5109}"/>
+                <a16:creationId xmlns:a16="http://schemas.microsoft.com/office/drawing/2014/main" id="{213BBEE9-0351-473E-A208-9C8348F5E656}"/>
               </a:ext>
             </a:extLst>
           </p:cNvPr>
@@ -6556,7 +6556,7 @@
           <p:cNvPr id="12" name="core-body-2">
             <a:extLst xmlns:a="http://schemas.openxmlformats.org/drawingml/2006/main">
               <a:ext uri="{FF2B5EF4-FFF2-40B4-BE49-F238E27FC236}">
-                <a16:creationId xmlns:a16="http://schemas.microsoft.com/office/drawing/2014/main" id="{39952B31-FF34-4D2C-99CD-00444F43C97F}"/>
+                <a16:creationId xmlns:a16="http://schemas.microsoft.com/office/drawing/2014/main" id="{B542B880-3027-4BB6-A1DA-7940A1BC6409}"/>
               </a:ext>
             </a:extLst>
           </p:cNvPr>
@@ -6620,7 +6620,7 @@
           <p:cNvPr id="13" name="s3-takeaway-rule">
             <a:extLst xmlns:a="http://schemas.openxmlformats.org/drawingml/2006/main">
               <a:ext uri="{FF2B5EF4-FFF2-40B4-BE49-F238E27FC236}">
-                <a16:creationId xmlns:a16="http://schemas.microsoft.com/office/drawing/2014/main" id="{3EE1380B-7A9A-4E16-ABCC-0FD0435CDF6D}"/>
+                <a16:creationId xmlns:a16="http://schemas.microsoft.com/office/drawing/2014/main" id="{2860A5D4-2A67-4DC0-87A3-C28745434C60}"/>
               </a:ext>
             </a:extLst>
           </p:cNvPr>
@@ -6653,7 +6653,7 @@
           <p:cNvPr id="14" name="s3-takeaway">
             <a:extLst xmlns:a="http://schemas.openxmlformats.org/drawingml/2006/main">
               <a:ext uri="{FF2B5EF4-FFF2-40B4-BE49-F238E27FC236}">
-                <a16:creationId xmlns:a16="http://schemas.microsoft.com/office/drawing/2014/main" id="{A7BCD38E-76EB-4361-ADF1-ED27A95A4FEF}"/>
+                <a16:creationId xmlns:a16="http://schemas.microsoft.com/office/drawing/2014/main" id="{BA32C98C-35E0-4AA5-8EFA-D9D25255438E}"/>
               </a:ext>
             </a:extLst>
           </p:cNvPr>
@@ -6709,7 +6709,7 @@
     </p:spTree>
     <p:extLst>
       <p:ext uri="{BB962C8B-B14F-4D97-AF65-F5344CB8AC3E}">
-        <p14:creationId xmlns:p14="http://schemas.microsoft.com/office/powerpoint/2010/main" val="846843238"/>
+        <p14:creationId xmlns:p14="http://schemas.microsoft.com/office/powerpoint/2010/main" val="164312520"/>
       </p:ext>
     </p:extLst>
   </p:cSld>
@@ -6740,7 +6740,7 @@
           <p:cNvPr id="1" name="s4-rule">
             <a:extLst xmlns:a="http://schemas.openxmlformats.org/drawingml/2006/main">
               <a:ext uri="{FF2B5EF4-FFF2-40B4-BE49-F238E27FC236}">
-                <a16:creationId xmlns:a16="http://schemas.microsoft.com/office/drawing/2014/main" id="{1967646A-BA02-41DE-9023-0CBAA0071E72}"/>
+                <a16:creationId xmlns:a16="http://schemas.microsoft.com/office/drawing/2014/main" id="{48AF7794-B420-4274-9648-FA51812F943A}"/>
               </a:ext>
             </a:extLst>
           </p:cNvPr>
@@ -6773,7 +6773,7 @@
           <p:cNvPr id="2" name="s4-eyebrow">
             <a:extLst xmlns:a="http://schemas.openxmlformats.org/drawingml/2006/main">
               <a:ext uri="{FF2B5EF4-FFF2-40B4-BE49-F238E27FC236}">
-                <a16:creationId xmlns:a16="http://schemas.microsoft.com/office/drawing/2014/main" id="{1DB66397-8756-4DDD-AC2D-CBCB94D8ABAB}"/>
+                <a16:creationId xmlns:a16="http://schemas.microsoft.com/office/drawing/2014/main" id="{9A446FE2-7FDC-4B96-9F0D-83D31C0434FE}"/>
               </a:ext>
             </a:extLst>
           </p:cNvPr>
@@ -6831,7 +6831,7 @@
           <p:cNvPr id="3" name="s4-title">
             <a:extLst xmlns:a="http://schemas.openxmlformats.org/drawingml/2006/main">
               <a:ext uri="{FF2B5EF4-FFF2-40B4-BE49-F238E27FC236}">
-                <a16:creationId xmlns:a16="http://schemas.microsoft.com/office/drawing/2014/main" id="{6EB9835B-A620-4475-8DE3-64A3E9E6AF49}"/>
+                <a16:creationId xmlns:a16="http://schemas.microsoft.com/office/drawing/2014/main" id="{A85DCE69-8045-4C1C-8975-8B62D5277BD0}"/>
               </a:ext>
             </a:extLst>
           </p:cNvPr>
@@ -6889,7 +6889,7 @@
           <p:cNvPr id="4" name="s4-footer">
             <a:extLst xmlns:a="http://schemas.openxmlformats.org/drawingml/2006/main">
               <a:ext uri="{FF2B5EF4-FFF2-40B4-BE49-F238E27FC236}">
-                <a16:creationId xmlns:a16="http://schemas.microsoft.com/office/drawing/2014/main" id="{F0A05FFC-B5C4-4435-8133-51A5FAB8157B}"/>
+                <a16:creationId xmlns:a16="http://schemas.microsoft.com/office/drawing/2014/main" id="{5EAB4CC0-C98D-441E-8628-5A1442EAE2D7}"/>
               </a:ext>
             </a:extLst>
           </p:cNvPr>
@@ -6920,7 +6920,7 @@
           <p:cNvPr id="5" name="s4-identity">
             <a:extLst xmlns:a="http://schemas.openxmlformats.org/drawingml/2006/main">
               <a:ext uri="{FF2B5EF4-FFF2-40B4-BE49-F238E27FC236}">
-                <a16:creationId xmlns:a16="http://schemas.microsoft.com/office/drawing/2014/main" id="{84F2DB9A-A4E9-40E6-8626-ECB8677DFD90}"/>
+                <a16:creationId xmlns:a16="http://schemas.microsoft.com/office/drawing/2014/main" id="{DAC11BBC-6024-40FA-BE12-2A71F289B1FE}"/>
               </a:ext>
             </a:extLst>
           </p:cNvPr>
@@ -6978,7 +6978,7 @@
           <p:cNvPr id="6" name="core-no-0">
             <a:extLst xmlns:a="http://schemas.openxmlformats.org/drawingml/2006/main">
               <a:ext uri="{FF2B5EF4-FFF2-40B4-BE49-F238E27FC236}">
-                <a16:creationId xmlns:a16="http://schemas.microsoft.com/office/drawing/2014/main" id="{F13F6118-A563-403A-80EB-2798B3D218A5}"/>
+                <a16:creationId xmlns:a16="http://schemas.microsoft.com/office/drawing/2014/main" id="{DF0BEEFA-8AAF-4D26-A449-5DFFB3B5020F}"/>
               </a:ext>
             </a:extLst>
           </p:cNvPr>
@@ -7036,7 +7036,7 @@
           <p:cNvPr id="7" name="core-label-0">
             <a:extLst xmlns:a="http://schemas.openxmlformats.org/drawingml/2006/main">
               <a:ext uri="{FF2B5EF4-FFF2-40B4-BE49-F238E27FC236}">
-                <a16:creationId xmlns:a16="http://schemas.microsoft.com/office/drawing/2014/main" id="{C09CDF56-659F-4475-B5D4-0AE468E1A9AB}"/>
+                <a16:creationId xmlns:a16="http://schemas.microsoft.com/office/drawing/2014/main" id="{11DA2D80-D988-4D2B-BED6-F2FA53CA9C2B}"/>
               </a:ext>
             </a:extLst>
           </p:cNvPr>
@@ -7094,7 +7094,7 @@
           <p:cNvPr id="8" name="core-body-0">
             <a:extLst xmlns:a="http://schemas.openxmlformats.org/drawingml/2006/main">
               <a:ext uri="{FF2B5EF4-FFF2-40B4-BE49-F238E27FC236}">
-                <a16:creationId xmlns:a16="http://schemas.microsoft.com/office/drawing/2014/main" id="{1C129434-902E-47B4-A969-3989F56B6B53}"/>
+                <a16:creationId xmlns:a16="http://schemas.microsoft.com/office/drawing/2014/main" id="{90F1E0DC-158A-4615-A9C2-4E313C102662}"/>
               </a:ext>
             </a:extLst>
           </p:cNvPr>
@@ -7158,7 +7158,7 @@
           <p:cNvPr id="9" name="core-no-1">
             <a:extLst xmlns:a="http://schemas.openxmlformats.org/drawingml/2006/main">
               <a:ext uri="{FF2B5EF4-FFF2-40B4-BE49-F238E27FC236}">
-                <a16:creationId xmlns:a16="http://schemas.microsoft.com/office/drawing/2014/main" id="{83170D6F-6946-480F-9822-3BD55AAC4ADC}"/>
+                <a16:creationId xmlns:a16="http://schemas.microsoft.com/office/drawing/2014/main" id="{9B3CF04F-EF0A-4946-B844-3F09F1B235F1}"/>
               </a:ext>
             </a:extLst>
           </p:cNvPr>
@@ -7216,7 +7216,7 @@
           <p:cNvPr id="10" name="core-body-1">
             <a:extLst xmlns:a="http://schemas.openxmlformats.org/drawingml/2006/main">
               <a:ext uri="{FF2B5EF4-FFF2-40B4-BE49-F238E27FC236}">
-                <a16:creationId xmlns:a16="http://schemas.microsoft.com/office/drawing/2014/main" id="{A3A03615-6176-42C8-8BEF-65D841D3F49F}"/>
+                <a16:creationId xmlns:a16="http://schemas.microsoft.com/office/drawing/2014/main" id="{BA4D05C1-3235-4D65-A6A1-B6B3D61E2E27}"/>
               </a:ext>
             </a:extLst>
           </p:cNvPr>
@@ -7280,7 +7280,7 @@
           <p:cNvPr id="11" name="s4-takeaway-rule">
             <a:extLst xmlns:a="http://schemas.openxmlformats.org/drawingml/2006/main">
               <a:ext uri="{FF2B5EF4-FFF2-40B4-BE49-F238E27FC236}">
-                <a16:creationId xmlns:a16="http://schemas.microsoft.com/office/drawing/2014/main" id="{2691497D-2B23-43C3-82FC-EE48B27BFD8E}"/>
+                <a16:creationId xmlns:a16="http://schemas.microsoft.com/office/drawing/2014/main" id="{57F6CC73-3D6B-45D3-A830-2095F69EC9AB}"/>
               </a:ext>
             </a:extLst>
           </p:cNvPr>
@@ -7313,7 +7313,7 @@
           <p:cNvPr id="12" name="s4-takeaway">
             <a:extLst xmlns:a="http://schemas.openxmlformats.org/drawingml/2006/main">
               <a:ext uri="{FF2B5EF4-FFF2-40B4-BE49-F238E27FC236}">
-                <a16:creationId xmlns:a16="http://schemas.microsoft.com/office/drawing/2014/main" id="{5B7FC470-A39D-44FD-AB06-C2967B67DF9A}"/>
+                <a16:creationId xmlns:a16="http://schemas.microsoft.com/office/drawing/2014/main" id="{A56A0AB8-920B-4EE5-B6A8-283EE4D2504B}"/>
               </a:ext>
             </a:extLst>
           </p:cNvPr>
@@ -7369,7 +7369,7 @@
     </p:spTree>
     <p:extLst>
       <p:ext uri="{BB962C8B-B14F-4D97-AF65-F5344CB8AC3E}">
-        <p14:creationId xmlns:p14="http://schemas.microsoft.com/office/powerpoint/2010/main" val="472581412"/>
+        <p14:creationId xmlns:p14="http://schemas.microsoft.com/office/powerpoint/2010/main" val="1496137158"/>
       </p:ext>
     </p:extLst>
   </p:cSld>
@@ -7400,7 +7400,7 @@
           <p:cNvPr id="1" name="s5-rule">
             <a:extLst xmlns:a="http://schemas.openxmlformats.org/drawingml/2006/main">
               <a:ext uri="{FF2B5EF4-FFF2-40B4-BE49-F238E27FC236}">
-                <a16:creationId xmlns:a16="http://schemas.microsoft.com/office/drawing/2014/main" id="{FAF39A1C-7F62-4536-863D-A4874C78D92E}"/>
+                <a16:creationId xmlns:a16="http://schemas.microsoft.com/office/drawing/2014/main" id="{40C23AE8-028A-4A64-AB21-21F8AE7884DF}"/>
               </a:ext>
             </a:extLst>
           </p:cNvPr>
@@ -7433,7 +7433,7 @@
           <p:cNvPr id="2" name="s5-eyebrow">
             <a:extLst xmlns:a="http://schemas.openxmlformats.org/drawingml/2006/main">
               <a:ext uri="{FF2B5EF4-FFF2-40B4-BE49-F238E27FC236}">
-                <a16:creationId xmlns:a16="http://schemas.microsoft.com/office/drawing/2014/main" id="{AF778D96-FAD7-4D22-804F-E6F4C77A98E0}"/>
+                <a16:creationId xmlns:a16="http://schemas.microsoft.com/office/drawing/2014/main" id="{E42151E2-7A95-4E91-A399-45029FBD5D57}"/>
               </a:ext>
             </a:extLst>
           </p:cNvPr>
@@ -7491,7 +7491,7 @@
           <p:cNvPr id="3" name="s5-title">
             <a:extLst xmlns:a="http://schemas.openxmlformats.org/drawingml/2006/main">
               <a:ext uri="{FF2B5EF4-FFF2-40B4-BE49-F238E27FC236}">
-                <a16:creationId xmlns:a16="http://schemas.microsoft.com/office/drawing/2014/main" id="{5F0A6416-EE02-4317-8D3F-5342417EBD07}"/>
+                <a16:creationId xmlns:a16="http://schemas.microsoft.com/office/drawing/2014/main" id="{3A3EDC80-6EBC-4869-9953-DA42B49C104A}"/>
               </a:ext>
             </a:extLst>
           </p:cNvPr>
@@ -7549,7 +7549,7 @@
           <p:cNvPr id="4" name="s5-footer">
             <a:extLst xmlns:a="http://schemas.openxmlformats.org/drawingml/2006/main">
               <a:ext uri="{FF2B5EF4-FFF2-40B4-BE49-F238E27FC236}">
-                <a16:creationId xmlns:a16="http://schemas.microsoft.com/office/drawing/2014/main" id="{820F5EAC-B362-4AA4-AE1F-9B7553993AF1}"/>
+                <a16:creationId xmlns:a16="http://schemas.microsoft.com/office/drawing/2014/main" id="{CF07571D-697C-487F-9F21-1132C0E2A2D4}"/>
               </a:ext>
             </a:extLst>
           </p:cNvPr>
@@ -7580,7 +7580,7 @@
           <p:cNvPr id="5" name="s5-identity">
             <a:extLst xmlns:a="http://schemas.openxmlformats.org/drawingml/2006/main">
               <a:ext uri="{FF2B5EF4-FFF2-40B4-BE49-F238E27FC236}">
-                <a16:creationId xmlns:a16="http://schemas.microsoft.com/office/drawing/2014/main" id="{E19FC407-4F2D-4186-992A-90F515AA4405}"/>
+                <a16:creationId xmlns:a16="http://schemas.microsoft.com/office/drawing/2014/main" id="{1E1EA8EB-2BEE-46DC-94B7-9BE13D528C08}"/>
               </a:ext>
             </a:extLst>
           </p:cNvPr>
@@ -7638,7 +7638,7 @@
           <p:cNvPr id="6" name="core-no-0">
             <a:extLst xmlns:a="http://schemas.openxmlformats.org/drawingml/2006/main">
               <a:ext uri="{FF2B5EF4-FFF2-40B4-BE49-F238E27FC236}">
-                <a16:creationId xmlns:a16="http://schemas.microsoft.com/office/drawing/2014/main" id="{85018D7F-9015-45B1-B658-81E00521CEF5}"/>
+                <a16:creationId xmlns:a16="http://schemas.microsoft.com/office/drawing/2014/main" id="{C91A5EED-796F-45C2-B2E0-73C3F64327F0}"/>
               </a:ext>
             </a:extLst>
           </p:cNvPr>
@@ -7696,7 +7696,7 @@
           <p:cNvPr id="7" name="core-label-0">
             <a:extLst xmlns:a="http://schemas.openxmlformats.org/drawingml/2006/main">
               <a:ext uri="{FF2B5EF4-FFF2-40B4-BE49-F238E27FC236}">
-                <a16:creationId xmlns:a16="http://schemas.microsoft.com/office/drawing/2014/main" id="{A17BFF07-47E6-4B63-9A7F-5129DD12C4B3}"/>
+                <a16:creationId xmlns:a16="http://schemas.microsoft.com/office/drawing/2014/main" id="{246B100E-CB2C-4BED-93CC-30D5DAAABE11}"/>
               </a:ext>
             </a:extLst>
           </p:cNvPr>
@@ -7754,7 +7754,7 @@
           <p:cNvPr id="8" name="core-body-0">
             <a:extLst xmlns:a="http://schemas.openxmlformats.org/drawingml/2006/main">
               <a:ext uri="{FF2B5EF4-FFF2-40B4-BE49-F238E27FC236}">
-                <a16:creationId xmlns:a16="http://schemas.microsoft.com/office/drawing/2014/main" id="{300EF38A-1226-41F8-A747-1A2E3DD1D909}"/>
+                <a16:creationId xmlns:a16="http://schemas.microsoft.com/office/drawing/2014/main" id="{284AD431-8FAD-4BDF-8FE6-A33D1173400F}"/>
               </a:ext>
             </a:extLst>
           </p:cNvPr>
@@ -7818,7 +7818,7 @@
           <p:cNvPr id="9" name="core-no-1">
             <a:extLst xmlns:a="http://schemas.openxmlformats.org/drawingml/2006/main">
               <a:ext uri="{FF2B5EF4-FFF2-40B4-BE49-F238E27FC236}">
-                <a16:creationId xmlns:a16="http://schemas.microsoft.com/office/drawing/2014/main" id="{8316F19A-AEEC-464A-9A58-2FD33B300C49}"/>
+                <a16:creationId xmlns:a16="http://schemas.microsoft.com/office/drawing/2014/main" id="{33623FA9-C1EB-4BE3-B6FF-5E055F7F9048}"/>
               </a:ext>
             </a:extLst>
           </p:cNvPr>
@@ -7876,7 +7876,7 @@
           <p:cNvPr id="10" name="core-body-1">
             <a:extLst xmlns:a="http://schemas.openxmlformats.org/drawingml/2006/main">
               <a:ext uri="{FF2B5EF4-FFF2-40B4-BE49-F238E27FC236}">
-                <a16:creationId xmlns:a16="http://schemas.microsoft.com/office/drawing/2014/main" id="{A42B2B1E-E068-4743-9245-9CC10D2DF0C6}"/>
+                <a16:creationId xmlns:a16="http://schemas.microsoft.com/office/drawing/2014/main" id="{F3301DC9-7BE2-46C6-A444-A1619505FB7D}"/>
               </a:ext>
             </a:extLst>
           </p:cNvPr>
@@ -7940,7 +7940,7 @@
           <p:cNvPr id="11" name="s5-takeaway-rule">
             <a:extLst xmlns:a="http://schemas.openxmlformats.org/drawingml/2006/main">
               <a:ext uri="{FF2B5EF4-FFF2-40B4-BE49-F238E27FC236}">
-                <a16:creationId xmlns:a16="http://schemas.microsoft.com/office/drawing/2014/main" id="{847E2164-20ED-491A-AEB6-38DE0B68DF74}"/>
+                <a16:creationId xmlns:a16="http://schemas.microsoft.com/office/drawing/2014/main" id="{F248F7B9-63E2-4A48-B7E7-085022E8A43F}"/>
               </a:ext>
             </a:extLst>
           </p:cNvPr>
@@ -7973,7 +7973,7 @@
           <p:cNvPr id="12" name="s5-takeaway">
             <a:extLst xmlns:a="http://schemas.openxmlformats.org/drawingml/2006/main">
               <a:ext uri="{FF2B5EF4-FFF2-40B4-BE49-F238E27FC236}">
-                <a16:creationId xmlns:a16="http://schemas.microsoft.com/office/drawing/2014/main" id="{EA33306C-0114-4FF8-9E55-398865F9BF30}"/>
+                <a16:creationId xmlns:a16="http://schemas.microsoft.com/office/drawing/2014/main" id="{569DE8D2-CA02-4C11-A877-DEAF2CA942B0}"/>
               </a:ext>
             </a:extLst>
           </p:cNvPr>
@@ -8029,7 +8029,7 @@
     </p:spTree>
     <p:extLst>
       <p:ext uri="{BB962C8B-B14F-4D97-AF65-F5344CB8AC3E}">
-        <p14:creationId xmlns:p14="http://schemas.microsoft.com/office/powerpoint/2010/main" val="952726493"/>
+        <p14:creationId xmlns:p14="http://schemas.microsoft.com/office/powerpoint/2010/main" val="260457598"/>
       </p:ext>
     </p:extLst>
   </p:cSld>
@@ -8060,7 +8060,7 @@
           <p:cNvPr id="1" name="s6-rule">
             <a:extLst xmlns:a="http://schemas.openxmlformats.org/drawingml/2006/main">
               <a:ext uri="{FF2B5EF4-FFF2-40B4-BE49-F238E27FC236}">
-                <a16:creationId xmlns:a16="http://schemas.microsoft.com/office/drawing/2014/main" id="{8B645155-387B-4006-8B33-EDA6E114E2AA}"/>
+                <a16:creationId xmlns:a16="http://schemas.microsoft.com/office/drawing/2014/main" id="{B431AEA6-BFAF-45A4-8A4C-A0EA894BAE12}"/>
               </a:ext>
             </a:extLst>
           </p:cNvPr>
@@ -8093,7 +8093,7 @@
           <p:cNvPr id="2" name="s6-eyebrow">
             <a:extLst xmlns:a="http://schemas.openxmlformats.org/drawingml/2006/main">
               <a:ext uri="{FF2B5EF4-FFF2-40B4-BE49-F238E27FC236}">
-                <a16:creationId xmlns:a16="http://schemas.microsoft.com/office/drawing/2014/main" id="{957B601B-6241-4238-87C3-5B37A2774BB4}"/>
+                <a16:creationId xmlns:a16="http://schemas.microsoft.com/office/drawing/2014/main" id="{C27E73FD-2287-4B86-84C1-B12565A705B5}"/>
               </a:ext>
             </a:extLst>
           </p:cNvPr>
@@ -8151,7 +8151,7 @@
           <p:cNvPr id="3" name="s6-title">
             <a:extLst xmlns:a="http://schemas.openxmlformats.org/drawingml/2006/main">
               <a:ext uri="{FF2B5EF4-FFF2-40B4-BE49-F238E27FC236}">
-                <a16:creationId xmlns:a16="http://schemas.microsoft.com/office/drawing/2014/main" id="{3F6CF653-DFA5-4465-978B-D5E2FBF5789A}"/>
+                <a16:creationId xmlns:a16="http://schemas.microsoft.com/office/drawing/2014/main" id="{2D028B25-AB19-4C38-9C94-EDC45CA9079C}"/>
               </a:ext>
             </a:extLst>
           </p:cNvPr>
@@ -8209,7 +8209,7 @@
           <p:cNvPr id="4" name="s6-footer">
             <a:extLst xmlns:a="http://schemas.openxmlformats.org/drawingml/2006/main">
               <a:ext uri="{FF2B5EF4-FFF2-40B4-BE49-F238E27FC236}">
-                <a16:creationId xmlns:a16="http://schemas.microsoft.com/office/drawing/2014/main" id="{83A8E800-3DBB-4FA0-A479-0F422D5F4D58}"/>
+                <a16:creationId xmlns:a16="http://schemas.microsoft.com/office/drawing/2014/main" id="{E83B765E-A8FE-4DF2-AAF2-B8A7455B3135}"/>
               </a:ext>
             </a:extLst>
           </p:cNvPr>
@@ -8240,7 +8240,7 @@
           <p:cNvPr id="5" name="s6-identity">
             <a:extLst xmlns:a="http://schemas.openxmlformats.org/drawingml/2006/main">
               <a:ext uri="{FF2B5EF4-FFF2-40B4-BE49-F238E27FC236}">
-                <a16:creationId xmlns:a16="http://schemas.microsoft.com/office/drawing/2014/main" id="{B7504A49-68DB-4371-80FA-9E54B466229F}"/>
+                <a16:creationId xmlns:a16="http://schemas.microsoft.com/office/drawing/2014/main" id="{A83A8985-6B23-4186-88D8-9E2E2AD27312}"/>
               </a:ext>
             </a:extLst>
           </p:cNvPr>
@@ -8298,7 +8298,7 @@
           <p:cNvPr id="6" name="core-no-0">
             <a:extLst xmlns:a="http://schemas.openxmlformats.org/drawingml/2006/main">
               <a:ext uri="{FF2B5EF4-FFF2-40B4-BE49-F238E27FC236}">
-                <a16:creationId xmlns:a16="http://schemas.microsoft.com/office/drawing/2014/main" id="{E885540C-217D-4DFF-B830-5409E6B5F9EC}"/>
+                <a16:creationId xmlns:a16="http://schemas.microsoft.com/office/drawing/2014/main" id="{097C082C-CDC3-4021-B47E-B0C27F3954FD}"/>
               </a:ext>
             </a:extLst>
           </p:cNvPr>
@@ -8356,7 +8356,7 @@
           <p:cNvPr id="7" name="core-label-0">
             <a:extLst xmlns:a="http://schemas.openxmlformats.org/drawingml/2006/main">
               <a:ext uri="{FF2B5EF4-FFF2-40B4-BE49-F238E27FC236}">
-                <a16:creationId xmlns:a16="http://schemas.microsoft.com/office/drawing/2014/main" id="{C8312295-8EAA-4AD0-8B78-99018DD8C5FD}"/>
+                <a16:creationId xmlns:a16="http://schemas.microsoft.com/office/drawing/2014/main" id="{25E47B49-D64B-4839-813B-AA0F51D18084}"/>
               </a:ext>
             </a:extLst>
           </p:cNvPr>
@@ -8414,7 +8414,7 @@
           <p:cNvPr id="8" name="core-body-0">
             <a:extLst xmlns:a="http://schemas.openxmlformats.org/drawingml/2006/main">
               <a:ext uri="{FF2B5EF4-FFF2-40B4-BE49-F238E27FC236}">
-                <a16:creationId xmlns:a16="http://schemas.microsoft.com/office/drawing/2014/main" id="{1D0D2F2D-2DA8-4E64-BD40-BB62697C7969}"/>
+                <a16:creationId xmlns:a16="http://schemas.microsoft.com/office/drawing/2014/main" id="{CF334869-A327-4543-85E9-B891266A0E03}"/>
               </a:ext>
             </a:extLst>
           </p:cNvPr>
@@ -8478,7 +8478,7 @@
           <p:cNvPr id="9" name="core-no-1">
             <a:extLst xmlns:a="http://schemas.openxmlformats.org/drawingml/2006/main">
               <a:ext uri="{FF2B5EF4-FFF2-40B4-BE49-F238E27FC236}">
-                <a16:creationId xmlns:a16="http://schemas.microsoft.com/office/drawing/2014/main" id="{0603814B-E677-4EE0-95C6-CEE9216E4484}"/>
+                <a16:creationId xmlns:a16="http://schemas.microsoft.com/office/drawing/2014/main" id="{7AC0B6BC-3B0B-4F58-8325-4C1612A1FCD9}"/>
               </a:ext>
             </a:extLst>
           </p:cNvPr>
@@ -8536,7 +8536,7 @@
           <p:cNvPr id="10" name="core-body-1">
             <a:extLst xmlns:a="http://schemas.openxmlformats.org/drawingml/2006/main">
               <a:ext uri="{FF2B5EF4-FFF2-40B4-BE49-F238E27FC236}">
-                <a16:creationId xmlns:a16="http://schemas.microsoft.com/office/drawing/2014/main" id="{62ACFFAF-36C2-4CCA-B26E-5D8B47C2BBCE}"/>
+                <a16:creationId xmlns:a16="http://schemas.microsoft.com/office/drawing/2014/main" id="{7BE1BC8F-6A2E-4284-A461-2B5854EBA799}"/>
               </a:ext>
             </a:extLst>
           </p:cNvPr>
@@ -8600,7 +8600,7 @@
           <p:cNvPr id="11" name="s6-takeaway-rule">
             <a:extLst xmlns:a="http://schemas.openxmlformats.org/drawingml/2006/main">
               <a:ext uri="{FF2B5EF4-FFF2-40B4-BE49-F238E27FC236}">
-                <a16:creationId xmlns:a16="http://schemas.microsoft.com/office/drawing/2014/main" id="{8B903844-609A-46A5-B713-9519A0C1B3D2}"/>
+                <a16:creationId xmlns:a16="http://schemas.microsoft.com/office/drawing/2014/main" id="{AA474CAC-50A8-45E8-BF3F-B6EAB8D81C13}"/>
               </a:ext>
             </a:extLst>
           </p:cNvPr>
@@ -8633,7 +8633,7 @@
           <p:cNvPr id="12" name="s6-takeaway">
             <a:extLst xmlns:a="http://schemas.openxmlformats.org/drawingml/2006/main">
               <a:ext uri="{FF2B5EF4-FFF2-40B4-BE49-F238E27FC236}">
-                <a16:creationId xmlns:a16="http://schemas.microsoft.com/office/drawing/2014/main" id="{C180713B-6EC3-4624-982C-3F95BA2E26B6}"/>
+                <a16:creationId xmlns:a16="http://schemas.microsoft.com/office/drawing/2014/main" id="{3E8E48C8-C89D-4E7F-9F41-86F99FF1DFD6}"/>
               </a:ext>
             </a:extLst>
           </p:cNvPr>
@@ -8689,7 +8689,7 @@
     </p:spTree>
     <p:extLst>
       <p:ext uri="{BB962C8B-B14F-4D97-AF65-F5344CB8AC3E}">
-        <p14:creationId xmlns:p14="http://schemas.microsoft.com/office/powerpoint/2010/main" val="272361783"/>
+        <p14:creationId xmlns:p14="http://schemas.microsoft.com/office/powerpoint/2010/main" val="1293195787"/>
       </p:ext>
     </p:extLst>
   </p:cSld>
@@ -8720,7 +8720,7 @@
           <p:cNvPr id="1" name="s7-rule">
             <a:extLst xmlns:a="http://schemas.openxmlformats.org/drawingml/2006/main">
               <a:ext uri="{FF2B5EF4-FFF2-40B4-BE49-F238E27FC236}">
-                <a16:creationId xmlns:a16="http://schemas.microsoft.com/office/drawing/2014/main" id="{629A7B65-7F5C-41AA-8897-2061E35BE429}"/>
+                <a16:creationId xmlns:a16="http://schemas.microsoft.com/office/drawing/2014/main" id="{29A6D31C-0478-49AD-81D2-B1E368EB1617}"/>
               </a:ext>
             </a:extLst>
           </p:cNvPr>
@@ -8753,7 +8753,7 @@
           <p:cNvPr id="2" name="s7-eyebrow">
             <a:extLst xmlns:a="http://schemas.openxmlformats.org/drawingml/2006/main">
               <a:ext uri="{FF2B5EF4-FFF2-40B4-BE49-F238E27FC236}">
-                <a16:creationId xmlns:a16="http://schemas.microsoft.com/office/drawing/2014/main" id="{159D2359-D9CD-4A00-A5E9-F0BBC8E06AE9}"/>
+                <a16:creationId xmlns:a16="http://schemas.microsoft.com/office/drawing/2014/main" id="{D0956D1A-D563-42AB-811C-110EC7FC1555}"/>
               </a:ext>
             </a:extLst>
           </p:cNvPr>
@@ -8811,7 +8811,7 @@
           <p:cNvPr id="3" name="s7-title">
             <a:extLst xmlns:a="http://schemas.openxmlformats.org/drawingml/2006/main">
               <a:ext uri="{FF2B5EF4-FFF2-40B4-BE49-F238E27FC236}">
-                <a16:creationId xmlns:a16="http://schemas.microsoft.com/office/drawing/2014/main" id="{E8F6C5AA-D511-4E99-9381-83957A11F70D}"/>
+                <a16:creationId xmlns:a16="http://schemas.microsoft.com/office/drawing/2014/main" id="{320ED0F9-63E7-4D41-88B0-7665516B0BC9}"/>
               </a:ext>
             </a:extLst>
           </p:cNvPr>
@@ -8869,7 +8869,7 @@
           <p:cNvPr id="4" name="s7-footer">
             <a:extLst xmlns:a="http://schemas.openxmlformats.org/drawingml/2006/main">
               <a:ext uri="{FF2B5EF4-FFF2-40B4-BE49-F238E27FC236}">
-                <a16:creationId xmlns:a16="http://schemas.microsoft.com/office/drawing/2014/main" id="{D4A34C38-8DC7-421A-BA5A-F7802A91CB9E}"/>
+                <a16:creationId xmlns:a16="http://schemas.microsoft.com/office/drawing/2014/main" id="{2582644F-AE85-4386-9DDF-3A35261CC844}"/>
               </a:ext>
             </a:extLst>
           </p:cNvPr>
@@ -8900,7 +8900,7 @@
           <p:cNvPr id="5" name="s7-identity">
             <a:extLst xmlns:a="http://schemas.openxmlformats.org/drawingml/2006/main">
               <a:ext uri="{FF2B5EF4-FFF2-40B4-BE49-F238E27FC236}">
-                <a16:creationId xmlns:a16="http://schemas.microsoft.com/office/drawing/2014/main" id="{6AD532B4-87C8-4521-A3FF-F2E66393347B}"/>
+                <a16:creationId xmlns:a16="http://schemas.microsoft.com/office/drawing/2014/main" id="{D7E1300D-25EB-4C7B-BF47-2D299E62A5E5}"/>
               </a:ext>
             </a:extLst>
           </p:cNvPr>
@@ -8958,7 +8958,7 @@
           <p:cNvPr id="6" name="core-no-0">
             <a:extLst xmlns:a="http://schemas.openxmlformats.org/drawingml/2006/main">
               <a:ext uri="{FF2B5EF4-FFF2-40B4-BE49-F238E27FC236}">
-                <a16:creationId xmlns:a16="http://schemas.microsoft.com/office/drawing/2014/main" id="{FE2D849A-EE60-4854-B5C6-1620438CDE06}"/>
+                <a16:creationId xmlns:a16="http://schemas.microsoft.com/office/drawing/2014/main" id="{4DDCB2F2-043A-46E0-AEDD-4DA0F21FCF0C}"/>
               </a:ext>
             </a:extLst>
           </p:cNvPr>
@@ -9016,7 +9016,7 @@
           <p:cNvPr id="7" name="core-label-0">
             <a:extLst xmlns:a="http://schemas.openxmlformats.org/drawingml/2006/main">
               <a:ext uri="{FF2B5EF4-FFF2-40B4-BE49-F238E27FC236}">
-                <a16:creationId xmlns:a16="http://schemas.microsoft.com/office/drawing/2014/main" id="{EFF6D937-9A31-49C4-B3D6-E85128548B5B}"/>
+                <a16:creationId xmlns:a16="http://schemas.microsoft.com/office/drawing/2014/main" id="{2DC090AD-01B9-49EF-84C5-77DEDD6815FD}"/>
               </a:ext>
             </a:extLst>
           </p:cNvPr>
@@ -9074,7 +9074,7 @@
           <p:cNvPr id="8" name="core-body-0">
             <a:extLst xmlns:a="http://schemas.openxmlformats.org/drawingml/2006/main">
               <a:ext uri="{FF2B5EF4-FFF2-40B4-BE49-F238E27FC236}">
-                <a16:creationId xmlns:a16="http://schemas.microsoft.com/office/drawing/2014/main" id="{94590F2B-8671-4AC8-9966-09F9169BCC07}"/>
+                <a16:creationId xmlns:a16="http://schemas.microsoft.com/office/drawing/2014/main" id="{15EB71E2-9771-4610-B144-A0E61D3C6AFF}"/>
               </a:ext>
             </a:extLst>
           </p:cNvPr>
@@ -9138,7 +9138,7 @@
           <p:cNvPr id="9" name="core-no-1">
             <a:extLst xmlns:a="http://schemas.openxmlformats.org/drawingml/2006/main">
               <a:ext uri="{FF2B5EF4-FFF2-40B4-BE49-F238E27FC236}">
-                <a16:creationId xmlns:a16="http://schemas.microsoft.com/office/drawing/2014/main" id="{7E8B4B33-3A13-4AB5-8A53-474E32217FD8}"/>
+                <a16:creationId xmlns:a16="http://schemas.microsoft.com/office/drawing/2014/main" id="{DF581457-7B3D-4043-8A4B-91D76D5D9A5A}"/>
               </a:ext>
             </a:extLst>
           </p:cNvPr>
@@ -9196,7 +9196,7 @@
           <p:cNvPr id="10" name="core-body-1">
             <a:extLst xmlns:a="http://schemas.openxmlformats.org/drawingml/2006/main">
               <a:ext uri="{FF2B5EF4-FFF2-40B4-BE49-F238E27FC236}">
-                <a16:creationId xmlns:a16="http://schemas.microsoft.com/office/drawing/2014/main" id="{86BA427A-4B69-4C69-8E6B-E11618BAB563}"/>
+                <a16:creationId xmlns:a16="http://schemas.microsoft.com/office/drawing/2014/main" id="{A1C8742C-5397-4849-813A-68B401FB9FA5}"/>
               </a:ext>
             </a:extLst>
           </p:cNvPr>
@@ -9260,7 +9260,7 @@
           <p:cNvPr id="11" name="core-no-2">
             <a:extLst xmlns:a="http://schemas.openxmlformats.org/drawingml/2006/main">
               <a:ext uri="{FF2B5EF4-FFF2-40B4-BE49-F238E27FC236}">
-                <a16:creationId xmlns:a16="http://schemas.microsoft.com/office/drawing/2014/main" id="{416F6B39-BA31-4D90-8E74-E2DE140D84E0}"/>
+                <a16:creationId xmlns:a16="http://schemas.microsoft.com/office/drawing/2014/main" id="{4781DFD6-6128-42F1-B179-8A53445B7B01}"/>
               </a:ext>
             </a:extLst>
           </p:cNvPr>
@@ -9318,7 +9318,7 @@
           <p:cNvPr id="12" name="core-body-2">
             <a:extLst xmlns:a="http://schemas.openxmlformats.org/drawingml/2006/main">
               <a:ext uri="{FF2B5EF4-FFF2-40B4-BE49-F238E27FC236}">
-                <a16:creationId xmlns:a16="http://schemas.microsoft.com/office/drawing/2014/main" id="{7455AD6B-8069-4A24-AAD0-4E428FF269CB}"/>
+                <a16:creationId xmlns:a16="http://schemas.microsoft.com/office/drawing/2014/main" id="{65EF9CB3-4B9D-4595-9844-1EA293C70F47}"/>
               </a:ext>
             </a:extLst>
           </p:cNvPr>
@@ -9382,7 +9382,7 @@
           <p:cNvPr id="13" name="s7-takeaway-rule">
             <a:extLst xmlns:a="http://schemas.openxmlformats.org/drawingml/2006/main">
               <a:ext uri="{FF2B5EF4-FFF2-40B4-BE49-F238E27FC236}">
-                <a16:creationId xmlns:a16="http://schemas.microsoft.com/office/drawing/2014/main" id="{BF77EE44-9E20-468D-8653-CFA8B55B56C0}"/>
+                <a16:creationId xmlns:a16="http://schemas.microsoft.com/office/drawing/2014/main" id="{D512C62C-9EEA-440D-97C3-E4EA876887C8}"/>
               </a:ext>
             </a:extLst>
           </p:cNvPr>
@@ -9415,7 +9415,7 @@
           <p:cNvPr id="14" name="s7-takeaway">
             <a:extLst xmlns:a="http://schemas.openxmlformats.org/drawingml/2006/main">
               <a:ext uri="{FF2B5EF4-FFF2-40B4-BE49-F238E27FC236}">
-                <a16:creationId xmlns:a16="http://schemas.microsoft.com/office/drawing/2014/main" id="{1E1AA9BA-453C-43A3-9EB6-8B52F4D839E6}"/>
+                <a16:creationId xmlns:a16="http://schemas.microsoft.com/office/drawing/2014/main" id="{1DA98D68-2961-4342-92C3-3A9CEE479F81}"/>
               </a:ext>
             </a:extLst>
           </p:cNvPr>
@@ -9471,7 +9471,7 @@
     </p:spTree>
     <p:extLst>
       <p:ext uri="{BB962C8B-B14F-4D97-AF65-F5344CB8AC3E}">
-        <p14:creationId xmlns:p14="http://schemas.microsoft.com/office/powerpoint/2010/main" val="649003934"/>
+        <p14:creationId xmlns:p14="http://schemas.microsoft.com/office/powerpoint/2010/main" val="548240069"/>
       </p:ext>
     </p:extLst>
   </p:cSld>
@@ -9502,7 +9502,7 @@
           <p:cNvPr id="1" name="s8-rule">
             <a:extLst xmlns:a="http://schemas.openxmlformats.org/drawingml/2006/main">
               <a:ext uri="{FF2B5EF4-FFF2-40B4-BE49-F238E27FC236}">
-                <a16:creationId xmlns:a16="http://schemas.microsoft.com/office/drawing/2014/main" id="{A358320D-BEE9-4EB2-BD70-91C49EBD0489}"/>
+                <a16:creationId xmlns:a16="http://schemas.microsoft.com/office/drawing/2014/main" id="{6766ED7C-979D-4A46-82A5-47D5B9990E9B}"/>
               </a:ext>
             </a:extLst>
           </p:cNvPr>
@@ -9535,7 +9535,7 @@
           <p:cNvPr id="2" name="s8-eyebrow">
             <a:extLst xmlns:a="http://schemas.openxmlformats.org/drawingml/2006/main">
               <a:ext uri="{FF2B5EF4-FFF2-40B4-BE49-F238E27FC236}">
-                <a16:creationId xmlns:a16="http://schemas.microsoft.com/office/drawing/2014/main" id="{C66AF315-420D-4FAD-9AC8-EA361786FB8C}"/>
+                <a16:creationId xmlns:a16="http://schemas.microsoft.com/office/drawing/2014/main" id="{8F2B5B7E-2256-428E-A88C-3C4CAB8A3021}"/>
               </a:ext>
             </a:extLst>
           </p:cNvPr>
@@ -9593,7 +9593,7 @@
           <p:cNvPr id="3" name="s8-title">
             <a:extLst xmlns:a="http://schemas.openxmlformats.org/drawingml/2006/main">
               <a:ext uri="{FF2B5EF4-FFF2-40B4-BE49-F238E27FC236}">
-                <a16:creationId xmlns:a16="http://schemas.microsoft.com/office/drawing/2014/main" id="{CABDFAA9-A68C-47F5-949C-D2A02C0D2C58}"/>
+                <a16:creationId xmlns:a16="http://schemas.microsoft.com/office/drawing/2014/main" id="{0E72928F-1787-4909-85CB-AB3CC2FC5D2A}"/>
               </a:ext>
             </a:extLst>
           </p:cNvPr>
@@ -9651,7 +9651,7 @@
           <p:cNvPr id="4" name="s8-footer">
             <a:extLst xmlns:a="http://schemas.openxmlformats.org/drawingml/2006/main">
               <a:ext uri="{FF2B5EF4-FFF2-40B4-BE49-F238E27FC236}">
-                <a16:creationId xmlns:a16="http://schemas.microsoft.com/office/drawing/2014/main" id="{11D636CF-DECF-4B70-BF39-DA2810AEF4B7}"/>
+                <a16:creationId xmlns:a16="http://schemas.microsoft.com/office/drawing/2014/main" id="{45F3478B-E1C4-4453-B96F-DEFE6FACA7BE}"/>
               </a:ext>
             </a:extLst>
           </p:cNvPr>
@@ -9682,7 +9682,7 @@
           <p:cNvPr id="5" name="s8-identity">
             <a:extLst xmlns:a="http://schemas.openxmlformats.org/drawingml/2006/main">
               <a:ext uri="{FF2B5EF4-FFF2-40B4-BE49-F238E27FC236}">
-                <a16:creationId xmlns:a16="http://schemas.microsoft.com/office/drawing/2014/main" id="{4F9D7BB7-7624-43F6-A037-C7F5DC6CA0E7}"/>
+                <a16:creationId xmlns:a16="http://schemas.microsoft.com/office/drawing/2014/main" id="{5374077F-0F02-46E4-BA6A-348ABCC380F7}"/>
               </a:ext>
             </a:extLst>
           </p:cNvPr>
@@ -9740,7 +9740,7 @@
           <p:cNvPr id="6" name="core-no-0">
             <a:extLst xmlns:a="http://schemas.openxmlformats.org/drawingml/2006/main">
               <a:ext uri="{FF2B5EF4-FFF2-40B4-BE49-F238E27FC236}">
-                <a16:creationId xmlns:a16="http://schemas.microsoft.com/office/drawing/2014/main" id="{4F140DD5-3233-4A1D-AAE1-74285F57CA90}"/>
+                <a16:creationId xmlns:a16="http://schemas.microsoft.com/office/drawing/2014/main" id="{3E93C223-11FB-45BA-B46C-C5D524170413}"/>
               </a:ext>
             </a:extLst>
           </p:cNvPr>
@@ -9798,7 +9798,7 @@
           <p:cNvPr id="7" name="core-label-0">
             <a:extLst xmlns:a="http://schemas.openxmlformats.org/drawingml/2006/main">
               <a:ext uri="{FF2B5EF4-FFF2-40B4-BE49-F238E27FC236}">
-                <a16:creationId xmlns:a16="http://schemas.microsoft.com/office/drawing/2014/main" id="{55851C1D-C6BD-4762-987F-0E33F39B7F59}"/>
+                <a16:creationId xmlns:a16="http://schemas.microsoft.com/office/drawing/2014/main" id="{4A9AF4E2-55DE-4226-96A9-9CE736C6C68A}"/>
               </a:ext>
             </a:extLst>
           </p:cNvPr>
@@ -9856,7 +9856,7 @@
           <p:cNvPr id="8" name="core-body-0">
             <a:extLst xmlns:a="http://schemas.openxmlformats.org/drawingml/2006/main">
               <a:ext uri="{FF2B5EF4-FFF2-40B4-BE49-F238E27FC236}">
-                <a16:creationId xmlns:a16="http://schemas.microsoft.com/office/drawing/2014/main" id="{61CA6BA6-DA47-43F8-9FDC-6A29CD2F5375}"/>
+                <a16:creationId xmlns:a16="http://schemas.microsoft.com/office/drawing/2014/main" id="{439D4D2A-7CAF-49F8-AFA9-DD446C0D864D}"/>
               </a:ext>
             </a:extLst>
           </p:cNvPr>
@@ -9920,7 +9920,7 @@
           <p:cNvPr id="9" name="core-no-1">
             <a:extLst xmlns:a="http://schemas.openxmlformats.org/drawingml/2006/main">
               <a:ext uri="{FF2B5EF4-FFF2-40B4-BE49-F238E27FC236}">
-                <a16:creationId xmlns:a16="http://schemas.microsoft.com/office/drawing/2014/main" id="{66642916-919E-4EA7-80B9-2DBDC3408614}"/>
+                <a16:creationId xmlns:a16="http://schemas.microsoft.com/office/drawing/2014/main" id="{55E1332A-107F-46AB-85B6-EDA2EDF49DCF}"/>
               </a:ext>
             </a:extLst>
           </p:cNvPr>
@@ -9978,7 +9978,7 @@
           <p:cNvPr id="10" name="core-body-1">
             <a:extLst xmlns:a="http://schemas.openxmlformats.org/drawingml/2006/main">
               <a:ext uri="{FF2B5EF4-FFF2-40B4-BE49-F238E27FC236}">
-                <a16:creationId xmlns:a16="http://schemas.microsoft.com/office/drawing/2014/main" id="{5E0C16EE-7CCD-4FAF-BF76-BDDE9FA5E798}"/>
+                <a16:creationId xmlns:a16="http://schemas.microsoft.com/office/drawing/2014/main" id="{C38DDA9A-E634-4DCC-8BC2-A966FDF33DF6}"/>
               </a:ext>
             </a:extLst>
           </p:cNvPr>
@@ -10042,7 +10042,7 @@
           <p:cNvPr id="11" name="s8-takeaway-rule">
             <a:extLst xmlns:a="http://schemas.openxmlformats.org/drawingml/2006/main">
               <a:ext uri="{FF2B5EF4-FFF2-40B4-BE49-F238E27FC236}">
-                <a16:creationId xmlns:a16="http://schemas.microsoft.com/office/drawing/2014/main" id="{0322DF8A-14E3-472D-A313-4058BD156FE1}"/>
+                <a16:creationId xmlns:a16="http://schemas.microsoft.com/office/drawing/2014/main" id="{2AF10163-B3ED-4314-9070-5D51B6AE1A28}"/>
               </a:ext>
             </a:extLst>
           </p:cNvPr>
@@ -10075,7 +10075,7 @@
           <p:cNvPr id="12" name="s8-takeaway">
             <a:extLst xmlns:a="http://schemas.openxmlformats.org/drawingml/2006/main">
               <a:ext uri="{FF2B5EF4-FFF2-40B4-BE49-F238E27FC236}">
-                <a16:creationId xmlns:a16="http://schemas.microsoft.com/office/drawing/2014/main" id="{A85030A4-3776-4B67-B4B8-129541488064}"/>
+                <a16:creationId xmlns:a16="http://schemas.microsoft.com/office/drawing/2014/main" id="{3055E2A3-F02A-4E6B-A665-0E106489C7DC}"/>
               </a:ext>
             </a:extLst>
           </p:cNvPr>
@@ -10131,7 +10131,7 @@
     </p:spTree>
     <p:extLst>
       <p:ext uri="{BB962C8B-B14F-4D97-AF65-F5344CB8AC3E}">
-        <p14:creationId xmlns:p14="http://schemas.microsoft.com/office/powerpoint/2010/main" val="429172470"/>
+        <p14:creationId xmlns:p14="http://schemas.microsoft.com/office/powerpoint/2010/main" val="1740322135"/>
       </p:ext>
     </p:extLst>
   </p:cSld>
@@ -10162,7 +10162,7 @@
           <p:cNvPr id="1" name="s9-rule">
             <a:extLst xmlns:a="http://schemas.openxmlformats.org/drawingml/2006/main">
               <a:ext uri="{FF2B5EF4-FFF2-40B4-BE49-F238E27FC236}">
-                <a16:creationId xmlns:a16="http://schemas.microsoft.com/office/drawing/2014/main" id="{6B9DA1B6-2FDD-48E9-AB63-EF15434B80B0}"/>
+                <a16:creationId xmlns:a16="http://schemas.microsoft.com/office/drawing/2014/main" id="{841723F1-C7AF-4308-8407-3A380B98696F}"/>
               </a:ext>
             </a:extLst>
           </p:cNvPr>
@@ -10195,7 +10195,7 @@
           <p:cNvPr id="2" name="s9-eyebrow">
             <a:extLst xmlns:a="http://schemas.openxmlformats.org/drawingml/2006/main">
               <a:ext uri="{FF2B5EF4-FFF2-40B4-BE49-F238E27FC236}">
-                <a16:creationId xmlns:a16="http://schemas.microsoft.com/office/drawing/2014/main" id="{354A0640-CDDB-4A7D-BDD7-1822E43D2456}"/>
+                <a16:creationId xmlns:a16="http://schemas.microsoft.com/office/drawing/2014/main" id="{BD1B8CB9-F765-4CDE-B382-136B6CF5B51C}"/>
               </a:ext>
             </a:extLst>
           </p:cNvPr>
@@ -10253,7 +10253,7 @@
           <p:cNvPr id="3" name="s9-title">
             <a:extLst xmlns:a="http://schemas.openxmlformats.org/drawingml/2006/main">
               <a:ext uri="{FF2B5EF4-FFF2-40B4-BE49-F238E27FC236}">
-                <a16:creationId xmlns:a16="http://schemas.microsoft.com/office/drawing/2014/main" id="{C21ADF29-116F-42AB-BF2C-36B19FCDEAEF}"/>
+                <a16:creationId xmlns:a16="http://schemas.microsoft.com/office/drawing/2014/main" id="{C4562D8A-5CB0-4C42-B393-0AF181F3F24C}"/>
               </a:ext>
             </a:extLst>
           </p:cNvPr>
@@ -10311,7 +10311,7 @@
           <p:cNvPr id="4" name="s9-footer">
             <a:extLst xmlns:a="http://schemas.openxmlformats.org/drawingml/2006/main">
               <a:ext uri="{FF2B5EF4-FFF2-40B4-BE49-F238E27FC236}">
-                <a16:creationId xmlns:a16="http://schemas.microsoft.com/office/drawing/2014/main" id="{D6EDCFCD-C841-475F-B8B4-5D1C6B7E6E18}"/>
+                <a16:creationId xmlns:a16="http://schemas.microsoft.com/office/drawing/2014/main" id="{58B6F718-A1F6-4D1F-A743-EE5CB9FD5E59}"/>
               </a:ext>
             </a:extLst>
           </p:cNvPr>
@@ -10342,7 +10342,7 @@
           <p:cNvPr id="5" name="s9-identity">
             <a:extLst xmlns:a="http://schemas.openxmlformats.org/drawingml/2006/main">
               <a:ext uri="{FF2B5EF4-FFF2-40B4-BE49-F238E27FC236}">
-                <a16:creationId xmlns:a16="http://schemas.microsoft.com/office/drawing/2014/main" id="{4E5D0D63-BFA4-466F-A8F5-662D6E9C3C34}"/>
+                <a16:creationId xmlns:a16="http://schemas.microsoft.com/office/drawing/2014/main" id="{F6C8CB1A-CD36-4712-ABD2-F944F9C84A50}"/>
               </a:ext>
             </a:extLst>
           </p:cNvPr>
@@ -10400,7 +10400,7 @@
           <p:cNvPr id="6" name="case-title">
             <a:extLst xmlns:a="http://schemas.openxmlformats.org/drawingml/2006/main">
               <a:ext uri="{FF2B5EF4-FFF2-40B4-BE49-F238E27FC236}">
-                <a16:creationId xmlns:a16="http://schemas.microsoft.com/office/drawing/2014/main" id="{625745A9-B7D9-4CD1-B3BC-DE6C0AF79EBA}"/>
+                <a16:creationId xmlns:a16="http://schemas.microsoft.com/office/drawing/2014/main" id="{A782C7AB-0BED-4B7A-8F49-117EA79F892D}"/>
               </a:ext>
             </a:extLst>
           </p:cNvPr>
@@ -10464,7 +10464,7 @@
           <p:cNvPr id="7" name="case-row-0">
             <a:extLst xmlns:a="http://schemas.openxmlformats.org/drawingml/2006/main">
               <a:ext uri="{FF2B5EF4-FFF2-40B4-BE49-F238E27FC236}">
-                <a16:creationId xmlns:a16="http://schemas.microsoft.com/office/drawing/2014/main" id="{9223DEC2-D488-4CA6-BEEE-264E9B30D7DC}"/>
+                <a16:creationId xmlns:a16="http://schemas.microsoft.com/office/drawing/2014/main" id="{63F74288-2086-402C-8B68-C2540CE415FE}"/>
               </a:ext>
             </a:extLst>
           </p:cNvPr>
@@ -10528,7 +10528,7 @@
           <p:cNvPr id="8" name="case-row-1">
             <a:extLst xmlns:a="http://schemas.openxmlformats.org/drawingml/2006/main">
               <a:ext uri="{FF2B5EF4-FFF2-40B4-BE49-F238E27FC236}">
-                <a16:creationId xmlns:a16="http://schemas.microsoft.com/office/drawing/2014/main" id="{DE61C98F-2724-440D-AD3F-E2AF8492DD37}"/>
+                <a16:creationId xmlns:a16="http://schemas.microsoft.com/office/drawing/2014/main" id="{CFC426E3-77C6-4C43-911A-0F4BA32149F8}"/>
               </a:ext>
             </a:extLst>
           </p:cNvPr>
@@ -10592,7 +10592,7 @@
           <p:cNvPr id="9" name="case-row-2">
             <a:extLst xmlns:a="http://schemas.openxmlformats.org/drawingml/2006/main">
               <a:ext uri="{FF2B5EF4-FFF2-40B4-BE49-F238E27FC236}">
-                <a16:creationId xmlns:a16="http://schemas.microsoft.com/office/drawing/2014/main" id="{F50921A3-A86B-4E10-877D-528A7450C993}"/>
+                <a16:creationId xmlns:a16="http://schemas.microsoft.com/office/drawing/2014/main" id="{E3F9AE1E-532C-47B0-A91C-8F48B3AEDA42}"/>
               </a:ext>
             </a:extLst>
           </p:cNvPr>
@@ -10656,7 +10656,7 @@
           <p:cNvPr id="10" name="case-row-3">
             <a:extLst xmlns:a="http://schemas.openxmlformats.org/drawingml/2006/main">
               <a:ext uri="{FF2B5EF4-FFF2-40B4-BE49-F238E27FC236}">
-                <a16:creationId xmlns:a16="http://schemas.microsoft.com/office/drawing/2014/main" id="{FC82D116-716D-400A-8186-33CCF58CC58D}"/>
+                <a16:creationId xmlns:a16="http://schemas.microsoft.com/office/drawing/2014/main" id="{03BDD021-5AEF-4C19-B09D-78BAF3C29B22}"/>
               </a:ext>
             </a:extLst>
           </p:cNvPr>
@@ -10720,7 +10720,7 @@
           <p:cNvPr id="11" name="s9-takeaway-rule">
             <a:extLst xmlns:a="http://schemas.openxmlformats.org/drawingml/2006/main">
               <a:ext uri="{FF2B5EF4-FFF2-40B4-BE49-F238E27FC236}">
-                <a16:creationId xmlns:a16="http://schemas.microsoft.com/office/drawing/2014/main" id="{106953CE-43F1-4F3C-BA11-2C7922F7922D}"/>
+                <a16:creationId xmlns:a16="http://schemas.microsoft.com/office/drawing/2014/main" id="{73F12CBB-DD45-4FC0-82EC-630E9B31A64B}"/>
               </a:ext>
             </a:extLst>
           </p:cNvPr>
@@ -10753,7 +10753,7 @@
           <p:cNvPr id="12" name="s9-takeaway">
             <a:extLst xmlns:a="http://schemas.openxmlformats.org/drawingml/2006/main">
               <a:ext uri="{FF2B5EF4-FFF2-40B4-BE49-F238E27FC236}">
-                <a16:creationId xmlns:a16="http://schemas.microsoft.com/office/drawing/2014/main" id="{E5D407FE-624A-4FD7-9C3A-BAF891C69455}"/>
+                <a16:creationId xmlns:a16="http://schemas.microsoft.com/office/drawing/2014/main" id="{52C7DBD4-487B-41D5-BC4A-0A0DB9A301AF}"/>
               </a:ext>
             </a:extLst>
           </p:cNvPr>
@@ -10809,7 +10809,7 @@
     </p:spTree>
     <p:extLst>
       <p:ext uri="{BB962C8B-B14F-4D97-AF65-F5344CB8AC3E}">
-        <p14:creationId xmlns:p14="http://schemas.microsoft.com/office/powerpoint/2010/main" val="551000412"/>
+        <p14:creationId xmlns:p14="http://schemas.microsoft.com/office/powerpoint/2010/main" val="1315204625"/>
       </p:ext>
     </p:extLst>
   </p:cSld>

--- a/docs/public/course-assets/course-pptx/in-004.pptx
+++ b/docs/public/course-assets/course-pptx/in-004.pptx
@@ -2,25 +2,25 @@
 <file path=ppt/presentation.xml><?xml version="1.0" encoding="utf-8"?>
 <p:presentation xmlns:p="http://schemas.openxmlformats.org/presentationml/2006/main">
   <p:sldMasterIdLst>
-    <p:sldMasterId xmlns:r="http://schemas.openxmlformats.org/officeDocument/2006/relationships" id="2147483648" r:id="Rf40d8cf714ea4bd9"/>
+    <p:sldMasterId xmlns:r="http://schemas.openxmlformats.org/officeDocument/2006/relationships" id="2147483648" r:id="R1cd0fadcb10b494b"/>
   </p:sldMasterIdLst>
   <p:notesMasterIdLst>
-    <p:notesMasterId xmlns:r="http://schemas.openxmlformats.org/officeDocument/2006/relationships" r:id="R8737c1758a2f4198"/>
+    <p:notesMasterId xmlns:r="http://schemas.openxmlformats.org/officeDocument/2006/relationships" r:id="R6011117d2db84da1"/>
   </p:notesMasterIdLst>
   <p:sldIdLst>
-    <p:sldId xmlns:r="http://schemas.openxmlformats.org/officeDocument/2006/relationships" id="256" r:id="R9f2f0e6257cb4694"/>
-    <p:sldId xmlns:r="http://schemas.openxmlformats.org/officeDocument/2006/relationships" id="257" r:id="Rc1447b416b1d4603"/>
-    <p:sldId xmlns:r="http://schemas.openxmlformats.org/officeDocument/2006/relationships" id="258" r:id="R8b0c1d26891d4688"/>
-    <p:sldId xmlns:r="http://schemas.openxmlformats.org/officeDocument/2006/relationships" id="259" r:id="R9d9af3d027d64ccf"/>
-    <p:sldId xmlns:r="http://schemas.openxmlformats.org/officeDocument/2006/relationships" id="260" r:id="R2799288862bd44b1"/>
-    <p:sldId xmlns:r="http://schemas.openxmlformats.org/officeDocument/2006/relationships" id="261" r:id="R61a3a918a00b470e"/>
-    <p:sldId xmlns:r="http://schemas.openxmlformats.org/officeDocument/2006/relationships" id="262" r:id="R0f6b718f47634c9f"/>
-    <p:sldId xmlns:r="http://schemas.openxmlformats.org/officeDocument/2006/relationships" id="263" r:id="R5dee8a6ae87641ce"/>
-    <p:sldId xmlns:r="http://schemas.openxmlformats.org/officeDocument/2006/relationships" id="264" r:id="Racef31f6487242ca"/>
-    <p:sldId xmlns:r="http://schemas.openxmlformats.org/officeDocument/2006/relationships" id="265" r:id="R86de5a47fe8d4879"/>
-    <p:sldId xmlns:r="http://schemas.openxmlformats.org/officeDocument/2006/relationships" id="266" r:id="R426886db91464121"/>
-    <p:sldId xmlns:r="http://schemas.openxmlformats.org/officeDocument/2006/relationships" id="267" r:id="R378450942e884ede"/>
-    <p:sldId xmlns:r="http://schemas.openxmlformats.org/officeDocument/2006/relationships" id="268" r:id="R74b96f3b896945f3"/>
+    <p:sldId xmlns:r="http://schemas.openxmlformats.org/officeDocument/2006/relationships" id="256" r:id="R71bf51cfc7af445c"/>
+    <p:sldId xmlns:r="http://schemas.openxmlformats.org/officeDocument/2006/relationships" id="257" r:id="R4eece0a8cd9e43b9"/>
+    <p:sldId xmlns:r="http://schemas.openxmlformats.org/officeDocument/2006/relationships" id="258" r:id="R635d332995c84ff0"/>
+    <p:sldId xmlns:r="http://schemas.openxmlformats.org/officeDocument/2006/relationships" id="259" r:id="R555131cc845f4770"/>
+    <p:sldId xmlns:r="http://schemas.openxmlformats.org/officeDocument/2006/relationships" id="260" r:id="R243eb63e441a4942"/>
+    <p:sldId xmlns:r="http://schemas.openxmlformats.org/officeDocument/2006/relationships" id="261" r:id="R4c222c87685b48b3"/>
+    <p:sldId xmlns:r="http://schemas.openxmlformats.org/officeDocument/2006/relationships" id="262" r:id="Rbb53b81be6c8481c"/>
+    <p:sldId xmlns:r="http://schemas.openxmlformats.org/officeDocument/2006/relationships" id="263" r:id="R2ddb881467564663"/>
+    <p:sldId xmlns:r="http://schemas.openxmlformats.org/officeDocument/2006/relationships" id="264" r:id="R14711366d8fd4908"/>
+    <p:sldId xmlns:r="http://schemas.openxmlformats.org/officeDocument/2006/relationships" id="265" r:id="R829f5c033b424d68"/>
+    <p:sldId xmlns:r="http://schemas.openxmlformats.org/officeDocument/2006/relationships" id="266" r:id="R406cdc6b88b9442f"/>
+    <p:sldId xmlns:r="http://schemas.openxmlformats.org/officeDocument/2006/relationships" id="267" r:id="R5c92420c244e4ccd"/>
+    <p:sldId xmlns:r="http://schemas.openxmlformats.org/officeDocument/2006/relationships" id="268" r:id="Rd7dfb9ec9d5249e9"/>
   </p:sldIdLst>
   <p:sldSz cx="12192000" cy="6858000"/>
   <p:notesSz cx="6858000" cy="9144000"/>
@@ -1405,7 +1405,7 @@
   </p:cSld>
   <p:clrMap bg1="lt1" tx1="dk1" bg2="lt2" tx2="dk2" accent1="accent1" accent2="accent2" accent3="accent3" accent4="accent4" accent5="accent5" accent6="accent6" hlink="hlink" folHlink="folHlink"/>
   <p:sldLayoutIdLst>
-    <p:sldLayoutId xmlns:r="http://schemas.openxmlformats.org/officeDocument/2006/relationships" id="2147483649" r:id="R5bf3e801dd0f4ca9"/>
+    <p:sldLayoutId xmlns:r="http://schemas.openxmlformats.org/officeDocument/2006/relationships" id="2147483649" r:id="R5c8c3989b5774c69"/>
   </p:sldLayoutIdLst>
   <p:txStyles>
     <p:titleStyle>
@@ -1956,7 +1956,7 @@
           <p:cNvPr id="1" name="cover-rule">
             <a:extLst xmlns:a="http://schemas.openxmlformats.org/drawingml/2006/main">
               <a:ext uri="{FF2B5EF4-FFF2-40B4-BE49-F238E27FC236}">
-                <a16:creationId xmlns:a16="http://schemas.microsoft.com/office/drawing/2014/main" id="{4C19116C-7418-4540-AFA4-D4B45A39CC58}"/>
+                <a16:creationId xmlns:a16="http://schemas.microsoft.com/office/drawing/2014/main" id="{6AA12216-6C77-4D46-8E72-CEA7B90C5553}"/>
               </a:ext>
             </a:extLst>
           </p:cNvPr>
@@ -1989,7 +1989,7 @@
           <p:cNvPr id="2" name="cover-ring-1">
             <a:extLst xmlns:a="http://schemas.openxmlformats.org/drawingml/2006/main">
               <a:ext uri="{FF2B5EF4-FFF2-40B4-BE49-F238E27FC236}">
-                <a16:creationId xmlns:a16="http://schemas.microsoft.com/office/drawing/2014/main" id="{A56572B7-7C6B-421D-9B9D-B57429D33C12}"/>
+                <a16:creationId xmlns:a16="http://schemas.microsoft.com/office/drawing/2014/main" id="{C8CC33E7-7143-4766-B995-9BF2C7371723}"/>
               </a:ext>
             </a:extLst>
           </p:cNvPr>
@@ -2020,7 +2020,7 @@
           <p:cNvPr id="3" name="cover-ring-2">
             <a:extLst xmlns:a="http://schemas.openxmlformats.org/drawingml/2006/main">
               <a:ext uri="{FF2B5EF4-FFF2-40B4-BE49-F238E27FC236}">
-                <a16:creationId xmlns:a16="http://schemas.microsoft.com/office/drawing/2014/main" id="{95AEF660-0856-4D8A-8505-88931DB978F6}"/>
+                <a16:creationId xmlns:a16="http://schemas.microsoft.com/office/drawing/2014/main" id="{3165B24E-2A62-48BC-868E-D3ADACB093B0}"/>
               </a:ext>
             </a:extLst>
           </p:cNvPr>
@@ -2051,7 +2051,7 @@
           <p:cNvPr id="4" name="cover-core">
             <a:extLst xmlns:a="http://schemas.openxmlformats.org/drawingml/2006/main">
               <a:ext uri="{FF2B5EF4-FFF2-40B4-BE49-F238E27FC236}">
-                <a16:creationId xmlns:a16="http://schemas.microsoft.com/office/drawing/2014/main" id="{3C6AF810-C764-4BDA-97CA-35E209C08E31}"/>
+                <a16:creationId xmlns:a16="http://schemas.microsoft.com/office/drawing/2014/main" id="{E7E36EBF-8352-4E53-8A6E-97389EB5B4D8}"/>
               </a:ext>
             </a:extLst>
           </p:cNvPr>
@@ -2084,7 +2084,7 @@
           <p:cNvPr id="5" name="cover-line-1">
             <a:extLst xmlns:a="http://schemas.openxmlformats.org/drawingml/2006/main">
               <a:ext uri="{FF2B5EF4-FFF2-40B4-BE49-F238E27FC236}">
-                <a16:creationId xmlns:a16="http://schemas.microsoft.com/office/drawing/2014/main" id="{072ED357-ABB4-4DFA-9628-E525AD94C3E7}"/>
+                <a16:creationId xmlns:a16="http://schemas.microsoft.com/office/drawing/2014/main" id="{8BFCCC7A-7BAC-46F8-BB1A-A9C6B09A83FF}"/>
               </a:ext>
             </a:extLst>
           </p:cNvPr>
@@ -2115,7 +2115,7 @@
           <p:cNvPr id="6" name="cover-line-2">
             <a:extLst xmlns:a="http://schemas.openxmlformats.org/drawingml/2006/main">
               <a:ext uri="{FF2B5EF4-FFF2-40B4-BE49-F238E27FC236}">
-                <a16:creationId xmlns:a16="http://schemas.microsoft.com/office/drawing/2014/main" id="{86ABCD7B-095B-4211-BC74-89CB17B0AC25}"/>
+                <a16:creationId xmlns:a16="http://schemas.microsoft.com/office/drawing/2014/main" id="{3A0EF6B3-A543-4729-8566-550794C71AE9}"/>
               </a:ext>
             </a:extLst>
           </p:cNvPr>
@@ -2146,7 +2146,7 @@
           <p:cNvPr id="7" name="cover-eyebrow">
             <a:extLst xmlns:a="http://schemas.openxmlformats.org/drawingml/2006/main">
               <a:ext uri="{FF2B5EF4-FFF2-40B4-BE49-F238E27FC236}">
-                <a16:creationId xmlns:a16="http://schemas.microsoft.com/office/drawing/2014/main" id="{1CE01CE2-4681-4BB9-AB85-9992EBF14489}"/>
+                <a16:creationId xmlns:a16="http://schemas.microsoft.com/office/drawing/2014/main" id="{D152CD64-48FD-4637-A588-807DEC870FB5}"/>
               </a:ext>
             </a:extLst>
           </p:cNvPr>
@@ -2204,7 +2204,7 @@
           <p:cNvPr id="8" name="cover-title">
             <a:extLst xmlns:a="http://schemas.openxmlformats.org/drawingml/2006/main">
               <a:ext uri="{FF2B5EF4-FFF2-40B4-BE49-F238E27FC236}">
-                <a16:creationId xmlns:a16="http://schemas.microsoft.com/office/drawing/2014/main" id="{FEA40936-B698-4BA0-90B1-01F2C346A35C}"/>
+                <a16:creationId xmlns:a16="http://schemas.microsoft.com/office/drawing/2014/main" id="{960EFD69-4413-4E84-9D16-038AE974F5A6}"/>
               </a:ext>
             </a:extLst>
           </p:cNvPr>
@@ -2262,7 +2262,7 @@
           <p:cNvPr id="9" name="cover-subtitle">
             <a:extLst xmlns:a="http://schemas.openxmlformats.org/drawingml/2006/main">
               <a:ext uri="{FF2B5EF4-FFF2-40B4-BE49-F238E27FC236}">
-                <a16:creationId xmlns:a16="http://schemas.microsoft.com/office/drawing/2014/main" id="{E9897F7D-EA02-4E6B-9D17-59A3502C0CE2}"/>
+                <a16:creationId xmlns:a16="http://schemas.microsoft.com/office/drawing/2014/main" id="{2746CFE5-0A8A-4EA1-A559-45E1BE0880F2}"/>
               </a:ext>
             </a:extLst>
           </p:cNvPr>
@@ -2324,7 +2324,7 @@
           <p:cNvPr id="10" name="cover-lead">
             <a:extLst xmlns:a="http://schemas.openxmlformats.org/drawingml/2006/main">
               <a:ext uri="{FF2B5EF4-FFF2-40B4-BE49-F238E27FC236}">
-                <a16:creationId xmlns:a16="http://schemas.microsoft.com/office/drawing/2014/main" id="{3A72F1C2-5AA4-4E95-8E00-78A0D40082A5}"/>
+                <a16:creationId xmlns:a16="http://schemas.microsoft.com/office/drawing/2014/main" id="{5D1816F5-8409-479B-A576-57DD077CF16E}"/>
               </a:ext>
             </a:extLst>
           </p:cNvPr>
@@ -2382,7 +2382,7 @@
           <p:cNvPr id="11" name="cover-course">
             <a:extLst xmlns:a="http://schemas.openxmlformats.org/drawingml/2006/main">
               <a:ext uri="{FF2B5EF4-FFF2-40B4-BE49-F238E27FC236}">
-                <a16:creationId xmlns:a16="http://schemas.microsoft.com/office/drawing/2014/main" id="{CA667C6C-64F3-4E6E-A5EC-CF62507E7912}"/>
+                <a16:creationId xmlns:a16="http://schemas.microsoft.com/office/drawing/2014/main" id="{04F1BF98-537E-48E9-944B-8765230AF972}"/>
               </a:ext>
             </a:extLst>
           </p:cNvPr>
@@ -2440,7 +2440,7 @@
           <p:cNvPr id="12" name="cover-id">
             <a:extLst xmlns:a="http://schemas.openxmlformats.org/drawingml/2006/main">
               <a:ext uri="{FF2B5EF4-FFF2-40B4-BE49-F238E27FC236}">
-                <a16:creationId xmlns:a16="http://schemas.microsoft.com/office/drawing/2014/main" id="{9044DD7B-66DC-4746-BE62-D0C7E7FB2B8E}"/>
+                <a16:creationId xmlns:a16="http://schemas.microsoft.com/office/drawing/2014/main" id="{9101292D-3708-4A65-90AA-2A63DB02FDD2}"/>
               </a:ext>
             </a:extLst>
           </p:cNvPr>
@@ -2496,7 +2496,7 @@
     </p:spTree>
     <p:extLst>
       <p:ext uri="{BB962C8B-B14F-4D97-AF65-F5344CB8AC3E}">
-        <p14:creationId xmlns:p14="http://schemas.microsoft.com/office/powerpoint/2010/main" val="1870314280"/>
+        <p14:creationId xmlns:p14="http://schemas.microsoft.com/office/powerpoint/2010/main" val="1476732693"/>
       </p:ext>
     </p:extLst>
   </p:cSld>
@@ -2527,7 +2527,7 @@
           <p:cNvPr id="1" name="s10-rule">
             <a:extLst xmlns:a="http://schemas.openxmlformats.org/drawingml/2006/main">
               <a:ext uri="{FF2B5EF4-FFF2-40B4-BE49-F238E27FC236}">
-                <a16:creationId xmlns:a16="http://schemas.microsoft.com/office/drawing/2014/main" id="{E0EB2C88-B999-4112-9318-F15C1A073A03}"/>
+                <a16:creationId xmlns:a16="http://schemas.microsoft.com/office/drawing/2014/main" id="{75ADC0A8-B71F-49EE-89F0-A10D7ACD17F5}"/>
               </a:ext>
             </a:extLst>
           </p:cNvPr>
@@ -2560,7 +2560,7 @@
           <p:cNvPr id="2" name="s10-eyebrow">
             <a:extLst xmlns:a="http://schemas.openxmlformats.org/drawingml/2006/main">
               <a:ext uri="{FF2B5EF4-FFF2-40B4-BE49-F238E27FC236}">
-                <a16:creationId xmlns:a16="http://schemas.microsoft.com/office/drawing/2014/main" id="{19087818-F0BF-4491-A4E2-C829124EB2C6}"/>
+                <a16:creationId xmlns:a16="http://schemas.microsoft.com/office/drawing/2014/main" id="{83C6BC70-0370-448A-93AF-C1A76A3E31C5}"/>
               </a:ext>
             </a:extLst>
           </p:cNvPr>
@@ -2618,7 +2618,7 @@
           <p:cNvPr id="3" name="s10-title">
             <a:extLst xmlns:a="http://schemas.openxmlformats.org/drawingml/2006/main">
               <a:ext uri="{FF2B5EF4-FFF2-40B4-BE49-F238E27FC236}">
-                <a16:creationId xmlns:a16="http://schemas.microsoft.com/office/drawing/2014/main" id="{A00EF41F-B855-4A2B-B0FC-F938FF846FAA}"/>
+                <a16:creationId xmlns:a16="http://schemas.microsoft.com/office/drawing/2014/main" id="{0E2A5ABE-878C-4BC4-88B9-3E3E74870273}"/>
               </a:ext>
             </a:extLst>
           </p:cNvPr>
@@ -2676,7 +2676,7 @@
           <p:cNvPr id="4" name="s10-footer">
             <a:extLst xmlns:a="http://schemas.openxmlformats.org/drawingml/2006/main">
               <a:ext uri="{FF2B5EF4-FFF2-40B4-BE49-F238E27FC236}">
-                <a16:creationId xmlns:a16="http://schemas.microsoft.com/office/drawing/2014/main" id="{D6F261D5-5275-40D8-B8EC-97F32E9FC005}"/>
+                <a16:creationId xmlns:a16="http://schemas.microsoft.com/office/drawing/2014/main" id="{30F4426B-CBA4-4DBA-85C8-A2FDB498CC86}"/>
               </a:ext>
             </a:extLst>
           </p:cNvPr>
@@ -2707,7 +2707,7 @@
           <p:cNvPr id="5" name="s10-identity">
             <a:extLst xmlns:a="http://schemas.openxmlformats.org/drawingml/2006/main">
               <a:ext uri="{FF2B5EF4-FFF2-40B4-BE49-F238E27FC236}">
-                <a16:creationId xmlns:a16="http://schemas.microsoft.com/office/drawing/2014/main" id="{993B6C66-CA2C-4668-AA96-37FAA93077EE}"/>
+                <a16:creationId xmlns:a16="http://schemas.microsoft.com/office/drawing/2014/main" id="{FA8B9F17-77A3-474E-AEA1-6E9D872D6512}"/>
               </a:ext>
             </a:extLst>
           </p:cNvPr>
@@ -2765,7 +2765,7 @@
           <p:cNvPr id="6" name="case-title">
             <a:extLst xmlns:a="http://schemas.openxmlformats.org/drawingml/2006/main">
               <a:ext uri="{FF2B5EF4-FFF2-40B4-BE49-F238E27FC236}">
-                <a16:creationId xmlns:a16="http://schemas.microsoft.com/office/drawing/2014/main" id="{9AD451C0-DB13-4E2D-A135-634AD0EED69C}"/>
+                <a16:creationId xmlns:a16="http://schemas.microsoft.com/office/drawing/2014/main" id="{09292803-89A6-4310-85DF-195BE29847F3}"/>
               </a:ext>
             </a:extLst>
           </p:cNvPr>
@@ -2829,7 +2829,7 @@
           <p:cNvPr id="7" name="case-row-0">
             <a:extLst xmlns:a="http://schemas.openxmlformats.org/drawingml/2006/main">
               <a:ext uri="{FF2B5EF4-FFF2-40B4-BE49-F238E27FC236}">
-                <a16:creationId xmlns:a16="http://schemas.microsoft.com/office/drawing/2014/main" id="{255F8D78-ED11-4321-9CE2-C18DA3CE1390}"/>
+                <a16:creationId xmlns:a16="http://schemas.microsoft.com/office/drawing/2014/main" id="{64A6528B-758F-4617-A93A-A35883AACE37}"/>
               </a:ext>
             </a:extLst>
           </p:cNvPr>
@@ -2893,7 +2893,7 @@
           <p:cNvPr id="8" name="case-row-1">
             <a:extLst xmlns:a="http://schemas.openxmlformats.org/drawingml/2006/main">
               <a:ext uri="{FF2B5EF4-FFF2-40B4-BE49-F238E27FC236}">
-                <a16:creationId xmlns:a16="http://schemas.microsoft.com/office/drawing/2014/main" id="{952E639F-6FB2-42A1-90BC-21D912E9C65C}"/>
+                <a16:creationId xmlns:a16="http://schemas.microsoft.com/office/drawing/2014/main" id="{F0A0F1B7-1C51-4BBC-9F7C-A378DA65B39B}"/>
               </a:ext>
             </a:extLst>
           </p:cNvPr>
@@ -2957,7 +2957,7 @@
           <p:cNvPr id="9" name="case-row-2">
             <a:extLst xmlns:a="http://schemas.openxmlformats.org/drawingml/2006/main">
               <a:ext uri="{FF2B5EF4-FFF2-40B4-BE49-F238E27FC236}">
-                <a16:creationId xmlns:a16="http://schemas.microsoft.com/office/drawing/2014/main" id="{196F846F-35FC-4788-9C53-760876507E59}"/>
+                <a16:creationId xmlns:a16="http://schemas.microsoft.com/office/drawing/2014/main" id="{8CE74A0B-17DB-4472-B79A-FB71739BA09D}"/>
               </a:ext>
             </a:extLst>
           </p:cNvPr>
@@ -3021,7 +3021,7 @@
           <p:cNvPr id="10" name="s10-takeaway-rule">
             <a:extLst xmlns:a="http://schemas.openxmlformats.org/drawingml/2006/main">
               <a:ext uri="{FF2B5EF4-FFF2-40B4-BE49-F238E27FC236}">
-                <a16:creationId xmlns:a16="http://schemas.microsoft.com/office/drawing/2014/main" id="{F3BAC517-F261-4086-8F86-9166B917596B}"/>
+                <a16:creationId xmlns:a16="http://schemas.microsoft.com/office/drawing/2014/main" id="{3C1CC09B-7CA6-48DC-887A-35721F36C9FF}"/>
               </a:ext>
             </a:extLst>
           </p:cNvPr>
@@ -3054,7 +3054,7 @@
           <p:cNvPr id="11" name="s10-takeaway">
             <a:extLst xmlns:a="http://schemas.openxmlformats.org/drawingml/2006/main">
               <a:ext uri="{FF2B5EF4-FFF2-40B4-BE49-F238E27FC236}">
-                <a16:creationId xmlns:a16="http://schemas.microsoft.com/office/drawing/2014/main" id="{F0FC9629-B5D1-44E5-8C5C-494AFA42B0B9}"/>
+                <a16:creationId xmlns:a16="http://schemas.microsoft.com/office/drawing/2014/main" id="{52A10C3C-BB8E-4DDA-82E9-2B4AE6044ACA}"/>
               </a:ext>
             </a:extLst>
           </p:cNvPr>
@@ -3110,7 +3110,7 @@
     </p:spTree>
     <p:extLst>
       <p:ext uri="{BB962C8B-B14F-4D97-AF65-F5344CB8AC3E}">
-        <p14:creationId xmlns:p14="http://schemas.microsoft.com/office/powerpoint/2010/main" val="281050355"/>
+        <p14:creationId xmlns:p14="http://schemas.microsoft.com/office/powerpoint/2010/main" val="829347192"/>
       </p:ext>
     </p:extLst>
   </p:cSld>
@@ -3141,7 +3141,7 @@
           <p:cNvPr id="1" name="s11-rule">
             <a:extLst xmlns:a="http://schemas.openxmlformats.org/drawingml/2006/main">
               <a:ext uri="{FF2B5EF4-FFF2-40B4-BE49-F238E27FC236}">
-                <a16:creationId xmlns:a16="http://schemas.microsoft.com/office/drawing/2014/main" id="{6D7329CF-166E-42BE-AB32-E26E91760D5D}"/>
+                <a16:creationId xmlns:a16="http://schemas.microsoft.com/office/drawing/2014/main" id="{30DD7929-2306-4B69-A788-3309561ECEFB}"/>
               </a:ext>
             </a:extLst>
           </p:cNvPr>
@@ -3174,7 +3174,7 @@
           <p:cNvPr id="2" name="s11-eyebrow">
             <a:extLst xmlns:a="http://schemas.openxmlformats.org/drawingml/2006/main">
               <a:ext uri="{FF2B5EF4-FFF2-40B4-BE49-F238E27FC236}">
-                <a16:creationId xmlns:a16="http://schemas.microsoft.com/office/drawing/2014/main" id="{3AC96DD3-087C-499D-977A-F1B66C924457}"/>
+                <a16:creationId xmlns:a16="http://schemas.microsoft.com/office/drawing/2014/main" id="{2CEDFBE9-C178-4F31-8DC9-9481E9B3B89A}"/>
               </a:ext>
             </a:extLst>
           </p:cNvPr>
@@ -3232,7 +3232,7 @@
           <p:cNvPr id="3" name="s11-title">
             <a:extLst xmlns:a="http://schemas.openxmlformats.org/drawingml/2006/main">
               <a:ext uri="{FF2B5EF4-FFF2-40B4-BE49-F238E27FC236}">
-                <a16:creationId xmlns:a16="http://schemas.microsoft.com/office/drawing/2014/main" id="{F1A6D89E-84EF-409B-A644-0C6A9542EDEB}"/>
+                <a16:creationId xmlns:a16="http://schemas.microsoft.com/office/drawing/2014/main" id="{5A64DAE5-DCB3-4E42-8A58-65B8DC52D671}"/>
               </a:ext>
             </a:extLst>
           </p:cNvPr>
@@ -3290,7 +3290,7 @@
           <p:cNvPr id="4" name="s11-footer">
             <a:extLst xmlns:a="http://schemas.openxmlformats.org/drawingml/2006/main">
               <a:ext uri="{FF2B5EF4-FFF2-40B4-BE49-F238E27FC236}">
-                <a16:creationId xmlns:a16="http://schemas.microsoft.com/office/drawing/2014/main" id="{AAEE7D6E-36AE-4AB6-B756-C1245C22AEF1}"/>
+                <a16:creationId xmlns:a16="http://schemas.microsoft.com/office/drawing/2014/main" id="{8DFC4DF6-5395-49B8-97A8-86764435EBDC}"/>
               </a:ext>
             </a:extLst>
           </p:cNvPr>
@@ -3321,7 +3321,7 @@
           <p:cNvPr id="5" name="s11-identity">
             <a:extLst xmlns:a="http://schemas.openxmlformats.org/drawingml/2006/main">
               <a:ext uri="{FF2B5EF4-FFF2-40B4-BE49-F238E27FC236}">
-                <a16:creationId xmlns:a16="http://schemas.microsoft.com/office/drawing/2014/main" id="{A19C9AC9-1F14-42C7-B524-78D6557A58B2}"/>
+                <a16:creationId xmlns:a16="http://schemas.microsoft.com/office/drawing/2014/main" id="{5A92BB2E-F143-4AF3-8686-7E6951727E84}"/>
               </a:ext>
             </a:extLst>
           </p:cNvPr>
@@ -3379,7 +3379,7 @@
           <p:cNvPr id="6" name="practice-circle-0">
             <a:extLst xmlns:a="http://schemas.openxmlformats.org/drawingml/2006/main">
               <a:ext uri="{FF2B5EF4-FFF2-40B4-BE49-F238E27FC236}">
-                <a16:creationId xmlns:a16="http://schemas.microsoft.com/office/drawing/2014/main" id="{519FEF40-6449-4568-B827-2865C39C834C}"/>
+                <a16:creationId xmlns:a16="http://schemas.microsoft.com/office/drawing/2014/main" id="{22B56C2F-5A17-41FA-9077-916DD9570A30}"/>
               </a:ext>
             </a:extLst>
           </p:cNvPr>
@@ -3412,7 +3412,7 @@
           <p:cNvPr id="7" name="practice-number-0">
             <a:extLst xmlns:a="http://schemas.openxmlformats.org/drawingml/2006/main">
               <a:ext uri="{FF2B5EF4-FFF2-40B4-BE49-F238E27FC236}">
-                <a16:creationId xmlns:a16="http://schemas.microsoft.com/office/drawing/2014/main" id="{C9BD56DD-F34A-4FC2-B822-857303C0B687}"/>
+                <a16:creationId xmlns:a16="http://schemas.microsoft.com/office/drawing/2014/main" id="{28601FB2-BEE5-4D83-8874-79A1C52190DF}"/>
               </a:ext>
             </a:extLst>
           </p:cNvPr>
@@ -3470,7 +3470,7 @@
           <p:cNvPr id="8" name="practice-item-0">
             <a:extLst xmlns:a="http://schemas.openxmlformats.org/drawingml/2006/main">
               <a:ext uri="{FF2B5EF4-FFF2-40B4-BE49-F238E27FC236}">
-                <a16:creationId xmlns:a16="http://schemas.microsoft.com/office/drawing/2014/main" id="{EDA3CAA3-85FE-43E4-BDE7-FA84BC2DCC88}"/>
+                <a16:creationId xmlns:a16="http://schemas.microsoft.com/office/drawing/2014/main" id="{D50DF389-80EC-45D4-A456-3EF161E29E07}"/>
               </a:ext>
             </a:extLst>
           </p:cNvPr>
@@ -3534,7 +3534,7 @@
           <p:cNvPr id="9" name="practice-connector-0">
             <a:extLst xmlns:a="http://schemas.openxmlformats.org/drawingml/2006/main">
               <a:ext uri="{FF2B5EF4-FFF2-40B4-BE49-F238E27FC236}">
-                <a16:creationId xmlns:a16="http://schemas.microsoft.com/office/drawing/2014/main" id="{AD81FB1D-9A08-40D7-839B-B331E9CE6523}"/>
+                <a16:creationId xmlns:a16="http://schemas.microsoft.com/office/drawing/2014/main" id="{793FD311-7FE6-43A9-9258-DA554B483981}"/>
               </a:ext>
             </a:extLst>
           </p:cNvPr>
@@ -3565,7 +3565,7 @@
           <p:cNvPr id="10" name="practice-circle-1">
             <a:extLst xmlns:a="http://schemas.openxmlformats.org/drawingml/2006/main">
               <a:ext uri="{FF2B5EF4-FFF2-40B4-BE49-F238E27FC236}">
-                <a16:creationId xmlns:a16="http://schemas.microsoft.com/office/drawing/2014/main" id="{4DCD9D37-0837-4D0A-A149-AF2F04B7EA5C}"/>
+                <a16:creationId xmlns:a16="http://schemas.microsoft.com/office/drawing/2014/main" id="{41F0DC6E-F10C-4856-91E1-983028E9BDB8}"/>
               </a:ext>
             </a:extLst>
           </p:cNvPr>
@@ -3598,7 +3598,7 @@
           <p:cNvPr id="11" name="practice-number-1">
             <a:extLst xmlns:a="http://schemas.openxmlformats.org/drawingml/2006/main">
               <a:ext uri="{FF2B5EF4-FFF2-40B4-BE49-F238E27FC236}">
-                <a16:creationId xmlns:a16="http://schemas.microsoft.com/office/drawing/2014/main" id="{81CEBBCE-4D95-487D-A232-619160F1886B}"/>
+                <a16:creationId xmlns:a16="http://schemas.microsoft.com/office/drawing/2014/main" id="{1499A619-308F-41DB-9F56-EC712A7CB7D2}"/>
               </a:ext>
             </a:extLst>
           </p:cNvPr>
@@ -3656,7 +3656,7 @@
           <p:cNvPr id="12" name="practice-item-1">
             <a:extLst xmlns:a="http://schemas.openxmlformats.org/drawingml/2006/main">
               <a:ext uri="{FF2B5EF4-FFF2-40B4-BE49-F238E27FC236}">
-                <a16:creationId xmlns:a16="http://schemas.microsoft.com/office/drawing/2014/main" id="{A817BB15-B112-4173-B9C1-6B2D38B59F7B}"/>
+                <a16:creationId xmlns:a16="http://schemas.microsoft.com/office/drawing/2014/main" id="{6E5CD977-D9FF-4761-9E71-9DE070B7FB30}"/>
               </a:ext>
             </a:extLst>
           </p:cNvPr>
@@ -3720,7 +3720,7 @@
           <p:cNvPr id="13" name="practice-connector-1">
             <a:extLst xmlns:a="http://schemas.openxmlformats.org/drawingml/2006/main">
               <a:ext uri="{FF2B5EF4-FFF2-40B4-BE49-F238E27FC236}">
-                <a16:creationId xmlns:a16="http://schemas.microsoft.com/office/drawing/2014/main" id="{F8B2C55F-F0A8-475E-951C-3093595CB199}"/>
+                <a16:creationId xmlns:a16="http://schemas.microsoft.com/office/drawing/2014/main" id="{88E425C4-30AC-4454-AC50-8DF059FDBABE}"/>
               </a:ext>
             </a:extLst>
           </p:cNvPr>
@@ -3751,7 +3751,7 @@
           <p:cNvPr id="14" name="practice-circle-2">
             <a:extLst xmlns:a="http://schemas.openxmlformats.org/drawingml/2006/main">
               <a:ext uri="{FF2B5EF4-FFF2-40B4-BE49-F238E27FC236}">
-                <a16:creationId xmlns:a16="http://schemas.microsoft.com/office/drawing/2014/main" id="{10DB6194-2EC2-4D31-B7C2-5562E3EDA608}"/>
+                <a16:creationId xmlns:a16="http://schemas.microsoft.com/office/drawing/2014/main" id="{5CC4DDB7-C7BB-416A-9FC4-4D1B725EE5DC}"/>
               </a:ext>
             </a:extLst>
           </p:cNvPr>
@@ -3784,7 +3784,7 @@
           <p:cNvPr id="15" name="practice-number-2">
             <a:extLst xmlns:a="http://schemas.openxmlformats.org/drawingml/2006/main">
               <a:ext uri="{FF2B5EF4-FFF2-40B4-BE49-F238E27FC236}">
-                <a16:creationId xmlns:a16="http://schemas.microsoft.com/office/drawing/2014/main" id="{255DC55A-CE3A-4C07-9758-BED2ED98899C}"/>
+                <a16:creationId xmlns:a16="http://schemas.microsoft.com/office/drawing/2014/main" id="{A0CBF081-A242-4E98-92D9-5E9B169F3D1B}"/>
               </a:ext>
             </a:extLst>
           </p:cNvPr>
@@ -3842,7 +3842,7 @@
           <p:cNvPr id="16" name="practice-item-2">
             <a:extLst xmlns:a="http://schemas.openxmlformats.org/drawingml/2006/main">
               <a:ext uri="{FF2B5EF4-FFF2-40B4-BE49-F238E27FC236}">
-                <a16:creationId xmlns:a16="http://schemas.microsoft.com/office/drawing/2014/main" id="{BA7B0B69-4A13-4E55-8B92-0439D2819FA8}"/>
+                <a16:creationId xmlns:a16="http://schemas.microsoft.com/office/drawing/2014/main" id="{5C18BAD4-699F-4C7E-AB71-72FE7EA9E3C5}"/>
               </a:ext>
             </a:extLst>
           </p:cNvPr>
@@ -3904,7 +3904,7 @@
     </p:spTree>
     <p:extLst>
       <p:ext uri="{BB962C8B-B14F-4D97-AF65-F5344CB8AC3E}">
-        <p14:creationId xmlns:p14="http://schemas.microsoft.com/office/powerpoint/2010/main" val="903487001"/>
+        <p14:creationId xmlns:p14="http://schemas.microsoft.com/office/powerpoint/2010/main" val="1196623569"/>
       </p:ext>
     </p:extLst>
   </p:cSld>
@@ -3935,7 +3935,7 @@
           <p:cNvPr id="1" name="s12-rule">
             <a:extLst xmlns:a="http://schemas.openxmlformats.org/drawingml/2006/main">
               <a:ext uri="{FF2B5EF4-FFF2-40B4-BE49-F238E27FC236}">
-                <a16:creationId xmlns:a16="http://schemas.microsoft.com/office/drawing/2014/main" id="{E7B6BA9A-8D22-43AB-A74F-4243BB785EE9}"/>
+                <a16:creationId xmlns:a16="http://schemas.microsoft.com/office/drawing/2014/main" id="{67438359-EBF2-4EB4-B1A0-AD974A2E91AB}"/>
               </a:ext>
             </a:extLst>
           </p:cNvPr>
@@ -3968,7 +3968,7 @@
           <p:cNvPr id="2" name="s12-eyebrow">
             <a:extLst xmlns:a="http://schemas.openxmlformats.org/drawingml/2006/main">
               <a:ext uri="{FF2B5EF4-FFF2-40B4-BE49-F238E27FC236}">
-                <a16:creationId xmlns:a16="http://schemas.microsoft.com/office/drawing/2014/main" id="{A107D163-44AC-4AFE-BBBB-7F49998CE472}"/>
+                <a16:creationId xmlns:a16="http://schemas.microsoft.com/office/drawing/2014/main" id="{3C8A5CC3-CF4D-41EB-8BF7-3EDB2773EEFC}"/>
               </a:ext>
             </a:extLst>
           </p:cNvPr>
@@ -4026,7 +4026,7 @@
           <p:cNvPr id="3" name="s12-title">
             <a:extLst xmlns:a="http://schemas.openxmlformats.org/drawingml/2006/main">
               <a:ext uri="{FF2B5EF4-FFF2-40B4-BE49-F238E27FC236}">
-                <a16:creationId xmlns:a16="http://schemas.microsoft.com/office/drawing/2014/main" id="{D9AFBDF5-A6CD-4B97-8D48-2485EA63CC31}"/>
+                <a16:creationId xmlns:a16="http://schemas.microsoft.com/office/drawing/2014/main" id="{2894E6D0-C13C-48D9-B6CD-60A9EA691B2C}"/>
               </a:ext>
             </a:extLst>
           </p:cNvPr>
@@ -4084,7 +4084,7 @@
           <p:cNvPr id="4" name="s12-footer">
             <a:extLst xmlns:a="http://schemas.openxmlformats.org/drawingml/2006/main">
               <a:ext uri="{FF2B5EF4-FFF2-40B4-BE49-F238E27FC236}">
-                <a16:creationId xmlns:a16="http://schemas.microsoft.com/office/drawing/2014/main" id="{43A30786-C90E-4E48-A6C4-5C972CE162D9}"/>
+                <a16:creationId xmlns:a16="http://schemas.microsoft.com/office/drawing/2014/main" id="{3F56EADE-7D32-498F-A38B-4727DA6656A6}"/>
               </a:ext>
             </a:extLst>
           </p:cNvPr>
@@ -4115,7 +4115,7 @@
           <p:cNvPr id="5" name="s12-identity">
             <a:extLst xmlns:a="http://schemas.openxmlformats.org/drawingml/2006/main">
               <a:ext uri="{FF2B5EF4-FFF2-40B4-BE49-F238E27FC236}">
-                <a16:creationId xmlns:a16="http://schemas.microsoft.com/office/drawing/2014/main" id="{2EB2327F-CC57-4BF8-9272-409CC853C7CB}"/>
+                <a16:creationId xmlns:a16="http://schemas.microsoft.com/office/drawing/2014/main" id="{2AD5E76E-BCD3-4B09-8B42-2A006B7FCA0F}"/>
               </a:ext>
             </a:extLst>
           </p:cNvPr>
@@ -4173,7 +4173,7 @@
           <p:cNvPr id="6" name="recap-circle-0">
             <a:extLst xmlns:a="http://schemas.openxmlformats.org/drawingml/2006/main">
               <a:ext uri="{FF2B5EF4-FFF2-40B4-BE49-F238E27FC236}">
-                <a16:creationId xmlns:a16="http://schemas.microsoft.com/office/drawing/2014/main" id="{18E60093-8063-4327-8F96-E06EBDDF5A9B}"/>
+                <a16:creationId xmlns:a16="http://schemas.microsoft.com/office/drawing/2014/main" id="{473CC1C9-9C76-4D38-929D-9D7014261B3E}"/>
               </a:ext>
             </a:extLst>
           </p:cNvPr>
@@ -4206,7 +4206,7 @@
           <p:cNvPr id="7" name="recap-number-0">
             <a:extLst xmlns:a="http://schemas.openxmlformats.org/drawingml/2006/main">
               <a:ext uri="{FF2B5EF4-FFF2-40B4-BE49-F238E27FC236}">
-                <a16:creationId xmlns:a16="http://schemas.microsoft.com/office/drawing/2014/main" id="{C1653A09-F4A8-463D-8086-DBA9F522A5D5}"/>
+                <a16:creationId xmlns:a16="http://schemas.microsoft.com/office/drawing/2014/main" id="{2EDDF5B7-54F9-460A-8CA5-930ABC85A399}"/>
               </a:ext>
             </a:extLst>
           </p:cNvPr>
@@ -4264,7 +4264,7 @@
           <p:cNvPr id="8" name="recap-item-0">
             <a:extLst xmlns:a="http://schemas.openxmlformats.org/drawingml/2006/main">
               <a:ext uri="{FF2B5EF4-FFF2-40B4-BE49-F238E27FC236}">
-                <a16:creationId xmlns:a16="http://schemas.microsoft.com/office/drawing/2014/main" id="{446EA3A8-B469-42E5-B4A5-3889AC0DBBA9}"/>
+                <a16:creationId xmlns:a16="http://schemas.microsoft.com/office/drawing/2014/main" id="{B974C361-5C6A-48F2-AEA3-2DFC5A348C99}"/>
               </a:ext>
             </a:extLst>
           </p:cNvPr>
@@ -4328,7 +4328,7 @@
           <p:cNvPr id="9" name="recap-connector-0">
             <a:extLst xmlns:a="http://schemas.openxmlformats.org/drawingml/2006/main">
               <a:ext uri="{FF2B5EF4-FFF2-40B4-BE49-F238E27FC236}">
-                <a16:creationId xmlns:a16="http://schemas.microsoft.com/office/drawing/2014/main" id="{668E3245-AD08-4C96-AE35-91F43C65692F}"/>
+                <a16:creationId xmlns:a16="http://schemas.microsoft.com/office/drawing/2014/main" id="{277990F5-4822-48DC-82DD-B2564E3B16B9}"/>
               </a:ext>
             </a:extLst>
           </p:cNvPr>
@@ -4359,7 +4359,7 @@
           <p:cNvPr id="10" name="recap-circle-1">
             <a:extLst xmlns:a="http://schemas.openxmlformats.org/drawingml/2006/main">
               <a:ext uri="{FF2B5EF4-FFF2-40B4-BE49-F238E27FC236}">
-                <a16:creationId xmlns:a16="http://schemas.microsoft.com/office/drawing/2014/main" id="{53FD12D6-103C-4092-B626-E6115A9389FC}"/>
+                <a16:creationId xmlns:a16="http://schemas.microsoft.com/office/drawing/2014/main" id="{486A7149-0D4B-4769-A798-E85043BED7D7}"/>
               </a:ext>
             </a:extLst>
           </p:cNvPr>
@@ -4392,7 +4392,7 @@
           <p:cNvPr id="11" name="recap-number-1">
             <a:extLst xmlns:a="http://schemas.openxmlformats.org/drawingml/2006/main">
               <a:ext uri="{FF2B5EF4-FFF2-40B4-BE49-F238E27FC236}">
-                <a16:creationId xmlns:a16="http://schemas.microsoft.com/office/drawing/2014/main" id="{6C9C7B27-1C24-40A6-912D-CB2FC4179E30}"/>
+                <a16:creationId xmlns:a16="http://schemas.microsoft.com/office/drawing/2014/main" id="{FA9F994C-6C75-4D89-B83B-1EAEC7F9059E}"/>
               </a:ext>
             </a:extLst>
           </p:cNvPr>
@@ -4450,7 +4450,7 @@
           <p:cNvPr id="12" name="recap-item-1">
             <a:extLst xmlns:a="http://schemas.openxmlformats.org/drawingml/2006/main">
               <a:ext uri="{FF2B5EF4-FFF2-40B4-BE49-F238E27FC236}">
-                <a16:creationId xmlns:a16="http://schemas.microsoft.com/office/drawing/2014/main" id="{F59AD0E5-2FF7-429C-B8FB-1EDBB08C4993}"/>
+                <a16:creationId xmlns:a16="http://schemas.microsoft.com/office/drawing/2014/main" id="{852E6E5C-612C-4CC7-8716-0CC5D9DE1E87}"/>
               </a:ext>
             </a:extLst>
           </p:cNvPr>
@@ -4514,7 +4514,7 @@
           <p:cNvPr id="13" name="recap-connector-1">
             <a:extLst xmlns:a="http://schemas.openxmlformats.org/drawingml/2006/main">
               <a:ext uri="{FF2B5EF4-FFF2-40B4-BE49-F238E27FC236}">
-                <a16:creationId xmlns:a16="http://schemas.microsoft.com/office/drawing/2014/main" id="{628D8E5D-1018-47EC-840A-0072B5705A85}"/>
+                <a16:creationId xmlns:a16="http://schemas.microsoft.com/office/drawing/2014/main" id="{DC44C33A-4D33-44A4-A9F1-4A6B6D48872E}"/>
               </a:ext>
             </a:extLst>
           </p:cNvPr>
@@ -4545,7 +4545,7 @@
           <p:cNvPr id="14" name="recap-circle-2">
             <a:extLst xmlns:a="http://schemas.openxmlformats.org/drawingml/2006/main">
               <a:ext uri="{FF2B5EF4-FFF2-40B4-BE49-F238E27FC236}">
-                <a16:creationId xmlns:a16="http://schemas.microsoft.com/office/drawing/2014/main" id="{2847337D-C8D2-41B2-9805-F05BB3E772CB}"/>
+                <a16:creationId xmlns:a16="http://schemas.microsoft.com/office/drawing/2014/main" id="{89D33805-10EF-4B92-8108-4AB1410351D1}"/>
               </a:ext>
             </a:extLst>
           </p:cNvPr>
@@ -4578,7 +4578,7 @@
           <p:cNvPr id="15" name="recap-number-2">
             <a:extLst xmlns:a="http://schemas.openxmlformats.org/drawingml/2006/main">
               <a:ext uri="{FF2B5EF4-FFF2-40B4-BE49-F238E27FC236}">
-                <a16:creationId xmlns:a16="http://schemas.microsoft.com/office/drawing/2014/main" id="{3F5305B1-1AD3-491A-8528-89C06B5F758D}"/>
+                <a16:creationId xmlns:a16="http://schemas.microsoft.com/office/drawing/2014/main" id="{E84EBFAE-C6FF-4887-B700-DEFA43247ADB}"/>
               </a:ext>
             </a:extLst>
           </p:cNvPr>
@@ -4636,7 +4636,7 @@
           <p:cNvPr id="16" name="recap-item-2">
             <a:extLst xmlns:a="http://schemas.openxmlformats.org/drawingml/2006/main">
               <a:ext uri="{FF2B5EF4-FFF2-40B4-BE49-F238E27FC236}">
-                <a16:creationId xmlns:a16="http://schemas.microsoft.com/office/drawing/2014/main" id="{EC37883B-EE0F-419F-9351-C078B89994E5}"/>
+                <a16:creationId xmlns:a16="http://schemas.microsoft.com/office/drawing/2014/main" id="{5D819CCC-06C5-4AEE-8023-9E6264203E59}"/>
               </a:ext>
             </a:extLst>
           </p:cNvPr>
@@ -4698,7 +4698,7 @@
     </p:spTree>
     <p:extLst>
       <p:ext uri="{BB962C8B-B14F-4D97-AF65-F5344CB8AC3E}">
-        <p14:creationId xmlns:p14="http://schemas.microsoft.com/office/powerpoint/2010/main" val="417536550"/>
+        <p14:creationId xmlns:p14="http://schemas.microsoft.com/office/powerpoint/2010/main" val="1395437305"/>
       </p:ext>
     </p:extLst>
   </p:cSld>
@@ -4729,7 +4729,7 @@
           <p:cNvPr id="1" name="s13-rule">
             <a:extLst xmlns:a="http://schemas.openxmlformats.org/drawingml/2006/main">
               <a:ext uri="{FF2B5EF4-FFF2-40B4-BE49-F238E27FC236}">
-                <a16:creationId xmlns:a16="http://schemas.microsoft.com/office/drawing/2014/main" id="{5CF0E079-C9BD-40D8-A431-78373D11F76B}"/>
+                <a16:creationId xmlns:a16="http://schemas.microsoft.com/office/drawing/2014/main" id="{7CF87C6A-FFB8-4846-B602-C8B7BA57180B}"/>
               </a:ext>
             </a:extLst>
           </p:cNvPr>
@@ -4762,7 +4762,7 @@
           <p:cNvPr id="2" name="s13-eyebrow">
             <a:extLst xmlns:a="http://schemas.openxmlformats.org/drawingml/2006/main">
               <a:ext uri="{FF2B5EF4-FFF2-40B4-BE49-F238E27FC236}">
-                <a16:creationId xmlns:a16="http://schemas.microsoft.com/office/drawing/2014/main" id="{354AED70-D038-4787-974B-4C1EFE2B9B20}"/>
+                <a16:creationId xmlns:a16="http://schemas.microsoft.com/office/drawing/2014/main" id="{6805EE07-E22C-4F1D-989D-44342E0A2FB1}"/>
               </a:ext>
             </a:extLst>
           </p:cNvPr>
@@ -4820,7 +4820,7 @@
           <p:cNvPr id="3" name="s13-title">
             <a:extLst xmlns:a="http://schemas.openxmlformats.org/drawingml/2006/main">
               <a:ext uri="{FF2B5EF4-FFF2-40B4-BE49-F238E27FC236}">
-                <a16:creationId xmlns:a16="http://schemas.microsoft.com/office/drawing/2014/main" id="{DE983B82-964E-4D91-AE2B-9744DEFF7A19}"/>
+                <a16:creationId xmlns:a16="http://schemas.microsoft.com/office/drawing/2014/main" id="{E1019F89-3DC9-4226-94CF-B5A277682E08}"/>
               </a:ext>
             </a:extLst>
           </p:cNvPr>
@@ -4878,7 +4878,7 @@
           <p:cNvPr id="4" name="s13-footer">
             <a:extLst xmlns:a="http://schemas.openxmlformats.org/drawingml/2006/main">
               <a:ext uri="{FF2B5EF4-FFF2-40B4-BE49-F238E27FC236}">
-                <a16:creationId xmlns:a16="http://schemas.microsoft.com/office/drawing/2014/main" id="{8E30179C-D897-4BA4-B73C-E4CC38C5B40B}"/>
+                <a16:creationId xmlns:a16="http://schemas.microsoft.com/office/drawing/2014/main" id="{3A6A9FAC-9BE3-4446-B673-3449037B369B}"/>
               </a:ext>
             </a:extLst>
           </p:cNvPr>
@@ -4909,7 +4909,7 @@
           <p:cNvPr id="5" name="s13-identity">
             <a:extLst xmlns:a="http://schemas.openxmlformats.org/drawingml/2006/main">
               <a:ext uri="{FF2B5EF4-FFF2-40B4-BE49-F238E27FC236}">
-                <a16:creationId xmlns:a16="http://schemas.microsoft.com/office/drawing/2014/main" id="{B1E14DEB-DCD0-48CD-8BD4-5B6B2ABD5FC8}"/>
+                <a16:creationId xmlns:a16="http://schemas.microsoft.com/office/drawing/2014/main" id="{AD37FCFA-C3AF-42AE-AF57-A9244011BDB4}"/>
               </a:ext>
             </a:extLst>
           </p:cNvPr>
@@ -4967,7 +4967,7 @@
           <p:cNvPr id="6" name="source-0">
             <a:extLst xmlns:a="http://schemas.openxmlformats.org/drawingml/2006/main">
               <a:ext uri="{FF2B5EF4-FFF2-40B4-BE49-F238E27FC236}">
-                <a16:creationId xmlns:a16="http://schemas.microsoft.com/office/drawing/2014/main" id="{A72A1C64-95D9-40CD-B199-9934D3DBB556}"/>
+                <a16:creationId xmlns:a16="http://schemas.microsoft.com/office/drawing/2014/main" id="{CE880E38-6928-4662-8A2C-FAE6CA780C74}"/>
               </a:ext>
             </a:extLst>
           </p:cNvPr>
@@ -5031,7 +5031,7 @@
           <p:cNvPr id="7" name="source-1">
             <a:extLst xmlns:a="http://schemas.openxmlformats.org/drawingml/2006/main">
               <a:ext uri="{FF2B5EF4-FFF2-40B4-BE49-F238E27FC236}">
-                <a16:creationId xmlns:a16="http://schemas.microsoft.com/office/drawing/2014/main" id="{390F74B0-9D45-47AB-A914-9712B1CE98B3}"/>
+                <a16:creationId xmlns:a16="http://schemas.microsoft.com/office/drawing/2014/main" id="{2214F53E-3753-4F82-A58E-7937E364AF0E}"/>
               </a:ext>
             </a:extLst>
           </p:cNvPr>
@@ -5095,7 +5095,7 @@
           <p:cNvPr id="8" name="source-2">
             <a:extLst xmlns:a="http://schemas.openxmlformats.org/drawingml/2006/main">
               <a:ext uri="{FF2B5EF4-FFF2-40B4-BE49-F238E27FC236}">
-                <a16:creationId xmlns:a16="http://schemas.microsoft.com/office/drawing/2014/main" id="{FEC23B2B-224C-4C63-B86C-1E6BE0BD57A1}"/>
+                <a16:creationId xmlns:a16="http://schemas.microsoft.com/office/drawing/2014/main" id="{B157A1F7-EAA6-4B24-B78F-DFE93FEF2BED}"/>
               </a:ext>
             </a:extLst>
           </p:cNvPr>
@@ -5159,7 +5159,7 @@
           <p:cNvPr id="9" name="source-3">
             <a:extLst xmlns:a="http://schemas.openxmlformats.org/drawingml/2006/main">
               <a:ext uri="{FF2B5EF4-FFF2-40B4-BE49-F238E27FC236}">
-                <a16:creationId xmlns:a16="http://schemas.microsoft.com/office/drawing/2014/main" id="{C148FF7A-1E6D-4A04-A097-FB5CF25541ED}"/>
+                <a16:creationId xmlns:a16="http://schemas.microsoft.com/office/drawing/2014/main" id="{0955202D-B559-4512-97FE-33C987E02582}"/>
               </a:ext>
             </a:extLst>
           </p:cNvPr>
@@ -5223,7 +5223,7 @@
           <p:cNvPr id="10" name="s13-takeaway-rule">
             <a:extLst xmlns:a="http://schemas.openxmlformats.org/drawingml/2006/main">
               <a:ext uri="{FF2B5EF4-FFF2-40B4-BE49-F238E27FC236}">
-                <a16:creationId xmlns:a16="http://schemas.microsoft.com/office/drawing/2014/main" id="{DCF681C6-8E0E-4EC6-B423-8718A71115AE}"/>
+                <a16:creationId xmlns:a16="http://schemas.microsoft.com/office/drawing/2014/main" id="{6CA56871-3A17-44AB-BB0D-204D27FDE772}"/>
               </a:ext>
             </a:extLst>
           </p:cNvPr>
@@ -5256,7 +5256,7 @@
           <p:cNvPr id="11" name="s13-takeaway">
             <a:extLst xmlns:a="http://schemas.openxmlformats.org/drawingml/2006/main">
               <a:ext uri="{FF2B5EF4-FFF2-40B4-BE49-F238E27FC236}">
-                <a16:creationId xmlns:a16="http://schemas.microsoft.com/office/drawing/2014/main" id="{11921051-41E5-468C-826D-75D92E68DE93}"/>
+                <a16:creationId xmlns:a16="http://schemas.microsoft.com/office/drawing/2014/main" id="{61EEC89C-3D9E-4910-9828-05E24D837F1A}"/>
               </a:ext>
             </a:extLst>
           </p:cNvPr>
@@ -5281,7 +5281,7 @@
         </p:spPr>
         <p:txBody>
           <a:bodyPr xmlns:a="http://schemas.openxmlformats.org/drawingml/2006/main" lIns="0" tIns="0" rIns="0" bIns="0" anchor="ctr">
-            <a:normAutofit fontScale="95911"/>
+            <a:normAutofit fontScale="100000"/>
           </a:bodyPr>
           <a:lstStyle xmlns:a="http://schemas.openxmlformats.org/drawingml/2006/main"/>
           <a:p xmlns:a="http://schemas.openxmlformats.org/drawingml/2006/main">
@@ -5304,7 +5304,7 @@
                 <a:ea typeface="PingFang SC"/>
                 <a:cs typeface="PingFang SC"/>
               </a:rPr>
-              <a:t>课程精编页用于讲授主线；播放器中的“原课件”模式保留团队 PowerPoint 精选页、真实图片和可播放视频。</a:t>
+              <a:t>课程正文与幻灯片共享同一知识主线，图片和视频用于帮助理解本节概念与案例。</a:t>
             </a:r>
           </a:p>
         </p:txBody>
@@ -5312,7 +5312,7 @@
     </p:spTree>
     <p:extLst>
       <p:ext uri="{BB962C8B-B14F-4D97-AF65-F5344CB8AC3E}">
-        <p14:creationId xmlns:p14="http://schemas.microsoft.com/office/powerpoint/2010/main" val="589757056"/>
+        <p14:creationId xmlns:p14="http://schemas.microsoft.com/office/powerpoint/2010/main" val="1694364497"/>
       </p:ext>
     </p:extLst>
   </p:cSld>
@@ -5343,7 +5343,7 @@
           <p:cNvPr id="1" name="s2-rule">
             <a:extLst xmlns:a="http://schemas.openxmlformats.org/drawingml/2006/main">
               <a:ext uri="{FF2B5EF4-FFF2-40B4-BE49-F238E27FC236}">
-                <a16:creationId xmlns:a16="http://schemas.microsoft.com/office/drawing/2014/main" id="{751A0D1D-197E-43F0-8D09-02A121BE46AC}"/>
+                <a16:creationId xmlns:a16="http://schemas.microsoft.com/office/drawing/2014/main" id="{D07292D3-7940-44DB-ABAA-F750666EB10D}"/>
               </a:ext>
             </a:extLst>
           </p:cNvPr>
@@ -5376,7 +5376,7 @@
           <p:cNvPr id="2" name="s2-eyebrow">
             <a:extLst xmlns:a="http://schemas.openxmlformats.org/drawingml/2006/main">
               <a:ext uri="{FF2B5EF4-FFF2-40B4-BE49-F238E27FC236}">
-                <a16:creationId xmlns:a16="http://schemas.microsoft.com/office/drawing/2014/main" id="{5D758BC3-88D2-48F9-BF33-370B0D875249}"/>
+                <a16:creationId xmlns:a16="http://schemas.microsoft.com/office/drawing/2014/main" id="{C367A01F-B956-4D8C-8DD5-A505F4B26EAB}"/>
               </a:ext>
             </a:extLst>
           </p:cNvPr>
@@ -5434,7 +5434,7 @@
           <p:cNvPr id="3" name="s2-title">
             <a:extLst xmlns:a="http://schemas.openxmlformats.org/drawingml/2006/main">
               <a:ext uri="{FF2B5EF4-FFF2-40B4-BE49-F238E27FC236}">
-                <a16:creationId xmlns:a16="http://schemas.microsoft.com/office/drawing/2014/main" id="{8EED3711-8938-4755-BD6D-E334682688D1}"/>
+                <a16:creationId xmlns:a16="http://schemas.microsoft.com/office/drawing/2014/main" id="{ABC5666C-37EB-4343-B6AB-EB0627919153}"/>
               </a:ext>
             </a:extLst>
           </p:cNvPr>
@@ -5492,7 +5492,7 @@
           <p:cNvPr id="4" name="s2-footer">
             <a:extLst xmlns:a="http://schemas.openxmlformats.org/drawingml/2006/main">
               <a:ext uri="{FF2B5EF4-FFF2-40B4-BE49-F238E27FC236}">
-                <a16:creationId xmlns:a16="http://schemas.microsoft.com/office/drawing/2014/main" id="{9D5B8F30-3D58-442C-AA2A-8FAEF6EC19D0}"/>
+                <a16:creationId xmlns:a16="http://schemas.microsoft.com/office/drawing/2014/main" id="{2E67355E-D6C4-4088-B36B-CE6097EEAF13}"/>
               </a:ext>
             </a:extLst>
           </p:cNvPr>
@@ -5523,7 +5523,7 @@
           <p:cNvPr id="5" name="s2-identity">
             <a:extLst xmlns:a="http://schemas.openxmlformats.org/drawingml/2006/main">
               <a:ext uri="{FF2B5EF4-FFF2-40B4-BE49-F238E27FC236}">
-                <a16:creationId xmlns:a16="http://schemas.microsoft.com/office/drawing/2014/main" id="{0488A2B3-1AC4-45DF-863C-101AE740CEEA}"/>
+                <a16:creationId xmlns:a16="http://schemas.microsoft.com/office/drawing/2014/main" id="{CEBD6646-A61B-425B-9D02-C5B817B646F5}"/>
               </a:ext>
             </a:extLst>
           </p:cNvPr>
@@ -5581,7 +5581,7 @@
           <p:cNvPr id="6" name="objective-1">
             <a:extLst xmlns:a="http://schemas.openxmlformats.org/drawingml/2006/main">
               <a:ext uri="{FF2B5EF4-FFF2-40B4-BE49-F238E27FC236}">
-                <a16:creationId xmlns:a16="http://schemas.microsoft.com/office/drawing/2014/main" id="{1040D770-B33B-4F7C-871B-B3291A6F6B67}"/>
+                <a16:creationId xmlns:a16="http://schemas.microsoft.com/office/drawing/2014/main" id="{65E7DB73-B7E8-44A6-9E46-81C1A389B5BA}"/>
               </a:ext>
             </a:extLst>
           </p:cNvPr>
@@ -5668,7 +5668,7 @@
           <p:cNvPr id="7" name="objective-2">
             <a:extLst xmlns:a="http://schemas.openxmlformats.org/drawingml/2006/main">
               <a:ext uri="{FF2B5EF4-FFF2-40B4-BE49-F238E27FC236}">
-                <a16:creationId xmlns:a16="http://schemas.microsoft.com/office/drawing/2014/main" id="{4D5C4DA7-F61F-4712-8587-36DBD083D8E7}"/>
+                <a16:creationId xmlns:a16="http://schemas.microsoft.com/office/drawing/2014/main" id="{F63D6D16-6B8C-4771-ADBF-FFD70496B056}"/>
               </a:ext>
             </a:extLst>
           </p:cNvPr>
@@ -5755,7 +5755,7 @@
           <p:cNvPr id="8" name="objective-3">
             <a:extLst xmlns:a="http://schemas.openxmlformats.org/drawingml/2006/main">
               <a:ext uri="{FF2B5EF4-FFF2-40B4-BE49-F238E27FC236}">
-                <a16:creationId xmlns:a16="http://schemas.microsoft.com/office/drawing/2014/main" id="{2796C43A-E851-4506-AF4B-0136FB2C160A}"/>
+                <a16:creationId xmlns:a16="http://schemas.microsoft.com/office/drawing/2014/main" id="{31721583-C720-4786-B616-DE37A697D892}"/>
               </a:ext>
             </a:extLst>
           </p:cNvPr>
@@ -5842,7 +5842,7 @@
           <p:cNvPr id="9" name="objective-4">
             <a:extLst xmlns:a="http://schemas.openxmlformats.org/drawingml/2006/main">
               <a:ext uri="{FF2B5EF4-FFF2-40B4-BE49-F238E27FC236}">
-                <a16:creationId xmlns:a16="http://schemas.microsoft.com/office/drawing/2014/main" id="{F707E197-7B04-4D7A-AD40-C30352C3D1A8}"/>
+                <a16:creationId xmlns:a16="http://schemas.microsoft.com/office/drawing/2014/main" id="{F628421D-2977-4AE1-B380-07368BDF4B57}"/>
               </a:ext>
             </a:extLst>
           </p:cNvPr>
@@ -5927,7 +5927,7 @@
     </p:spTree>
     <p:extLst>
       <p:ext uri="{BB962C8B-B14F-4D97-AF65-F5344CB8AC3E}">
-        <p14:creationId xmlns:p14="http://schemas.microsoft.com/office/powerpoint/2010/main" val="1433710493"/>
+        <p14:creationId xmlns:p14="http://schemas.microsoft.com/office/powerpoint/2010/main" val="680185867"/>
       </p:ext>
     </p:extLst>
   </p:cSld>
@@ -5958,7 +5958,7 @@
           <p:cNvPr id="1" name="s3-rule">
             <a:extLst xmlns:a="http://schemas.openxmlformats.org/drawingml/2006/main">
               <a:ext uri="{FF2B5EF4-FFF2-40B4-BE49-F238E27FC236}">
-                <a16:creationId xmlns:a16="http://schemas.microsoft.com/office/drawing/2014/main" id="{647D5167-6A5B-4CB5-9586-BAF367BE1500}"/>
+                <a16:creationId xmlns:a16="http://schemas.microsoft.com/office/drawing/2014/main" id="{94FF70C0-5514-4E8E-A7B5-BC55C5BFE65B}"/>
               </a:ext>
             </a:extLst>
           </p:cNvPr>
@@ -5991,7 +5991,7 @@
           <p:cNvPr id="2" name="s3-eyebrow">
             <a:extLst xmlns:a="http://schemas.openxmlformats.org/drawingml/2006/main">
               <a:ext uri="{FF2B5EF4-FFF2-40B4-BE49-F238E27FC236}">
-                <a16:creationId xmlns:a16="http://schemas.microsoft.com/office/drawing/2014/main" id="{4F52BCD1-93AE-4F51-A5E7-E1851801F300}"/>
+                <a16:creationId xmlns:a16="http://schemas.microsoft.com/office/drawing/2014/main" id="{F6792190-9F30-476D-BDE9-15A8CA168252}"/>
               </a:ext>
             </a:extLst>
           </p:cNvPr>
@@ -6049,7 +6049,7 @@
           <p:cNvPr id="3" name="s3-title">
             <a:extLst xmlns:a="http://schemas.openxmlformats.org/drawingml/2006/main">
               <a:ext uri="{FF2B5EF4-FFF2-40B4-BE49-F238E27FC236}">
-                <a16:creationId xmlns:a16="http://schemas.microsoft.com/office/drawing/2014/main" id="{B405EC40-7EDF-46C8-A9DC-1A2690CE0F8F}"/>
+                <a16:creationId xmlns:a16="http://schemas.microsoft.com/office/drawing/2014/main" id="{565E6E3F-81A0-4703-81D3-9C84B5B75E9A}"/>
               </a:ext>
             </a:extLst>
           </p:cNvPr>
@@ -6107,7 +6107,7 @@
           <p:cNvPr id="4" name="s3-footer">
             <a:extLst xmlns:a="http://schemas.openxmlformats.org/drawingml/2006/main">
               <a:ext uri="{FF2B5EF4-FFF2-40B4-BE49-F238E27FC236}">
-                <a16:creationId xmlns:a16="http://schemas.microsoft.com/office/drawing/2014/main" id="{BA308673-5856-4668-856C-FCE2401B2B00}"/>
+                <a16:creationId xmlns:a16="http://schemas.microsoft.com/office/drawing/2014/main" id="{7B159CB0-D72F-42E4-BEDC-7813601F43B9}"/>
               </a:ext>
             </a:extLst>
           </p:cNvPr>
@@ -6138,7 +6138,7 @@
           <p:cNvPr id="5" name="s3-identity">
             <a:extLst xmlns:a="http://schemas.openxmlformats.org/drawingml/2006/main">
               <a:ext uri="{FF2B5EF4-FFF2-40B4-BE49-F238E27FC236}">
-                <a16:creationId xmlns:a16="http://schemas.microsoft.com/office/drawing/2014/main" id="{A3EF167C-E860-482F-B29E-B3500CCEF4C5}"/>
+                <a16:creationId xmlns:a16="http://schemas.microsoft.com/office/drawing/2014/main" id="{78522F10-B30F-48DD-91FB-109C82CD5A72}"/>
               </a:ext>
             </a:extLst>
           </p:cNvPr>
@@ -6196,7 +6196,7 @@
           <p:cNvPr id="6" name="core-no-0">
             <a:extLst xmlns:a="http://schemas.openxmlformats.org/drawingml/2006/main">
               <a:ext uri="{FF2B5EF4-FFF2-40B4-BE49-F238E27FC236}">
-                <a16:creationId xmlns:a16="http://schemas.microsoft.com/office/drawing/2014/main" id="{7B4667A6-CF09-45C8-B08D-79D5A6565AD4}"/>
+                <a16:creationId xmlns:a16="http://schemas.microsoft.com/office/drawing/2014/main" id="{84949C2B-64A5-4535-BE60-839C8F62C1E6}"/>
               </a:ext>
             </a:extLst>
           </p:cNvPr>
@@ -6254,7 +6254,7 @@
           <p:cNvPr id="7" name="core-label-0">
             <a:extLst xmlns:a="http://schemas.openxmlformats.org/drawingml/2006/main">
               <a:ext uri="{FF2B5EF4-FFF2-40B4-BE49-F238E27FC236}">
-                <a16:creationId xmlns:a16="http://schemas.microsoft.com/office/drawing/2014/main" id="{96C06C5C-5048-4DA4-A550-5D3A03AA6B0F}"/>
+                <a16:creationId xmlns:a16="http://schemas.microsoft.com/office/drawing/2014/main" id="{E5B38270-DA05-4913-A201-EE51E657A166}"/>
               </a:ext>
             </a:extLst>
           </p:cNvPr>
@@ -6312,7 +6312,7 @@
           <p:cNvPr id="8" name="core-body-0">
             <a:extLst xmlns:a="http://schemas.openxmlformats.org/drawingml/2006/main">
               <a:ext uri="{FF2B5EF4-FFF2-40B4-BE49-F238E27FC236}">
-                <a16:creationId xmlns:a16="http://schemas.microsoft.com/office/drawing/2014/main" id="{F17040E9-0AE1-4D51-8F5A-1780AF8728EC}"/>
+                <a16:creationId xmlns:a16="http://schemas.microsoft.com/office/drawing/2014/main" id="{8A0E5D3D-26BF-456C-B7E1-5434D204D9B4}"/>
               </a:ext>
             </a:extLst>
           </p:cNvPr>
@@ -6376,7 +6376,7 @@
           <p:cNvPr id="9" name="core-no-1">
             <a:extLst xmlns:a="http://schemas.openxmlformats.org/drawingml/2006/main">
               <a:ext uri="{FF2B5EF4-FFF2-40B4-BE49-F238E27FC236}">
-                <a16:creationId xmlns:a16="http://schemas.microsoft.com/office/drawing/2014/main" id="{F69734B9-6F8B-4A32-A1EE-D2C70953CA32}"/>
+                <a16:creationId xmlns:a16="http://schemas.microsoft.com/office/drawing/2014/main" id="{84E2B4E2-4ED2-4355-9E26-FD90F54DB979}"/>
               </a:ext>
             </a:extLst>
           </p:cNvPr>
@@ -6434,7 +6434,7 @@
           <p:cNvPr id="10" name="core-body-1">
             <a:extLst xmlns:a="http://schemas.openxmlformats.org/drawingml/2006/main">
               <a:ext uri="{FF2B5EF4-FFF2-40B4-BE49-F238E27FC236}">
-                <a16:creationId xmlns:a16="http://schemas.microsoft.com/office/drawing/2014/main" id="{2EC961F6-7CBA-4B6C-A9C5-4B70CCDE502A}"/>
+                <a16:creationId xmlns:a16="http://schemas.microsoft.com/office/drawing/2014/main" id="{80268CED-78BC-4288-B1A7-67B049DFC80E}"/>
               </a:ext>
             </a:extLst>
           </p:cNvPr>
@@ -6498,7 +6498,7 @@
           <p:cNvPr id="11" name="core-no-2">
             <a:extLst xmlns:a="http://schemas.openxmlformats.org/drawingml/2006/main">
               <a:ext uri="{FF2B5EF4-FFF2-40B4-BE49-F238E27FC236}">
-                <a16:creationId xmlns:a16="http://schemas.microsoft.com/office/drawing/2014/main" id="{213BBEE9-0351-473E-A208-9C8348F5E656}"/>
+                <a16:creationId xmlns:a16="http://schemas.microsoft.com/office/drawing/2014/main" id="{D1AE137A-6D45-408F-A025-28712072408D}"/>
               </a:ext>
             </a:extLst>
           </p:cNvPr>
@@ -6556,7 +6556,7 @@
           <p:cNvPr id="12" name="core-body-2">
             <a:extLst xmlns:a="http://schemas.openxmlformats.org/drawingml/2006/main">
               <a:ext uri="{FF2B5EF4-FFF2-40B4-BE49-F238E27FC236}">
-                <a16:creationId xmlns:a16="http://schemas.microsoft.com/office/drawing/2014/main" id="{B542B880-3027-4BB6-A1DA-7940A1BC6409}"/>
+                <a16:creationId xmlns:a16="http://schemas.microsoft.com/office/drawing/2014/main" id="{1DC2F45D-908F-467A-B1CC-56D56E45CCA0}"/>
               </a:ext>
             </a:extLst>
           </p:cNvPr>
@@ -6620,7 +6620,7 @@
           <p:cNvPr id="13" name="s3-takeaway-rule">
             <a:extLst xmlns:a="http://schemas.openxmlformats.org/drawingml/2006/main">
               <a:ext uri="{FF2B5EF4-FFF2-40B4-BE49-F238E27FC236}">
-                <a16:creationId xmlns:a16="http://schemas.microsoft.com/office/drawing/2014/main" id="{2860A5D4-2A67-4DC0-87A3-C28745434C60}"/>
+                <a16:creationId xmlns:a16="http://schemas.microsoft.com/office/drawing/2014/main" id="{3C623ECA-9D09-4E4F-A775-BD3E48C6F4DA}"/>
               </a:ext>
             </a:extLst>
           </p:cNvPr>
@@ -6653,7 +6653,7 @@
           <p:cNvPr id="14" name="s3-takeaway">
             <a:extLst xmlns:a="http://schemas.openxmlformats.org/drawingml/2006/main">
               <a:ext uri="{FF2B5EF4-FFF2-40B4-BE49-F238E27FC236}">
-                <a16:creationId xmlns:a16="http://schemas.microsoft.com/office/drawing/2014/main" id="{BA32C98C-35E0-4AA5-8EFA-D9D25255438E}"/>
+                <a16:creationId xmlns:a16="http://schemas.microsoft.com/office/drawing/2014/main" id="{5BF95DE8-C718-4BC2-984C-F70603D04D44}"/>
               </a:ext>
             </a:extLst>
           </p:cNvPr>
@@ -6709,7 +6709,7 @@
     </p:spTree>
     <p:extLst>
       <p:ext uri="{BB962C8B-B14F-4D97-AF65-F5344CB8AC3E}">
-        <p14:creationId xmlns:p14="http://schemas.microsoft.com/office/powerpoint/2010/main" val="164312520"/>
+        <p14:creationId xmlns:p14="http://schemas.microsoft.com/office/powerpoint/2010/main" val="24759003"/>
       </p:ext>
     </p:extLst>
   </p:cSld>
@@ -6740,7 +6740,7 @@
           <p:cNvPr id="1" name="s4-rule">
             <a:extLst xmlns:a="http://schemas.openxmlformats.org/drawingml/2006/main">
               <a:ext uri="{FF2B5EF4-FFF2-40B4-BE49-F238E27FC236}">
-                <a16:creationId xmlns:a16="http://schemas.microsoft.com/office/drawing/2014/main" id="{48AF7794-B420-4274-9648-FA51812F943A}"/>
+                <a16:creationId xmlns:a16="http://schemas.microsoft.com/office/drawing/2014/main" id="{FF22D612-27DA-414E-9A80-076D39ACC227}"/>
               </a:ext>
             </a:extLst>
           </p:cNvPr>
@@ -6773,7 +6773,7 @@
           <p:cNvPr id="2" name="s4-eyebrow">
             <a:extLst xmlns:a="http://schemas.openxmlformats.org/drawingml/2006/main">
               <a:ext uri="{FF2B5EF4-FFF2-40B4-BE49-F238E27FC236}">
-                <a16:creationId xmlns:a16="http://schemas.microsoft.com/office/drawing/2014/main" id="{9A446FE2-7FDC-4B96-9F0D-83D31C0434FE}"/>
+                <a16:creationId xmlns:a16="http://schemas.microsoft.com/office/drawing/2014/main" id="{6DBC6ABD-7A82-45B8-909C-D7D07A7609BC}"/>
               </a:ext>
             </a:extLst>
           </p:cNvPr>
@@ -6831,7 +6831,7 @@
           <p:cNvPr id="3" name="s4-title">
             <a:extLst xmlns:a="http://schemas.openxmlformats.org/drawingml/2006/main">
               <a:ext uri="{FF2B5EF4-FFF2-40B4-BE49-F238E27FC236}">
-                <a16:creationId xmlns:a16="http://schemas.microsoft.com/office/drawing/2014/main" id="{A85DCE69-8045-4C1C-8975-8B62D5277BD0}"/>
+                <a16:creationId xmlns:a16="http://schemas.microsoft.com/office/drawing/2014/main" id="{70777533-E22E-4FF3-94A5-EC6D710BD95B}"/>
               </a:ext>
             </a:extLst>
           </p:cNvPr>
@@ -6889,7 +6889,7 @@
           <p:cNvPr id="4" name="s4-footer">
             <a:extLst xmlns:a="http://schemas.openxmlformats.org/drawingml/2006/main">
               <a:ext uri="{FF2B5EF4-FFF2-40B4-BE49-F238E27FC236}">
-                <a16:creationId xmlns:a16="http://schemas.microsoft.com/office/drawing/2014/main" id="{5EAB4CC0-C98D-441E-8628-5A1442EAE2D7}"/>
+                <a16:creationId xmlns:a16="http://schemas.microsoft.com/office/drawing/2014/main" id="{4A3EF4C9-ACFE-4A5A-AF74-E586E4BFF5B1}"/>
               </a:ext>
             </a:extLst>
           </p:cNvPr>
@@ -6920,7 +6920,7 @@
           <p:cNvPr id="5" name="s4-identity">
             <a:extLst xmlns:a="http://schemas.openxmlformats.org/drawingml/2006/main">
               <a:ext uri="{FF2B5EF4-FFF2-40B4-BE49-F238E27FC236}">
-                <a16:creationId xmlns:a16="http://schemas.microsoft.com/office/drawing/2014/main" id="{DAC11BBC-6024-40FA-BE12-2A71F289B1FE}"/>
+                <a16:creationId xmlns:a16="http://schemas.microsoft.com/office/drawing/2014/main" id="{1563083D-ADEB-4947-A012-C3B80FDA8AA5}"/>
               </a:ext>
             </a:extLst>
           </p:cNvPr>
@@ -6978,7 +6978,7 @@
           <p:cNvPr id="6" name="core-no-0">
             <a:extLst xmlns:a="http://schemas.openxmlformats.org/drawingml/2006/main">
               <a:ext uri="{FF2B5EF4-FFF2-40B4-BE49-F238E27FC236}">
-                <a16:creationId xmlns:a16="http://schemas.microsoft.com/office/drawing/2014/main" id="{DF0BEEFA-8AAF-4D26-A449-5DFFB3B5020F}"/>
+                <a16:creationId xmlns:a16="http://schemas.microsoft.com/office/drawing/2014/main" id="{41CCF5F1-3E60-4E1A-9F0B-225E0F42CBAE}"/>
               </a:ext>
             </a:extLst>
           </p:cNvPr>
@@ -7036,7 +7036,7 @@
           <p:cNvPr id="7" name="core-label-0">
             <a:extLst xmlns:a="http://schemas.openxmlformats.org/drawingml/2006/main">
               <a:ext uri="{FF2B5EF4-FFF2-40B4-BE49-F238E27FC236}">
-                <a16:creationId xmlns:a16="http://schemas.microsoft.com/office/drawing/2014/main" id="{11DA2D80-D988-4D2B-BED6-F2FA53CA9C2B}"/>
+                <a16:creationId xmlns:a16="http://schemas.microsoft.com/office/drawing/2014/main" id="{27A740A7-7766-4976-B26B-F4506403ED44}"/>
               </a:ext>
             </a:extLst>
           </p:cNvPr>
@@ -7094,7 +7094,7 @@
           <p:cNvPr id="8" name="core-body-0">
             <a:extLst xmlns:a="http://schemas.openxmlformats.org/drawingml/2006/main">
               <a:ext uri="{FF2B5EF4-FFF2-40B4-BE49-F238E27FC236}">
-                <a16:creationId xmlns:a16="http://schemas.microsoft.com/office/drawing/2014/main" id="{90F1E0DC-158A-4615-A9C2-4E313C102662}"/>
+                <a16:creationId xmlns:a16="http://schemas.microsoft.com/office/drawing/2014/main" id="{39C43948-74CD-4645-AF26-87C6636609D6}"/>
               </a:ext>
             </a:extLst>
           </p:cNvPr>
@@ -7158,7 +7158,7 @@
           <p:cNvPr id="9" name="core-no-1">
             <a:extLst xmlns:a="http://schemas.openxmlformats.org/drawingml/2006/main">
               <a:ext uri="{FF2B5EF4-FFF2-40B4-BE49-F238E27FC236}">
-                <a16:creationId xmlns:a16="http://schemas.microsoft.com/office/drawing/2014/main" id="{9B3CF04F-EF0A-4946-B844-3F09F1B235F1}"/>
+                <a16:creationId xmlns:a16="http://schemas.microsoft.com/office/drawing/2014/main" id="{8558A60F-4718-4952-952D-AB65D93E2D22}"/>
               </a:ext>
             </a:extLst>
           </p:cNvPr>
@@ -7216,7 +7216,7 @@
           <p:cNvPr id="10" name="core-body-1">
             <a:extLst xmlns:a="http://schemas.openxmlformats.org/drawingml/2006/main">
               <a:ext uri="{FF2B5EF4-FFF2-40B4-BE49-F238E27FC236}">
-                <a16:creationId xmlns:a16="http://schemas.microsoft.com/office/drawing/2014/main" id="{BA4D05C1-3235-4D65-A6A1-B6B3D61E2E27}"/>
+                <a16:creationId xmlns:a16="http://schemas.microsoft.com/office/drawing/2014/main" id="{31C3C775-A0EB-41FD-8B1C-8551A9914AB9}"/>
               </a:ext>
             </a:extLst>
           </p:cNvPr>
@@ -7280,7 +7280,7 @@
           <p:cNvPr id="11" name="s4-takeaway-rule">
             <a:extLst xmlns:a="http://schemas.openxmlformats.org/drawingml/2006/main">
               <a:ext uri="{FF2B5EF4-FFF2-40B4-BE49-F238E27FC236}">
-                <a16:creationId xmlns:a16="http://schemas.microsoft.com/office/drawing/2014/main" id="{57F6CC73-3D6B-45D3-A830-2095F69EC9AB}"/>
+                <a16:creationId xmlns:a16="http://schemas.microsoft.com/office/drawing/2014/main" id="{09B7A178-F554-4093-B7DF-EC1AF7029566}"/>
               </a:ext>
             </a:extLst>
           </p:cNvPr>
@@ -7313,7 +7313,7 @@
           <p:cNvPr id="12" name="s4-takeaway">
             <a:extLst xmlns:a="http://schemas.openxmlformats.org/drawingml/2006/main">
               <a:ext uri="{FF2B5EF4-FFF2-40B4-BE49-F238E27FC236}">
-                <a16:creationId xmlns:a16="http://schemas.microsoft.com/office/drawing/2014/main" id="{A56A0AB8-920B-4EE5-B6A8-283EE4D2504B}"/>
+                <a16:creationId xmlns:a16="http://schemas.microsoft.com/office/drawing/2014/main" id="{D322535D-2E51-4586-8186-65EDD8B49DE5}"/>
               </a:ext>
             </a:extLst>
           </p:cNvPr>
@@ -7369,7 +7369,7 @@
     </p:spTree>
     <p:extLst>
       <p:ext uri="{BB962C8B-B14F-4D97-AF65-F5344CB8AC3E}">
-        <p14:creationId xmlns:p14="http://schemas.microsoft.com/office/powerpoint/2010/main" val="1496137158"/>
+        <p14:creationId xmlns:p14="http://schemas.microsoft.com/office/powerpoint/2010/main" val="803349065"/>
       </p:ext>
     </p:extLst>
   </p:cSld>
@@ -7400,7 +7400,7 @@
           <p:cNvPr id="1" name="s5-rule">
             <a:extLst xmlns:a="http://schemas.openxmlformats.org/drawingml/2006/main">
               <a:ext uri="{FF2B5EF4-FFF2-40B4-BE49-F238E27FC236}">
-                <a16:creationId xmlns:a16="http://schemas.microsoft.com/office/drawing/2014/main" id="{40C23AE8-028A-4A64-AB21-21F8AE7884DF}"/>
+                <a16:creationId xmlns:a16="http://schemas.microsoft.com/office/drawing/2014/main" id="{DDB81525-367D-4D2D-9A90-8622960B8B31}"/>
               </a:ext>
             </a:extLst>
           </p:cNvPr>
@@ -7433,7 +7433,7 @@
           <p:cNvPr id="2" name="s5-eyebrow">
             <a:extLst xmlns:a="http://schemas.openxmlformats.org/drawingml/2006/main">
               <a:ext uri="{FF2B5EF4-FFF2-40B4-BE49-F238E27FC236}">
-                <a16:creationId xmlns:a16="http://schemas.microsoft.com/office/drawing/2014/main" id="{E42151E2-7A95-4E91-A399-45029FBD5D57}"/>
+                <a16:creationId xmlns:a16="http://schemas.microsoft.com/office/drawing/2014/main" id="{FA16A71B-E299-473D-AB52-1006CD02D864}"/>
               </a:ext>
             </a:extLst>
           </p:cNvPr>
@@ -7491,7 +7491,7 @@
           <p:cNvPr id="3" name="s5-title">
             <a:extLst xmlns:a="http://schemas.openxmlformats.org/drawingml/2006/main">
               <a:ext uri="{FF2B5EF4-FFF2-40B4-BE49-F238E27FC236}">
-                <a16:creationId xmlns:a16="http://schemas.microsoft.com/office/drawing/2014/main" id="{3A3EDC80-6EBC-4869-9953-DA42B49C104A}"/>
+                <a16:creationId xmlns:a16="http://schemas.microsoft.com/office/drawing/2014/main" id="{23699127-CB3E-428C-8DCF-F4A3714D129A}"/>
               </a:ext>
             </a:extLst>
           </p:cNvPr>
@@ -7549,7 +7549,7 @@
           <p:cNvPr id="4" name="s5-footer">
             <a:extLst xmlns:a="http://schemas.openxmlformats.org/drawingml/2006/main">
               <a:ext uri="{FF2B5EF4-FFF2-40B4-BE49-F238E27FC236}">
-                <a16:creationId xmlns:a16="http://schemas.microsoft.com/office/drawing/2014/main" id="{CF07571D-697C-487F-9F21-1132C0E2A2D4}"/>
+                <a16:creationId xmlns:a16="http://schemas.microsoft.com/office/drawing/2014/main" id="{E796CDF6-2417-407C-A68E-37CABDB8F59D}"/>
               </a:ext>
             </a:extLst>
           </p:cNvPr>
@@ -7580,7 +7580,7 @@
           <p:cNvPr id="5" name="s5-identity">
             <a:extLst xmlns:a="http://schemas.openxmlformats.org/drawingml/2006/main">
               <a:ext uri="{FF2B5EF4-FFF2-40B4-BE49-F238E27FC236}">
-                <a16:creationId xmlns:a16="http://schemas.microsoft.com/office/drawing/2014/main" id="{1E1EA8EB-2BEE-46DC-94B7-9BE13D528C08}"/>
+                <a16:creationId xmlns:a16="http://schemas.microsoft.com/office/drawing/2014/main" id="{1275C429-C1D8-451F-A7A4-7F72AF72830E}"/>
               </a:ext>
             </a:extLst>
           </p:cNvPr>
@@ -7638,7 +7638,7 @@
           <p:cNvPr id="6" name="core-no-0">
             <a:extLst xmlns:a="http://schemas.openxmlformats.org/drawingml/2006/main">
               <a:ext uri="{FF2B5EF4-FFF2-40B4-BE49-F238E27FC236}">
-                <a16:creationId xmlns:a16="http://schemas.microsoft.com/office/drawing/2014/main" id="{C91A5EED-796F-45C2-B2E0-73C3F64327F0}"/>
+                <a16:creationId xmlns:a16="http://schemas.microsoft.com/office/drawing/2014/main" id="{2B50F515-C3ED-4661-AF5B-F73E52D30B21}"/>
               </a:ext>
             </a:extLst>
           </p:cNvPr>
@@ -7696,7 +7696,7 @@
           <p:cNvPr id="7" name="core-label-0">
             <a:extLst xmlns:a="http://schemas.openxmlformats.org/drawingml/2006/main">
               <a:ext uri="{FF2B5EF4-FFF2-40B4-BE49-F238E27FC236}">
-                <a16:creationId xmlns:a16="http://schemas.microsoft.com/office/drawing/2014/main" id="{246B100E-CB2C-4BED-93CC-30D5DAAABE11}"/>
+                <a16:creationId xmlns:a16="http://schemas.microsoft.com/office/drawing/2014/main" id="{700E858E-0EEC-4F0F-81E0-10229C63B329}"/>
               </a:ext>
             </a:extLst>
           </p:cNvPr>
@@ -7754,7 +7754,7 @@
           <p:cNvPr id="8" name="core-body-0">
             <a:extLst xmlns:a="http://schemas.openxmlformats.org/drawingml/2006/main">
               <a:ext uri="{FF2B5EF4-FFF2-40B4-BE49-F238E27FC236}">
-                <a16:creationId xmlns:a16="http://schemas.microsoft.com/office/drawing/2014/main" id="{284AD431-8FAD-4BDF-8FE6-A33D1173400F}"/>
+                <a16:creationId xmlns:a16="http://schemas.microsoft.com/office/drawing/2014/main" id="{1BC9DEB5-2B93-471E-90EC-615624AC7183}"/>
               </a:ext>
             </a:extLst>
           </p:cNvPr>
@@ -7818,7 +7818,7 @@
           <p:cNvPr id="9" name="core-no-1">
             <a:extLst xmlns:a="http://schemas.openxmlformats.org/drawingml/2006/main">
               <a:ext uri="{FF2B5EF4-FFF2-40B4-BE49-F238E27FC236}">
-                <a16:creationId xmlns:a16="http://schemas.microsoft.com/office/drawing/2014/main" id="{33623FA9-C1EB-4BE3-B6FF-5E055F7F9048}"/>
+                <a16:creationId xmlns:a16="http://schemas.microsoft.com/office/drawing/2014/main" id="{9F380BF8-B9B6-4956-9A59-D182D3AD52EF}"/>
               </a:ext>
             </a:extLst>
           </p:cNvPr>
@@ -7876,7 +7876,7 @@
           <p:cNvPr id="10" name="core-body-1">
             <a:extLst xmlns:a="http://schemas.openxmlformats.org/drawingml/2006/main">
               <a:ext uri="{FF2B5EF4-FFF2-40B4-BE49-F238E27FC236}">
-                <a16:creationId xmlns:a16="http://schemas.microsoft.com/office/drawing/2014/main" id="{F3301DC9-7BE2-46C6-A444-A1619505FB7D}"/>
+                <a16:creationId xmlns:a16="http://schemas.microsoft.com/office/drawing/2014/main" id="{C1A33762-51B0-478D-86E3-159E3569FBC2}"/>
               </a:ext>
             </a:extLst>
           </p:cNvPr>
@@ -7940,7 +7940,7 @@
           <p:cNvPr id="11" name="s5-takeaway-rule">
             <a:extLst xmlns:a="http://schemas.openxmlformats.org/drawingml/2006/main">
               <a:ext uri="{FF2B5EF4-FFF2-40B4-BE49-F238E27FC236}">
-                <a16:creationId xmlns:a16="http://schemas.microsoft.com/office/drawing/2014/main" id="{F248F7B9-63E2-4A48-B7E7-085022E8A43F}"/>
+                <a16:creationId xmlns:a16="http://schemas.microsoft.com/office/drawing/2014/main" id="{01023CDB-E9ED-4EAE-BA1B-418F22A7184F}"/>
               </a:ext>
             </a:extLst>
           </p:cNvPr>
@@ -7973,7 +7973,7 @@
           <p:cNvPr id="12" name="s5-takeaway">
             <a:extLst xmlns:a="http://schemas.openxmlformats.org/drawingml/2006/main">
               <a:ext uri="{FF2B5EF4-FFF2-40B4-BE49-F238E27FC236}">
-                <a16:creationId xmlns:a16="http://schemas.microsoft.com/office/drawing/2014/main" id="{569DE8D2-CA02-4C11-A877-DEAF2CA942B0}"/>
+                <a16:creationId xmlns:a16="http://schemas.microsoft.com/office/drawing/2014/main" id="{93D121A7-1525-40A5-8B2F-64D0A50EAA82}"/>
               </a:ext>
             </a:extLst>
           </p:cNvPr>
@@ -8029,7 +8029,7 @@
     </p:spTree>
     <p:extLst>
       <p:ext uri="{BB962C8B-B14F-4D97-AF65-F5344CB8AC3E}">
-        <p14:creationId xmlns:p14="http://schemas.microsoft.com/office/powerpoint/2010/main" val="260457598"/>
+        <p14:creationId xmlns:p14="http://schemas.microsoft.com/office/powerpoint/2010/main" val="663686154"/>
       </p:ext>
     </p:extLst>
   </p:cSld>
@@ -8060,7 +8060,7 @@
           <p:cNvPr id="1" name="s6-rule">
             <a:extLst xmlns:a="http://schemas.openxmlformats.org/drawingml/2006/main">
               <a:ext uri="{FF2B5EF4-FFF2-40B4-BE49-F238E27FC236}">
-                <a16:creationId xmlns:a16="http://schemas.microsoft.com/office/drawing/2014/main" id="{B431AEA6-BFAF-45A4-8A4C-A0EA894BAE12}"/>
+                <a16:creationId xmlns:a16="http://schemas.microsoft.com/office/drawing/2014/main" id="{BC747EE5-4275-4303-97B2-F45A4A49AD3E}"/>
               </a:ext>
             </a:extLst>
           </p:cNvPr>
@@ -8093,7 +8093,7 @@
           <p:cNvPr id="2" name="s6-eyebrow">
             <a:extLst xmlns:a="http://schemas.openxmlformats.org/drawingml/2006/main">
               <a:ext uri="{FF2B5EF4-FFF2-40B4-BE49-F238E27FC236}">
-                <a16:creationId xmlns:a16="http://schemas.microsoft.com/office/drawing/2014/main" id="{C27E73FD-2287-4B86-84C1-B12565A705B5}"/>
+                <a16:creationId xmlns:a16="http://schemas.microsoft.com/office/drawing/2014/main" id="{768D46DD-8ECB-4A03-B5FC-E4A610ABE66B}"/>
               </a:ext>
             </a:extLst>
           </p:cNvPr>
@@ -8151,7 +8151,7 @@
           <p:cNvPr id="3" name="s6-title">
             <a:extLst xmlns:a="http://schemas.openxmlformats.org/drawingml/2006/main">
               <a:ext uri="{FF2B5EF4-FFF2-40B4-BE49-F238E27FC236}">
-                <a16:creationId xmlns:a16="http://schemas.microsoft.com/office/drawing/2014/main" id="{2D028B25-AB19-4C38-9C94-EDC45CA9079C}"/>
+                <a16:creationId xmlns:a16="http://schemas.microsoft.com/office/drawing/2014/main" id="{B8DD5B73-2D25-42D8-A4B9-79DFDF3F24D1}"/>
               </a:ext>
             </a:extLst>
           </p:cNvPr>
@@ -8209,7 +8209,7 @@
           <p:cNvPr id="4" name="s6-footer">
             <a:extLst xmlns:a="http://schemas.openxmlformats.org/drawingml/2006/main">
               <a:ext uri="{FF2B5EF4-FFF2-40B4-BE49-F238E27FC236}">
-                <a16:creationId xmlns:a16="http://schemas.microsoft.com/office/drawing/2014/main" id="{E83B765E-A8FE-4DF2-AAF2-B8A7455B3135}"/>
+                <a16:creationId xmlns:a16="http://schemas.microsoft.com/office/drawing/2014/main" id="{E9C70C96-5A6A-4C27-8B18-AC67462944B8}"/>
               </a:ext>
             </a:extLst>
           </p:cNvPr>
@@ -8240,7 +8240,7 @@
           <p:cNvPr id="5" name="s6-identity">
             <a:extLst xmlns:a="http://schemas.openxmlformats.org/drawingml/2006/main">
               <a:ext uri="{FF2B5EF4-FFF2-40B4-BE49-F238E27FC236}">
-                <a16:creationId xmlns:a16="http://schemas.microsoft.com/office/drawing/2014/main" id="{A83A8985-6B23-4186-88D8-9E2E2AD27312}"/>
+                <a16:creationId xmlns:a16="http://schemas.microsoft.com/office/drawing/2014/main" id="{94CF450C-3200-4283-9D4B-EDCAF9C83CD3}"/>
               </a:ext>
             </a:extLst>
           </p:cNvPr>
@@ -8298,7 +8298,7 @@
           <p:cNvPr id="6" name="core-no-0">
             <a:extLst xmlns:a="http://schemas.openxmlformats.org/drawingml/2006/main">
               <a:ext uri="{FF2B5EF4-FFF2-40B4-BE49-F238E27FC236}">
-                <a16:creationId xmlns:a16="http://schemas.microsoft.com/office/drawing/2014/main" id="{097C082C-CDC3-4021-B47E-B0C27F3954FD}"/>
+                <a16:creationId xmlns:a16="http://schemas.microsoft.com/office/drawing/2014/main" id="{0AFB71A5-837C-4BB4-A4EC-3DA4583C3D98}"/>
               </a:ext>
             </a:extLst>
           </p:cNvPr>
@@ -8356,7 +8356,7 @@
           <p:cNvPr id="7" name="core-label-0">
             <a:extLst xmlns:a="http://schemas.openxmlformats.org/drawingml/2006/main">
               <a:ext uri="{FF2B5EF4-FFF2-40B4-BE49-F238E27FC236}">
-                <a16:creationId xmlns:a16="http://schemas.microsoft.com/office/drawing/2014/main" id="{25E47B49-D64B-4839-813B-AA0F51D18084}"/>
+                <a16:creationId xmlns:a16="http://schemas.microsoft.com/office/drawing/2014/main" id="{396FE9AF-91A5-422E-80A0-BA73E57708F0}"/>
               </a:ext>
             </a:extLst>
           </p:cNvPr>
@@ -8414,7 +8414,7 @@
           <p:cNvPr id="8" name="core-body-0">
             <a:extLst xmlns:a="http://schemas.openxmlformats.org/drawingml/2006/main">
               <a:ext uri="{FF2B5EF4-FFF2-40B4-BE49-F238E27FC236}">
-                <a16:creationId xmlns:a16="http://schemas.microsoft.com/office/drawing/2014/main" id="{CF334869-A327-4543-85E9-B891266A0E03}"/>
+                <a16:creationId xmlns:a16="http://schemas.microsoft.com/office/drawing/2014/main" id="{48D5B7E3-2D71-4647-B1F7-6DBF7B844BA5}"/>
               </a:ext>
             </a:extLst>
           </p:cNvPr>
@@ -8478,7 +8478,7 @@
           <p:cNvPr id="9" name="core-no-1">
             <a:extLst xmlns:a="http://schemas.openxmlformats.org/drawingml/2006/main">
               <a:ext uri="{FF2B5EF4-FFF2-40B4-BE49-F238E27FC236}">
-                <a16:creationId xmlns:a16="http://schemas.microsoft.com/office/drawing/2014/main" id="{7AC0B6BC-3B0B-4F58-8325-4C1612A1FCD9}"/>
+                <a16:creationId xmlns:a16="http://schemas.microsoft.com/office/drawing/2014/main" id="{D019981A-FE97-40EB-A72F-634E46CABF0B}"/>
               </a:ext>
             </a:extLst>
           </p:cNvPr>
@@ -8536,7 +8536,7 @@
           <p:cNvPr id="10" name="core-body-1">
             <a:extLst xmlns:a="http://schemas.openxmlformats.org/drawingml/2006/main">
               <a:ext uri="{FF2B5EF4-FFF2-40B4-BE49-F238E27FC236}">
-                <a16:creationId xmlns:a16="http://schemas.microsoft.com/office/drawing/2014/main" id="{7BE1BC8F-6A2E-4284-A461-2B5854EBA799}"/>
+                <a16:creationId xmlns:a16="http://schemas.microsoft.com/office/drawing/2014/main" id="{262E880C-B4F6-4A78-A2A3-1D5C178AA2CF}"/>
               </a:ext>
             </a:extLst>
           </p:cNvPr>
@@ -8600,7 +8600,7 @@
           <p:cNvPr id="11" name="s6-takeaway-rule">
             <a:extLst xmlns:a="http://schemas.openxmlformats.org/drawingml/2006/main">
               <a:ext uri="{FF2B5EF4-FFF2-40B4-BE49-F238E27FC236}">
-                <a16:creationId xmlns:a16="http://schemas.microsoft.com/office/drawing/2014/main" id="{AA474CAC-50A8-45E8-BF3F-B6EAB8D81C13}"/>
+                <a16:creationId xmlns:a16="http://schemas.microsoft.com/office/drawing/2014/main" id="{61B70106-336D-4356-9AC5-018D0EDB2D82}"/>
               </a:ext>
             </a:extLst>
           </p:cNvPr>
@@ -8633,7 +8633,7 @@
           <p:cNvPr id="12" name="s6-takeaway">
             <a:extLst xmlns:a="http://schemas.openxmlformats.org/drawingml/2006/main">
               <a:ext uri="{FF2B5EF4-FFF2-40B4-BE49-F238E27FC236}">
-                <a16:creationId xmlns:a16="http://schemas.microsoft.com/office/drawing/2014/main" id="{3E8E48C8-C89D-4E7F-9F41-86F99FF1DFD6}"/>
+                <a16:creationId xmlns:a16="http://schemas.microsoft.com/office/drawing/2014/main" id="{C7DA44C8-98F3-4279-8F9E-0811CF08E22D}"/>
               </a:ext>
             </a:extLst>
           </p:cNvPr>
@@ -8689,7 +8689,7 @@
     </p:spTree>
     <p:extLst>
       <p:ext uri="{BB962C8B-B14F-4D97-AF65-F5344CB8AC3E}">
-        <p14:creationId xmlns:p14="http://schemas.microsoft.com/office/powerpoint/2010/main" val="1293195787"/>
+        <p14:creationId xmlns:p14="http://schemas.microsoft.com/office/powerpoint/2010/main" val="674169180"/>
       </p:ext>
     </p:extLst>
   </p:cSld>
@@ -8720,7 +8720,7 @@
           <p:cNvPr id="1" name="s7-rule">
             <a:extLst xmlns:a="http://schemas.openxmlformats.org/drawingml/2006/main">
               <a:ext uri="{FF2B5EF4-FFF2-40B4-BE49-F238E27FC236}">
-                <a16:creationId xmlns:a16="http://schemas.microsoft.com/office/drawing/2014/main" id="{29A6D31C-0478-49AD-81D2-B1E368EB1617}"/>
+                <a16:creationId xmlns:a16="http://schemas.microsoft.com/office/drawing/2014/main" id="{3200908B-6A02-4FBA-88E9-77B4923E7029}"/>
               </a:ext>
             </a:extLst>
           </p:cNvPr>
@@ -8753,7 +8753,7 @@
           <p:cNvPr id="2" name="s7-eyebrow">
             <a:extLst xmlns:a="http://schemas.openxmlformats.org/drawingml/2006/main">
               <a:ext uri="{FF2B5EF4-FFF2-40B4-BE49-F238E27FC236}">
-                <a16:creationId xmlns:a16="http://schemas.microsoft.com/office/drawing/2014/main" id="{D0956D1A-D563-42AB-811C-110EC7FC1555}"/>
+                <a16:creationId xmlns:a16="http://schemas.microsoft.com/office/drawing/2014/main" id="{7B54CF99-D686-4C1F-80DA-CFC0B3BFCBFE}"/>
               </a:ext>
             </a:extLst>
           </p:cNvPr>
@@ -8811,7 +8811,7 @@
           <p:cNvPr id="3" name="s7-title">
             <a:extLst xmlns:a="http://schemas.openxmlformats.org/drawingml/2006/main">
               <a:ext uri="{FF2B5EF4-FFF2-40B4-BE49-F238E27FC236}">
-                <a16:creationId xmlns:a16="http://schemas.microsoft.com/office/drawing/2014/main" id="{320ED0F9-63E7-4D41-88B0-7665516B0BC9}"/>
+                <a16:creationId xmlns:a16="http://schemas.microsoft.com/office/drawing/2014/main" id="{7093F09D-6E1C-4B2A-A7A7-98B76648E222}"/>
               </a:ext>
             </a:extLst>
           </p:cNvPr>
@@ -8869,7 +8869,7 @@
           <p:cNvPr id="4" name="s7-footer">
             <a:extLst xmlns:a="http://schemas.openxmlformats.org/drawingml/2006/main">
               <a:ext uri="{FF2B5EF4-FFF2-40B4-BE49-F238E27FC236}">
-                <a16:creationId xmlns:a16="http://schemas.microsoft.com/office/drawing/2014/main" id="{2582644F-AE85-4386-9DDF-3A35261CC844}"/>
+                <a16:creationId xmlns:a16="http://schemas.microsoft.com/office/drawing/2014/main" id="{835F03F3-551B-403E-8E2D-58A34A60DB7A}"/>
               </a:ext>
             </a:extLst>
           </p:cNvPr>
@@ -8900,7 +8900,7 @@
           <p:cNvPr id="5" name="s7-identity">
             <a:extLst xmlns:a="http://schemas.openxmlformats.org/drawingml/2006/main">
               <a:ext uri="{FF2B5EF4-FFF2-40B4-BE49-F238E27FC236}">
-                <a16:creationId xmlns:a16="http://schemas.microsoft.com/office/drawing/2014/main" id="{D7E1300D-25EB-4C7B-BF47-2D299E62A5E5}"/>
+                <a16:creationId xmlns:a16="http://schemas.microsoft.com/office/drawing/2014/main" id="{6C16593F-8D79-4426-805B-DB61BE089495}"/>
               </a:ext>
             </a:extLst>
           </p:cNvPr>
@@ -8958,7 +8958,7 @@
           <p:cNvPr id="6" name="core-no-0">
             <a:extLst xmlns:a="http://schemas.openxmlformats.org/drawingml/2006/main">
               <a:ext uri="{FF2B5EF4-FFF2-40B4-BE49-F238E27FC236}">
-                <a16:creationId xmlns:a16="http://schemas.microsoft.com/office/drawing/2014/main" id="{4DDCB2F2-043A-46E0-AEDD-4DA0F21FCF0C}"/>
+                <a16:creationId xmlns:a16="http://schemas.microsoft.com/office/drawing/2014/main" id="{DE1619FC-C019-46BE-9477-B6D23A82F3B7}"/>
               </a:ext>
             </a:extLst>
           </p:cNvPr>
@@ -9016,7 +9016,7 @@
           <p:cNvPr id="7" name="core-label-0">
             <a:extLst xmlns:a="http://schemas.openxmlformats.org/drawingml/2006/main">
               <a:ext uri="{FF2B5EF4-FFF2-40B4-BE49-F238E27FC236}">
-                <a16:creationId xmlns:a16="http://schemas.microsoft.com/office/drawing/2014/main" id="{2DC090AD-01B9-49EF-84C5-77DEDD6815FD}"/>
+                <a16:creationId xmlns:a16="http://schemas.microsoft.com/office/drawing/2014/main" id="{951FCEC5-8F59-4FB2-90F0-7C14074371DA}"/>
               </a:ext>
             </a:extLst>
           </p:cNvPr>
@@ -9074,7 +9074,7 @@
           <p:cNvPr id="8" name="core-body-0">
             <a:extLst xmlns:a="http://schemas.openxmlformats.org/drawingml/2006/main">
               <a:ext uri="{FF2B5EF4-FFF2-40B4-BE49-F238E27FC236}">
-                <a16:creationId xmlns:a16="http://schemas.microsoft.com/office/drawing/2014/main" id="{15EB71E2-9771-4610-B144-A0E61D3C6AFF}"/>
+                <a16:creationId xmlns:a16="http://schemas.microsoft.com/office/drawing/2014/main" id="{F67036D7-0C9B-4CD7-946E-AC354444320B}"/>
               </a:ext>
             </a:extLst>
           </p:cNvPr>
@@ -9138,7 +9138,7 @@
           <p:cNvPr id="9" name="core-no-1">
             <a:extLst xmlns:a="http://schemas.openxmlformats.org/drawingml/2006/main">
               <a:ext uri="{FF2B5EF4-FFF2-40B4-BE49-F238E27FC236}">
-                <a16:creationId xmlns:a16="http://schemas.microsoft.com/office/drawing/2014/main" id="{DF581457-7B3D-4043-8A4B-91D76D5D9A5A}"/>
+                <a16:creationId xmlns:a16="http://schemas.microsoft.com/office/drawing/2014/main" id="{2D75AF56-E191-4CC9-BD6B-A7420E2657B0}"/>
               </a:ext>
             </a:extLst>
           </p:cNvPr>
@@ -9196,7 +9196,7 @@
           <p:cNvPr id="10" name="core-body-1">
             <a:extLst xmlns:a="http://schemas.openxmlformats.org/drawingml/2006/main">
               <a:ext uri="{FF2B5EF4-FFF2-40B4-BE49-F238E27FC236}">
-                <a16:creationId xmlns:a16="http://schemas.microsoft.com/office/drawing/2014/main" id="{A1C8742C-5397-4849-813A-68B401FB9FA5}"/>
+                <a16:creationId xmlns:a16="http://schemas.microsoft.com/office/drawing/2014/main" id="{073CA911-6E16-43C9-94B5-E2E2EF791805}"/>
               </a:ext>
             </a:extLst>
           </p:cNvPr>
@@ -9260,7 +9260,7 @@
           <p:cNvPr id="11" name="core-no-2">
             <a:extLst xmlns:a="http://schemas.openxmlformats.org/drawingml/2006/main">
               <a:ext uri="{FF2B5EF4-FFF2-40B4-BE49-F238E27FC236}">
-                <a16:creationId xmlns:a16="http://schemas.microsoft.com/office/drawing/2014/main" id="{4781DFD6-6128-42F1-B179-8A53445B7B01}"/>
+                <a16:creationId xmlns:a16="http://schemas.microsoft.com/office/drawing/2014/main" id="{4CA43A4A-BAD8-407F-8376-5BA7A15407A1}"/>
               </a:ext>
             </a:extLst>
           </p:cNvPr>
@@ -9318,7 +9318,7 @@
           <p:cNvPr id="12" name="core-body-2">
             <a:extLst xmlns:a="http://schemas.openxmlformats.org/drawingml/2006/main">
               <a:ext uri="{FF2B5EF4-FFF2-40B4-BE49-F238E27FC236}">
-                <a16:creationId xmlns:a16="http://schemas.microsoft.com/office/drawing/2014/main" id="{65EF9CB3-4B9D-4595-9844-1EA293C70F47}"/>
+                <a16:creationId xmlns:a16="http://schemas.microsoft.com/office/drawing/2014/main" id="{F182046D-C038-415D-831E-E542CC0E8290}"/>
               </a:ext>
             </a:extLst>
           </p:cNvPr>
@@ -9382,7 +9382,7 @@
           <p:cNvPr id="13" name="s7-takeaway-rule">
             <a:extLst xmlns:a="http://schemas.openxmlformats.org/drawingml/2006/main">
               <a:ext uri="{FF2B5EF4-FFF2-40B4-BE49-F238E27FC236}">
-                <a16:creationId xmlns:a16="http://schemas.microsoft.com/office/drawing/2014/main" id="{D512C62C-9EEA-440D-97C3-E4EA876887C8}"/>
+                <a16:creationId xmlns:a16="http://schemas.microsoft.com/office/drawing/2014/main" id="{AB499EF0-8BDA-4DBD-BC72-2CCF2BA81D88}"/>
               </a:ext>
             </a:extLst>
           </p:cNvPr>
@@ -9415,7 +9415,7 @@
           <p:cNvPr id="14" name="s7-takeaway">
             <a:extLst xmlns:a="http://schemas.openxmlformats.org/drawingml/2006/main">
               <a:ext uri="{FF2B5EF4-FFF2-40B4-BE49-F238E27FC236}">
-                <a16:creationId xmlns:a16="http://schemas.microsoft.com/office/drawing/2014/main" id="{1DA98D68-2961-4342-92C3-3A9CEE479F81}"/>
+                <a16:creationId xmlns:a16="http://schemas.microsoft.com/office/drawing/2014/main" id="{AE3A2009-B9FB-418C-A41D-C740A639FD1B}"/>
               </a:ext>
             </a:extLst>
           </p:cNvPr>
@@ -9471,7 +9471,7 @@
     </p:spTree>
     <p:extLst>
       <p:ext uri="{BB962C8B-B14F-4D97-AF65-F5344CB8AC3E}">
-        <p14:creationId xmlns:p14="http://schemas.microsoft.com/office/powerpoint/2010/main" val="548240069"/>
+        <p14:creationId xmlns:p14="http://schemas.microsoft.com/office/powerpoint/2010/main" val="2055764226"/>
       </p:ext>
     </p:extLst>
   </p:cSld>
@@ -9502,7 +9502,7 @@
           <p:cNvPr id="1" name="s8-rule">
             <a:extLst xmlns:a="http://schemas.openxmlformats.org/drawingml/2006/main">
               <a:ext uri="{FF2B5EF4-FFF2-40B4-BE49-F238E27FC236}">
-                <a16:creationId xmlns:a16="http://schemas.microsoft.com/office/drawing/2014/main" id="{6766ED7C-979D-4A46-82A5-47D5B9990E9B}"/>
+                <a16:creationId xmlns:a16="http://schemas.microsoft.com/office/drawing/2014/main" id="{48C1D1AE-D09A-43A5-B725-789C997A854F}"/>
               </a:ext>
             </a:extLst>
           </p:cNvPr>
@@ -9535,7 +9535,7 @@
           <p:cNvPr id="2" name="s8-eyebrow">
             <a:extLst xmlns:a="http://schemas.openxmlformats.org/drawingml/2006/main">
               <a:ext uri="{FF2B5EF4-FFF2-40B4-BE49-F238E27FC236}">
-                <a16:creationId xmlns:a16="http://schemas.microsoft.com/office/drawing/2014/main" id="{8F2B5B7E-2256-428E-A88C-3C4CAB8A3021}"/>
+                <a16:creationId xmlns:a16="http://schemas.microsoft.com/office/drawing/2014/main" id="{B16C0BC5-40C0-4892-A2E2-5E3C0ECB1AAF}"/>
               </a:ext>
             </a:extLst>
           </p:cNvPr>
@@ -9593,7 +9593,7 @@
           <p:cNvPr id="3" name="s8-title">
             <a:extLst xmlns:a="http://schemas.openxmlformats.org/drawingml/2006/main">
               <a:ext uri="{FF2B5EF4-FFF2-40B4-BE49-F238E27FC236}">
-                <a16:creationId xmlns:a16="http://schemas.microsoft.com/office/drawing/2014/main" id="{0E72928F-1787-4909-85CB-AB3CC2FC5D2A}"/>
+                <a16:creationId xmlns:a16="http://schemas.microsoft.com/office/drawing/2014/main" id="{A474BE03-8F7B-41E8-9BF8-DDAB1203C938}"/>
               </a:ext>
             </a:extLst>
           </p:cNvPr>
@@ -9651,7 +9651,7 @@
           <p:cNvPr id="4" name="s8-footer">
             <a:extLst xmlns:a="http://schemas.openxmlformats.org/drawingml/2006/main">
               <a:ext uri="{FF2B5EF4-FFF2-40B4-BE49-F238E27FC236}">
-                <a16:creationId xmlns:a16="http://schemas.microsoft.com/office/drawing/2014/main" id="{45F3478B-E1C4-4453-B96F-DEFE6FACA7BE}"/>
+                <a16:creationId xmlns:a16="http://schemas.microsoft.com/office/drawing/2014/main" id="{A2466BED-E437-4E4B-B430-01A073E11D9F}"/>
               </a:ext>
             </a:extLst>
           </p:cNvPr>
@@ -9682,7 +9682,7 @@
           <p:cNvPr id="5" name="s8-identity">
             <a:extLst xmlns:a="http://schemas.openxmlformats.org/drawingml/2006/main">
               <a:ext uri="{FF2B5EF4-FFF2-40B4-BE49-F238E27FC236}">
-                <a16:creationId xmlns:a16="http://schemas.microsoft.com/office/drawing/2014/main" id="{5374077F-0F02-46E4-BA6A-348ABCC380F7}"/>
+                <a16:creationId xmlns:a16="http://schemas.microsoft.com/office/drawing/2014/main" id="{87707A74-0246-4416-B983-F284BAD0C409}"/>
               </a:ext>
             </a:extLst>
           </p:cNvPr>
@@ -9740,7 +9740,7 @@
           <p:cNvPr id="6" name="core-no-0">
             <a:extLst xmlns:a="http://schemas.openxmlformats.org/drawingml/2006/main">
               <a:ext uri="{FF2B5EF4-FFF2-40B4-BE49-F238E27FC236}">
-                <a16:creationId xmlns:a16="http://schemas.microsoft.com/office/drawing/2014/main" id="{3E93C223-11FB-45BA-B46C-C5D524170413}"/>
+                <a16:creationId xmlns:a16="http://schemas.microsoft.com/office/drawing/2014/main" id="{F0D0B9E9-55DC-49CE-AFA5-9EAAD384C883}"/>
               </a:ext>
             </a:extLst>
           </p:cNvPr>
@@ -9798,7 +9798,7 @@
           <p:cNvPr id="7" name="core-label-0">
             <a:extLst xmlns:a="http://schemas.openxmlformats.org/drawingml/2006/main">
               <a:ext uri="{FF2B5EF4-FFF2-40B4-BE49-F238E27FC236}">
-                <a16:creationId xmlns:a16="http://schemas.microsoft.com/office/drawing/2014/main" id="{4A9AF4E2-55DE-4226-96A9-9CE736C6C68A}"/>
+                <a16:creationId xmlns:a16="http://schemas.microsoft.com/office/drawing/2014/main" id="{EACAAE82-FBE7-4B92-B5C1-C8F62D6C16C7}"/>
               </a:ext>
             </a:extLst>
           </p:cNvPr>
@@ -9856,7 +9856,7 @@
           <p:cNvPr id="8" name="core-body-0">
             <a:extLst xmlns:a="http://schemas.openxmlformats.org/drawingml/2006/main">
               <a:ext uri="{FF2B5EF4-FFF2-40B4-BE49-F238E27FC236}">
-                <a16:creationId xmlns:a16="http://schemas.microsoft.com/office/drawing/2014/main" id="{439D4D2A-7CAF-49F8-AFA9-DD446C0D864D}"/>
+                <a16:creationId xmlns:a16="http://schemas.microsoft.com/office/drawing/2014/main" id="{596626C7-82F2-4C52-A345-E988F4BA8666}"/>
               </a:ext>
             </a:extLst>
           </p:cNvPr>
@@ -9920,7 +9920,7 @@
           <p:cNvPr id="9" name="core-no-1">
             <a:extLst xmlns:a="http://schemas.openxmlformats.org/drawingml/2006/main">
               <a:ext uri="{FF2B5EF4-FFF2-40B4-BE49-F238E27FC236}">
-                <a16:creationId xmlns:a16="http://schemas.microsoft.com/office/drawing/2014/main" id="{55E1332A-107F-46AB-85B6-EDA2EDF49DCF}"/>
+                <a16:creationId xmlns:a16="http://schemas.microsoft.com/office/drawing/2014/main" id="{629BD7AF-4D9A-4D00-9549-AACFC91A2A55}"/>
               </a:ext>
             </a:extLst>
           </p:cNvPr>
@@ -9978,7 +9978,7 @@
           <p:cNvPr id="10" name="core-body-1">
             <a:extLst xmlns:a="http://schemas.openxmlformats.org/drawingml/2006/main">
               <a:ext uri="{FF2B5EF4-FFF2-40B4-BE49-F238E27FC236}">
-                <a16:creationId xmlns:a16="http://schemas.microsoft.com/office/drawing/2014/main" id="{C38DDA9A-E634-4DCC-8BC2-A966FDF33DF6}"/>
+                <a16:creationId xmlns:a16="http://schemas.microsoft.com/office/drawing/2014/main" id="{32FA4B4B-5DF3-454B-BF2F-BE6EAC1B55FA}"/>
               </a:ext>
             </a:extLst>
           </p:cNvPr>
@@ -10042,7 +10042,7 @@
           <p:cNvPr id="11" name="s8-takeaway-rule">
             <a:extLst xmlns:a="http://schemas.openxmlformats.org/drawingml/2006/main">
               <a:ext uri="{FF2B5EF4-FFF2-40B4-BE49-F238E27FC236}">
-                <a16:creationId xmlns:a16="http://schemas.microsoft.com/office/drawing/2014/main" id="{2AF10163-B3ED-4314-9070-5D51B6AE1A28}"/>
+                <a16:creationId xmlns:a16="http://schemas.microsoft.com/office/drawing/2014/main" id="{BD6363AB-DB48-4035-8C7D-3D18C9549C78}"/>
               </a:ext>
             </a:extLst>
           </p:cNvPr>
@@ -10075,7 +10075,7 @@
           <p:cNvPr id="12" name="s8-takeaway">
             <a:extLst xmlns:a="http://schemas.openxmlformats.org/drawingml/2006/main">
               <a:ext uri="{FF2B5EF4-FFF2-40B4-BE49-F238E27FC236}">
-                <a16:creationId xmlns:a16="http://schemas.microsoft.com/office/drawing/2014/main" id="{3055E2A3-F02A-4E6B-A665-0E106489C7DC}"/>
+                <a16:creationId xmlns:a16="http://schemas.microsoft.com/office/drawing/2014/main" id="{FA8B59CE-B406-432F-8545-F6E45208CFA7}"/>
               </a:ext>
             </a:extLst>
           </p:cNvPr>
@@ -10131,7 +10131,7 @@
     </p:spTree>
     <p:extLst>
       <p:ext uri="{BB962C8B-B14F-4D97-AF65-F5344CB8AC3E}">
-        <p14:creationId xmlns:p14="http://schemas.microsoft.com/office/powerpoint/2010/main" val="1740322135"/>
+        <p14:creationId xmlns:p14="http://schemas.microsoft.com/office/powerpoint/2010/main" val="1290838292"/>
       </p:ext>
     </p:extLst>
   </p:cSld>
@@ -10162,7 +10162,7 @@
           <p:cNvPr id="1" name="s9-rule">
             <a:extLst xmlns:a="http://schemas.openxmlformats.org/drawingml/2006/main">
               <a:ext uri="{FF2B5EF4-FFF2-40B4-BE49-F238E27FC236}">
-                <a16:creationId xmlns:a16="http://schemas.microsoft.com/office/drawing/2014/main" id="{841723F1-C7AF-4308-8407-3A380B98696F}"/>
+                <a16:creationId xmlns:a16="http://schemas.microsoft.com/office/drawing/2014/main" id="{9C2918E0-3121-4995-826E-5F63100F231E}"/>
               </a:ext>
             </a:extLst>
           </p:cNvPr>
@@ -10195,7 +10195,7 @@
           <p:cNvPr id="2" name="s9-eyebrow">
             <a:extLst xmlns:a="http://schemas.openxmlformats.org/drawingml/2006/main">
               <a:ext uri="{FF2B5EF4-FFF2-40B4-BE49-F238E27FC236}">
-                <a16:creationId xmlns:a16="http://schemas.microsoft.com/office/drawing/2014/main" id="{BD1B8CB9-F765-4CDE-B382-136B6CF5B51C}"/>
+                <a16:creationId xmlns:a16="http://schemas.microsoft.com/office/drawing/2014/main" id="{AFED4B16-C15B-49D3-A1C5-4E573A18C852}"/>
               </a:ext>
             </a:extLst>
           </p:cNvPr>
@@ -10253,7 +10253,7 @@
           <p:cNvPr id="3" name="s9-title">
             <a:extLst xmlns:a="http://schemas.openxmlformats.org/drawingml/2006/main">
               <a:ext uri="{FF2B5EF4-FFF2-40B4-BE49-F238E27FC236}">
-                <a16:creationId xmlns:a16="http://schemas.microsoft.com/office/drawing/2014/main" id="{C4562D8A-5CB0-4C42-B393-0AF181F3F24C}"/>
+                <a16:creationId xmlns:a16="http://schemas.microsoft.com/office/drawing/2014/main" id="{F807EF6D-B483-4145-BEF3-F0AB1DEEF827}"/>
               </a:ext>
             </a:extLst>
           </p:cNvPr>
@@ -10311,7 +10311,7 @@
           <p:cNvPr id="4" name="s9-footer">
             <a:extLst xmlns:a="http://schemas.openxmlformats.org/drawingml/2006/main">
               <a:ext uri="{FF2B5EF4-FFF2-40B4-BE49-F238E27FC236}">
-                <a16:creationId xmlns:a16="http://schemas.microsoft.com/office/drawing/2014/main" id="{58B6F718-A1F6-4D1F-A743-EE5CB9FD5E59}"/>
+                <a16:creationId xmlns:a16="http://schemas.microsoft.com/office/drawing/2014/main" id="{15672D50-6423-4CB6-817C-D3AEAB112483}"/>
               </a:ext>
             </a:extLst>
           </p:cNvPr>
@@ -10342,7 +10342,7 @@
           <p:cNvPr id="5" name="s9-identity">
             <a:extLst xmlns:a="http://schemas.openxmlformats.org/drawingml/2006/main">
               <a:ext uri="{FF2B5EF4-FFF2-40B4-BE49-F238E27FC236}">
-                <a16:creationId xmlns:a16="http://schemas.microsoft.com/office/drawing/2014/main" id="{F6C8CB1A-CD36-4712-ABD2-F944F9C84A50}"/>
+                <a16:creationId xmlns:a16="http://schemas.microsoft.com/office/drawing/2014/main" id="{25215F14-38DA-4F32-810D-C0C27949C307}"/>
               </a:ext>
             </a:extLst>
           </p:cNvPr>
@@ -10400,7 +10400,7 @@
           <p:cNvPr id="6" name="case-title">
             <a:extLst xmlns:a="http://schemas.openxmlformats.org/drawingml/2006/main">
               <a:ext uri="{FF2B5EF4-FFF2-40B4-BE49-F238E27FC236}">
-                <a16:creationId xmlns:a16="http://schemas.microsoft.com/office/drawing/2014/main" id="{A782C7AB-0BED-4B7A-8F49-117EA79F892D}"/>
+                <a16:creationId xmlns:a16="http://schemas.microsoft.com/office/drawing/2014/main" id="{6EDB7C96-E0BB-4163-AB73-A9837B794516}"/>
               </a:ext>
             </a:extLst>
           </p:cNvPr>
@@ -10464,7 +10464,7 @@
           <p:cNvPr id="7" name="case-row-0">
             <a:extLst xmlns:a="http://schemas.openxmlformats.org/drawingml/2006/main">
               <a:ext uri="{FF2B5EF4-FFF2-40B4-BE49-F238E27FC236}">
-                <a16:creationId xmlns:a16="http://schemas.microsoft.com/office/drawing/2014/main" id="{63F74288-2086-402C-8B68-C2540CE415FE}"/>
+                <a16:creationId xmlns:a16="http://schemas.microsoft.com/office/drawing/2014/main" id="{21F9B0CC-3AAA-4A4C-B197-4B97310BDC82}"/>
               </a:ext>
             </a:extLst>
           </p:cNvPr>
@@ -10528,7 +10528,7 @@
           <p:cNvPr id="8" name="case-row-1">
             <a:extLst xmlns:a="http://schemas.openxmlformats.org/drawingml/2006/main">
               <a:ext uri="{FF2B5EF4-FFF2-40B4-BE49-F238E27FC236}">
-                <a16:creationId xmlns:a16="http://schemas.microsoft.com/office/drawing/2014/main" id="{CFC426E3-77C6-4C43-911A-0F4BA32149F8}"/>
+                <a16:creationId xmlns:a16="http://schemas.microsoft.com/office/drawing/2014/main" id="{634FA3D6-64C8-43AB-BC78-3E4E5E9650C6}"/>
               </a:ext>
             </a:extLst>
           </p:cNvPr>
@@ -10592,7 +10592,7 @@
           <p:cNvPr id="9" name="case-row-2">
             <a:extLst xmlns:a="http://schemas.openxmlformats.org/drawingml/2006/main">
               <a:ext uri="{FF2B5EF4-FFF2-40B4-BE49-F238E27FC236}">
-                <a16:creationId xmlns:a16="http://schemas.microsoft.com/office/drawing/2014/main" id="{E3F9AE1E-532C-47B0-A91C-8F48B3AEDA42}"/>
+                <a16:creationId xmlns:a16="http://schemas.microsoft.com/office/drawing/2014/main" id="{E706ECB2-1F77-438B-B1E6-B7680AA268A5}"/>
               </a:ext>
             </a:extLst>
           </p:cNvPr>
@@ -10656,7 +10656,7 @@
           <p:cNvPr id="10" name="case-row-3">
             <a:extLst xmlns:a="http://schemas.openxmlformats.org/drawingml/2006/main">
               <a:ext uri="{FF2B5EF4-FFF2-40B4-BE49-F238E27FC236}">
-                <a16:creationId xmlns:a16="http://schemas.microsoft.com/office/drawing/2014/main" id="{03BDD021-5AEF-4C19-B09D-78BAF3C29B22}"/>
+                <a16:creationId xmlns:a16="http://schemas.microsoft.com/office/drawing/2014/main" id="{6FE99733-293D-45BA-9DF8-E69076DE2BA5}"/>
               </a:ext>
             </a:extLst>
           </p:cNvPr>
@@ -10720,7 +10720,7 @@
           <p:cNvPr id="11" name="s9-takeaway-rule">
             <a:extLst xmlns:a="http://schemas.openxmlformats.org/drawingml/2006/main">
               <a:ext uri="{FF2B5EF4-FFF2-40B4-BE49-F238E27FC236}">
-                <a16:creationId xmlns:a16="http://schemas.microsoft.com/office/drawing/2014/main" id="{73F12CBB-DD45-4FC0-82EC-630E9B31A64B}"/>
+                <a16:creationId xmlns:a16="http://schemas.microsoft.com/office/drawing/2014/main" id="{C482E125-358A-486F-8862-B9E68A113CEF}"/>
               </a:ext>
             </a:extLst>
           </p:cNvPr>
@@ -10753,7 +10753,7 @@
           <p:cNvPr id="12" name="s9-takeaway">
             <a:extLst xmlns:a="http://schemas.openxmlformats.org/drawingml/2006/main">
               <a:ext uri="{FF2B5EF4-FFF2-40B4-BE49-F238E27FC236}">
-                <a16:creationId xmlns:a16="http://schemas.microsoft.com/office/drawing/2014/main" id="{52C7DBD4-487B-41D5-BC4A-0A0DB9A301AF}"/>
+                <a16:creationId xmlns:a16="http://schemas.microsoft.com/office/drawing/2014/main" id="{D1428713-C759-42C1-B2DC-E982B7A03E39}"/>
               </a:ext>
             </a:extLst>
           </p:cNvPr>
@@ -10809,7 +10809,7 @@
     </p:spTree>
     <p:extLst>
       <p:ext uri="{BB962C8B-B14F-4D97-AF65-F5344CB8AC3E}">
-        <p14:creationId xmlns:p14="http://schemas.microsoft.com/office/powerpoint/2010/main" val="1315204625"/>
+        <p14:creationId xmlns:p14="http://schemas.microsoft.com/office/powerpoint/2010/main" val="1105673694"/>
       </p:ext>
     </p:extLst>
   </p:cSld>
